--- a/slide/L2_owasp_stride.pptx
+++ b/slide/L2_owasp_stride.pptx
@@ -3116,7 +3116,7 @@
             <a:avLst/>
           </a:prstGeom>
           <a:solidFill>
-            <a:srgbClr val="0F2D52"/>
+            <a:srgbClr val="081B33"/>
           </a:solidFill>
           <a:ln>
             <a:noFill/>
@@ -3152,8 +3152,8 @@
         </p:nvSpPr>
         <p:spPr>
           <a:xfrm>
-            <a:off x="0" y="914400"/>
-            <a:ext cx="365760" cy="2286000"/>
+            <a:off x="0" y="0"/>
+            <a:ext cx="12191695" cy="137160"/>
           </a:xfrm>
           <a:prstGeom prst="rect">
             <a:avLst/>
@@ -3189,14 +3189,186 @@
       </p:sp>
       <p:sp>
         <p:nvSpPr>
-          <p:cNvPr id="4" name="TextBox 3"/>
+          <p:cNvPr id="4" name="Oval 3"/>
+          <p:cNvSpPr/>
+          <p:nvPr/>
+        </p:nvSpPr>
+        <p:spPr>
+          <a:xfrm>
+            <a:off x="8686800" y="-914400"/>
+            <a:ext cx="2743200" cy="2743200"/>
+          </a:xfrm>
+          <a:prstGeom prst="ellipse">
+            <a:avLst/>
+          </a:prstGeom>
+          <a:noFill/>
+          <a:ln w="25400">
+            <a:solidFill>
+              <a:srgbClr val="00A0B0"/>
+            </a:solidFill>
+          </a:ln>
+        </p:spPr>
+        <p:style>
+          <a:lnRef idx="1">
+            <a:schemeClr val="accent1"/>
+          </a:lnRef>
+          <a:fillRef idx="3">
+            <a:schemeClr val="accent1"/>
+          </a:fillRef>
+          <a:effectRef idx="2">
+            <a:schemeClr val="accent1"/>
+          </a:effectRef>
+          <a:fontRef idx="minor">
+            <a:schemeClr val="lt1"/>
+          </a:fontRef>
+        </p:style>
+        <p:txBody>
+          <a:bodyPr rtlCol="0" anchor="ctr"/>
+          <a:lstStyle/>
+          <a:p>
+            <a:pPr algn="ctr"/>
+          </a:p>
+        </p:txBody>
+      </p:sp>
+      <p:sp>
+        <p:nvSpPr>
+          <p:cNvPr id="5" name="Oval 4"/>
+          <p:cNvSpPr/>
+          <p:nvPr/>
+        </p:nvSpPr>
+        <p:spPr>
+          <a:xfrm>
+            <a:off x="10515600" y="1371600"/>
+            <a:ext cx="1828800" cy="1828800"/>
+          </a:xfrm>
+          <a:prstGeom prst="ellipse">
+            <a:avLst/>
+          </a:prstGeom>
+          <a:noFill/>
+          <a:ln w="25400">
+            <a:solidFill>
+              <a:srgbClr val="00A0B0"/>
+            </a:solidFill>
+          </a:ln>
+        </p:spPr>
+        <p:style>
+          <a:lnRef idx="1">
+            <a:schemeClr val="accent1"/>
+          </a:lnRef>
+          <a:fillRef idx="3">
+            <a:schemeClr val="accent1"/>
+          </a:fillRef>
+          <a:effectRef idx="2">
+            <a:schemeClr val="accent1"/>
+          </a:effectRef>
+          <a:fontRef idx="minor">
+            <a:schemeClr val="lt1"/>
+          </a:fontRef>
+        </p:style>
+        <p:txBody>
+          <a:bodyPr rtlCol="0" anchor="ctr"/>
+          <a:lstStyle/>
+          <a:p>
+            <a:pPr algn="ctr"/>
+          </a:p>
+        </p:txBody>
+      </p:sp>
+      <p:sp>
+        <p:nvSpPr>
+          <p:cNvPr id="6" name="Oval 5"/>
+          <p:cNvSpPr/>
+          <p:nvPr/>
+        </p:nvSpPr>
+        <p:spPr>
+          <a:xfrm>
+            <a:off x="8458200" y="3429000"/>
+            <a:ext cx="2286000" cy="2286000"/>
+          </a:xfrm>
+          <a:prstGeom prst="ellipse">
+            <a:avLst/>
+          </a:prstGeom>
+          <a:noFill/>
+          <a:ln w="25400">
+            <a:solidFill>
+              <a:srgbClr val="00A0B0"/>
+            </a:solidFill>
+          </a:ln>
+        </p:spPr>
+        <p:style>
+          <a:lnRef idx="1">
+            <a:schemeClr val="accent1"/>
+          </a:lnRef>
+          <a:fillRef idx="3">
+            <a:schemeClr val="accent1"/>
+          </a:fillRef>
+          <a:effectRef idx="2">
+            <a:schemeClr val="accent1"/>
+          </a:effectRef>
+          <a:fontRef idx="minor">
+            <a:schemeClr val="lt1"/>
+          </a:fontRef>
+        </p:style>
+        <p:txBody>
+          <a:bodyPr rtlCol="0" anchor="ctr"/>
+          <a:lstStyle/>
+          <a:p>
+            <a:pPr algn="ctr"/>
+          </a:p>
+        </p:txBody>
+      </p:sp>
+      <p:sp>
+        <p:nvSpPr>
+          <p:cNvPr id="7" name="Rectangle 6"/>
+          <p:cNvSpPr/>
+          <p:nvPr/>
+        </p:nvSpPr>
+        <p:spPr>
+          <a:xfrm>
+            <a:off x="0" y="2286000"/>
+            <a:ext cx="228600" cy="2743200"/>
+          </a:xfrm>
+          <a:prstGeom prst="rect">
+            <a:avLst/>
+          </a:prstGeom>
+          <a:solidFill>
+            <a:srgbClr val="00A0B0"/>
+          </a:solidFill>
+          <a:ln>
+            <a:noFill/>
+          </a:ln>
+        </p:spPr>
+        <p:style>
+          <a:lnRef idx="1">
+            <a:schemeClr val="accent1"/>
+          </a:lnRef>
+          <a:fillRef idx="3">
+            <a:schemeClr val="accent1"/>
+          </a:fillRef>
+          <a:effectRef idx="2">
+            <a:schemeClr val="accent1"/>
+          </a:effectRef>
+          <a:fontRef idx="minor">
+            <a:schemeClr val="lt1"/>
+          </a:fontRef>
+        </p:style>
+        <p:txBody>
+          <a:bodyPr rtlCol="0" anchor="ctr"/>
+          <a:lstStyle/>
+          <a:p>
+            <a:pPr algn="ctr"/>
+          </a:p>
+        </p:txBody>
+      </p:sp>
+      <p:sp>
+        <p:nvSpPr>
+          <p:cNvPr id="8" name="TextBox 7"/>
           <p:cNvSpPr txBox="1"/>
           <p:nvPr/>
         </p:nvSpPr>
         <p:spPr>
           <a:xfrm>
-            <a:off x="731520" y="914400"/>
-            <a:ext cx="10058400" cy="548640"/>
+            <a:off x="548640" y="2286000"/>
+            <a:ext cx="7315200" cy="457200"/>
           </a:xfrm>
           <a:prstGeom prst="rect">
             <a:avLst/>
@@ -3211,7 +3383,7 @@
           <a:p>
             <a:pPr algn="l"/>
             <a:r>
-              <a:rPr sz="1800" b="1" i="0">
+              <a:rPr sz="1600" b="1" i="0">
                 <a:solidFill>
                   <a:srgbClr val="00A0B0"/>
                 </a:solidFill>
@@ -3224,14 +3396,14 @@
       </p:sp>
       <p:sp>
         <p:nvSpPr>
-          <p:cNvPr id="5" name="TextBox 4"/>
+          <p:cNvPr id="9" name="TextBox 8"/>
           <p:cNvSpPr txBox="1"/>
           <p:nvPr/>
         </p:nvSpPr>
         <p:spPr>
           <a:xfrm>
-            <a:off x="731520" y="1554480"/>
-            <a:ext cx="10058400" cy="1828800"/>
+            <a:off x="548640" y="2743200"/>
+            <a:ext cx="10515600" cy="2011680"/>
           </a:xfrm>
           <a:prstGeom prst="rect">
             <a:avLst/>
@@ -3246,7 +3418,7 @@
           <a:p>
             <a:pPr algn="l"/>
             <a:r>
-              <a:rPr sz="5400" b="1" i="0">
+              <a:rPr sz="5600" b="1" i="0">
                 <a:solidFill>
                   <a:srgbClr val="FFFFFF"/>
                 </a:solidFill>
@@ -3259,14 +3431,14 @@
       </p:sp>
       <p:sp>
         <p:nvSpPr>
-          <p:cNvPr id="6" name="TextBox 5"/>
+          <p:cNvPr id="10" name="TextBox 9"/>
           <p:cNvSpPr txBox="1"/>
           <p:nvPr/>
         </p:nvSpPr>
         <p:spPr>
           <a:xfrm>
-            <a:off x="731520" y="3566160"/>
-            <a:ext cx="10058400" cy="1097280"/>
+            <a:off x="548640" y="4572000"/>
+            <a:ext cx="10058400" cy="914400"/>
           </a:xfrm>
           <a:prstGeom prst="rect">
             <a:avLst/>
@@ -3281,9 +3453,9 @@
           <a:p>
             <a:pPr algn="l"/>
             <a:r>
-              <a:rPr sz="2400" b="0" i="1">
-                <a:solidFill>
-                  <a:srgbClr val="FFFFFF"/>
+              <a:rPr sz="2200" b="0" i="1">
+                <a:solidFill>
+                  <a:srgbClr val="6FD8E0"/>
                 </a:solidFill>
                 <a:latin typeface="Calibri"/>
               </a:rPr>
@@ -3294,14 +3466,94 @@
       </p:sp>
       <p:sp>
         <p:nvSpPr>
-          <p:cNvPr id="7" name="TextBox 6"/>
+          <p:cNvPr id="11" name="Rounded Rectangle 10"/>
+          <p:cNvSpPr/>
+          <p:nvPr/>
+        </p:nvSpPr>
+        <p:spPr>
+          <a:xfrm>
+            <a:off x="548640" y="5669280"/>
+            <a:ext cx="2011680" cy="411480"/>
+          </a:xfrm>
+          <a:prstGeom prst="roundRect">
+            <a:avLst>
+              <a:gd name="adj" fmla="val 8000"/>
+            </a:avLst>
+          </a:prstGeom>
+          <a:solidFill>
+            <a:srgbClr val="00A0B0"/>
+          </a:solidFill>
+          <a:ln>
+            <a:noFill/>
+          </a:ln>
+        </p:spPr>
+        <p:style>
+          <a:lnRef idx="1">
+            <a:schemeClr val="accent1"/>
+          </a:lnRef>
+          <a:fillRef idx="3">
+            <a:schemeClr val="accent1"/>
+          </a:fillRef>
+          <a:effectRef idx="2">
+            <a:schemeClr val="accent1"/>
+          </a:effectRef>
+          <a:fontRef idx="minor">
+            <a:schemeClr val="lt1"/>
+          </a:fontRef>
+        </p:style>
+        <p:txBody>
+          <a:bodyPr rtlCol="0" anchor="ctr"/>
+          <a:lstStyle/>
+          <a:p>
+            <a:pPr algn="ctr"/>
+          </a:p>
+        </p:txBody>
+      </p:sp>
+      <p:sp>
+        <p:nvSpPr>
+          <p:cNvPr id="12" name="TextBox 11"/>
           <p:cNvSpPr txBox="1"/>
           <p:nvPr/>
         </p:nvSpPr>
         <p:spPr>
           <a:xfrm>
-            <a:off x="731520" y="5029200"/>
-            <a:ext cx="10058400" cy="457200"/>
+            <a:off x="548640" y="5669280"/>
+            <a:ext cx="2011680" cy="411480"/>
+          </a:xfrm>
+          <a:prstGeom prst="rect">
+            <a:avLst/>
+          </a:prstGeom>
+          <a:noFill/>
+        </p:spPr>
+        <p:txBody>
+          <a:bodyPr wrap="square" lIns="45720" rIns="45720" tIns="18288" bIns="18288" anchor="ctr">
+            <a:spAutoFit/>
+          </a:bodyPr>
+          <a:lstStyle/>
+          <a:p>
+            <a:pPr algn="ctr"/>
+            <a:r>
+              <a:rPr sz="1200" b="1" i="0">
+                <a:solidFill>
+                  <a:srgbClr val="FFFFFF"/>
+                </a:solidFill>
+                <a:latin typeface="Calibri"/>
+              </a:rPr>
+              <a:t>⏱  Lezione 2 · 2 ore</a:t>
+            </a:r>
+          </a:p>
+        </p:txBody>
+      </p:sp>
+      <p:sp>
+        <p:nvSpPr>
+          <p:cNvPr id="13" name="TextBox 12"/>
+          <p:cNvSpPr txBox="1"/>
+          <p:nvPr/>
+        </p:nvSpPr>
+        <p:spPr>
+          <a:xfrm>
+            <a:off x="548640" y="6263640"/>
+            <a:ext cx="10972800" cy="365760"/>
           </a:xfrm>
           <a:prstGeom prst="rect">
             <a:avLst/>
@@ -3316,83 +3568,13 @@
           <a:p>
             <a:pPr algn="l"/>
             <a:r>
-              <a:rPr sz="1800" b="1" i="0">
-                <a:solidFill>
-                  <a:srgbClr val="00A0B0"/>
+              <a:rPr sz="1000" b="0" i="0">
+                <a:solidFill>
+                  <a:srgbClr val="CBD0D8"/>
                 </a:solidFill>
                 <a:latin typeface="Calibri"/>
               </a:rPr>
-              <a:t>⏱  Lezione 2 · 2 ore</a:t>
-            </a:r>
-          </a:p>
-        </p:txBody>
-      </p:sp>
-      <p:sp>
-        <p:nvSpPr>
-          <p:cNvPr id="8" name="TextBox 7"/>
-          <p:cNvSpPr txBox="1"/>
-          <p:nvPr/>
-        </p:nvSpPr>
-        <p:spPr>
-          <a:xfrm>
-            <a:off x="731520" y="5943600"/>
-            <a:ext cx="10058400" cy="457200"/>
-          </a:xfrm>
-          <a:prstGeom prst="rect">
-            <a:avLst/>
-          </a:prstGeom>
-          <a:noFill/>
-        </p:spPr>
-        <p:txBody>
-          <a:bodyPr wrap="square" lIns="45720" rIns="45720" tIns="18288" bIns="18288" anchor="t">
-            <a:spAutoFit/>
-          </a:bodyPr>
-          <a:lstStyle/>
-          <a:p>
-            <a:pPr algn="l"/>
-            <a:r>
-              <a:rPr sz="1200" b="0" i="0">
-                <a:solidFill>
-                  <a:srgbClr val="FFFFFF"/>
-                </a:solidFill>
-                <a:latin typeface="Calibri"/>
-              </a:rPr>
-              <a:t>Corso IFTS STEM · Specialista nelle Tecniche di Evoluzione e Manutenzione del Software</a:t>
-            </a:r>
-          </a:p>
-        </p:txBody>
-      </p:sp>
-      <p:sp>
-        <p:nvSpPr>
-          <p:cNvPr id="9" name="TextBox 8"/>
-          <p:cNvSpPr txBox="1"/>
-          <p:nvPr/>
-        </p:nvSpPr>
-        <p:spPr>
-          <a:xfrm>
-            <a:off x="731520" y="6263640"/>
-            <a:ext cx="10058400" cy="365760"/>
-          </a:xfrm>
-          <a:prstGeom prst="rect">
-            <a:avLst/>
-          </a:prstGeom>
-          <a:noFill/>
-        </p:spPr>
-        <p:txBody>
-          <a:bodyPr wrap="square" lIns="45720" rIns="45720" tIns="18288" bIns="18288" anchor="t">
-            <a:spAutoFit/>
-          </a:bodyPr>
-          <a:lstStyle/>
-          <a:p>
-            <a:pPr algn="l"/>
-            <a:r>
-              <a:rPr sz="1100" b="0" i="1">
-                <a:solidFill>
-                  <a:srgbClr val="FFFFFF"/>
-                </a:solidFill>
-                <a:latin typeface="Calibri"/>
-              </a:rPr>
-              <a:t>Ing. Alessandro Manneschi · Anno formativo 2024/2025</a:t>
+              <a:t>Corso IFTS STEM · Ing. Alessandro Manneschi · 2024/2025</a:t>
             </a:r>
           </a:p>
         </p:txBody>
@@ -3488,780 +3670,7 @@
                 </a:solidFill>
                 <a:latin typeface="Calibri"/>
               </a:rPr>
-              <a:t>STRIDE — sei lettere, sei categorie</a:t>
-            </a:r>
-          </a:p>
-        </p:txBody>
-      </p:sp>
-      <p:sp>
-        <p:nvSpPr>
-          <p:cNvPr id="4" name="TextBox 3"/>
-          <p:cNvSpPr txBox="1"/>
-          <p:nvPr/>
-        </p:nvSpPr>
-        <p:spPr>
-          <a:xfrm>
-            <a:off x="640080" y="1005840"/>
-            <a:ext cx="10972800" cy="5029200"/>
-          </a:xfrm>
-          <a:prstGeom prst="rect">
-            <a:avLst/>
-          </a:prstGeom>
-          <a:noFill/>
-        </p:spPr>
-        <p:txBody>
-          <a:bodyPr wrap="square">
-            <a:spAutoFit/>
-          </a:bodyPr>
-          <a:lstStyle/>
-          <a:p>
-            <a:pPr>
-              <a:lnSpc>
-                <a:spcPct val="150000"/>
-              </a:lnSpc>
-            </a:pPr>
-            <a:r>
-              <a:rPr sz="2000" b="1">
-                <a:solidFill>
-                  <a:srgbClr val="00A0B0"/>
-                </a:solidFill>
-                <a:latin typeface="Calibri"/>
-              </a:rPr>
-              <a:t>▸  </a:t>
-            </a:r>
-            <a:r>
-              <a:rPr sz="2000">
-                <a:solidFill>
-                  <a:srgbClr val="1A1A2E"/>
-                </a:solidFill>
-                <a:latin typeface="Calibri"/>
-              </a:rPr>
-              <a:t>S — Spoofing: fingersi qualcun altro (viola Authenticity)</a:t>
-            </a:r>
-          </a:p>
-          <a:p>
-            <a:pPr>
-              <a:lnSpc>
-                <a:spcPct val="150000"/>
-              </a:lnSpc>
-            </a:pPr>
-            <a:r>
-              <a:rPr sz="2000" b="1">
-                <a:solidFill>
-                  <a:srgbClr val="00A0B0"/>
-                </a:solidFill>
-                <a:latin typeface="Calibri"/>
-              </a:rPr>
-              <a:t>▸  </a:t>
-            </a:r>
-            <a:r>
-              <a:rPr sz="2000">
-                <a:solidFill>
-                  <a:srgbClr val="1A1A2E"/>
-                </a:solidFill>
-                <a:latin typeface="Calibri"/>
-              </a:rPr>
-              <a:t>T — Tampering: modificare dati (viola Integrity)</a:t>
-            </a:r>
-          </a:p>
-          <a:p>
-            <a:pPr>
-              <a:lnSpc>
-                <a:spcPct val="150000"/>
-              </a:lnSpc>
-            </a:pPr>
-            <a:r>
-              <a:rPr sz="2000" b="1">
-                <a:solidFill>
-                  <a:srgbClr val="00A0B0"/>
-                </a:solidFill>
-                <a:latin typeface="Calibri"/>
-              </a:rPr>
-              <a:t>▸  </a:t>
-            </a:r>
-            <a:r>
-              <a:rPr sz="2000">
-                <a:solidFill>
-                  <a:srgbClr val="1A1A2E"/>
-                </a:solidFill>
-                <a:latin typeface="Calibri"/>
-              </a:rPr>
-              <a:t>R — Repudiation: negare di aver fatto (viola Non-repudiation)</a:t>
-            </a:r>
-          </a:p>
-          <a:p>
-            <a:pPr>
-              <a:lnSpc>
-                <a:spcPct val="150000"/>
-              </a:lnSpc>
-            </a:pPr>
-            <a:r>
-              <a:rPr sz="2000" b="1">
-                <a:solidFill>
-                  <a:srgbClr val="00A0B0"/>
-                </a:solidFill>
-                <a:latin typeface="Calibri"/>
-              </a:rPr>
-              <a:t>▸  </a:t>
-            </a:r>
-            <a:r>
-              <a:rPr sz="2000">
-                <a:solidFill>
-                  <a:srgbClr val="1A1A2E"/>
-                </a:solidFill>
-                <a:latin typeface="Calibri"/>
-              </a:rPr>
-              <a:t>I — Information Disclosure: esporre dati (viola Confidentiality)</a:t>
-            </a:r>
-          </a:p>
-          <a:p>
-            <a:pPr>
-              <a:lnSpc>
-                <a:spcPct val="150000"/>
-              </a:lnSpc>
-            </a:pPr>
-            <a:r>
-              <a:rPr sz="2000" b="1">
-                <a:solidFill>
-                  <a:srgbClr val="00A0B0"/>
-                </a:solidFill>
-                <a:latin typeface="Calibri"/>
-              </a:rPr>
-              <a:t>▸  </a:t>
-            </a:r>
-            <a:r>
-              <a:rPr sz="2000">
-                <a:solidFill>
-                  <a:srgbClr val="1A1A2E"/>
-                </a:solidFill>
-                <a:latin typeface="Calibri"/>
-              </a:rPr>
-              <a:t>D — Denial of Service: rendere indisponibile (viola Availability)</a:t>
-            </a:r>
-          </a:p>
-          <a:p>
-            <a:pPr>
-              <a:lnSpc>
-                <a:spcPct val="150000"/>
-              </a:lnSpc>
-            </a:pPr>
-            <a:r>
-              <a:rPr sz="2000" b="1">
-                <a:solidFill>
-                  <a:srgbClr val="00A0B0"/>
-                </a:solidFill>
-                <a:latin typeface="Calibri"/>
-              </a:rPr>
-              <a:t>▸  </a:t>
-            </a:r>
-            <a:r>
-              <a:rPr sz="2000">
-                <a:solidFill>
-                  <a:srgbClr val="1A1A2E"/>
-                </a:solidFill>
-                <a:latin typeface="Calibri"/>
-              </a:rPr>
-              <a:t>E — Elevation of Privilege: ottenere più privilegi del previsto</a:t>
-            </a:r>
-          </a:p>
-        </p:txBody>
-      </p:sp>
-      <p:cxnSp>
-        <p:nvCxnSpPr>
-          <p:cNvPr id="5" name="Connector 4"/>
-          <p:cNvCxnSpPr/>
-          <p:nvPr/>
-        </p:nvCxnSpPr>
-        <p:spPr>
-          <a:xfrm>
-            <a:off x="457200" y="6446520"/>
-            <a:ext cx="11274552" cy="0"/>
-          </a:xfrm>
-          <a:prstGeom prst="line">
-            <a:avLst/>
-          </a:prstGeom>
-          <a:ln w="19050">
-            <a:solidFill>
-              <a:srgbClr val="00A0B0"/>
-            </a:solidFill>
-          </a:ln>
-        </p:spPr>
-        <p:style>
-          <a:lnRef idx="2">
-            <a:schemeClr val="accent1"/>
-          </a:lnRef>
-          <a:fillRef idx="0">
-            <a:schemeClr val="accent1"/>
-          </a:fillRef>
-          <a:effectRef idx="1">
-            <a:schemeClr val="accent1"/>
-          </a:effectRef>
-          <a:fontRef idx="minor">
-            <a:schemeClr val="tx1"/>
-          </a:fontRef>
-        </p:style>
-      </p:cxnSp>
-      <p:sp>
-        <p:nvSpPr>
-          <p:cNvPr id="6" name="TextBox 5"/>
-          <p:cNvSpPr txBox="1"/>
-          <p:nvPr/>
-        </p:nvSpPr>
-        <p:spPr>
-          <a:xfrm>
-            <a:off x="457200" y="6473952"/>
-            <a:ext cx="7315200" cy="320040"/>
-          </a:xfrm>
-          <a:prstGeom prst="rect">
-            <a:avLst/>
-          </a:prstGeom>
-          <a:noFill/>
-        </p:spPr>
-        <p:txBody>
-          <a:bodyPr wrap="square" lIns="45720" rIns="45720" tIns="18288" bIns="18288" anchor="t">
-            <a:spAutoFit/>
-          </a:bodyPr>
-          <a:lstStyle/>
-          <a:p>
-            <a:pPr algn="l"/>
-            <a:r>
-              <a:rPr sz="1000" b="0" i="0">
-                <a:solidFill>
-                  <a:srgbClr val="6B7280"/>
-                </a:solidFill>
-                <a:latin typeface="Calibri"/>
-              </a:rPr>
-              <a:t>Secure Coding · Corso IFTS STEM · A. Manneschi</a:t>
-            </a:r>
-          </a:p>
-        </p:txBody>
-      </p:sp>
-      <p:sp>
-        <p:nvSpPr>
-          <p:cNvPr id="7" name="TextBox 6"/>
-          <p:cNvSpPr txBox="1"/>
-          <p:nvPr/>
-        </p:nvSpPr>
-        <p:spPr>
-          <a:xfrm>
-            <a:off x="10515600" y="6473952"/>
-            <a:ext cx="1188720" cy="320040"/>
-          </a:xfrm>
-          <a:prstGeom prst="rect">
-            <a:avLst/>
-          </a:prstGeom>
-          <a:noFill/>
-        </p:spPr>
-        <p:txBody>
-          <a:bodyPr wrap="square" lIns="45720" rIns="45720" tIns="18288" bIns="18288" anchor="t">
-            <a:spAutoFit/>
-          </a:bodyPr>
-          <a:lstStyle/>
-          <a:p>
-            <a:pPr algn="r"/>
-            <a:r>
-              <a:rPr sz="1000" b="1" i="0">
-                <a:solidFill>
-                  <a:srgbClr val="6B7280"/>
-                </a:solidFill>
-                <a:latin typeface="Calibri"/>
-              </a:rPr>
-              <a:t>L2  ·  10/14</a:t>
-            </a:r>
-          </a:p>
-        </p:txBody>
-      </p:sp>
-    </p:spTree>
-  </p:cSld>
-  <p:clrMapOvr>
-    <a:masterClrMapping/>
-  </p:clrMapOvr>
-</p:sld>
-</file>
-
-<file path=ppt/slides/slide11.xml><?xml version="1.0" encoding="utf-8"?>
-<p:sld xmlns:a="http://schemas.openxmlformats.org/drawingml/2006/main" xmlns:p="http://schemas.openxmlformats.org/presentationml/2006/main" xmlns:r="http://schemas.openxmlformats.org/officeDocument/2006/relationships">
-  <p:cSld>
-    <p:spTree>
-      <p:nvGrpSpPr>
-        <p:cNvPr id="1" name=""/>
-        <p:cNvGrpSpPr/>
-        <p:nvPr/>
-      </p:nvGrpSpPr>
-      <p:grpSpPr/>
-      <p:sp>
-        <p:nvSpPr>
-          <p:cNvPr id="2" name="Rectangle 1"/>
-          <p:cNvSpPr/>
-          <p:nvPr/>
-        </p:nvSpPr>
-        <p:spPr>
-          <a:xfrm>
-            <a:off x="0" y="0"/>
-            <a:ext cx="12191695" cy="777240"/>
-          </a:xfrm>
-          <a:prstGeom prst="rect">
-            <a:avLst/>
-          </a:prstGeom>
-          <a:solidFill>
-            <a:srgbClr val="0F2D52"/>
-          </a:solidFill>
-          <a:ln>
-            <a:noFill/>
-          </a:ln>
-        </p:spPr>
-        <p:style>
-          <a:lnRef idx="1">
-            <a:schemeClr val="accent1"/>
-          </a:lnRef>
-          <a:fillRef idx="3">
-            <a:schemeClr val="accent1"/>
-          </a:fillRef>
-          <a:effectRef idx="2">
-            <a:schemeClr val="accent1"/>
-          </a:effectRef>
-          <a:fontRef idx="minor">
-            <a:schemeClr val="lt1"/>
-          </a:fontRef>
-        </p:style>
-        <p:txBody>
-          <a:bodyPr rtlCol="0" anchor="ctr"/>
-          <a:lstStyle/>
-          <a:p>
-            <a:pPr algn="ctr"/>
-          </a:p>
-        </p:txBody>
-      </p:sp>
-      <p:sp>
-        <p:nvSpPr>
-          <p:cNvPr id="3" name="TextBox 2"/>
-          <p:cNvSpPr txBox="1"/>
-          <p:nvPr/>
-        </p:nvSpPr>
-        <p:spPr>
-          <a:xfrm>
-            <a:off x="457200" y="164592"/>
-            <a:ext cx="10972800" cy="502920"/>
-          </a:xfrm>
-          <a:prstGeom prst="rect">
-            <a:avLst/>
-          </a:prstGeom>
-          <a:noFill/>
-        </p:spPr>
-        <p:txBody>
-          <a:bodyPr wrap="square" lIns="45720" rIns="45720" tIns="18288" bIns="18288" anchor="ctr">
-            <a:spAutoFit/>
-          </a:bodyPr>
-          <a:lstStyle/>
-          <a:p>
-            <a:pPr algn="l"/>
-            <a:r>
-              <a:rPr sz="2400" b="1" i="0">
-                <a:solidFill>
-                  <a:srgbClr val="FFFFFF"/>
-                </a:solidFill>
-                <a:latin typeface="Calibri"/>
-              </a:rPr>
-              <a:t>Data Flow Diagram — 4 simboli</a:t>
-            </a:r>
-          </a:p>
-        </p:txBody>
-      </p:sp>
-      <p:sp>
-        <p:nvSpPr>
-          <p:cNvPr id="4" name="TextBox 3"/>
-          <p:cNvSpPr txBox="1"/>
-          <p:nvPr/>
-        </p:nvSpPr>
-        <p:spPr>
-          <a:xfrm>
-            <a:off x="640080" y="1005840"/>
-            <a:ext cx="10972800" cy="5029200"/>
-          </a:xfrm>
-          <a:prstGeom prst="rect">
-            <a:avLst/>
-          </a:prstGeom>
-          <a:noFill/>
-        </p:spPr>
-        <p:txBody>
-          <a:bodyPr wrap="square">
-            <a:spAutoFit/>
-          </a:bodyPr>
-          <a:lstStyle/>
-          <a:p>
-            <a:pPr>
-              <a:lnSpc>
-                <a:spcPct val="150000"/>
-              </a:lnSpc>
-            </a:pPr>
-            <a:r>
-              <a:rPr sz="2000" b="1">
-                <a:solidFill>
-                  <a:srgbClr val="00A0B0"/>
-                </a:solidFill>
-                <a:latin typeface="Calibri"/>
-              </a:rPr>
-              <a:t>▸  </a:t>
-            </a:r>
-            <a:r>
-              <a:rPr sz="2000">
-                <a:solidFill>
-                  <a:srgbClr val="1A1A2E"/>
-                </a:solidFill>
-                <a:latin typeface="Calibri"/>
-              </a:rPr>
-              <a:t>□  Rettangolo: entità esterna (utente, sistema terzo)</a:t>
-            </a:r>
-          </a:p>
-          <a:p>
-            <a:pPr>
-              <a:lnSpc>
-                <a:spcPct val="150000"/>
-              </a:lnSpc>
-            </a:pPr>
-            <a:r>
-              <a:rPr sz="2000" b="1">
-                <a:solidFill>
-                  <a:srgbClr val="00A0B0"/>
-                </a:solidFill>
-                <a:latin typeface="Calibri"/>
-              </a:rPr>
-              <a:t>▸  </a:t>
-            </a:r>
-            <a:r>
-              <a:rPr sz="2000">
-                <a:solidFill>
-                  <a:srgbClr val="1A1A2E"/>
-                </a:solidFill>
-                <a:latin typeface="Calibri"/>
-              </a:rPr>
-              <a:t>○  Cerchio: processo (codice in esecuzione)</a:t>
-            </a:r>
-          </a:p>
-          <a:p>
-            <a:pPr>
-              <a:lnSpc>
-                <a:spcPct val="150000"/>
-              </a:lnSpc>
-            </a:pPr>
-            <a:r>
-              <a:rPr sz="2000" b="1">
-                <a:solidFill>
-                  <a:srgbClr val="00A0B0"/>
-                </a:solidFill>
-                <a:latin typeface="Calibri"/>
-              </a:rPr>
-              <a:t>▸  </a:t>
-            </a:r>
-            <a:r>
-              <a:rPr sz="2000">
-                <a:solidFill>
-                  <a:srgbClr val="1A1A2E"/>
-                </a:solidFill>
-                <a:latin typeface="Calibri"/>
-              </a:rPr>
-              <a:t>═══ Linee parallele: datastore (DB, file)</a:t>
-            </a:r>
-          </a:p>
-          <a:p>
-            <a:pPr>
-              <a:lnSpc>
-                <a:spcPct val="150000"/>
-              </a:lnSpc>
-            </a:pPr>
-            <a:r>
-              <a:rPr sz="2000" b="1">
-                <a:solidFill>
-                  <a:srgbClr val="00A0B0"/>
-                </a:solidFill>
-                <a:latin typeface="Calibri"/>
-              </a:rPr>
-              <a:t>▸  </a:t>
-            </a:r>
-            <a:r>
-              <a:rPr sz="2000">
-                <a:solidFill>
-                  <a:srgbClr val="1A1A2E"/>
-                </a:solidFill>
-                <a:latin typeface="Calibri"/>
-              </a:rPr>
-              <a:t>→  Freccia: flusso di dati</a:t>
-            </a:r>
-          </a:p>
-          <a:p>
-            <a:pPr>
-              <a:lnSpc>
-                <a:spcPct val="150000"/>
-              </a:lnSpc>
-            </a:pPr>
-            <a:r>
-              <a:rPr sz="2000" b="1">
-                <a:solidFill>
-                  <a:srgbClr val="00A0B0"/>
-                </a:solidFill>
-                <a:latin typeface="Calibri"/>
-              </a:rPr>
-              <a:t>▸  </a:t>
-            </a:r>
-            <a:r>
-              <a:rPr sz="2000">
-                <a:solidFill>
-                  <a:srgbClr val="1A1A2E"/>
-                </a:solidFill>
-                <a:latin typeface="Calibri"/>
-              </a:rPr>
-              <a:t>┄┄  Linea tratteggiata: trust boundary</a:t>
-            </a:r>
-          </a:p>
-          <a:p>
-            <a:pPr>
-              <a:lnSpc>
-                <a:spcPct val="150000"/>
-              </a:lnSpc>
-            </a:pPr>
-            <a:r>
-              <a:rPr sz="2000" b="1">
-                <a:solidFill>
-                  <a:srgbClr val="00A0B0"/>
-                </a:solidFill>
-                <a:latin typeface="Calibri"/>
-              </a:rPr>
-              <a:t>▸  </a:t>
-            </a:r>
-            <a:r>
-              <a:rPr sz="2000">
-                <a:solidFill>
-                  <a:srgbClr val="1A1A2E"/>
-                </a:solidFill>
-                <a:latin typeface="Calibri"/>
-              </a:rPr>
-              <a:t/>
-            </a:r>
-          </a:p>
-          <a:p>
-            <a:pPr>
-              <a:lnSpc>
-                <a:spcPct val="150000"/>
-              </a:lnSpc>
-            </a:pPr>
-            <a:r>
-              <a:rPr sz="2000" b="1">
-                <a:solidFill>
-                  <a:srgbClr val="00A0B0"/>
-                </a:solidFill>
-                <a:latin typeface="Calibri"/>
-              </a:rPr>
-              <a:t>▸  </a:t>
-            </a:r>
-            <a:r>
-              <a:rPr sz="2000">
-                <a:solidFill>
-                  <a:srgbClr val="1A1A2E"/>
-                </a:solidFill>
-                <a:latin typeface="Calibri"/>
-              </a:rPr>
-              <a:t>Ogni attraversamento di trust boundary = opportunità di attacco</a:t>
-            </a:r>
-          </a:p>
-        </p:txBody>
-      </p:sp>
-      <p:cxnSp>
-        <p:nvCxnSpPr>
-          <p:cNvPr id="5" name="Connector 4"/>
-          <p:cNvCxnSpPr/>
-          <p:nvPr/>
-        </p:nvCxnSpPr>
-        <p:spPr>
-          <a:xfrm>
-            <a:off x="457200" y="6446520"/>
-            <a:ext cx="11274552" cy="0"/>
-          </a:xfrm>
-          <a:prstGeom prst="line">
-            <a:avLst/>
-          </a:prstGeom>
-          <a:ln w="19050">
-            <a:solidFill>
-              <a:srgbClr val="00A0B0"/>
-            </a:solidFill>
-          </a:ln>
-        </p:spPr>
-        <p:style>
-          <a:lnRef idx="2">
-            <a:schemeClr val="accent1"/>
-          </a:lnRef>
-          <a:fillRef idx="0">
-            <a:schemeClr val="accent1"/>
-          </a:fillRef>
-          <a:effectRef idx="1">
-            <a:schemeClr val="accent1"/>
-          </a:effectRef>
-          <a:fontRef idx="minor">
-            <a:schemeClr val="tx1"/>
-          </a:fontRef>
-        </p:style>
-      </p:cxnSp>
-      <p:sp>
-        <p:nvSpPr>
-          <p:cNvPr id="6" name="TextBox 5"/>
-          <p:cNvSpPr txBox="1"/>
-          <p:nvPr/>
-        </p:nvSpPr>
-        <p:spPr>
-          <a:xfrm>
-            <a:off x="457200" y="6473952"/>
-            <a:ext cx="7315200" cy="320040"/>
-          </a:xfrm>
-          <a:prstGeom prst="rect">
-            <a:avLst/>
-          </a:prstGeom>
-          <a:noFill/>
-        </p:spPr>
-        <p:txBody>
-          <a:bodyPr wrap="square" lIns="45720" rIns="45720" tIns="18288" bIns="18288" anchor="t">
-            <a:spAutoFit/>
-          </a:bodyPr>
-          <a:lstStyle/>
-          <a:p>
-            <a:pPr algn="l"/>
-            <a:r>
-              <a:rPr sz="1000" b="0" i="0">
-                <a:solidFill>
-                  <a:srgbClr val="6B7280"/>
-                </a:solidFill>
-                <a:latin typeface="Calibri"/>
-              </a:rPr>
-              <a:t>Secure Coding · Corso IFTS STEM · A. Manneschi</a:t>
-            </a:r>
-          </a:p>
-        </p:txBody>
-      </p:sp>
-      <p:sp>
-        <p:nvSpPr>
-          <p:cNvPr id="7" name="TextBox 6"/>
-          <p:cNvSpPr txBox="1"/>
-          <p:nvPr/>
-        </p:nvSpPr>
-        <p:spPr>
-          <a:xfrm>
-            <a:off x="10515600" y="6473952"/>
-            <a:ext cx="1188720" cy="320040"/>
-          </a:xfrm>
-          <a:prstGeom prst="rect">
-            <a:avLst/>
-          </a:prstGeom>
-          <a:noFill/>
-        </p:spPr>
-        <p:txBody>
-          <a:bodyPr wrap="square" lIns="45720" rIns="45720" tIns="18288" bIns="18288" anchor="t">
-            <a:spAutoFit/>
-          </a:bodyPr>
-          <a:lstStyle/>
-          <a:p>
-            <a:pPr algn="r"/>
-            <a:r>
-              <a:rPr sz="1000" b="1" i="0">
-                <a:solidFill>
-                  <a:srgbClr val="6B7280"/>
-                </a:solidFill>
-                <a:latin typeface="Calibri"/>
-              </a:rPr>
-              <a:t>L2  ·  11/14</a:t>
-            </a:r>
-          </a:p>
-        </p:txBody>
-      </p:sp>
-    </p:spTree>
-  </p:cSld>
-  <p:clrMapOvr>
-    <a:masterClrMapping/>
-  </p:clrMapOvr>
-</p:sld>
-</file>
-
-<file path=ppt/slides/slide12.xml><?xml version="1.0" encoding="utf-8"?>
-<p:sld xmlns:a="http://schemas.openxmlformats.org/drawingml/2006/main" xmlns:p="http://schemas.openxmlformats.org/presentationml/2006/main" xmlns:r="http://schemas.openxmlformats.org/officeDocument/2006/relationships">
-  <p:cSld>
-    <p:spTree>
-      <p:nvGrpSpPr>
-        <p:cNvPr id="1" name=""/>
-        <p:cNvGrpSpPr/>
-        <p:nvPr/>
-      </p:nvGrpSpPr>
-      <p:grpSpPr/>
-      <p:sp>
-        <p:nvSpPr>
-          <p:cNvPr id="2" name="Rectangle 1"/>
-          <p:cNvSpPr/>
-          <p:nvPr/>
-        </p:nvSpPr>
-        <p:spPr>
-          <a:xfrm>
-            <a:off x="0" y="0"/>
-            <a:ext cx="12191695" cy="777240"/>
-          </a:xfrm>
-          <a:prstGeom prst="rect">
-            <a:avLst/>
-          </a:prstGeom>
-          <a:solidFill>
-            <a:srgbClr val="0F2D52"/>
-          </a:solidFill>
-          <a:ln>
-            <a:noFill/>
-          </a:ln>
-        </p:spPr>
-        <p:style>
-          <a:lnRef idx="1">
-            <a:schemeClr val="accent1"/>
-          </a:lnRef>
-          <a:fillRef idx="3">
-            <a:schemeClr val="accent1"/>
-          </a:fillRef>
-          <a:effectRef idx="2">
-            <a:schemeClr val="accent1"/>
-          </a:effectRef>
-          <a:fontRef idx="minor">
-            <a:schemeClr val="lt1"/>
-          </a:fontRef>
-        </p:style>
-        <p:txBody>
-          <a:bodyPr rtlCol="0" anchor="ctr"/>
-          <a:lstStyle/>
-          <a:p>
-            <a:pPr algn="ctr"/>
-          </a:p>
-        </p:txBody>
-      </p:sp>
-      <p:sp>
-        <p:nvSpPr>
-          <p:cNvPr id="3" name="TextBox 2"/>
-          <p:cNvSpPr txBox="1"/>
-          <p:nvPr/>
-        </p:nvSpPr>
-        <p:spPr>
-          <a:xfrm>
-            <a:off x="457200" y="164592"/>
-            <a:ext cx="10972800" cy="502920"/>
-          </a:xfrm>
-          <a:prstGeom prst="rect">
-            <a:avLst/>
-          </a:prstGeom>
-          <a:noFill/>
-        </p:spPr>
-        <p:txBody>
-          <a:bodyPr wrap="square" lIns="45720" rIns="45720" tIns="18288" bIns="18288" anchor="ctr">
-            <a:spAutoFit/>
-          </a:bodyPr>
-          <a:lstStyle/>
-          <a:p>
-            <a:pPr algn="l"/>
-            <a:r>
-              <a:rPr sz="2400" b="1" i="0">
-                <a:solidFill>
-                  <a:srgbClr val="FFFFFF"/>
-                </a:solidFill>
-                <a:latin typeface="Calibri"/>
-              </a:rPr>
-              <a:t>STRIDE light — esempio su mini-blog</a:t>
+              <a:t>STRIDE applicato al mini-blog</a:t>
             </a:r>
           </a:p>
         </p:txBody>
@@ -4276,7 +3685,7 @@
         </p:nvGraphicFramePr>
         <p:xfrm>
           <a:off x="457200" y="1188720"/>
-          <a:ext cx="11247120" cy="5029200"/>
+          <a:ext cx="11247120" cy="4937760"/>
         </p:xfrm>
         <a:graphic>
           <a:graphicData uri="http://schemas.openxmlformats.org/drawingml/2006/table">
@@ -4290,7 +3699,7 @@
                 <a:gridCol w="2811780"/>
                 <a:gridCol w="2811780"/>
               </a:tblGrid>
-              <a:tr h="628650">
+              <a:tr h="617220">
                 <a:tc>
                   <a:txBody>
                     <a:bodyPr/>
@@ -4298,7 +3707,7 @@
                     <a:p>
                       <a:pPr algn="ctr"/>
                       <a:r>
-                        <a:rPr sz="1400" b="1">
+                        <a:rPr sz="1300" b="1">
                           <a:solidFill>
                             <a:srgbClr val="FFFFFF"/>
                           </a:solidFill>
@@ -4321,7 +3730,7 @@
                     <a:p>
                       <a:pPr algn="ctr"/>
                       <a:r>
-                        <a:rPr sz="1400" b="1">
+                        <a:rPr sz="1300" b="1">
                           <a:solidFill>
                             <a:srgbClr val="FFFFFF"/>
                           </a:solidFill>
@@ -4344,7 +3753,7 @@
                     <a:p>
                       <a:pPr algn="ctr"/>
                       <a:r>
-                        <a:rPr sz="1400" b="1">
+                        <a:rPr sz="1300" b="1">
                           <a:solidFill>
                             <a:srgbClr val="FFFFFF"/>
                           </a:solidFill>
@@ -4367,7 +3776,7 @@
                     <a:p>
                       <a:pPr algn="ctr"/>
                       <a:r>
-                        <a:rPr sz="1400" b="1">
+                        <a:rPr sz="1300" b="1">
                           <a:solidFill>
                             <a:srgbClr val="FFFFFF"/>
                           </a:solidFill>
@@ -4384,15 +3793,14 @@
                   </a:tcPr>
                 </a:tc>
               </a:tr>
-              <a:tr h="628650">
+              <a:tr h="617220">
                 <a:tc>
                   <a:txBody>
                     <a:bodyPr/>
                     <a:lstStyle/>
                     <a:p>
-                      <a:pPr algn="l"/>
                       <a:r>
-                        <a:rPr sz="1200">
+                        <a:rPr sz="1100">
                           <a:solidFill>
                             <a:srgbClr val="1A1A2E"/>
                           </a:solidFill>
@@ -4413,9 +3821,8 @@
                     <a:bodyPr/>
                     <a:lstStyle/>
                     <a:p>
-                      <a:pPr algn="l"/>
                       <a:r>
-                        <a:rPr sz="1200">
+                        <a:rPr sz="1100">
                           <a:solidFill>
                             <a:srgbClr val="1A1A2E"/>
                           </a:solidFill>
@@ -4436,9 +3843,8 @@
                     <a:bodyPr/>
                     <a:lstStyle/>
                     <a:p>
-                      <a:pPr algn="l"/>
                       <a:r>
-                        <a:rPr sz="1200">
+                        <a:rPr sz="1100">
                           <a:solidFill>
                             <a:srgbClr val="1A1A2E"/>
                           </a:solidFill>
@@ -4459,15 +3865,14 @@
                     <a:bodyPr/>
                     <a:lstStyle/>
                     <a:p>
-                      <a:pPr algn="l"/>
                       <a:r>
-                        <a:rPr sz="1200">
+                        <a:rPr sz="1100">
                           <a:solidFill>
                             <a:srgbClr val="1A1A2E"/>
                           </a:solidFill>
                           <a:latin typeface="Calibri"/>
                         </a:rPr>
-                        <a:t>Password robuste + MFA</a:t>
+                        <a:t>bcrypt + MFA</a:t>
                       </a:r>
                     </a:p>
                   </a:txBody>
@@ -4478,15 +3883,14 @@
                   </a:tcPr>
                 </a:tc>
               </a:tr>
-              <a:tr h="628650">
+              <a:tr h="617220">
                 <a:tc>
                   <a:txBody>
                     <a:bodyPr/>
                     <a:lstStyle/>
                     <a:p>
-                      <a:pPr algn="l"/>
                       <a:r>
-                        <a:rPr sz="1200">
+                        <a:rPr sz="1100">
                           <a:solidFill>
                             <a:srgbClr val="1A1A2E"/>
                           </a:solidFill>
@@ -4507,9 +3911,8 @@
                     <a:bodyPr/>
                     <a:lstStyle/>
                     <a:p>
-                      <a:pPr algn="l"/>
                       <a:r>
-                        <a:rPr sz="1200">
+                        <a:rPr sz="1100">
                           <a:solidFill>
                             <a:srgbClr val="1A1A2E"/>
                           </a:solidFill>
@@ -4530,9 +3933,8 @@
                     <a:bodyPr/>
                     <a:lstStyle/>
                     <a:p>
-                      <a:pPr algn="l"/>
                       <a:r>
-                        <a:rPr sz="1200">
+                        <a:rPr sz="1100">
                           <a:solidFill>
                             <a:srgbClr val="1A1A2E"/>
                           </a:solidFill>
@@ -4553,15 +3955,14 @@
                     <a:bodyPr/>
                     <a:lstStyle/>
                     <a:p>
-                      <a:pPr algn="l"/>
                       <a:r>
-                        <a:rPr sz="1200">
+                        <a:rPr sz="1100">
                           <a:solidFill>
                             <a:srgbClr val="1A1A2E"/>
                           </a:solidFill>
                           <a:latin typeface="Calibri"/>
                         </a:rPr>
-                        <a:t>Cookie firmato server-side</a:t>
+                        <a:t>Cookie firmato server</a:t>
                       </a:r>
                     </a:p>
                   </a:txBody>
@@ -4572,15 +3973,14 @@
                   </a:tcPr>
                 </a:tc>
               </a:tr>
-              <a:tr h="628650">
+              <a:tr h="617220">
                 <a:tc>
                   <a:txBody>
                     <a:bodyPr/>
                     <a:lstStyle/>
                     <a:p>
-                      <a:pPr algn="l"/>
                       <a:r>
-                        <a:rPr sz="1200">
+                        <a:rPr sz="1100">
                           <a:solidFill>
                             <a:srgbClr val="1A1A2E"/>
                           </a:solidFill>
@@ -4601,9 +4001,8 @@
                     <a:bodyPr/>
                     <a:lstStyle/>
                     <a:p>
-                      <a:pPr algn="l"/>
                       <a:r>
-                        <a:rPr sz="1200">
+                        <a:rPr sz="1100">
                           <a:solidFill>
                             <a:srgbClr val="1A1A2E"/>
                           </a:solidFill>
@@ -4624,9 +4023,8 @@
                     <a:bodyPr/>
                     <a:lstStyle/>
                     <a:p>
-                      <a:pPr algn="l"/>
                       <a:r>
-                        <a:rPr sz="1200">
+                        <a:rPr sz="1100">
                           <a:solidFill>
                             <a:srgbClr val="1A1A2E"/>
                           </a:solidFill>
@@ -4647,9 +4045,8 @@
                     <a:bodyPr/>
                     <a:lstStyle/>
                     <a:p>
-                      <a:pPr algn="l"/>
                       <a:r>
-                        <a:rPr sz="1200">
+                        <a:rPr sz="1100">
                           <a:solidFill>
                             <a:srgbClr val="1A1A2E"/>
                           </a:solidFill>
@@ -4666,15 +4063,14 @@
                   </a:tcPr>
                 </a:tc>
               </a:tr>
-              <a:tr h="628650">
+              <a:tr h="617220">
                 <a:tc>
                   <a:txBody>
                     <a:bodyPr/>
                     <a:lstStyle/>
                     <a:p>
-                      <a:pPr algn="l"/>
                       <a:r>
-                        <a:rPr sz="1200">
+                        <a:rPr sz="1100">
                           <a:solidFill>
                             <a:srgbClr val="1A1A2E"/>
                           </a:solidFill>
@@ -4695,9 +4091,8 @@
                     <a:bodyPr/>
                     <a:lstStyle/>
                     <a:p>
-                      <a:pPr algn="l"/>
                       <a:r>
-                        <a:rPr sz="1200">
+                        <a:rPr sz="1100">
                           <a:solidFill>
                             <a:srgbClr val="1A1A2E"/>
                           </a:solidFill>
@@ -4718,9 +4113,8 @@
                     <a:bodyPr/>
                     <a:lstStyle/>
                     <a:p>
-                      <a:pPr algn="l"/>
                       <a:r>
-                        <a:rPr sz="1200">
+                        <a:rPr sz="1100">
                           <a:solidFill>
                             <a:srgbClr val="1A1A2E"/>
                           </a:solidFill>
@@ -4741,9 +4135,8 @@
                     <a:bodyPr/>
                     <a:lstStyle/>
                     <a:p>
-                      <a:pPr algn="l"/>
                       <a:r>
-                        <a:rPr sz="1200">
+                        <a:rPr sz="1100">
                           <a:solidFill>
                             <a:srgbClr val="1A1A2E"/>
                           </a:solidFill>
@@ -4760,15 +4153,14 @@
                   </a:tcPr>
                 </a:tc>
               </a:tr>
-              <a:tr h="628650">
+              <a:tr h="617220">
                 <a:tc>
                   <a:txBody>
                     <a:bodyPr/>
                     <a:lstStyle/>
                     <a:p>
-                      <a:pPr algn="l"/>
                       <a:r>
-                        <a:rPr sz="1200">
+                        <a:rPr sz="1100">
                           <a:solidFill>
                             <a:srgbClr val="1A1A2E"/>
                           </a:solidFill>
@@ -4789,9 +4181,8 @@
                     <a:bodyPr/>
                     <a:lstStyle/>
                     <a:p>
-                      <a:pPr algn="l"/>
                       <a:r>
-                        <a:rPr sz="1200">
+                        <a:rPr sz="1100">
                           <a:solidFill>
                             <a:srgbClr val="1A1A2E"/>
                           </a:solidFill>
@@ -4812,9 +4203,8 @@
                     <a:bodyPr/>
                     <a:lstStyle/>
                     <a:p>
-                      <a:pPr algn="l"/>
                       <a:r>
-                        <a:rPr sz="1200">
+                        <a:rPr sz="1100">
                           <a:solidFill>
                             <a:srgbClr val="1A1A2E"/>
                           </a:solidFill>
@@ -4835,9 +4225,8 @@
                     <a:bodyPr/>
                     <a:lstStyle/>
                     <a:p>
-                      <a:pPr algn="l"/>
                       <a:r>
-                        <a:rPr sz="1200">
+                        <a:rPr sz="1100">
                           <a:solidFill>
                             <a:srgbClr val="1A1A2E"/>
                           </a:solidFill>
@@ -4854,15 +4243,14 @@
                   </a:tcPr>
                 </a:tc>
               </a:tr>
-              <a:tr h="628650">
+              <a:tr h="617220">
                 <a:tc>
                   <a:txBody>
                     <a:bodyPr/>
                     <a:lstStyle/>
                     <a:p>
-                      <a:pPr algn="l"/>
                       <a:r>
-                        <a:rPr sz="1200">
+                        <a:rPr sz="1100">
                           <a:solidFill>
                             <a:srgbClr val="1A1A2E"/>
                           </a:solidFill>
@@ -4883,9 +4271,8 @@
                     <a:bodyPr/>
                     <a:lstStyle/>
                     <a:p>
-                      <a:pPr algn="l"/>
                       <a:r>
-                        <a:rPr sz="1200">
+                        <a:rPr sz="1100">
                           <a:solidFill>
                             <a:srgbClr val="1A1A2E"/>
                           </a:solidFill>
@@ -4906,9 +4293,8 @@
                     <a:bodyPr/>
                     <a:lstStyle/>
                     <a:p>
-                      <a:pPr algn="l"/>
                       <a:r>
-                        <a:rPr sz="1200">
+                        <a:rPr sz="1100">
                           <a:solidFill>
                             <a:srgbClr val="1A1A2E"/>
                           </a:solidFill>
@@ -4929,9 +4315,8 @@
                     <a:bodyPr/>
                     <a:lstStyle/>
                     <a:p>
-                      <a:pPr algn="l"/>
                       <a:r>
-                        <a:rPr sz="1200">
+                        <a:rPr sz="1100">
                           <a:solidFill>
                             <a:srgbClr val="1A1A2E"/>
                           </a:solidFill>
@@ -4948,21 +4333,20 @@
                   </a:tcPr>
                 </a:tc>
               </a:tr>
-              <a:tr h="628650">
+              <a:tr h="617220">
                 <a:tc>
                   <a:txBody>
                     <a:bodyPr/>
                     <a:lstStyle/>
                     <a:p>
-                      <a:pPr algn="l"/>
                       <a:r>
-                        <a:rPr sz="1200">
+                        <a:rPr sz="1100">
                           <a:solidFill>
                             <a:srgbClr val="1A1A2E"/>
                           </a:solidFill>
                           <a:latin typeface="Calibri"/>
                         </a:rPr>
-                        <a:t>Flusso utente→web</a:t>
+                        <a:t>Flusso utente↔web</a:t>
                       </a:r>
                     </a:p>
                   </a:txBody>
@@ -4977,9 +4361,8 @@
                     <a:bodyPr/>
                     <a:lstStyle/>
                     <a:p>
-                      <a:pPr algn="l"/>
                       <a:r>
-                        <a:rPr sz="1200">
+                        <a:rPr sz="1100">
                           <a:solidFill>
                             <a:srgbClr val="1A1A2E"/>
                           </a:solidFill>
@@ -5000,9 +4383,8 @@
                     <a:bodyPr/>
                     <a:lstStyle/>
                     <a:p>
-                      <a:pPr algn="l"/>
                       <a:r>
-                        <a:rPr sz="1200">
+                        <a:rPr sz="1100">
                           <a:solidFill>
                             <a:srgbClr val="1A1A2E"/>
                           </a:solidFill>
@@ -5023,9 +4405,8 @@
                     <a:bodyPr/>
                     <a:lstStyle/>
                     <a:p>
-                      <a:pPr algn="l"/>
                       <a:r>
-                        <a:rPr sz="1200">
+                        <a:rPr sz="1100">
                           <a:solidFill>
                             <a:srgbClr val="1A1A2E"/>
                           </a:solidFill>
@@ -5090,7 +4471,7 @@
         <p:spPr>
           <a:xfrm>
             <a:off x="457200" y="6473952"/>
-            <a:ext cx="7315200" cy="320040"/>
+            <a:ext cx="7315200" cy="292608"/>
           </a:xfrm>
           <a:prstGeom prst="rect">
             <a:avLst/>
@@ -5111,7 +4492,7 @@
                 </a:solidFill>
                 <a:latin typeface="Calibri"/>
               </a:rPr>
-              <a:t>Secure Coding · Corso IFTS STEM · A. Manneschi</a:t>
+              <a:t>Secure Coding · Corso IFTS STEM · A. Manneschi · 2024/2025</a:t>
             </a:r>
           </a:p>
         </p:txBody>
@@ -5125,7 +4506,1428 @@
         <p:spPr>
           <a:xfrm>
             <a:off x="10515600" y="6473952"/>
-            <a:ext cx="1188720" cy="320040"/>
+            <a:ext cx="1188720" cy="292608"/>
+          </a:xfrm>
+          <a:prstGeom prst="rect">
+            <a:avLst/>
+          </a:prstGeom>
+          <a:noFill/>
+        </p:spPr>
+        <p:txBody>
+          <a:bodyPr wrap="square" lIns="45720" rIns="45720" tIns="18288" bIns="18288" anchor="t">
+            <a:spAutoFit/>
+          </a:bodyPr>
+          <a:lstStyle/>
+          <a:p>
+            <a:pPr algn="r"/>
+            <a:r>
+              <a:rPr sz="1000" b="1" i="0">
+                <a:solidFill>
+                  <a:srgbClr val="6B7280"/>
+                </a:solidFill>
+                <a:latin typeface="Calibri"/>
+              </a:rPr>
+              <a:t>L2  ·  10/14</a:t>
+            </a:r>
+          </a:p>
+        </p:txBody>
+      </p:sp>
+    </p:spTree>
+  </p:cSld>
+  <p:clrMapOvr>
+    <a:masterClrMapping/>
+  </p:clrMapOvr>
+</p:sld>
+</file>
+
+<file path=ppt/slides/slide11.xml><?xml version="1.0" encoding="utf-8"?>
+<p:sld xmlns:a="http://schemas.openxmlformats.org/drawingml/2006/main" xmlns:p="http://schemas.openxmlformats.org/presentationml/2006/main" xmlns:r="http://schemas.openxmlformats.org/officeDocument/2006/relationships">
+  <p:cSld>
+    <p:spTree>
+      <p:nvGrpSpPr>
+        <p:cNvPr id="1" name=""/>
+        <p:cNvGrpSpPr/>
+        <p:nvPr/>
+      </p:nvGrpSpPr>
+      <p:grpSpPr/>
+      <p:sp>
+        <p:nvSpPr>
+          <p:cNvPr id="2" name="Rectangle 1"/>
+          <p:cNvSpPr/>
+          <p:nvPr/>
+        </p:nvSpPr>
+        <p:spPr>
+          <a:xfrm>
+            <a:off x="0" y="0"/>
+            <a:ext cx="12191695" cy="777240"/>
+          </a:xfrm>
+          <a:prstGeom prst="rect">
+            <a:avLst/>
+          </a:prstGeom>
+          <a:solidFill>
+            <a:srgbClr val="0F2D52"/>
+          </a:solidFill>
+          <a:ln>
+            <a:noFill/>
+          </a:ln>
+        </p:spPr>
+        <p:style>
+          <a:lnRef idx="1">
+            <a:schemeClr val="accent1"/>
+          </a:lnRef>
+          <a:fillRef idx="3">
+            <a:schemeClr val="accent1"/>
+          </a:fillRef>
+          <a:effectRef idx="2">
+            <a:schemeClr val="accent1"/>
+          </a:effectRef>
+          <a:fontRef idx="minor">
+            <a:schemeClr val="lt1"/>
+          </a:fontRef>
+        </p:style>
+        <p:txBody>
+          <a:bodyPr rtlCol="0" anchor="ctr"/>
+          <a:lstStyle/>
+          <a:p>
+            <a:pPr algn="ctr"/>
+          </a:p>
+        </p:txBody>
+      </p:sp>
+      <p:sp>
+        <p:nvSpPr>
+          <p:cNvPr id="3" name="TextBox 2"/>
+          <p:cNvSpPr txBox="1"/>
+          <p:nvPr/>
+        </p:nvSpPr>
+        <p:spPr>
+          <a:xfrm>
+            <a:off x="457200" y="164592"/>
+            <a:ext cx="10972800" cy="502920"/>
+          </a:xfrm>
+          <a:prstGeom prst="rect">
+            <a:avLst/>
+          </a:prstGeom>
+          <a:noFill/>
+        </p:spPr>
+        <p:txBody>
+          <a:bodyPr wrap="square" lIns="45720" rIns="45720" tIns="18288" bIns="18288" anchor="ctr">
+            <a:spAutoFit/>
+          </a:bodyPr>
+          <a:lstStyle/>
+          <a:p>
+            <a:pPr algn="l"/>
+            <a:r>
+              <a:rPr sz="2400" b="1" i="0">
+                <a:solidFill>
+                  <a:srgbClr val="FFFFFF"/>
+                </a:solidFill>
+                <a:latin typeface="Calibri"/>
+              </a:rPr>
+              <a:t>✏  Workshop in aula (30 min)</a:t>
+            </a:r>
+          </a:p>
+        </p:txBody>
+      </p:sp>
+      <p:sp>
+        <p:nvSpPr>
+          <p:cNvPr id="4" name="TextBox 3"/>
+          <p:cNvSpPr txBox="1"/>
+          <p:nvPr/>
+        </p:nvSpPr>
+        <p:spPr>
+          <a:xfrm>
+            <a:off x="640080" y="1097280"/>
+            <a:ext cx="10972800" cy="5029200"/>
+          </a:xfrm>
+          <a:prstGeom prst="rect">
+            <a:avLst/>
+          </a:prstGeom>
+          <a:noFill/>
+        </p:spPr>
+        <p:txBody>
+          <a:bodyPr wrap="square">
+            <a:spAutoFit/>
+          </a:bodyPr>
+          <a:lstStyle/>
+          <a:p>
+            <a:pPr>
+              <a:lnSpc>
+                <a:spcPct val="150000"/>
+              </a:lnSpc>
+              <a:spcAft>
+                <a:spcPts val="400"/>
+              </a:spcAft>
+            </a:pPr>
+            <a:r>
+              <a:rPr sz="2000" b="1">
+                <a:solidFill>
+                  <a:srgbClr val="00A0B0"/>
+                </a:solidFill>
+                <a:latin typeface="Calibri"/>
+              </a:rPr>
+              <a:t>▸  </a:t>
+            </a:r>
+            <a:r>
+              <a:rPr sz="2000">
+                <a:solidFill>
+                  <a:srgbClr val="1A1A2E"/>
+                </a:solidFill>
+                <a:latin typeface="Calibri"/>
+              </a:rPr>
+              <a:t>A coppie: applica STRIDE a un e-commerce piccolo</a:t>
+            </a:r>
+          </a:p>
+          <a:p>
+            <a:pPr>
+              <a:lnSpc>
+                <a:spcPct val="150000"/>
+              </a:lnSpc>
+              <a:spcAft>
+                <a:spcPts val="400"/>
+              </a:spcAft>
+            </a:pPr>
+            <a:r>
+              <a:rPr sz="2000" b="1">
+                <a:solidFill>
+                  <a:srgbClr val="00A0B0"/>
+                </a:solidFill>
+                <a:latin typeface="Calibri"/>
+              </a:rPr>
+              <a:t>▸  </a:t>
+            </a:r>
+            <a:r>
+              <a:rPr sz="2000">
+                <a:solidFill>
+                  <a:srgbClr val="1A1A2E"/>
+                </a:solidFill>
+                <a:latin typeface="Calibri"/>
+              </a:rPr>
+              <a:t>registrazione · login · ricerca · ordine · pagamento Stripe · email</a:t>
+            </a:r>
+          </a:p>
+          <a:p>
+            <a:pPr>
+              <a:lnSpc>
+                <a:spcPct val="150000"/>
+              </a:lnSpc>
+              <a:spcAft>
+                <a:spcPts val="400"/>
+              </a:spcAft>
+            </a:pPr>
+            <a:r>
+              <a:rPr sz="2000" b="1">
+                <a:solidFill>
+                  <a:srgbClr val="00A0B0"/>
+                </a:solidFill>
+                <a:latin typeface="Calibri"/>
+              </a:rPr>
+              <a:t>▸  </a:t>
+            </a:r>
+            <a:r>
+              <a:rPr sz="2000">
+                <a:solidFill>
+                  <a:srgbClr val="1A1A2E"/>
+                </a:solidFill>
+                <a:latin typeface="Calibri"/>
+              </a:rPr>
+              <a:t/>
+            </a:r>
+          </a:p>
+          <a:p>
+            <a:pPr>
+              <a:lnSpc>
+                <a:spcPct val="150000"/>
+              </a:lnSpc>
+              <a:spcAft>
+                <a:spcPts val="400"/>
+              </a:spcAft>
+            </a:pPr>
+            <a:r>
+              <a:rPr sz="2000" b="1">
+                <a:solidFill>
+                  <a:srgbClr val="00A0B0"/>
+                </a:solidFill>
+                <a:latin typeface="Calibri"/>
+              </a:rPr>
+              <a:t>▸  </a:t>
+            </a:r>
+            <a:r>
+              <a:rPr sz="2000">
+                <a:solidFill>
+                  <a:srgbClr val="1A1A2E"/>
+                </a:solidFill>
+                <a:latin typeface="Calibri"/>
+              </a:rPr>
+              <a:t>Output richiesto:</a:t>
+            </a:r>
+          </a:p>
+          <a:p>
+            <a:pPr>
+              <a:lnSpc>
+                <a:spcPct val="150000"/>
+              </a:lnSpc>
+              <a:spcAft>
+                <a:spcPts val="400"/>
+              </a:spcAft>
+            </a:pPr>
+            <a:r>
+              <a:rPr sz="2000" b="1">
+                <a:solidFill>
+                  <a:srgbClr val="00A0B0"/>
+                </a:solidFill>
+                <a:latin typeface="Calibri"/>
+              </a:rPr>
+              <a:t>▸  </a:t>
+            </a:r>
+            <a:r>
+              <a:rPr sz="2000">
+                <a:solidFill>
+                  <a:srgbClr val="1A1A2E"/>
+                </a:solidFill>
+                <a:latin typeface="Calibri"/>
+              </a:rPr>
+              <a:t>Disegno DFD (≥4 processi, 2 datastore, 2 trust boundary)</a:t>
+            </a:r>
+          </a:p>
+          <a:p>
+            <a:pPr>
+              <a:lnSpc>
+                <a:spcPct val="150000"/>
+              </a:lnSpc>
+              <a:spcAft>
+                <a:spcPts val="400"/>
+              </a:spcAft>
+            </a:pPr>
+            <a:r>
+              <a:rPr sz="2000" b="1">
+                <a:solidFill>
+                  <a:srgbClr val="00A0B0"/>
+                </a:solidFill>
+                <a:latin typeface="Calibri"/>
+              </a:rPr>
+              <a:t>▸  </a:t>
+            </a:r>
+            <a:r>
+              <a:rPr sz="2000">
+                <a:solidFill>
+                  <a:srgbClr val="1A1A2E"/>
+                </a:solidFill>
+                <a:latin typeface="Calibri"/>
+              </a:rPr>
+              <a:t>Tabella STRIDE con ≥8 minacce sparse tra le 6 categorie</a:t>
+            </a:r>
+          </a:p>
+          <a:p>
+            <a:pPr>
+              <a:lnSpc>
+                <a:spcPct val="150000"/>
+              </a:lnSpc>
+              <a:spcAft>
+                <a:spcPts val="400"/>
+              </a:spcAft>
+            </a:pPr>
+            <a:r>
+              <a:rPr sz="2000" b="1">
+                <a:solidFill>
+                  <a:srgbClr val="00A0B0"/>
+                </a:solidFill>
+                <a:latin typeface="Calibri"/>
+              </a:rPr>
+              <a:t>▸  </a:t>
+            </a:r>
+            <a:r>
+              <a:rPr sz="2000">
+                <a:solidFill>
+                  <a:srgbClr val="1A1A2E"/>
+                </a:solidFill>
+                <a:latin typeface="Calibri"/>
+              </a:rPr>
+              <a:t>Una mitigazione per ogni minaccia</a:t>
+            </a:r>
+          </a:p>
+        </p:txBody>
+      </p:sp>
+      <p:cxnSp>
+        <p:nvCxnSpPr>
+          <p:cNvPr id="5" name="Connector 4"/>
+          <p:cNvCxnSpPr/>
+          <p:nvPr/>
+        </p:nvCxnSpPr>
+        <p:spPr>
+          <a:xfrm>
+            <a:off x="457200" y="6446520"/>
+            <a:ext cx="11274552" cy="0"/>
+          </a:xfrm>
+          <a:prstGeom prst="line">
+            <a:avLst/>
+          </a:prstGeom>
+          <a:ln w="19050">
+            <a:solidFill>
+              <a:srgbClr val="00A0B0"/>
+            </a:solidFill>
+          </a:ln>
+        </p:spPr>
+        <p:style>
+          <a:lnRef idx="2">
+            <a:schemeClr val="accent1"/>
+          </a:lnRef>
+          <a:fillRef idx="0">
+            <a:schemeClr val="accent1"/>
+          </a:fillRef>
+          <a:effectRef idx="1">
+            <a:schemeClr val="accent1"/>
+          </a:effectRef>
+          <a:fontRef idx="minor">
+            <a:schemeClr val="tx1"/>
+          </a:fontRef>
+        </p:style>
+      </p:cxnSp>
+      <p:sp>
+        <p:nvSpPr>
+          <p:cNvPr id="6" name="TextBox 5"/>
+          <p:cNvSpPr txBox="1"/>
+          <p:nvPr/>
+        </p:nvSpPr>
+        <p:spPr>
+          <a:xfrm>
+            <a:off x="457200" y="6473952"/>
+            <a:ext cx="7315200" cy="292608"/>
+          </a:xfrm>
+          <a:prstGeom prst="rect">
+            <a:avLst/>
+          </a:prstGeom>
+          <a:noFill/>
+        </p:spPr>
+        <p:txBody>
+          <a:bodyPr wrap="square" lIns="45720" rIns="45720" tIns="18288" bIns="18288" anchor="t">
+            <a:spAutoFit/>
+          </a:bodyPr>
+          <a:lstStyle/>
+          <a:p>
+            <a:pPr algn="l"/>
+            <a:r>
+              <a:rPr sz="1000" b="0" i="0">
+                <a:solidFill>
+                  <a:srgbClr val="6B7280"/>
+                </a:solidFill>
+                <a:latin typeface="Calibri"/>
+              </a:rPr>
+              <a:t>Secure Coding · Corso IFTS STEM · A. Manneschi · 2024/2025</a:t>
+            </a:r>
+          </a:p>
+        </p:txBody>
+      </p:sp>
+      <p:sp>
+        <p:nvSpPr>
+          <p:cNvPr id="7" name="TextBox 6"/>
+          <p:cNvSpPr txBox="1"/>
+          <p:nvPr/>
+        </p:nvSpPr>
+        <p:spPr>
+          <a:xfrm>
+            <a:off x="10515600" y="6473952"/>
+            <a:ext cx="1188720" cy="292608"/>
+          </a:xfrm>
+          <a:prstGeom prst="rect">
+            <a:avLst/>
+          </a:prstGeom>
+          <a:noFill/>
+        </p:spPr>
+        <p:txBody>
+          <a:bodyPr wrap="square" lIns="45720" rIns="45720" tIns="18288" bIns="18288" anchor="t">
+            <a:spAutoFit/>
+          </a:bodyPr>
+          <a:lstStyle/>
+          <a:p>
+            <a:pPr algn="r"/>
+            <a:r>
+              <a:rPr sz="1000" b="1" i="0">
+                <a:solidFill>
+                  <a:srgbClr val="6B7280"/>
+                </a:solidFill>
+                <a:latin typeface="Calibri"/>
+              </a:rPr>
+              <a:t>L2  ·  11/14</a:t>
+            </a:r>
+          </a:p>
+        </p:txBody>
+      </p:sp>
+    </p:spTree>
+  </p:cSld>
+  <p:clrMapOvr>
+    <a:masterClrMapping/>
+  </p:clrMapOvr>
+</p:sld>
+</file>
+
+<file path=ppt/slides/slide12.xml><?xml version="1.0" encoding="utf-8"?>
+<p:sld xmlns:a="http://schemas.openxmlformats.org/drawingml/2006/main" xmlns:p="http://schemas.openxmlformats.org/presentationml/2006/main" xmlns:r="http://schemas.openxmlformats.org/officeDocument/2006/relationships">
+  <p:cSld>
+    <p:spTree>
+      <p:nvGrpSpPr>
+        <p:cNvPr id="1" name=""/>
+        <p:cNvGrpSpPr/>
+        <p:nvPr/>
+      </p:nvGrpSpPr>
+      <p:grpSpPr/>
+      <p:sp>
+        <p:nvSpPr>
+          <p:cNvPr id="2" name="Rectangle 1"/>
+          <p:cNvSpPr/>
+          <p:nvPr/>
+        </p:nvSpPr>
+        <p:spPr>
+          <a:xfrm>
+            <a:off x="0" y="0"/>
+            <a:ext cx="12191695" cy="777240"/>
+          </a:xfrm>
+          <a:prstGeom prst="rect">
+            <a:avLst/>
+          </a:prstGeom>
+          <a:solidFill>
+            <a:srgbClr val="0F2D52"/>
+          </a:solidFill>
+          <a:ln>
+            <a:noFill/>
+          </a:ln>
+        </p:spPr>
+        <p:style>
+          <a:lnRef idx="1">
+            <a:schemeClr val="accent1"/>
+          </a:lnRef>
+          <a:fillRef idx="3">
+            <a:schemeClr val="accent1"/>
+          </a:fillRef>
+          <a:effectRef idx="2">
+            <a:schemeClr val="accent1"/>
+          </a:effectRef>
+          <a:fontRef idx="minor">
+            <a:schemeClr val="lt1"/>
+          </a:fontRef>
+        </p:style>
+        <p:txBody>
+          <a:bodyPr rtlCol="0" anchor="ctr"/>
+          <a:lstStyle/>
+          <a:p>
+            <a:pPr algn="ctr"/>
+          </a:p>
+        </p:txBody>
+      </p:sp>
+      <p:sp>
+        <p:nvSpPr>
+          <p:cNvPr id="3" name="TextBox 2"/>
+          <p:cNvSpPr txBox="1"/>
+          <p:nvPr/>
+        </p:nvSpPr>
+        <p:spPr>
+          <a:xfrm>
+            <a:off x="457200" y="164592"/>
+            <a:ext cx="10972800" cy="502920"/>
+          </a:xfrm>
+          <a:prstGeom prst="rect">
+            <a:avLst/>
+          </a:prstGeom>
+          <a:noFill/>
+        </p:spPr>
+        <p:txBody>
+          <a:bodyPr wrap="square" lIns="45720" rIns="45720" tIns="18288" bIns="18288" anchor="ctr">
+            <a:spAutoFit/>
+          </a:bodyPr>
+          <a:lstStyle/>
+          <a:p>
+            <a:pPr algn="l"/>
+            <a:r>
+              <a:rPr sz="2400" b="1" i="0">
+                <a:solidFill>
+                  <a:srgbClr val="FFFFFF"/>
+                </a:solidFill>
+                <a:latin typeface="Calibri"/>
+              </a:rPr>
+              <a:t>📌  Cosa portare a casa</a:t>
+            </a:r>
+          </a:p>
+        </p:txBody>
+      </p:sp>
+      <p:sp>
+        <p:nvSpPr>
+          <p:cNvPr id="4" name="Oval 3"/>
+          <p:cNvSpPr/>
+          <p:nvPr/>
+        </p:nvSpPr>
+        <p:spPr>
+          <a:xfrm>
+            <a:off x="914400" y="1440180"/>
+            <a:ext cx="777240" cy="777240"/>
+          </a:xfrm>
+          <a:prstGeom prst="ellipse">
+            <a:avLst/>
+          </a:prstGeom>
+          <a:solidFill>
+            <a:srgbClr val="00A0B0"/>
+          </a:solidFill>
+          <a:ln>
+            <a:noFill/>
+          </a:ln>
+        </p:spPr>
+        <p:style>
+          <a:lnRef idx="1">
+            <a:schemeClr val="accent1"/>
+          </a:lnRef>
+          <a:fillRef idx="3">
+            <a:schemeClr val="accent1"/>
+          </a:fillRef>
+          <a:effectRef idx="2">
+            <a:schemeClr val="accent1"/>
+          </a:effectRef>
+          <a:fontRef idx="minor">
+            <a:schemeClr val="lt1"/>
+          </a:fontRef>
+        </p:style>
+        <p:txBody>
+          <a:bodyPr rtlCol="0" anchor="ctr"/>
+          <a:lstStyle/>
+          <a:p>
+            <a:pPr algn="ctr"/>
+          </a:p>
+        </p:txBody>
+      </p:sp>
+      <p:sp>
+        <p:nvSpPr>
+          <p:cNvPr id="5" name="TextBox 4"/>
+          <p:cNvSpPr txBox="1"/>
+          <p:nvPr/>
+        </p:nvSpPr>
+        <p:spPr>
+          <a:xfrm>
+            <a:off x="914400" y="1440180"/>
+            <a:ext cx="777240" cy="777240"/>
+          </a:xfrm>
+          <a:prstGeom prst="rect">
+            <a:avLst/>
+          </a:prstGeom>
+          <a:noFill/>
+        </p:spPr>
+        <p:txBody>
+          <a:bodyPr wrap="square" lIns="45720" rIns="45720" tIns="18288" bIns="18288" anchor="ctr">
+            <a:spAutoFit/>
+          </a:bodyPr>
+          <a:lstStyle/>
+          <a:p>
+            <a:pPr algn="ctr"/>
+            <a:r>
+              <a:rPr sz="2800" b="1" i="0">
+                <a:solidFill>
+                  <a:srgbClr val="FFFFFF"/>
+                </a:solidFill>
+                <a:latin typeface="Calibri"/>
+              </a:rPr>
+              <a:t>1</a:t>
+            </a:r>
+          </a:p>
+        </p:txBody>
+      </p:sp>
+      <p:sp>
+        <p:nvSpPr>
+          <p:cNvPr id="6" name="Rounded Rectangle 5"/>
+          <p:cNvSpPr/>
+          <p:nvPr/>
+        </p:nvSpPr>
+        <p:spPr>
+          <a:xfrm>
+            <a:off x="2011680" y="1440180"/>
+            <a:ext cx="9144000" cy="777240"/>
+          </a:xfrm>
+          <a:prstGeom prst="roundRect">
+            <a:avLst>
+              <a:gd name="adj" fmla="val 8000"/>
+            </a:avLst>
+          </a:prstGeom>
+          <a:solidFill>
+            <a:srgbClr val="FBFBFD"/>
+          </a:solidFill>
+          <a:ln w="19050">
+            <a:solidFill>
+              <a:srgbClr val="00A0B0"/>
+            </a:solidFill>
+          </a:ln>
+        </p:spPr>
+        <p:style>
+          <a:lnRef idx="1">
+            <a:schemeClr val="accent1"/>
+          </a:lnRef>
+          <a:fillRef idx="3">
+            <a:schemeClr val="accent1"/>
+          </a:fillRef>
+          <a:effectRef idx="2">
+            <a:schemeClr val="accent1"/>
+          </a:effectRef>
+          <a:fontRef idx="minor">
+            <a:schemeClr val="lt1"/>
+          </a:fontRef>
+        </p:style>
+        <p:txBody>
+          <a:bodyPr rtlCol="0" anchor="ctr"/>
+          <a:lstStyle/>
+          <a:p>
+            <a:pPr algn="ctr"/>
+          </a:p>
+        </p:txBody>
+      </p:sp>
+      <p:sp>
+        <p:nvSpPr>
+          <p:cNvPr id="7" name="TextBox 6"/>
+          <p:cNvSpPr txBox="1"/>
+          <p:nvPr/>
+        </p:nvSpPr>
+        <p:spPr>
+          <a:xfrm>
+            <a:off x="2286000" y="1440180"/>
+            <a:ext cx="8686800" cy="777240"/>
+          </a:xfrm>
+          <a:prstGeom prst="rect">
+            <a:avLst/>
+          </a:prstGeom>
+          <a:noFill/>
+        </p:spPr>
+        <p:txBody>
+          <a:bodyPr wrap="square" lIns="45720" rIns="45720" tIns="18288" bIns="18288" anchor="ctr">
+            <a:spAutoFit/>
+          </a:bodyPr>
+          <a:lstStyle/>
+          <a:p>
+            <a:pPr algn="l"/>
+            <a:r>
+              <a:rPr sz="1800" b="0" i="0">
+                <a:solidFill>
+                  <a:srgbClr val="1A1A2E"/>
+                </a:solidFill>
+                <a:latin typeface="Calibri"/>
+              </a:rPr>
+              <a:t>OWASP Top 10: impara almeno i primi 5 a memoria</a:t>
+            </a:r>
+          </a:p>
+        </p:txBody>
+      </p:sp>
+      <p:sp>
+        <p:nvSpPr>
+          <p:cNvPr id="8" name="Oval 7"/>
+          <p:cNvSpPr/>
+          <p:nvPr/>
+        </p:nvSpPr>
+        <p:spPr>
+          <a:xfrm>
+            <a:off x="914400" y="2354580"/>
+            <a:ext cx="777240" cy="777240"/>
+          </a:xfrm>
+          <a:prstGeom prst="ellipse">
+            <a:avLst/>
+          </a:prstGeom>
+          <a:solidFill>
+            <a:srgbClr val="00A0B0"/>
+          </a:solidFill>
+          <a:ln>
+            <a:noFill/>
+          </a:ln>
+        </p:spPr>
+        <p:style>
+          <a:lnRef idx="1">
+            <a:schemeClr val="accent1"/>
+          </a:lnRef>
+          <a:fillRef idx="3">
+            <a:schemeClr val="accent1"/>
+          </a:fillRef>
+          <a:effectRef idx="2">
+            <a:schemeClr val="accent1"/>
+          </a:effectRef>
+          <a:fontRef idx="minor">
+            <a:schemeClr val="lt1"/>
+          </a:fontRef>
+        </p:style>
+        <p:txBody>
+          <a:bodyPr rtlCol="0" anchor="ctr"/>
+          <a:lstStyle/>
+          <a:p>
+            <a:pPr algn="ctr"/>
+          </a:p>
+        </p:txBody>
+      </p:sp>
+      <p:sp>
+        <p:nvSpPr>
+          <p:cNvPr id="9" name="TextBox 8"/>
+          <p:cNvSpPr txBox="1"/>
+          <p:nvPr/>
+        </p:nvSpPr>
+        <p:spPr>
+          <a:xfrm>
+            <a:off x="914400" y="2354580"/>
+            <a:ext cx="777240" cy="777240"/>
+          </a:xfrm>
+          <a:prstGeom prst="rect">
+            <a:avLst/>
+          </a:prstGeom>
+          <a:noFill/>
+        </p:spPr>
+        <p:txBody>
+          <a:bodyPr wrap="square" lIns="45720" rIns="45720" tIns="18288" bIns="18288" anchor="ctr">
+            <a:spAutoFit/>
+          </a:bodyPr>
+          <a:lstStyle/>
+          <a:p>
+            <a:pPr algn="ctr"/>
+            <a:r>
+              <a:rPr sz="2800" b="1" i="0">
+                <a:solidFill>
+                  <a:srgbClr val="FFFFFF"/>
+                </a:solidFill>
+                <a:latin typeface="Calibri"/>
+              </a:rPr>
+              <a:t>2</a:t>
+            </a:r>
+          </a:p>
+        </p:txBody>
+      </p:sp>
+      <p:sp>
+        <p:nvSpPr>
+          <p:cNvPr id="10" name="Rounded Rectangle 9"/>
+          <p:cNvSpPr/>
+          <p:nvPr/>
+        </p:nvSpPr>
+        <p:spPr>
+          <a:xfrm>
+            <a:off x="2011680" y="2354580"/>
+            <a:ext cx="9144000" cy="777240"/>
+          </a:xfrm>
+          <a:prstGeom prst="roundRect">
+            <a:avLst>
+              <a:gd name="adj" fmla="val 8000"/>
+            </a:avLst>
+          </a:prstGeom>
+          <a:solidFill>
+            <a:srgbClr val="FBFBFD"/>
+          </a:solidFill>
+          <a:ln w="19050">
+            <a:solidFill>
+              <a:srgbClr val="00A0B0"/>
+            </a:solidFill>
+          </a:ln>
+        </p:spPr>
+        <p:style>
+          <a:lnRef idx="1">
+            <a:schemeClr val="accent1"/>
+          </a:lnRef>
+          <a:fillRef idx="3">
+            <a:schemeClr val="accent1"/>
+          </a:fillRef>
+          <a:effectRef idx="2">
+            <a:schemeClr val="accent1"/>
+          </a:effectRef>
+          <a:fontRef idx="minor">
+            <a:schemeClr val="lt1"/>
+          </a:fontRef>
+        </p:style>
+        <p:txBody>
+          <a:bodyPr rtlCol="0" anchor="ctr"/>
+          <a:lstStyle/>
+          <a:p>
+            <a:pPr algn="ctr"/>
+          </a:p>
+        </p:txBody>
+      </p:sp>
+      <p:sp>
+        <p:nvSpPr>
+          <p:cNvPr id="11" name="TextBox 10"/>
+          <p:cNvSpPr txBox="1"/>
+          <p:nvPr/>
+        </p:nvSpPr>
+        <p:spPr>
+          <a:xfrm>
+            <a:off x="2286000" y="2354580"/>
+            <a:ext cx="8686800" cy="777240"/>
+          </a:xfrm>
+          <a:prstGeom prst="rect">
+            <a:avLst/>
+          </a:prstGeom>
+          <a:noFill/>
+        </p:spPr>
+        <p:txBody>
+          <a:bodyPr wrap="square" lIns="45720" rIns="45720" tIns="18288" bIns="18288" anchor="ctr">
+            <a:spAutoFit/>
+          </a:bodyPr>
+          <a:lstStyle/>
+          <a:p>
+            <a:pPr algn="l"/>
+            <a:r>
+              <a:rPr sz="1800" b="0" i="0">
+                <a:solidFill>
+                  <a:srgbClr val="1A1A2E"/>
+                </a:solidFill>
+                <a:latin typeface="Calibri"/>
+              </a:rPr>
+              <a:t>CVE = identificatore, CVSS = punteggio 0-10</a:t>
+            </a:r>
+          </a:p>
+        </p:txBody>
+      </p:sp>
+      <p:sp>
+        <p:nvSpPr>
+          <p:cNvPr id="12" name="Oval 11"/>
+          <p:cNvSpPr/>
+          <p:nvPr/>
+        </p:nvSpPr>
+        <p:spPr>
+          <a:xfrm>
+            <a:off x="914400" y="3268980"/>
+            <a:ext cx="777240" cy="777240"/>
+          </a:xfrm>
+          <a:prstGeom prst="ellipse">
+            <a:avLst/>
+          </a:prstGeom>
+          <a:solidFill>
+            <a:srgbClr val="00A0B0"/>
+          </a:solidFill>
+          <a:ln>
+            <a:noFill/>
+          </a:ln>
+        </p:spPr>
+        <p:style>
+          <a:lnRef idx="1">
+            <a:schemeClr val="accent1"/>
+          </a:lnRef>
+          <a:fillRef idx="3">
+            <a:schemeClr val="accent1"/>
+          </a:fillRef>
+          <a:effectRef idx="2">
+            <a:schemeClr val="accent1"/>
+          </a:effectRef>
+          <a:fontRef idx="minor">
+            <a:schemeClr val="lt1"/>
+          </a:fontRef>
+        </p:style>
+        <p:txBody>
+          <a:bodyPr rtlCol="0" anchor="ctr"/>
+          <a:lstStyle/>
+          <a:p>
+            <a:pPr algn="ctr"/>
+          </a:p>
+        </p:txBody>
+      </p:sp>
+      <p:sp>
+        <p:nvSpPr>
+          <p:cNvPr id="13" name="TextBox 12"/>
+          <p:cNvSpPr txBox="1"/>
+          <p:nvPr/>
+        </p:nvSpPr>
+        <p:spPr>
+          <a:xfrm>
+            <a:off x="914400" y="3268980"/>
+            <a:ext cx="777240" cy="777240"/>
+          </a:xfrm>
+          <a:prstGeom prst="rect">
+            <a:avLst/>
+          </a:prstGeom>
+          <a:noFill/>
+        </p:spPr>
+        <p:txBody>
+          <a:bodyPr wrap="square" lIns="45720" rIns="45720" tIns="18288" bIns="18288" anchor="ctr">
+            <a:spAutoFit/>
+          </a:bodyPr>
+          <a:lstStyle/>
+          <a:p>
+            <a:pPr algn="ctr"/>
+            <a:r>
+              <a:rPr sz="2800" b="1" i="0">
+                <a:solidFill>
+                  <a:srgbClr val="FFFFFF"/>
+                </a:solidFill>
+                <a:latin typeface="Calibri"/>
+              </a:rPr>
+              <a:t>3</a:t>
+            </a:r>
+          </a:p>
+        </p:txBody>
+      </p:sp>
+      <p:sp>
+        <p:nvSpPr>
+          <p:cNvPr id="14" name="Rounded Rectangle 13"/>
+          <p:cNvSpPr/>
+          <p:nvPr/>
+        </p:nvSpPr>
+        <p:spPr>
+          <a:xfrm>
+            <a:off x="2011680" y="3268980"/>
+            <a:ext cx="9144000" cy="777240"/>
+          </a:xfrm>
+          <a:prstGeom prst="roundRect">
+            <a:avLst>
+              <a:gd name="adj" fmla="val 8000"/>
+            </a:avLst>
+          </a:prstGeom>
+          <a:solidFill>
+            <a:srgbClr val="FBFBFD"/>
+          </a:solidFill>
+          <a:ln w="19050">
+            <a:solidFill>
+              <a:srgbClr val="00A0B0"/>
+            </a:solidFill>
+          </a:ln>
+        </p:spPr>
+        <p:style>
+          <a:lnRef idx="1">
+            <a:schemeClr val="accent1"/>
+          </a:lnRef>
+          <a:fillRef idx="3">
+            <a:schemeClr val="accent1"/>
+          </a:fillRef>
+          <a:effectRef idx="2">
+            <a:schemeClr val="accent1"/>
+          </a:effectRef>
+          <a:fontRef idx="minor">
+            <a:schemeClr val="lt1"/>
+          </a:fontRef>
+        </p:style>
+        <p:txBody>
+          <a:bodyPr rtlCol="0" anchor="ctr"/>
+          <a:lstStyle/>
+          <a:p>
+            <a:pPr algn="ctr"/>
+          </a:p>
+        </p:txBody>
+      </p:sp>
+      <p:sp>
+        <p:nvSpPr>
+          <p:cNvPr id="15" name="TextBox 14"/>
+          <p:cNvSpPr txBox="1"/>
+          <p:nvPr/>
+        </p:nvSpPr>
+        <p:spPr>
+          <a:xfrm>
+            <a:off x="2286000" y="3268980"/>
+            <a:ext cx="8686800" cy="777240"/>
+          </a:xfrm>
+          <a:prstGeom prst="rect">
+            <a:avLst/>
+          </a:prstGeom>
+          <a:noFill/>
+        </p:spPr>
+        <p:txBody>
+          <a:bodyPr wrap="square" lIns="45720" rIns="45720" tIns="18288" bIns="18288" anchor="ctr">
+            <a:spAutoFit/>
+          </a:bodyPr>
+          <a:lstStyle/>
+          <a:p>
+            <a:pPr algn="l"/>
+            <a:r>
+              <a:rPr sz="1800" b="0" i="0">
+                <a:solidFill>
+                  <a:srgbClr val="1A1A2E"/>
+                </a:solidFill>
+                <a:latin typeface="Calibri"/>
+              </a:rPr>
+              <a:t>Threat modeling = 4 domande di Shostack</a:t>
+            </a:r>
+          </a:p>
+        </p:txBody>
+      </p:sp>
+      <p:sp>
+        <p:nvSpPr>
+          <p:cNvPr id="16" name="Oval 15"/>
+          <p:cNvSpPr/>
+          <p:nvPr/>
+        </p:nvSpPr>
+        <p:spPr>
+          <a:xfrm>
+            <a:off x="914400" y="4183380"/>
+            <a:ext cx="777240" cy="777240"/>
+          </a:xfrm>
+          <a:prstGeom prst="ellipse">
+            <a:avLst/>
+          </a:prstGeom>
+          <a:solidFill>
+            <a:srgbClr val="00A0B0"/>
+          </a:solidFill>
+          <a:ln>
+            <a:noFill/>
+          </a:ln>
+        </p:spPr>
+        <p:style>
+          <a:lnRef idx="1">
+            <a:schemeClr val="accent1"/>
+          </a:lnRef>
+          <a:fillRef idx="3">
+            <a:schemeClr val="accent1"/>
+          </a:fillRef>
+          <a:effectRef idx="2">
+            <a:schemeClr val="accent1"/>
+          </a:effectRef>
+          <a:fontRef idx="minor">
+            <a:schemeClr val="lt1"/>
+          </a:fontRef>
+        </p:style>
+        <p:txBody>
+          <a:bodyPr rtlCol="0" anchor="ctr"/>
+          <a:lstStyle/>
+          <a:p>
+            <a:pPr algn="ctr"/>
+          </a:p>
+        </p:txBody>
+      </p:sp>
+      <p:sp>
+        <p:nvSpPr>
+          <p:cNvPr id="17" name="TextBox 16"/>
+          <p:cNvSpPr txBox="1"/>
+          <p:nvPr/>
+        </p:nvSpPr>
+        <p:spPr>
+          <a:xfrm>
+            <a:off x="914400" y="4183380"/>
+            <a:ext cx="777240" cy="777240"/>
+          </a:xfrm>
+          <a:prstGeom prst="rect">
+            <a:avLst/>
+          </a:prstGeom>
+          <a:noFill/>
+        </p:spPr>
+        <p:txBody>
+          <a:bodyPr wrap="square" lIns="45720" rIns="45720" tIns="18288" bIns="18288" anchor="ctr">
+            <a:spAutoFit/>
+          </a:bodyPr>
+          <a:lstStyle/>
+          <a:p>
+            <a:pPr algn="ctr"/>
+            <a:r>
+              <a:rPr sz="2800" b="1" i="0">
+                <a:solidFill>
+                  <a:srgbClr val="FFFFFF"/>
+                </a:solidFill>
+                <a:latin typeface="Calibri"/>
+              </a:rPr>
+              <a:t>4</a:t>
+            </a:r>
+          </a:p>
+        </p:txBody>
+      </p:sp>
+      <p:sp>
+        <p:nvSpPr>
+          <p:cNvPr id="18" name="Rounded Rectangle 17"/>
+          <p:cNvSpPr/>
+          <p:nvPr/>
+        </p:nvSpPr>
+        <p:spPr>
+          <a:xfrm>
+            <a:off x="2011680" y="4183380"/>
+            <a:ext cx="9144000" cy="777240"/>
+          </a:xfrm>
+          <a:prstGeom prst="roundRect">
+            <a:avLst>
+              <a:gd name="adj" fmla="val 8000"/>
+            </a:avLst>
+          </a:prstGeom>
+          <a:solidFill>
+            <a:srgbClr val="FBFBFD"/>
+          </a:solidFill>
+          <a:ln w="19050">
+            <a:solidFill>
+              <a:srgbClr val="00A0B0"/>
+            </a:solidFill>
+          </a:ln>
+        </p:spPr>
+        <p:style>
+          <a:lnRef idx="1">
+            <a:schemeClr val="accent1"/>
+          </a:lnRef>
+          <a:fillRef idx="3">
+            <a:schemeClr val="accent1"/>
+          </a:fillRef>
+          <a:effectRef idx="2">
+            <a:schemeClr val="accent1"/>
+          </a:effectRef>
+          <a:fontRef idx="minor">
+            <a:schemeClr val="lt1"/>
+          </a:fontRef>
+        </p:style>
+        <p:txBody>
+          <a:bodyPr rtlCol="0" anchor="ctr"/>
+          <a:lstStyle/>
+          <a:p>
+            <a:pPr algn="ctr"/>
+          </a:p>
+        </p:txBody>
+      </p:sp>
+      <p:sp>
+        <p:nvSpPr>
+          <p:cNvPr id="19" name="TextBox 18"/>
+          <p:cNvSpPr txBox="1"/>
+          <p:nvPr/>
+        </p:nvSpPr>
+        <p:spPr>
+          <a:xfrm>
+            <a:off x="2286000" y="4183380"/>
+            <a:ext cx="8686800" cy="777240"/>
+          </a:xfrm>
+          <a:prstGeom prst="rect">
+            <a:avLst/>
+          </a:prstGeom>
+          <a:noFill/>
+        </p:spPr>
+        <p:txBody>
+          <a:bodyPr wrap="square" lIns="45720" rIns="45720" tIns="18288" bIns="18288" anchor="ctr">
+            <a:spAutoFit/>
+          </a:bodyPr>
+          <a:lstStyle/>
+          <a:p>
+            <a:pPr algn="l"/>
+            <a:r>
+              <a:rPr sz="1800" b="0" i="0">
+                <a:solidFill>
+                  <a:srgbClr val="1A1A2E"/>
+                </a:solidFill>
+                <a:latin typeface="Calibri"/>
+              </a:rPr>
+              <a:t>STRIDE = checklist sistematica, 6 categorie</a:t>
+            </a:r>
+          </a:p>
+        </p:txBody>
+      </p:sp>
+      <p:sp>
+        <p:nvSpPr>
+          <p:cNvPr id="20" name="Oval 19"/>
+          <p:cNvSpPr/>
+          <p:nvPr/>
+        </p:nvSpPr>
+        <p:spPr>
+          <a:xfrm>
+            <a:off x="914400" y="5097780"/>
+            <a:ext cx="777240" cy="777240"/>
+          </a:xfrm>
+          <a:prstGeom prst="ellipse">
+            <a:avLst/>
+          </a:prstGeom>
+          <a:solidFill>
+            <a:srgbClr val="00A0B0"/>
+          </a:solidFill>
+          <a:ln>
+            <a:noFill/>
+          </a:ln>
+        </p:spPr>
+        <p:style>
+          <a:lnRef idx="1">
+            <a:schemeClr val="accent1"/>
+          </a:lnRef>
+          <a:fillRef idx="3">
+            <a:schemeClr val="accent1"/>
+          </a:fillRef>
+          <a:effectRef idx="2">
+            <a:schemeClr val="accent1"/>
+          </a:effectRef>
+          <a:fontRef idx="minor">
+            <a:schemeClr val="lt1"/>
+          </a:fontRef>
+        </p:style>
+        <p:txBody>
+          <a:bodyPr rtlCol="0" anchor="ctr"/>
+          <a:lstStyle/>
+          <a:p>
+            <a:pPr algn="ctr"/>
+          </a:p>
+        </p:txBody>
+      </p:sp>
+      <p:sp>
+        <p:nvSpPr>
+          <p:cNvPr id="21" name="TextBox 20"/>
+          <p:cNvSpPr txBox="1"/>
+          <p:nvPr/>
+        </p:nvSpPr>
+        <p:spPr>
+          <a:xfrm>
+            <a:off x="914400" y="5097780"/>
+            <a:ext cx="777240" cy="777240"/>
+          </a:xfrm>
+          <a:prstGeom prst="rect">
+            <a:avLst/>
+          </a:prstGeom>
+          <a:noFill/>
+        </p:spPr>
+        <p:txBody>
+          <a:bodyPr wrap="square" lIns="45720" rIns="45720" tIns="18288" bIns="18288" anchor="ctr">
+            <a:spAutoFit/>
+          </a:bodyPr>
+          <a:lstStyle/>
+          <a:p>
+            <a:pPr algn="ctr"/>
+            <a:r>
+              <a:rPr sz="2800" b="1" i="0">
+                <a:solidFill>
+                  <a:srgbClr val="FFFFFF"/>
+                </a:solidFill>
+                <a:latin typeface="Calibri"/>
+              </a:rPr>
+              <a:t>5</a:t>
+            </a:r>
+          </a:p>
+        </p:txBody>
+      </p:sp>
+      <p:sp>
+        <p:nvSpPr>
+          <p:cNvPr id="22" name="Rounded Rectangle 21"/>
+          <p:cNvSpPr/>
+          <p:nvPr/>
+        </p:nvSpPr>
+        <p:spPr>
+          <a:xfrm>
+            <a:off x="2011680" y="5097780"/>
+            <a:ext cx="9144000" cy="777240"/>
+          </a:xfrm>
+          <a:prstGeom prst="roundRect">
+            <a:avLst>
+              <a:gd name="adj" fmla="val 8000"/>
+            </a:avLst>
+          </a:prstGeom>
+          <a:solidFill>
+            <a:srgbClr val="FBFBFD"/>
+          </a:solidFill>
+          <a:ln w="19050">
+            <a:solidFill>
+              <a:srgbClr val="00A0B0"/>
+            </a:solidFill>
+          </a:ln>
+        </p:spPr>
+        <p:style>
+          <a:lnRef idx="1">
+            <a:schemeClr val="accent1"/>
+          </a:lnRef>
+          <a:fillRef idx="3">
+            <a:schemeClr val="accent1"/>
+          </a:fillRef>
+          <a:effectRef idx="2">
+            <a:schemeClr val="accent1"/>
+          </a:effectRef>
+          <a:fontRef idx="minor">
+            <a:schemeClr val="lt1"/>
+          </a:fontRef>
+        </p:style>
+        <p:txBody>
+          <a:bodyPr rtlCol="0" anchor="ctr"/>
+          <a:lstStyle/>
+          <a:p>
+            <a:pPr algn="ctr"/>
+          </a:p>
+        </p:txBody>
+      </p:sp>
+      <p:sp>
+        <p:nvSpPr>
+          <p:cNvPr id="23" name="TextBox 22"/>
+          <p:cNvSpPr txBox="1"/>
+          <p:nvPr/>
+        </p:nvSpPr>
+        <p:spPr>
+          <a:xfrm>
+            <a:off x="2286000" y="5097780"/>
+            <a:ext cx="8686800" cy="777240"/>
+          </a:xfrm>
+          <a:prstGeom prst="rect">
+            <a:avLst/>
+          </a:prstGeom>
+          <a:noFill/>
+        </p:spPr>
+        <p:txBody>
+          <a:bodyPr wrap="square" lIns="45720" rIns="45720" tIns="18288" bIns="18288" anchor="ctr">
+            <a:spAutoFit/>
+          </a:bodyPr>
+          <a:lstStyle/>
+          <a:p>
+            <a:pPr algn="l"/>
+            <a:r>
+              <a:rPr sz="1800" b="0" i="0">
+                <a:solidFill>
+                  <a:srgbClr val="1A1A2E"/>
+                </a:solidFill>
+                <a:latin typeface="Calibri"/>
+              </a:rPr>
+              <a:t>Trust boundary = ogni attraversamento è opportunità d'attacco</a:t>
+            </a:r>
+          </a:p>
+        </p:txBody>
+      </p:sp>
+      <p:cxnSp>
+        <p:nvCxnSpPr>
+          <p:cNvPr id="24" name="Connector 23"/>
+          <p:cNvCxnSpPr/>
+          <p:nvPr/>
+        </p:nvCxnSpPr>
+        <p:spPr>
+          <a:xfrm>
+            <a:off x="457200" y="6446520"/>
+            <a:ext cx="11274552" cy="0"/>
+          </a:xfrm>
+          <a:prstGeom prst="line">
+            <a:avLst/>
+          </a:prstGeom>
+          <a:ln w="19050">
+            <a:solidFill>
+              <a:srgbClr val="00A0B0"/>
+            </a:solidFill>
+          </a:ln>
+        </p:spPr>
+        <p:style>
+          <a:lnRef idx="2">
+            <a:schemeClr val="accent1"/>
+          </a:lnRef>
+          <a:fillRef idx="0">
+            <a:schemeClr val="accent1"/>
+          </a:fillRef>
+          <a:effectRef idx="1">
+            <a:schemeClr val="accent1"/>
+          </a:effectRef>
+          <a:fontRef idx="minor">
+            <a:schemeClr val="tx1"/>
+          </a:fontRef>
+        </p:style>
+      </p:cxnSp>
+      <p:sp>
+        <p:nvSpPr>
+          <p:cNvPr id="25" name="TextBox 24"/>
+          <p:cNvSpPr txBox="1"/>
+          <p:nvPr/>
+        </p:nvSpPr>
+        <p:spPr>
+          <a:xfrm>
+            <a:off x="457200" y="6473952"/>
+            <a:ext cx="7315200" cy="292608"/>
+          </a:xfrm>
+          <a:prstGeom prst="rect">
+            <a:avLst/>
+          </a:prstGeom>
+          <a:noFill/>
+        </p:spPr>
+        <p:txBody>
+          <a:bodyPr wrap="square" lIns="45720" rIns="45720" tIns="18288" bIns="18288" anchor="t">
+            <a:spAutoFit/>
+          </a:bodyPr>
+          <a:lstStyle/>
+          <a:p>
+            <a:pPr algn="l"/>
+            <a:r>
+              <a:rPr sz="1000" b="0" i="0">
+                <a:solidFill>
+                  <a:srgbClr val="6B7280"/>
+                </a:solidFill>
+                <a:latin typeface="Calibri"/>
+              </a:rPr>
+              <a:t>Secure Coding · Corso IFTS STEM · A. Manneschi · 2024/2025</a:t>
+            </a:r>
+          </a:p>
+        </p:txBody>
+      </p:sp>
+      <p:sp>
+        <p:nvSpPr>
+          <p:cNvPr id="26" name="TextBox 25"/>
+          <p:cNvSpPr txBox="1"/>
+          <p:nvPr/>
+        </p:nvSpPr>
+        <p:spPr>
+          <a:xfrm>
+            <a:off x="10515600" y="6473952"/>
+            <a:ext cx="1188720" cy="292608"/>
           </a:xfrm>
           <a:prstGeom prst="rect">
             <a:avLst/>
@@ -5178,13 +5980,13 @@
         <p:spPr>
           <a:xfrm>
             <a:off x="0" y="0"/>
-            <a:ext cx="12191695" cy="777240"/>
+            <a:ext cx="4114800" cy="6858000"/>
           </a:xfrm>
           <a:prstGeom prst="rect">
             <a:avLst/>
           </a:prstGeom>
           <a:solidFill>
-            <a:srgbClr val="0F2D52"/>
+            <a:srgbClr val="081B33"/>
           </a:solidFill>
           <a:ln>
             <a:noFill/>
@@ -5214,14 +6016,100 @@
       </p:sp>
       <p:sp>
         <p:nvSpPr>
-          <p:cNvPr id="3" name="TextBox 2"/>
+          <p:cNvPr id="3" name="Rectangle 2"/>
+          <p:cNvSpPr/>
+          <p:nvPr/>
+        </p:nvSpPr>
+        <p:spPr>
+          <a:xfrm>
+            <a:off x="4114800" y="0"/>
+            <a:ext cx="8046720" cy="6858000"/>
+          </a:xfrm>
+          <a:prstGeom prst="rect">
+            <a:avLst/>
+          </a:prstGeom>
+          <a:solidFill>
+            <a:srgbClr val="F1F4F8"/>
+          </a:solidFill>
+          <a:ln>
+            <a:noFill/>
+          </a:ln>
+        </p:spPr>
+        <p:style>
+          <a:lnRef idx="1">
+            <a:schemeClr val="accent1"/>
+          </a:lnRef>
+          <a:fillRef idx="3">
+            <a:schemeClr val="accent1"/>
+          </a:fillRef>
+          <a:effectRef idx="2">
+            <a:schemeClr val="accent1"/>
+          </a:effectRef>
+          <a:fontRef idx="minor">
+            <a:schemeClr val="lt1"/>
+          </a:fontRef>
+        </p:style>
+        <p:txBody>
+          <a:bodyPr rtlCol="0" anchor="ctr"/>
+          <a:lstStyle/>
+          <a:p>
+            <a:pPr algn="ctr"/>
+          </a:p>
+        </p:txBody>
+      </p:sp>
+      <p:sp>
+        <p:nvSpPr>
+          <p:cNvPr id="4" name="Rectangle 3"/>
+          <p:cNvSpPr/>
+          <p:nvPr/>
+        </p:nvSpPr>
+        <p:spPr>
+          <a:xfrm>
+            <a:off x="4114800" y="0"/>
+            <a:ext cx="137160" cy="6858000"/>
+          </a:xfrm>
+          <a:prstGeom prst="rect">
+            <a:avLst/>
+          </a:prstGeom>
+          <a:solidFill>
+            <a:srgbClr val="00A0B0"/>
+          </a:solidFill>
+          <a:ln>
+            <a:noFill/>
+          </a:ln>
+        </p:spPr>
+        <p:style>
+          <a:lnRef idx="1">
+            <a:schemeClr val="accent1"/>
+          </a:lnRef>
+          <a:fillRef idx="3">
+            <a:schemeClr val="accent1"/>
+          </a:fillRef>
+          <a:effectRef idx="2">
+            <a:schemeClr val="accent1"/>
+          </a:effectRef>
+          <a:fontRef idx="minor">
+            <a:schemeClr val="lt1"/>
+          </a:fontRef>
+        </p:style>
+        <p:txBody>
+          <a:bodyPr rtlCol="0" anchor="ctr"/>
+          <a:lstStyle/>
+          <a:p>
+            <a:pPr algn="ctr"/>
+          </a:p>
+        </p:txBody>
+      </p:sp>
+      <p:sp>
+        <p:nvSpPr>
+          <p:cNvPr id="5" name="TextBox 4"/>
           <p:cNvSpPr txBox="1"/>
           <p:nvPr/>
         </p:nvSpPr>
         <p:spPr>
           <a:xfrm>
-            <a:off x="457200" y="164592"/>
-            <a:ext cx="10972800" cy="502920"/>
+            <a:off x="274320" y="2103120"/>
+            <a:ext cx="3657600" cy="2286000"/>
           </a:xfrm>
           <a:prstGeom prst="rect">
             <a:avLst/>
@@ -5229,34 +6117,34 @@
           <a:noFill/>
         </p:spPr>
         <p:txBody>
-          <a:bodyPr wrap="square" lIns="45720" rIns="45720" tIns="18288" bIns="18288" anchor="ctr">
+          <a:bodyPr wrap="square" lIns="45720" rIns="45720" tIns="18288" bIns="18288" anchor="t">
             <a:spAutoFit/>
           </a:bodyPr>
           <a:lstStyle/>
           <a:p>
-            <a:pPr algn="l"/>
-            <a:r>
-              <a:rPr sz="2400" b="1" i="0">
-                <a:solidFill>
-                  <a:srgbClr val="FFFFFF"/>
+            <a:pPr algn="ctr"/>
+            <a:r>
+              <a:rPr sz="17000" b="1" i="0">
+                <a:solidFill>
+                  <a:srgbClr val="00A0B0"/>
                 </a:solidFill>
                 <a:latin typeface="Calibri"/>
               </a:rPr>
-              <a:t>Workshop in aula (15 min)</a:t>
-            </a:r>
-          </a:p>
-        </p:txBody>
-      </p:sp>
-      <p:sp>
-        <p:nvSpPr>
-          <p:cNvPr id="4" name="TextBox 3"/>
+              <a:t>03</a:t>
+            </a:r>
+          </a:p>
+        </p:txBody>
+      </p:sp>
+      <p:sp>
+        <p:nvSpPr>
+          <p:cNvPr id="6" name="TextBox 5"/>
           <p:cNvSpPr txBox="1"/>
           <p:nvPr/>
         </p:nvSpPr>
         <p:spPr>
           <a:xfrm>
-            <a:off x="640080" y="1005840"/>
-            <a:ext cx="10972800" cy="5029200"/>
+            <a:off x="274320" y="4572000"/>
+            <a:ext cx="3657600" cy="457200"/>
           </a:xfrm>
           <a:prstGeom prst="rect">
             <a:avLst/>
@@ -5264,190 +6152,97 @@
           <a:noFill/>
         </p:spPr>
         <p:txBody>
-          <a:bodyPr wrap="square">
+          <a:bodyPr wrap="square" lIns="45720" rIns="45720" tIns="18288" bIns="18288" anchor="t">
             <a:spAutoFit/>
           </a:bodyPr>
           <a:lstStyle/>
           <a:p>
-            <a:pPr>
-              <a:lnSpc>
-                <a:spcPct val="150000"/>
-              </a:lnSpc>
-            </a:pPr>
-            <a:r>
-              <a:rPr sz="2000" b="1">
-                <a:solidFill>
-                  <a:srgbClr val="00A0B0"/>
+            <a:pPr algn="ctr"/>
+            <a:r>
+              <a:rPr sz="2000" b="1" i="0">
+                <a:solidFill>
+                  <a:srgbClr val="6FD8E0"/>
                 </a:solidFill>
                 <a:latin typeface="Calibri"/>
               </a:rPr>
-              <a:t>▸  </a:t>
-            </a:r>
-            <a:r>
-              <a:rPr sz="2000">
-                <a:solidFill>
-                  <a:srgbClr val="1A1A2E"/>
+              <a:t>PARTE</a:t>
+            </a:r>
+          </a:p>
+        </p:txBody>
+      </p:sp>
+      <p:sp>
+        <p:nvSpPr>
+          <p:cNvPr id="7" name="TextBox 6"/>
+          <p:cNvSpPr txBox="1"/>
+          <p:nvPr/>
+        </p:nvSpPr>
+        <p:spPr>
+          <a:xfrm>
+            <a:off x="4572000" y="2286000"/>
+            <a:ext cx="7315200" cy="1645920"/>
+          </a:xfrm>
+          <a:prstGeom prst="rect">
+            <a:avLst/>
+          </a:prstGeom>
+          <a:noFill/>
+        </p:spPr>
+        <p:txBody>
+          <a:bodyPr wrap="square" lIns="45720" rIns="45720" tIns="18288" bIns="18288" anchor="t">
+            <a:spAutoFit/>
+          </a:bodyPr>
+          <a:lstStyle/>
+          <a:p>
+            <a:pPr algn="l"/>
+            <a:r>
+              <a:rPr sz="4400" b="1" i="0">
+                <a:solidFill>
+                  <a:srgbClr val="0F2D52"/>
                 </a:solidFill>
                 <a:latin typeface="Calibri"/>
               </a:rPr>
-              <a:t>A coppie: applica STRIDE a un e-commerce piccolo</a:t>
-            </a:r>
-          </a:p>
-          <a:p>
-            <a:pPr>
-              <a:lnSpc>
-                <a:spcPct val="150000"/>
-              </a:lnSpc>
-            </a:pPr>
-            <a:r>
-              <a:rPr sz="2000" b="1">
-                <a:solidFill>
-                  <a:srgbClr val="00A0B0"/>
+              <a:t>Per approfondire</a:t>
+            </a:r>
+          </a:p>
+        </p:txBody>
+      </p:sp>
+      <p:sp>
+        <p:nvSpPr>
+          <p:cNvPr id="8" name="TextBox 7"/>
+          <p:cNvSpPr txBox="1"/>
+          <p:nvPr/>
+        </p:nvSpPr>
+        <p:spPr>
+          <a:xfrm>
+            <a:off x="4572000" y="3931920"/>
+            <a:ext cx="7315200" cy="1828800"/>
+          </a:xfrm>
+          <a:prstGeom prst="rect">
+            <a:avLst/>
+          </a:prstGeom>
+          <a:noFill/>
+        </p:spPr>
+        <p:txBody>
+          <a:bodyPr wrap="square" lIns="45720" rIns="45720" tIns="18288" bIns="18288" anchor="t">
+            <a:spAutoFit/>
+          </a:bodyPr>
+          <a:lstStyle/>
+          <a:p>
+            <a:pPr algn="l"/>
+            <a:r>
+              <a:rPr sz="1800" b="0" i="1">
+                <a:solidFill>
+                  <a:srgbClr val="6B7280"/>
                 </a:solidFill>
                 <a:latin typeface="Calibri"/>
               </a:rPr>
-              <a:t>▸  </a:t>
-            </a:r>
-            <a:r>
-              <a:rPr sz="2000">
-                <a:solidFill>
-                  <a:srgbClr val="1A1A2E"/>
-                </a:solidFill>
-                <a:latin typeface="Calibri"/>
-              </a:rPr>
-              <a:t>  registrazione · login · ricerca · ordine · pagamento Stripe · email</a:t>
-            </a:r>
-          </a:p>
-          <a:p>
-            <a:pPr>
-              <a:lnSpc>
-                <a:spcPct val="150000"/>
-              </a:lnSpc>
-            </a:pPr>
-            <a:r>
-              <a:rPr sz="2000" b="1">
-                <a:solidFill>
-                  <a:srgbClr val="00A0B0"/>
-                </a:solidFill>
-                <a:latin typeface="Calibri"/>
-              </a:rPr>
-              <a:t>▸  </a:t>
-            </a:r>
-            <a:r>
-              <a:rPr sz="2000">
-                <a:solidFill>
-                  <a:srgbClr val="1A1A2E"/>
-                </a:solidFill>
-                <a:latin typeface="Calibri"/>
-              </a:rPr>
-              <a:t/>
-            </a:r>
-          </a:p>
-          <a:p>
-            <a:pPr>
-              <a:lnSpc>
-                <a:spcPct val="150000"/>
-              </a:lnSpc>
-            </a:pPr>
-            <a:r>
-              <a:rPr sz="2000" b="1">
-                <a:solidFill>
-                  <a:srgbClr val="00A0B0"/>
-                </a:solidFill>
-                <a:latin typeface="Calibri"/>
-              </a:rPr>
-              <a:t>▸  </a:t>
-            </a:r>
-            <a:r>
-              <a:rPr sz="2000">
-                <a:solidFill>
-                  <a:srgbClr val="1A1A2E"/>
-                </a:solidFill>
-                <a:latin typeface="Calibri"/>
-              </a:rPr>
-              <a:t>Output richiesto:</a:t>
-            </a:r>
-          </a:p>
-          <a:p>
-            <a:pPr>
-              <a:lnSpc>
-                <a:spcPct val="150000"/>
-              </a:lnSpc>
-            </a:pPr>
-            <a:r>
-              <a:rPr sz="2000" b="1">
-                <a:solidFill>
-                  <a:srgbClr val="00A0B0"/>
-                </a:solidFill>
-                <a:latin typeface="Calibri"/>
-              </a:rPr>
-              <a:t>▸  </a:t>
-            </a:r>
-            <a:r>
-              <a:rPr sz="2000">
-                <a:solidFill>
-                  <a:srgbClr val="1A1A2E"/>
-                </a:solidFill>
-                <a:latin typeface="Calibri"/>
-              </a:rPr>
-              <a:t>  Disegno DFD (≥4 processi, 2 datastore, 2 trust boundary)</a:t>
-            </a:r>
-          </a:p>
-          <a:p>
-            <a:pPr>
-              <a:lnSpc>
-                <a:spcPct val="150000"/>
-              </a:lnSpc>
-            </a:pPr>
-            <a:r>
-              <a:rPr sz="2000" b="1">
-                <a:solidFill>
-                  <a:srgbClr val="00A0B0"/>
-                </a:solidFill>
-                <a:latin typeface="Calibri"/>
-              </a:rPr>
-              <a:t>▸  </a:t>
-            </a:r>
-            <a:r>
-              <a:rPr sz="2000">
-                <a:solidFill>
-                  <a:srgbClr val="1A1A2E"/>
-                </a:solidFill>
-                <a:latin typeface="Calibri"/>
-              </a:rPr>
-              <a:t>  Tabella STRIDE con ≥8 minacce sparse tra le 6 categorie</a:t>
-            </a:r>
-          </a:p>
-          <a:p>
-            <a:pPr>
-              <a:lnSpc>
-                <a:spcPct val="150000"/>
-              </a:lnSpc>
-            </a:pPr>
-            <a:r>
-              <a:rPr sz="2000" b="1">
-                <a:solidFill>
-                  <a:srgbClr val="00A0B0"/>
-                </a:solidFill>
-                <a:latin typeface="Calibri"/>
-              </a:rPr>
-              <a:t>▸  </a:t>
-            </a:r>
-            <a:r>
-              <a:rPr sz="2000">
-                <a:solidFill>
-                  <a:srgbClr val="1A1A2E"/>
-                </a:solidFill>
-                <a:latin typeface="Calibri"/>
-              </a:rPr>
-              <a:t>  Una mitigazione per ogni minaccia</a:t>
+              <a:t>Cosa leggere prima della prossima lezione</a:t>
             </a:r>
           </a:p>
         </p:txBody>
       </p:sp>
       <p:cxnSp>
         <p:nvCxnSpPr>
-          <p:cNvPr id="5" name="Connector 4"/>
+          <p:cNvPr id="9" name="Connector 8"/>
           <p:cNvCxnSpPr/>
           <p:nvPr/>
         </p:nvCxnSpPr>
@@ -5482,14 +6277,14 @@
       </p:cxnSp>
       <p:sp>
         <p:nvSpPr>
-          <p:cNvPr id="6" name="TextBox 5"/>
+          <p:cNvPr id="10" name="TextBox 9"/>
           <p:cNvSpPr txBox="1"/>
           <p:nvPr/>
         </p:nvSpPr>
         <p:spPr>
           <a:xfrm>
             <a:off x="457200" y="6473952"/>
-            <a:ext cx="7315200" cy="320040"/>
+            <a:ext cx="7315200" cy="292608"/>
           </a:xfrm>
           <a:prstGeom prst="rect">
             <a:avLst/>
@@ -5510,21 +6305,21 @@
                 </a:solidFill>
                 <a:latin typeface="Calibri"/>
               </a:rPr>
-              <a:t>Secure Coding · Corso IFTS STEM · A. Manneschi</a:t>
-            </a:r>
-          </a:p>
-        </p:txBody>
-      </p:sp>
-      <p:sp>
-        <p:nvSpPr>
-          <p:cNvPr id="7" name="TextBox 6"/>
+              <a:t>Secure Coding · Corso IFTS STEM · A. Manneschi · 2024/2025</a:t>
+            </a:r>
+          </a:p>
+        </p:txBody>
+      </p:sp>
+      <p:sp>
+        <p:nvSpPr>
+          <p:cNvPr id="11" name="TextBox 10"/>
           <p:cNvSpPr txBox="1"/>
           <p:nvPr/>
         </p:nvSpPr>
         <p:spPr>
           <a:xfrm>
             <a:off x="10515600" y="6473952"/>
-            <a:ext cx="1188720" cy="320040"/>
+            <a:ext cx="1188720" cy="292608"/>
           </a:xfrm>
           <a:prstGeom prst="rect">
             <a:avLst/>
@@ -5583,7 +6378,7 @@
             <a:avLst/>
           </a:prstGeom>
           <a:solidFill>
-            <a:srgbClr val="0F2D52"/>
+            <a:srgbClr val="081B33"/>
           </a:solidFill>
           <a:ln>
             <a:noFill/>
@@ -5619,11 +6414,247 @@
         </p:nvSpPr>
         <p:spPr>
           <a:xfrm>
-            <a:off x="8686800" y="457200"/>
-            <a:ext cx="3200400" cy="3200400"/>
+            <a:off x="8915400" y="228600"/>
+            <a:ext cx="2286000" cy="2286000"/>
           </a:xfrm>
           <a:prstGeom prst="ellipse">
             <a:avLst/>
+          </a:prstGeom>
+          <a:noFill/>
+          <a:ln w="25400">
+            <a:solidFill>
+              <a:srgbClr val="00A0B0"/>
+            </a:solidFill>
+          </a:ln>
+        </p:spPr>
+        <p:style>
+          <a:lnRef idx="1">
+            <a:schemeClr val="accent1"/>
+          </a:lnRef>
+          <a:fillRef idx="3">
+            <a:schemeClr val="accent1"/>
+          </a:fillRef>
+          <a:effectRef idx="2">
+            <a:schemeClr val="accent1"/>
+          </a:effectRef>
+          <a:fontRef idx="minor">
+            <a:schemeClr val="lt1"/>
+          </a:fontRef>
+        </p:style>
+        <p:txBody>
+          <a:bodyPr rtlCol="0" anchor="ctr"/>
+          <a:lstStyle/>
+          <a:p>
+            <a:pPr algn="ctr"/>
+          </a:p>
+        </p:txBody>
+      </p:sp>
+      <p:sp>
+        <p:nvSpPr>
+          <p:cNvPr id="4" name="Oval 3"/>
+          <p:cNvSpPr/>
+          <p:nvPr/>
+        </p:nvSpPr>
+        <p:spPr>
+          <a:xfrm>
+            <a:off x="10149840" y="3749040"/>
+            <a:ext cx="1645920" cy="1645920"/>
+          </a:xfrm>
+          <a:prstGeom prst="ellipse">
+            <a:avLst/>
+          </a:prstGeom>
+          <a:noFill/>
+          <a:ln w="25400">
+            <a:solidFill>
+              <a:srgbClr val="00A0B0"/>
+            </a:solidFill>
+          </a:ln>
+        </p:spPr>
+        <p:style>
+          <a:lnRef idx="1">
+            <a:schemeClr val="accent1"/>
+          </a:lnRef>
+          <a:fillRef idx="3">
+            <a:schemeClr val="accent1"/>
+          </a:fillRef>
+          <a:effectRef idx="2">
+            <a:schemeClr val="accent1"/>
+          </a:effectRef>
+          <a:fontRef idx="minor">
+            <a:schemeClr val="lt1"/>
+          </a:fontRef>
+        </p:style>
+        <p:txBody>
+          <a:bodyPr rtlCol="0" anchor="ctr"/>
+          <a:lstStyle/>
+          <a:p>
+            <a:pPr algn="ctr"/>
+          </a:p>
+        </p:txBody>
+      </p:sp>
+      <p:sp>
+        <p:nvSpPr>
+          <p:cNvPr id="5" name="Oval 4"/>
+          <p:cNvSpPr/>
+          <p:nvPr/>
+        </p:nvSpPr>
+        <p:spPr>
+          <a:xfrm>
+            <a:off x="685800" y="4800600"/>
+            <a:ext cx="1371600" cy="1371600"/>
+          </a:xfrm>
+          <a:prstGeom prst="ellipse">
+            <a:avLst/>
+          </a:prstGeom>
+          <a:noFill/>
+          <a:ln w="25400">
+            <a:solidFill>
+              <a:srgbClr val="00A0B0"/>
+            </a:solidFill>
+          </a:ln>
+        </p:spPr>
+        <p:style>
+          <a:lnRef idx="1">
+            <a:schemeClr val="accent1"/>
+          </a:lnRef>
+          <a:fillRef idx="3">
+            <a:schemeClr val="accent1"/>
+          </a:fillRef>
+          <a:effectRef idx="2">
+            <a:schemeClr val="accent1"/>
+          </a:effectRef>
+          <a:fontRef idx="minor">
+            <a:schemeClr val="lt1"/>
+          </a:fontRef>
+        </p:style>
+        <p:txBody>
+          <a:bodyPr rtlCol="0" anchor="ctr"/>
+          <a:lstStyle/>
+          <a:p>
+            <a:pPr algn="ctr"/>
+          </a:p>
+        </p:txBody>
+      </p:sp>
+      <p:sp>
+        <p:nvSpPr>
+          <p:cNvPr id="6" name="TextBox 5"/>
+          <p:cNvSpPr txBox="1"/>
+          <p:nvPr/>
+        </p:nvSpPr>
+        <p:spPr>
+          <a:xfrm>
+            <a:off x="731520" y="1371600"/>
+            <a:ext cx="10058400" cy="2286000"/>
+          </a:xfrm>
+          <a:prstGeom prst="rect">
+            <a:avLst/>
+          </a:prstGeom>
+          <a:noFill/>
+        </p:spPr>
+        <p:txBody>
+          <a:bodyPr wrap="square" lIns="45720" rIns="45720" tIns="18288" bIns="18288" anchor="t">
+            <a:spAutoFit/>
+          </a:bodyPr>
+          <a:lstStyle/>
+          <a:p>
+            <a:pPr algn="l"/>
+            <a:r>
+              <a:rPr sz="11000" b="1" i="0">
+                <a:solidFill>
+                  <a:srgbClr val="FFFFFF"/>
+                </a:solidFill>
+                <a:latin typeface="Calibri"/>
+              </a:rPr>
+              <a:t>Domande?</a:t>
+            </a:r>
+          </a:p>
+        </p:txBody>
+      </p:sp>
+      <p:cxnSp>
+        <p:nvCxnSpPr>
+          <p:cNvPr id="7" name="Connector 6"/>
+          <p:cNvCxnSpPr/>
+          <p:nvPr/>
+        </p:nvCxnSpPr>
+        <p:spPr>
+          <a:xfrm>
+            <a:off x="731520" y="3840480"/>
+            <a:ext cx="2926080" cy="0"/>
+          </a:xfrm>
+          <a:prstGeom prst="line">
+            <a:avLst/>
+          </a:prstGeom>
+          <a:ln w="50800">
+            <a:solidFill>
+              <a:srgbClr val="00A0B0"/>
+            </a:solidFill>
+          </a:ln>
+        </p:spPr>
+        <p:style>
+          <a:lnRef idx="2">
+            <a:schemeClr val="accent1"/>
+          </a:lnRef>
+          <a:fillRef idx="0">
+            <a:schemeClr val="accent1"/>
+          </a:fillRef>
+          <a:effectRef idx="1">
+            <a:schemeClr val="accent1"/>
+          </a:effectRef>
+          <a:fontRef idx="minor">
+            <a:schemeClr val="tx1"/>
+          </a:fontRef>
+        </p:style>
+      </p:cxnSp>
+      <p:sp>
+        <p:nvSpPr>
+          <p:cNvPr id="8" name="TextBox 7"/>
+          <p:cNvSpPr txBox="1"/>
+          <p:nvPr/>
+        </p:nvSpPr>
+        <p:spPr>
+          <a:xfrm>
+            <a:off x="731520" y="4114800"/>
+            <a:ext cx="10058400" cy="457200"/>
+          </a:xfrm>
+          <a:prstGeom prst="rect">
+            <a:avLst/>
+          </a:prstGeom>
+          <a:noFill/>
+        </p:spPr>
+        <p:txBody>
+          <a:bodyPr wrap="square" lIns="45720" rIns="45720" tIns="18288" bIns="18288" anchor="t">
+            <a:spAutoFit/>
+          </a:bodyPr>
+          <a:lstStyle/>
+          <a:p>
+            <a:pPr algn="l"/>
+            <a:r>
+              <a:rPr sz="2000" b="1" i="0">
+                <a:solidFill>
+                  <a:srgbClr val="00A0B0"/>
+                </a:solidFill>
+                <a:latin typeface="Calibri"/>
+              </a:rPr>
+              <a:t>Riepilogo · Q&amp;A · Discussione</a:t>
+            </a:r>
+          </a:p>
+        </p:txBody>
+      </p:sp>
+      <p:sp>
+        <p:nvSpPr>
+          <p:cNvPr id="9" name="Rounded Rectangle 8"/>
+          <p:cNvSpPr/>
+          <p:nvPr/>
+        </p:nvSpPr>
+        <p:spPr>
+          <a:xfrm>
+            <a:off x="731520" y="5029200"/>
+            <a:ext cx="10058400" cy="914400"/>
+          </a:xfrm>
+          <a:prstGeom prst="roundRect">
+            <a:avLst>
+              <a:gd name="adj" fmla="val 8000"/>
+            </a:avLst>
           </a:prstGeom>
           <a:solidFill>
             <a:srgbClr val="00A0B0"/>
@@ -5656,49 +6687,14 @@
       </p:sp>
       <p:sp>
         <p:nvSpPr>
-          <p:cNvPr id="4" name="TextBox 3"/>
+          <p:cNvPr id="10" name="TextBox 9"/>
           <p:cNvSpPr txBox="1"/>
           <p:nvPr/>
         </p:nvSpPr>
         <p:spPr>
           <a:xfrm>
-            <a:off x="731520" y="1645920"/>
-            <a:ext cx="7315200" cy="2286000"/>
-          </a:xfrm>
-          <a:prstGeom prst="rect">
-            <a:avLst/>
-          </a:prstGeom>
-          <a:noFill/>
-        </p:spPr>
-        <p:txBody>
-          <a:bodyPr wrap="square" lIns="45720" rIns="45720" tIns="18288" bIns="18288" anchor="t">
-            <a:spAutoFit/>
-          </a:bodyPr>
-          <a:lstStyle/>
-          <a:p>
-            <a:pPr algn="l"/>
-            <a:r>
-              <a:rPr sz="8800" b="1" i="0">
-                <a:solidFill>
-                  <a:srgbClr val="FFFFFF"/>
-                </a:solidFill>
-                <a:latin typeface="Calibri"/>
-              </a:rPr>
-              <a:t>Domande?</a:t>
-            </a:r>
-          </a:p>
-        </p:txBody>
-      </p:sp>
-      <p:sp>
-        <p:nvSpPr>
-          <p:cNvPr id="5" name="TextBox 4"/>
-          <p:cNvSpPr txBox="1"/>
-          <p:nvPr/>
-        </p:nvSpPr>
-        <p:spPr>
-          <a:xfrm>
-            <a:off x="8686800" y="457200"/>
-            <a:ext cx="3200400" cy="3200400"/>
+            <a:off x="1005840" y="5029200"/>
+            <a:ext cx="9784080" cy="914400"/>
           </a:xfrm>
           <a:prstGeom prst="rect">
             <a:avLst/>
@@ -5711,79 +6707,9 @@
           </a:bodyPr>
           <a:lstStyle/>
           <a:p>
-            <a:pPr algn="ctr"/>
-            <a:r>
-              <a:rPr sz="18000" b="1" i="0">
-                <a:solidFill>
-                  <a:srgbClr val="FFFFFF"/>
-                </a:solidFill>
-                <a:latin typeface="Calibri"/>
-              </a:rPr>
-              <a:t>?</a:t>
-            </a:r>
-          </a:p>
-        </p:txBody>
-      </p:sp>
-      <p:sp>
-        <p:nvSpPr>
-          <p:cNvPr id="6" name="TextBox 5"/>
-          <p:cNvSpPr txBox="1"/>
-          <p:nvPr/>
-        </p:nvSpPr>
-        <p:spPr>
-          <a:xfrm>
-            <a:off x="731520" y="4114800"/>
-            <a:ext cx="10058400" cy="457200"/>
-          </a:xfrm>
-          <a:prstGeom prst="rect">
-            <a:avLst/>
-          </a:prstGeom>
-          <a:noFill/>
-        </p:spPr>
-        <p:txBody>
-          <a:bodyPr wrap="square" lIns="45720" rIns="45720" tIns="18288" bIns="18288" anchor="t">
-            <a:spAutoFit/>
-          </a:bodyPr>
-          <a:lstStyle/>
-          <a:p>
             <a:pPr algn="l"/>
             <a:r>
-              <a:rPr sz="2200" b="1" i="0">
-                <a:solidFill>
-                  <a:srgbClr val="00A0B0"/>
-                </a:solidFill>
-                <a:latin typeface="Calibri"/>
-              </a:rPr>
-              <a:t>Cosa portarti via:</a:t>
-            </a:r>
-          </a:p>
-        </p:txBody>
-      </p:sp>
-      <p:sp>
-        <p:nvSpPr>
-          <p:cNvPr id="7" name="TextBox 6"/>
-          <p:cNvSpPr txBox="1"/>
-          <p:nvPr/>
-        </p:nvSpPr>
-        <p:spPr>
-          <a:xfrm>
-            <a:off x="731520" y="5303520"/>
-            <a:ext cx="10058400" cy="548640"/>
-          </a:xfrm>
-          <a:prstGeom prst="rect">
-            <a:avLst/>
-          </a:prstGeom>
-          <a:noFill/>
-        </p:spPr>
-        <p:txBody>
-          <a:bodyPr wrap="square" lIns="45720" rIns="45720" tIns="18288" bIns="18288" anchor="t">
-            <a:spAutoFit/>
-          </a:bodyPr>
-          <a:lstStyle/>
-          <a:p>
-            <a:pPr algn="l"/>
-            <a:r>
-              <a:rPr sz="1800" b="0" i="1">
+              <a:rPr sz="1800" b="1" i="1">
                 <a:solidFill>
                   <a:srgbClr val="FFFFFF"/>
                 </a:solidFill>
@@ -5796,7 +6722,7 @@
       </p:sp>
       <p:cxnSp>
         <p:nvCxnSpPr>
-          <p:cNvPr id="8" name="Connector 7"/>
+          <p:cNvPr id="11" name="Connector 10"/>
           <p:cNvCxnSpPr/>
           <p:nvPr/>
         </p:nvCxnSpPr>
@@ -5831,14 +6757,14 @@
       </p:cxnSp>
       <p:sp>
         <p:nvSpPr>
-          <p:cNvPr id="9" name="TextBox 8"/>
+          <p:cNvPr id="12" name="TextBox 11"/>
           <p:cNvSpPr txBox="1"/>
           <p:nvPr/>
         </p:nvSpPr>
         <p:spPr>
           <a:xfrm>
             <a:off x="457200" y="6473952"/>
-            <a:ext cx="7315200" cy="320040"/>
+            <a:ext cx="7315200" cy="292608"/>
           </a:xfrm>
           <a:prstGeom prst="rect">
             <a:avLst/>
@@ -5859,21 +6785,21 @@
                 </a:solidFill>
                 <a:latin typeface="Calibri"/>
               </a:rPr>
-              <a:t>Secure Coding · Corso IFTS STEM · A. Manneschi</a:t>
-            </a:r>
-          </a:p>
-        </p:txBody>
-      </p:sp>
-      <p:sp>
-        <p:nvSpPr>
-          <p:cNvPr id="10" name="TextBox 9"/>
+              <a:t>Secure Coding · Corso IFTS STEM · A. Manneschi · 2024/2025</a:t>
+            </a:r>
+          </a:p>
+        </p:txBody>
+      </p:sp>
+      <p:sp>
+        <p:nvSpPr>
+          <p:cNvPr id="13" name="TextBox 12"/>
           <p:cNvSpPr txBox="1"/>
           <p:nvPr/>
         </p:nvSpPr>
         <p:spPr>
           <a:xfrm>
             <a:off x="10515600" y="6473952"/>
-            <a:ext cx="1188720" cy="320040"/>
+            <a:ext cx="1188720" cy="292608"/>
           </a:xfrm>
           <a:prstGeom prst="rect">
             <a:avLst/>
@@ -5990,7 +6916,7 @@
                 </a:solidFill>
                 <a:latin typeface="Calibri"/>
               </a:rPr>
-              <a:t>Obiettivi</a:t>
+              <a:t>🎯  Obiettivi della lezione</a:t>
             </a:r>
           </a:p>
         </p:txBody>
@@ -6003,8 +6929,8 @@
         </p:nvSpPr>
         <p:spPr>
           <a:xfrm>
-            <a:off x="640080" y="1005840"/>
-            <a:ext cx="10972800" cy="5029200"/>
+            <a:off x="457200" y="914400"/>
+            <a:ext cx="2286000" cy="2286000"/>
           </a:xfrm>
           <a:prstGeom prst="rect">
             <a:avLst/>
@@ -6012,27 +6938,162 @@
           <a:noFill/>
         </p:spPr>
         <p:txBody>
-          <a:bodyPr wrap="square">
+          <a:bodyPr wrap="square" lIns="45720" rIns="45720" tIns="18288" bIns="18288" anchor="t">
             <a:spAutoFit/>
           </a:bodyPr>
           <a:lstStyle/>
           <a:p>
-            <a:pPr>
-              <a:lnSpc>
-                <a:spcPct val="150000"/>
-              </a:lnSpc>
-            </a:pPr>
-            <a:r>
-              <a:rPr sz="2000" b="1">
-                <a:solidFill>
-                  <a:srgbClr val="00A0B0"/>
+            <a:pPr algn="l"/>
+            <a:r>
+              <a:rPr sz="18000" b="1" i="0">
+                <a:solidFill>
+                  <a:srgbClr val="F1F4F8"/>
                 </a:solidFill>
                 <a:latin typeface="Calibri"/>
               </a:rPr>
-              <a:t>▸  </a:t>
-            </a:r>
-            <a:r>
-              <a:rPr sz="2000">
+              <a:t>05</a:t>
+            </a:r>
+          </a:p>
+        </p:txBody>
+      </p:sp>
+      <p:sp>
+        <p:nvSpPr>
+          <p:cNvPr id="5" name="TextBox 4"/>
+          <p:cNvSpPr txBox="1"/>
+          <p:nvPr/>
+        </p:nvSpPr>
+        <p:spPr>
+          <a:xfrm>
+            <a:off x="457200" y="3200400"/>
+            <a:ext cx="2286000" cy="457200"/>
+          </a:xfrm>
+          <a:prstGeom prst="rect">
+            <a:avLst/>
+          </a:prstGeom>
+          <a:noFill/>
+        </p:spPr>
+        <p:txBody>
+          <a:bodyPr wrap="square" lIns="45720" rIns="45720" tIns="18288" bIns="18288" anchor="t">
+            <a:spAutoFit/>
+          </a:bodyPr>
+          <a:lstStyle/>
+          <a:p>
+            <a:pPr algn="l"/>
+            <a:r>
+              <a:rPr sz="1800" b="1" i="1">
+                <a:solidFill>
+                  <a:srgbClr val="00A0B0"/>
+                </a:solidFill>
+                <a:latin typeface="Calibri"/>
+              </a:rPr>
+              <a:t>obiettivi</a:t>
+            </a:r>
+          </a:p>
+        </p:txBody>
+      </p:sp>
+      <p:sp>
+        <p:nvSpPr>
+          <p:cNvPr id="6" name="Oval 5"/>
+          <p:cNvSpPr/>
+          <p:nvPr/>
+        </p:nvSpPr>
+        <p:spPr>
+          <a:xfrm>
+            <a:off x="3200400" y="1188720"/>
+            <a:ext cx="548640" cy="548640"/>
+          </a:xfrm>
+          <a:prstGeom prst="ellipse">
+            <a:avLst/>
+          </a:prstGeom>
+          <a:solidFill>
+            <a:srgbClr val="00A0B0"/>
+          </a:solidFill>
+          <a:ln>
+            <a:noFill/>
+          </a:ln>
+        </p:spPr>
+        <p:style>
+          <a:lnRef idx="1">
+            <a:schemeClr val="accent1"/>
+          </a:lnRef>
+          <a:fillRef idx="3">
+            <a:schemeClr val="accent1"/>
+          </a:fillRef>
+          <a:effectRef idx="2">
+            <a:schemeClr val="accent1"/>
+          </a:effectRef>
+          <a:fontRef idx="minor">
+            <a:schemeClr val="lt1"/>
+          </a:fontRef>
+        </p:style>
+        <p:txBody>
+          <a:bodyPr rtlCol="0" anchor="ctr"/>
+          <a:lstStyle/>
+          <a:p>
+            <a:pPr algn="ctr"/>
+          </a:p>
+        </p:txBody>
+      </p:sp>
+      <p:sp>
+        <p:nvSpPr>
+          <p:cNvPr id="7" name="TextBox 6"/>
+          <p:cNvSpPr txBox="1"/>
+          <p:nvPr/>
+        </p:nvSpPr>
+        <p:spPr>
+          <a:xfrm>
+            <a:off x="3200400" y="1188720"/>
+            <a:ext cx="548640" cy="548640"/>
+          </a:xfrm>
+          <a:prstGeom prst="rect">
+            <a:avLst/>
+          </a:prstGeom>
+          <a:noFill/>
+        </p:spPr>
+        <p:txBody>
+          <a:bodyPr wrap="square" lIns="45720" rIns="45720" tIns="18288" bIns="18288" anchor="ctr">
+            <a:spAutoFit/>
+          </a:bodyPr>
+          <a:lstStyle/>
+          <a:p>
+            <a:pPr algn="ctr"/>
+            <a:r>
+              <a:rPr sz="1600" b="1" i="0">
+                <a:solidFill>
+                  <a:srgbClr val="FFFFFF"/>
+                </a:solidFill>
+                <a:latin typeface="Calibri"/>
+              </a:rPr>
+              <a:t>1</a:t>
+            </a:r>
+          </a:p>
+        </p:txBody>
+      </p:sp>
+      <p:sp>
+        <p:nvSpPr>
+          <p:cNvPr id="8" name="TextBox 7"/>
+          <p:cNvSpPr txBox="1"/>
+          <p:nvPr/>
+        </p:nvSpPr>
+        <p:spPr>
+          <a:xfrm>
+            <a:off x="4023360" y="1261872"/>
+            <a:ext cx="7772400" cy="548640"/>
+          </a:xfrm>
+          <a:prstGeom prst="rect">
+            <a:avLst/>
+          </a:prstGeom>
+          <a:noFill/>
+        </p:spPr>
+        <p:txBody>
+          <a:bodyPr wrap="square" lIns="45720" rIns="45720" tIns="18288" bIns="18288" anchor="ctr">
+            <a:spAutoFit/>
+          </a:bodyPr>
+          <a:lstStyle/>
+          <a:p>
+            <a:pPr algn="l"/>
+            <a:r>
+              <a:rPr sz="1600" b="0" i="0">
                 <a:solidFill>
                   <a:srgbClr val="1A1A2E"/>
                 </a:solidFill>
@@ -6041,23 +7102,111 @@
               <a:t>Conoscere OWASP e la Top 10 delle vulnerabilità web</a:t>
             </a:r>
           </a:p>
-          <a:p>
-            <a:pPr>
-              <a:lnSpc>
-                <a:spcPct val="150000"/>
-              </a:lnSpc>
-            </a:pPr>
-            <a:r>
-              <a:rPr sz="2000" b="1">
-                <a:solidFill>
-                  <a:srgbClr val="00A0B0"/>
+        </p:txBody>
+      </p:sp>
+      <p:sp>
+        <p:nvSpPr>
+          <p:cNvPr id="9" name="Oval 8"/>
+          <p:cNvSpPr/>
+          <p:nvPr/>
+        </p:nvSpPr>
+        <p:spPr>
+          <a:xfrm>
+            <a:off x="3200400" y="1965960"/>
+            <a:ext cx="548640" cy="548640"/>
+          </a:xfrm>
+          <a:prstGeom prst="ellipse">
+            <a:avLst/>
+          </a:prstGeom>
+          <a:solidFill>
+            <a:srgbClr val="00A0B0"/>
+          </a:solidFill>
+          <a:ln>
+            <a:noFill/>
+          </a:ln>
+        </p:spPr>
+        <p:style>
+          <a:lnRef idx="1">
+            <a:schemeClr val="accent1"/>
+          </a:lnRef>
+          <a:fillRef idx="3">
+            <a:schemeClr val="accent1"/>
+          </a:fillRef>
+          <a:effectRef idx="2">
+            <a:schemeClr val="accent1"/>
+          </a:effectRef>
+          <a:fontRef idx="minor">
+            <a:schemeClr val="lt1"/>
+          </a:fontRef>
+        </p:style>
+        <p:txBody>
+          <a:bodyPr rtlCol="0" anchor="ctr"/>
+          <a:lstStyle/>
+          <a:p>
+            <a:pPr algn="ctr"/>
+          </a:p>
+        </p:txBody>
+      </p:sp>
+      <p:sp>
+        <p:nvSpPr>
+          <p:cNvPr id="10" name="TextBox 9"/>
+          <p:cNvSpPr txBox="1"/>
+          <p:nvPr/>
+        </p:nvSpPr>
+        <p:spPr>
+          <a:xfrm>
+            <a:off x="3200400" y="1965960"/>
+            <a:ext cx="548640" cy="548640"/>
+          </a:xfrm>
+          <a:prstGeom prst="rect">
+            <a:avLst/>
+          </a:prstGeom>
+          <a:noFill/>
+        </p:spPr>
+        <p:txBody>
+          <a:bodyPr wrap="square" lIns="45720" rIns="45720" tIns="18288" bIns="18288" anchor="ctr">
+            <a:spAutoFit/>
+          </a:bodyPr>
+          <a:lstStyle/>
+          <a:p>
+            <a:pPr algn="ctr"/>
+            <a:r>
+              <a:rPr sz="1600" b="1" i="0">
+                <a:solidFill>
+                  <a:srgbClr val="FFFFFF"/>
                 </a:solidFill>
                 <a:latin typeface="Calibri"/>
               </a:rPr>
-              <a:t>▸  </a:t>
-            </a:r>
-            <a:r>
-              <a:rPr sz="2000">
+              <a:t>2</a:t>
+            </a:r>
+          </a:p>
+        </p:txBody>
+      </p:sp>
+      <p:sp>
+        <p:nvSpPr>
+          <p:cNvPr id="11" name="TextBox 10"/>
+          <p:cNvSpPr txBox="1"/>
+          <p:nvPr/>
+        </p:nvSpPr>
+        <p:spPr>
+          <a:xfrm>
+            <a:off x="4023360" y="2039112"/>
+            <a:ext cx="7772400" cy="548640"/>
+          </a:xfrm>
+          <a:prstGeom prst="rect">
+            <a:avLst/>
+          </a:prstGeom>
+          <a:noFill/>
+        </p:spPr>
+        <p:txBody>
+          <a:bodyPr wrap="square" lIns="45720" rIns="45720" tIns="18288" bIns="18288" anchor="ctr">
+            <a:spAutoFit/>
+          </a:bodyPr>
+          <a:lstStyle/>
+          <a:p>
+            <a:pPr algn="l"/>
+            <a:r>
+              <a:rPr sz="1600" b="0" i="0">
                 <a:solidFill>
                   <a:srgbClr val="1A1A2E"/>
                 </a:solidFill>
@@ -6066,23 +7215,111 @@
               <a:t>Saper leggere CVE e CVSS</a:t>
             </a:r>
           </a:p>
-          <a:p>
-            <a:pPr>
-              <a:lnSpc>
-                <a:spcPct val="150000"/>
-              </a:lnSpc>
-            </a:pPr>
-            <a:r>
-              <a:rPr sz="2000" b="1">
-                <a:solidFill>
-                  <a:srgbClr val="00A0B0"/>
+        </p:txBody>
+      </p:sp>
+      <p:sp>
+        <p:nvSpPr>
+          <p:cNvPr id="12" name="Oval 11"/>
+          <p:cNvSpPr/>
+          <p:nvPr/>
+        </p:nvSpPr>
+        <p:spPr>
+          <a:xfrm>
+            <a:off x="3200400" y="2743200"/>
+            <a:ext cx="548640" cy="548640"/>
+          </a:xfrm>
+          <a:prstGeom prst="ellipse">
+            <a:avLst/>
+          </a:prstGeom>
+          <a:solidFill>
+            <a:srgbClr val="00A0B0"/>
+          </a:solidFill>
+          <a:ln>
+            <a:noFill/>
+          </a:ln>
+        </p:spPr>
+        <p:style>
+          <a:lnRef idx="1">
+            <a:schemeClr val="accent1"/>
+          </a:lnRef>
+          <a:fillRef idx="3">
+            <a:schemeClr val="accent1"/>
+          </a:fillRef>
+          <a:effectRef idx="2">
+            <a:schemeClr val="accent1"/>
+          </a:effectRef>
+          <a:fontRef idx="minor">
+            <a:schemeClr val="lt1"/>
+          </a:fontRef>
+        </p:style>
+        <p:txBody>
+          <a:bodyPr rtlCol="0" anchor="ctr"/>
+          <a:lstStyle/>
+          <a:p>
+            <a:pPr algn="ctr"/>
+          </a:p>
+        </p:txBody>
+      </p:sp>
+      <p:sp>
+        <p:nvSpPr>
+          <p:cNvPr id="13" name="TextBox 12"/>
+          <p:cNvSpPr txBox="1"/>
+          <p:nvPr/>
+        </p:nvSpPr>
+        <p:spPr>
+          <a:xfrm>
+            <a:off x="3200400" y="2743200"/>
+            <a:ext cx="548640" cy="548640"/>
+          </a:xfrm>
+          <a:prstGeom prst="rect">
+            <a:avLst/>
+          </a:prstGeom>
+          <a:noFill/>
+        </p:spPr>
+        <p:txBody>
+          <a:bodyPr wrap="square" lIns="45720" rIns="45720" tIns="18288" bIns="18288" anchor="ctr">
+            <a:spAutoFit/>
+          </a:bodyPr>
+          <a:lstStyle/>
+          <a:p>
+            <a:pPr algn="ctr"/>
+            <a:r>
+              <a:rPr sz="1600" b="1" i="0">
+                <a:solidFill>
+                  <a:srgbClr val="FFFFFF"/>
                 </a:solidFill>
                 <a:latin typeface="Calibri"/>
               </a:rPr>
-              <a:t>▸  </a:t>
-            </a:r>
-            <a:r>
-              <a:rPr sz="2000">
+              <a:t>3</a:t>
+            </a:r>
+          </a:p>
+        </p:txBody>
+      </p:sp>
+      <p:sp>
+        <p:nvSpPr>
+          <p:cNvPr id="14" name="TextBox 13"/>
+          <p:cNvSpPr txBox="1"/>
+          <p:nvPr/>
+        </p:nvSpPr>
+        <p:spPr>
+          <a:xfrm>
+            <a:off x="4023360" y="2816352"/>
+            <a:ext cx="7772400" cy="548640"/>
+          </a:xfrm>
+          <a:prstGeom prst="rect">
+            <a:avLst/>
+          </a:prstGeom>
+          <a:noFill/>
+        </p:spPr>
+        <p:txBody>
+          <a:bodyPr wrap="square" lIns="45720" rIns="45720" tIns="18288" bIns="18288" anchor="ctr">
+            <a:spAutoFit/>
+          </a:bodyPr>
+          <a:lstStyle/>
+          <a:p>
+            <a:pPr algn="l"/>
+            <a:r>
+              <a:rPr sz="1600" b="0" i="0">
                 <a:solidFill>
                   <a:srgbClr val="1A1A2E"/>
                 </a:solidFill>
@@ -6091,23 +7328,111 @@
               <a:t>Applicare un threat modeling leggero (4 domande)</a:t>
             </a:r>
           </a:p>
-          <a:p>
-            <a:pPr>
-              <a:lnSpc>
-                <a:spcPct val="150000"/>
-              </a:lnSpc>
-            </a:pPr>
-            <a:r>
-              <a:rPr sz="2000" b="1">
-                <a:solidFill>
-                  <a:srgbClr val="00A0B0"/>
+        </p:txBody>
+      </p:sp>
+      <p:sp>
+        <p:nvSpPr>
+          <p:cNvPr id="15" name="Oval 14"/>
+          <p:cNvSpPr/>
+          <p:nvPr/>
+        </p:nvSpPr>
+        <p:spPr>
+          <a:xfrm>
+            <a:off x="3200400" y="3520440"/>
+            <a:ext cx="548640" cy="548640"/>
+          </a:xfrm>
+          <a:prstGeom prst="ellipse">
+            <a:avLst/>
+          </a:prstGeom>
+          <a:solidFill>
+            <a:srgbClr val="00A0B0"/>
+          </a:solidFill>
+          <a:ln>
+            <a:noFill/>
+          </a:ln>
+        </p:spPr>
+        <p:style>
+          <a:lnRef idx="1">
+            <a:schemeClr val="accent1"/>
+          </a:lnRef>
+          <a:fillRef idx="3">
+            <a:schemeClr val="accent1"/>
+          </a:fillRef>
+          <a:effectRef idx="2">
+            <a:schemeClr val="accent1"/>
+          </a:effectRef>
+          <a:fontRef idx="minor">
+            <a:schemeClr val="lt1"/>
+          </a:fontRef>
+        </p:style>
+        <p:txBody>
+          <a:bodyPr rtlCol="0" anchor="ctr"/>
+          <a:lstStyle/>
+          <a:p>
+            <a:pPr algn="ctr"/>
+          </a:p>
+        </p:txBody>
+      </p:sp>
+      <p:sp>
+        <p:nvSpPr>
+          <p:cNvPr id="16" name="TextBox 15"/>
+          <p:cNvSpPr txBox="1"/>
+          <p:nvPr/>
+        </p:nvSpPr>
+        <p:spPr>
+          <a:xfrm>
+            <a:off x="3200400" y="3520440"/>
+            <a:ext cx="548640" cy="548640"/>
+          </a:xfrm>
+          <a:prstGeom prst="rect">
+            <a:avLst/>
+          </a:prstGeom>
+          <a:noFill/>
+        </p:spPr>
+        <p:txBody>
+          <a:bodyPr wrap="square" lIns="45720" rIns="45720" tIns="18288" bIns="18288" anchor="ctr">
+            <a:spAutoFit/>
+          </a:bodyPr>
+          <a:lstStyle/>
+          <a:p>
+            <a:pPr algn="ctr"/>
+            <a:r>
+              <a:rPr sz="1600" b="1" i="0">
+                <a:solidFill>
+                  <a:srgbClr val="FFFFFF"/>
                 </a:solidFill>
                 <a:latin typeface="Calibri"/>
               </a:rPr>
-              <a:t>▸  </a:t>
-            </a:r>
-            <a:r>
-              <a:rPr sz="2000">
+              <a:t>4</a:t>
+            </a:r>
+          </a:p>
+        </p:txBody>
+      </p:sp>
+      <p:sp>
+        <p:nvSpPr>
+          <p:cNvPr id="17" name="TextBox 16"/>
+          <p:cNvSpPr txBox="1"/>
+          <p:nvPr/>
+        </p:nvSpPr>
+        <p:spPr>
+          <a:xfrm>
+            <a:off x="4023360" y="3593592"/>
+            <a:ext cx="7772400" cy="548640"/>
+          </a:xfrm>
+          <a:prstGeom prst="rect">
+            <a:avLst/>
+          </a:prstGeom>
+          <a:noFill/>
+        </p:spPr>
+        <p:txBody>
+          <a:bodyPr wrap="square" lIns="45720" rIns="45720" tIns="18288" bIns="18288" anchor="ctr">
+            <a:spAutoFit/>
+          </a:bodyPr>
+          <a:lstStyle/>
+          <a:p>
+            <a:pPr algn="l"/>
+            <a:r>
+              <a:rPr sz="1600" b="0" i="0">
                 <a:solidFill>
                   <a:srgbClr val="1A1A2E"/>
                 </a:solidFill>
@@ -6116,23 +7441,111 @@
               <a:t>Usare STRIDE come checklist sistematica</a:t>
             </a:r>
           </a:p>
-          <a:p>
-            <a:pPr>
-              <a:lnSpc>
-                <a:spcPct val="150000"/>
-              </a:lnSpc>
-            </a:pPr>
-            <a:r>
-              <a:rPr sz="2000" b="1">
-                <a:solidFill>
-                  <a:srgbClr val="00A0B0"/>
+        </p:txBody>
+      </p:sp>
+      <p:sp>
+        <p:nvSpPr>
+          <p:cNvPr id="18" name="Oval 17"/>
+          <p:cNvSpPr/>
+          <p:nvPr/>
+        </p:nvSpPr>
+        <p:spPr>
+          <a:xfrm>
+            <a:off x="3200400" y="4297680"/>
+            <a:ext cx="548640" cy="548640"/>
+          </a:xfrm>
+          <a:prstGeom prst="ellipse">
+            <a:avLst/>
+          </a:prstGeom>
+          <a:solidFill>
+            <a:srgbClr val="00A0B0"/>
+          </a:solidFill>
+          <a:ln>
+            <a:noFill/>
+          </a:ln>
+        </p:spPr>
+        <p:style>
+          <a:lnRef idx="1">
+            <a:schemeClr val="accent1"/>
+          </a:lnRef>
+          <a:fillRef idx="3">
+            <a:schemeClr val="accent1"/>
+          </a:fillRef>
+          <a:effectRef idx="2">
+            <a:schemeClr val="accent1"/>
+          </a:effectRef>
+          <a:fontRef idx="minor">
+            <a:schemeClr val="lt1"/>
+          </a:fontRef>
+        </p:style>
+        <p:txBody>
+          <a:bodyPr rtlCol="0" anchor="ctr"/>
+          <a:lstStyle/>
+          <a:p>
+            <a:pPr algn="ctr"/>
+          </a:p>
+        </p:txBody>
+      </p:sp>
+      <p:sp>
+        <p:nvSpPr>
+          <p:cNvPr id="19" name="TextBox 18"/>
+          <p:cNvSpPr txBox="1"/>
+          <p:nvPr/>
+        </p:nvSpPr>
+        <p:spPr>
+          <a:xfrm>
+            <a:off x="3200400" y="4297680"/>
+            <a:ext cx="548640" cy="548640"/>
+          </a:xfrm>
+          <a:prstGeom prst="rect">
+            <a:avLst/>
+          </a:prstGeom>
+          <a:noFill/>
+        </p:spPr>
+        <p:txBody>
+          <a:bodyPr wrap="square" lIns="45720" rIns="45720" tIns="18288" bIns="18288" anchor="ctr">
+            <a:spAutoFit/>
+          </a:bodyPr>
+          <a:lstStyle/>
+          <a:p>
+            <a:pPr algn="ctr"/>
+            <a:r>
+              <a:rPr sz="1600" b="1" i="0">
+                <a:solidFill>
+                  <a:srgbClr val="FFFFFF"/>
                 </a:solidFill>
                 <a:latin typeface="Calibri"/>
               </a:rPr>
-              <a:t>▸  </a:t>
-            </a:r>
-            <a:r>
-              <a:rPr sz="2000">
+              <a:t>5</a:t>
+            </a:r>
+          </a:p>
+        </p:txBody>
+      </p:sp>
+      <p:sp>
+        <p:nvSpPr>
+          <p:cNvPr id="20" name="TextBox 19"/>
+          <p:cNvSpPr txBox="1"/>
+          <p:nvPr/>
+        </p:nvSpPr>
+        <p:spPr>
+          <a:xfrm>
+            <a:off x="4023360" y="4370832"/>
+            <a:ext cx="7772400" cy="548640"/>
+          </a:xfrm>
+          <a:prstGeom prst="rect">
+            <a:avLst/>
+          </a:prstGeom>
+          <a:noFill/>
+        </p:spPr>
+        <p:txBody>
+          <a:bodyPr wrap="square" lIns="45720" rIns="45720" tIns="18288" bIns="18288" anchor="ctr">
+            <a:spAutoFit/>
+          </a:bodyPr>
+          <a:lstStyle/>
+          <a:p>
+            <a:pPr algn="l"/>
+            <a:r>
+              <a:rPr sz="1600" b="0" i="0">
                 <a:solidFill>
                   <a:srgbClr val="1A1A2E"/>
                 </a:solidFill>
@@ -6145,7 +7558,7 @@
       </p:sp>
       <p:cxnSp>
         <p:nvCxnSpPr>
-          <p:cNvPr id="5" name="Connector 4"/>
+          <p:cNvPr id="21" name="Connector 20"/>
           <p:cNvCxnSpPr/>
           <p:nvPr/>
         </p:nvCxnSpPr>
@@ -6180,14 +7593,14 @@
       </p:cxnSp>
       <p:sp>
         <p:nvSpPr>
-          <p:cNvPr id="6" name="TextBox 5"/>
+          <p:cNvPr id="22" name="TextBox 21"/>
           <p:cNvSpPr txBox="1"/>
           <p:nvPr/>
         </p:nvSpPr>
         <p:spPr>
           <a:xfrm>
             <a:off x="457200" y="6473952"/>
-            <a:ext cx="7315200" cy="320040"/>
+            <a:ext cx="7315200" cy="292608"/>
           </a:xfrm>
           <a:prstGeom prst="rect">
             <a:avLst/>
@@ -6208,21 +7621,21 @@
                 </a:solidFill>
                 <a:latin typeface="Calibri"/>
               </a:rPr>
-              <a:t>Secure Coding · Corso IFTS STEM · A. Manneschi</a:t>
-            </a:r>
-          </a:p>
-        </p:txBody>
-      </p:sp>
-      <p:sp>
-        <p:nvSpPr>
-          <p:cNvPr id="7" name="TextBox 6"/>
+              <a:t>Secure Coding · Corso IFTS STEM · A. Manneschi · 2024/2025</a:t>
+            </a:r>
+          </a:p>
+        </p:txBody>
+      </p:sp>
+      <p:sp>
+        <p:nvSpPr>
+          <p:cNvPr id="23" name="TextBox 22"/>
           <p:cNvSpPr txBox="1"/>
           <p:nvPr/>
         </p:nvSpPr>
         <p:spPr>
           <a:xfrm>
             <a:off x="10515600" y="6473952"/>
-            <a:ext cx="1188720" cy="320040"/>
+            <a:ext cx="1188720" cy="292608"/>
           </a:xfrm>
           <a:prstGeom prst="rect">
             <a:avLst/>
@@ -6311,14 +7724,57 @@
       </p:sp>
       <p:sp>
         <p:nvSpPr>
-          <p:cNvPr id="3" name="TextBox 2"/>
+          <p:cNvPr id="3" name="Rectangle 2"/>
+          <p:cNvSpPr/>
+          <p:nvPr/>
+        </p:nvSpPr>
+        <p:spPr>
+          <a:xfrm>
+            <a:off x="0" y="0"/>
+            <a:ext cx="365760" cy="6858000"/>
+          </a:xfrm>
+          <a:prstGeom prst="rect">
+            <a:avLst/>
+          </a:prstGeom>
+          <a:solidFill>
+            <a:srgbClr val="00A0B0"/>
+          </a:solidFill>
+          <a:ln>
+            <a:noFill/>
+          </a:ln>
+        </p:spPr>
+        <p:style>
+          <a:lnRef idx="1">
+            <a:schemeClr val="accent1"/>
+          </a:lnRef>
+          <a:fillRef idx="3">
+            <a:schemeClr val="accent1"/>
+          </a:fillRef>
+          <a:effectRef idx="2">
+            <a:schemeClr val="accent1"/>
+          </a:effectRef>
+          <a:fontRef idx="minor">
+            <a:schemeClr val="lt1"/>
+          </a:fontRef>
+        </p:style>
+        <p:txBody>
+          <a:bodyPr rtlCol="0" anchor="ctr"/>
+          <a:lstStyle/>
+          <a:p>
+            <a:pPr algn="ctr"/>
+          </a:p>
+        </p:txBody>
+      </p:sp>
+      <p:sp>
+        <p:nvSpPr>
+          <p:cNvPr id="4" name="TextBox 3"/>
           <p:cNvSpPr txBox="1"/>
           <p:nvPr/>
         </p:nvSpPr>
         <p:spPr>
           <a:xfrm>
-            <a:off x="457200" y="731520"/>
-            <a:ext cx="1828800" cy="1828800"/>
+            <a:off x="914400" y="914400"/>
+            <a:ext cx="2286000" cy="2286000"/>
           </a:xfrm>
           <a:prstGeom prst="rect">
             <a:avLst/>
@@ -6333,7 +7789,7 @@
           <a:p>
             <a:pPr algn="l"/>
             <a:r>
-              <a:rPr sz="20000" b="1" i="0">
+              <a:rPr sz="25000" b="1" i="0">
                 <a:solidFill>
                   <a:srgbClr val="00A0B0"/>
                 </a:solidFill>
@@ -6346,13 +7802,13 @@
       </p:sp>
       <p:sp>
         <p:nvSpPr>
-          <p:cNvPr id="4" name="TextBox 3"/>
+          <p:cNvPr id="5" name="TextBox 4"/>
           <p:cNvSpPr txBox="1"/>
           <p:nvPr/>
         </p:nvSpPr>
         <p:spPr>
           <a:xfrm>
-            <a:off x="2286000" y="1828800"/>
+            <a:off x="2286000" y="2286000"/>
             <a:ext cx="9144000" cy="3200400"/>
           </a:xfrm>
           <a:prstGeom prst="rect">
@@ -6372,44 +7828,9 @@
                 <a:solidFill>
                   <a:srgbClr val="0F2D52"/>
                 </a:solidFill>
-                <a:latin typeface="Calibri"/>
+                <a:latin typeface="Georgia"/>
               </a:rPr>
               <a:t>Bug a design: 1x. In coding: 5x. In testing: 10x. In produzione: 100x.</a:t>
-            </a:r>
-          </a:p>
-        </p:txBody>
-      </p:sp>
-      <p:sp>
-        <p:nvSpPr>
-          <p:cNvPr id="5" name="TextBox 4"/>
-          <p:cNvSpPr txBox="1"/>
-          <p:nvPr/>
-        </p:nvSpPr>
-        <p:spPr>
-          <a:xfrm>
-            <a:off x="2286000" y="5029200"/>
-            <a:ext cx="9144000" cy="457200"/>
-          </a:xfrm>
-          <a:prstGeom prst="rect">
-            <a:avLst/>
-          </a:prstGeom>
-          <a:noFill/>
-        </p:spPr>
-        <p:txBody>
-          <a:bodyPr wrap="square" lIns="45720" rIns="45720" tIns="18288" bIns="18288" anchor="t">
-            <a:spAutoFit/>
-          </a:bodyPr>
-          <a:lstStyle/>
-          <a:p>
-            <a:pPr algn="l"/>
-            <a:r>
-              <a:rPr sz="1600" b="0" i="1">
-                <a:solidFill>
-                  <a:srgbClr val="6B7280"/>
-                </a:solidFill>
-                <a:latin typeface="Calibri"/>
-              </a:rPr>
-              <a:t>— IBM Cost of a Data Breach Report</a:t>
             </a:r>
           </a:p>
         </p:txBody>
@@ -6422,13 +7843,13 @@
         </p:nvCxnSpPr>
         <p:spPr>
           <a:xfrm>
-            <a:off x="457200" y="6446520"/>
-            <a:ext cx="11274552" cy="0"/>
+            <a:off x="2286000" y="5029200"/>
+            <a:ext cx="1828800" cy="0"/>
           </a:xfrm>
           <a:prstGeom prst="line">
             <a:avLst/>
           </a:prstGeom>
-          <a:ln w="19050">
+          <a:ln w="38100">
             <a:solidFill>
               <a:srgbClr val="00A0B0"/>
             </a:solidFill>
@@ -6457,8 +7878,8 @@
         </p:nvSpPr>
         <p:spPr>
           <a:xfrm>
-            <a:off x="457200" y="6473952"/>
-            <a:ext cx="7315200" cy="320040"/>
+            <a:off x="2286000" y="5212080"/>
+            <a:ext cx="9144000" cy="457200"/>
           </a:xfrm>
           <a:prstGeom prst="rect">
             <a:avLst/>
@@ -6473,27 +7894,97 @@
           <a:p>
             <a:pPr algn="l"/>
             <a:r>
-              <a:rPr sz="1000" b="0" i="0">
+              <a:rPr sz="1600" b="0" i="1">
                 <a:solidFill>
                   <a:srgbClr val="6B7280"/>
                 </a:solidFill>
                 <a:latin typeface="Calibri"/>
               </a:rPr>
-              <a:t>Secure Coding · Corso IFTS STEM · A. Manneschi</a:t>
-            </a:r>
-          </a:p>
-        </p:txBody>
-      </p:sp>
-      <p:sp>
-        <p:nvSpPr>
-          <p:cNvPr id="8" name="TextBox 7"/>
+              <a:t>— IBM Cost of a Data Breach Report</a:t>
+            </a:r>
+          </a:p>
+        </p:txBody>
+      </p:sp>
+      <p:cxnSp>
+        <p:nvCxnSpPr>
+          <p:cNvPr id="8" name="Connector 7"/>
+          <p:cNvCxnSpPr/>
+          <p:nvPr/>
+        </p:nvCxnSpPr>
+        <p:spPr>
+          <a:xfrm>
+            <a:off x="457200" y="6446520"/>
+            <a:ext cx="11274552" cy="0"/>
+          </a:xfrm>
+          <a:prstGeom prst="line">
+            <a:avLst/>
+          </a:prstGeom>
+          <a:ln w="19050">
+            <a:solidFill>
+              <a:srgbClr val="00A0B0"/>
+            </a:solidFill>
+          </a:ln>
+        </p:spPr>
+        <p:style>
+          <a:lnRef idx="2">
+            <a:schemeClr val="accent1"/>
+          </a:lnRef>
+          <a:fillRef idx="0">
+            <a:schemeClr val="accent1"/>
+          </a:fillRef>
+          <a:effectRef idx="1">
+            <a:schemeClr val="accent1"/>
+          </a:effectRef>
+          <a:fontRef idx="minor">
+            <a:schemeClr val="tx1"/>
+          </a:fontRef>
+        </p:style>
+      </p:cxnSp>
+      <p:sp>
+        <p:nvSpPr>
+          <p:cNvPr id="9" name="TextBox 8"/>
           <p:cNvSpPr txBox="1"/>
           <p:nvPr/>
         </p:nvSpPr>
         <p:spPr>
           <a:xfrm>
+            <a:off x="457200" y="6473952"/>
+            <a:ext cx="7315200" cy="292608"/>
+          </a:xfrm>
+          <a:prstGeom prst="rect">
+            <a:avLst/>
+          </a:prstGeom>
+          <a:noFill/>
+        </p:spPr>
+        <p:txBody>
+          <a:bodyPr wrap="square" lIns="45720" rIns="45720" tIns="18288" bIns="18288" anchor="t">
+            <a:spAutoFit/>
+          </a:bodyPr>
+          <a:lstStyle/>
+          <a:p>
+            <a:pPr algn="l"/>
+            <a:r>
+              <a:rPr sz="1000" b="0" i="0">
+                <a:solidFill>
+                  <a:srgbClr val="6B7280"/>
+                </a:solidFill>
+                <a:latin typeface="Calibri"/>
+              </a:rPr>
+              <a:t>Secure Coding · Corso IFTS STEM · A. Manneschi · 2024/2025</a:t>
+            </a:r>
+          </a:p>
+        </p:txBody>
+      </p:sp>
+      <p:sp>
+        <p:nvSpPr>
+          <p:cNvPr id="10" name="TextBox 9"/>
+          <p:cNvSpPr txBox="1"/>
+          <p:nvPr/>
+        </p:nvSpPr>
+        <p:spPr>
+          <a:xfrm>
             <a:off x="10515600" y="6473952"/>
-            <a:ext cx="1188720" cy="320040"/>
+            <a:ext cx="1188720" cy="292608"/>
           </a:xfrm>
           <a:prstGeom prst="rect">
             <a:avLst/>
@@ -6610,380 +8101,6 @@
                 </a:solidFill>
                 <a:latin typeface="Calibri"/>
               </a:rPr>
-              <a:t>OWASP — cosa è</a:t>
-            </a:r>
-          </a:p>
-        </p:txBody>
-      </p:sp>
-      <p:sp>
-        <p:nvSpPr>
-          <p:cNvPr id="4" name="TextBox 3"/>
-          <p:cNvSpPr txBox="1"/>
-          <p:nvPr/>
-        </p:nvSpPr>
-        <p:spPr>
-          <a:xfrm>
-            <a:off x="640080" y="1005840"/>
-            <a:ext cx="10972800" cy="5029200"/>
-          </a:xfrm>
-          <a:prstGeom prst="rect">
-            <a:avLst/>
-          </a:prstGeom>
-          <a:noFill/>
-        </p:spPr>
-        <p:txBody>
-          <a:bodyPr wrap="square">
-            <a:spAutoFit/>
-          </a:bodyPr>
-          <a:lstStyle/>
-          <a:p>
-            <a:pPr>
-              <a:lnSpc>
-                <a:spcPct val="150000"/>
-              </a:lnSpc>
-            </a:pPr>
-            <a:r>
-              <a:rPr sz="2000" b="1">
-                <a:solidFill>
-                  <a:srgbClr val="00A0B0"/>
-                </a:solidFill>
-                <a:latin typeface="Calibri"/>
-              </a:rPr>
-              <a:t>▸  </a:t>
-            </a:r>
-            <a:r>
-              <a:rPr sz="2000">
-                <a:solidFill>
-                  <a:srgbClr val="1A1A2E"/>
-                </a:solidFill>
-                <a:latin typeface="Calibri"/>
-              </a:rPr>
-              <a:t>Open Web Application Security Project</a:t>
-            </a:r>
-          </a:p>
-          <a:p>
-            <a:pPr>
-              <a:lnSpc>
-                <a:spcPct val="150000"/>
-              </a:lnSpc>
-            </a:pPr>
-            <a:r>
-              <a:rPr sz="2000" b="1">
-                <a:solidFill>
-                  <a:srgbClr val="00A0B0"/>
-                </a:solidFill>
-                <a:latin typeface="Calibri"/>
-              </a:rPr>
-              <a:t>▸  </a:t>
-            </a:r>
-            <a:r>
-              <a:rPr sz="2000">
-                <a:solidFill>
-                  <a:srgbClr val="1A1A2E"/>
-                </a:solidFill>
-                <a:latin typeface="Calibri"/>
-              </a:rPr>
-              <a:t>Fondazione no-profit, internazionale, dal 2001</a:t>
-            </a:r>
-          </a:p>
-          <a:p>
-            <a:pPr>
-              <a:lnSpc>
-                <a:spcPct val="150000"/>
-              </a:lnSpc>
-            </a:pPr>
-            <a:r>
-              <a:rPr sz="2000" b="1">
-                <a:solidFill>
-                  <a:srgbClr val="00A0B0"/>
-                </a:solidFill>
-                <a:latin typeface="Calibri"/>
-              </a:rPr>
-              <a:t>▸  </a:t>
-            </a:r>
-            <a:r>
-              <a:rPr sz="2000">
-                <a:solidFill>
-                  <a:srgbClr val="1A1A2E"/>
-                </a:solidFill>
-                <a:latin typeface="Calibri"/>
-              </a:rPr>
-              <a:t>Tutto gratuito, niente vendita</a:t>
-            </a:r>
-          </a:p>
-          <a:p>
-            <a:pPr>
-              <a:lnSpc>
-                <a:spcPct val="150000"/>
-              </a:lnSpc>
-            </a:pPr>
-            <a:r>
-              <a:rPr sz="2000" b="1">
-                <a:solidFill>
-                  <a:srgbClr val="00A0B0"/>
-                </a:solidFill>
-                <a:latin typeface="Calibri"/>
-              </a:rPr>
-              <a:t>▸  </a:t>
-            </a:r>
-            <a:r>
-              <a:rPr sz="2000">
-                <a:solidFill>
-                  <a:srgbClr val="1A1A2E"/>
-                </a:solidFill>
-                <a:latin typeface="Calibri"/>
-              </a:rPr>
-              <a:t>Standard de facto della sicurezza applicativa</a:t>
-            </a:r>
-          </a:p>
-          <a:p>
-            <a:pPr>
-              <a:lnSpc>
-                <a:spcPct val="150000"/>
-              </a:lnSpc>
-            </a:pPr>
-            <a:r>
-              <a:rPr sz="2000" b="1">
-                <a:solidFill>
-                  <a:srgbClr val="00A0B0"/>
-                </a:solidFill>
-                <a:latin typeface="Calibri"/>
-              </a:rPr>
-              <a:t>▸  </a:t>
-            </a:r>
-            <a:r>
-              <a:rPr sz="2000">
-                <a:solidFill>
-                  <a:srgbClr val="1A1A2E"/>
-                </a:solidFill>
-                <a:latin typeface="Calibri"/>
-              </a:rPr>
-              <a:t/>
-            </a:r>
-          </a:p>
-          <a:p>
-            <a:pPr>
-              <a:lnSpc>
-                <a:spcPct val="150000"/>
-              </a:lnSpc>
-            </a:pPr>
-            <a:r>
-              <a:rPr sz="2000" b="1">
-                <a:solidFill>
-                  <a:srgbClr val="00A0B0"/>
-                </a:solidFill>
-                <a:latin typeface="Calibri"/>
-              </a:rPr>
-              <a:t>▸  </a:t>
-            </a:r>
-            <a:r>
-              <a:rPr sz="2000">
-                <a:solidFill>
-                  <a:srgbClr val="1A1A2E"/>
-                </a:solidFill>
-                <a:latin typeface="Calibri"/>
-              </a:rPr>
-              <a:t>Produce: Top 10, Cheat Sheets, ASVS, ZAP, ...</a:t>
-            </a:r>
-          </a:p>
-        </p:txBody>
-      </p:sp>
-      <p:cxnSp>
-        <p:nvCxnSpPr>
-          <p:cNvPr id="5" name="Connector 4"/>
-          <p:cNvCxnSpPr/>
-          <p:nvPr/>
-        </p:nvCxnSpPr>
-        <p:spPr>
-          <a:xfrm>
-            <a:off x="457200" y="6446520"/>
-            <a:ext cx="11274552" cy="0"/>
-          </a:xfrm>
-          <a:prstGeom prst="line">
-            <a:avLst/>
-          </a:prstGeom>
-          <a:ln w="19050">
-            <a:solidFill>
-              <a:srgbClr val="00A0B0"/>
-            </a:solidFill>
-          </a:ln>
-        </p:spPr>
-        <p:style>
-          <a:lnRef idx="2">
-            <a:schemeClr val="accent1"/>
-          </a:lnRef>
-          <a:fillRef idx="0">
-            <a:schemeClr val="accent1"/>
-          </a:fillRef>
-          <a:effectRef idx="1">
-            <a:schemeClr val="accent1"/>
-          </a:effectRef>
-          <a:fontRef idx="minor">
-            <a:schemeClr val="tx1"/>
-          </a:fontRef>
-        </p:style>
-      </p:cxnSp>
-      <p:sp>
-        <p:nvSpPr>
-          <p:cNvPr id="6" name="TextBox 5"/>
-          <p:cNvSpPr txBox="1"/>
-          <p:nvPr/>
-        </p:nvSpPr>
-        <p:spPr>
-          <a:xfrm>
-            <a:off x="457200" y="6473952"/>
-            <a:ext cx="7315200" cy="320040"/>
-          </a:xfrm>
-          <a:prstGeom prst="rect">
-            <a:avLst/>
-          </a:prstGeom>
-          <a:noFill/>
-        </p:spPr>
-        <p:txBody>
-          <a:bodyPr wrap="square" lIns="45720" rIns="45720" tIns="18288" bIns="18288" anchor="t">
-            <a:spAutoFit/>
-          </a:bodyPr>
-          <a:lstStyle/>
-          <a:p>
-            <a:pPr algn="l"/>
-            <a:r>
-              <a:rPr sz="1000" b="0" i="0">
-                <a:solidFill>
-                  <a:srgbClr val="6B7280"/>
-                </a:solidFill>
-                <a:latin typeface="Calibri"/>
-              </a:rPr>
-              <a:t>Secure Coding · Corso IFTS STEM · A. Manneschi</a:t>
-            </a:r>
-          </a:p>
-        </p:txBody>
-      </p:sp>
-      <p:sp>
-        <p:nvSpPr>
-          <p:cNvPr id="7" name="TextBox 6"/>
-          <p:cNvSpPr txBox="1"/>
-          <p:nvPr/>
-        </p:nvSpPr>
-        <p:spPr>
-          <a:xfrm>
-            <a:off x="10515600" y="6473952"/>
-            <a:ext cx="1188720" cy="320040"/>
-          </a:xfrm>
-          <a:prstGeom prst="rect">
-            <a:avLst/>
-          </a:prstGeom>
-          <a:noFill/>
-        </p:spPr>
-        <p:txBody>
-          <a:bodyPr wrap="square" lIns="45720" rIns="45720" tIns="18288" bIns="18288" anchor="t">
-            <a:spAutoFit/>
-          </a:bodyPr>
-          <a:lstStyle/>
-          <a:p>
-            <a:pPr algn="r"/>
-            <a:r>
-              <a:rPr sz="1000" b="1" i="0">
-                <a:solidFill>
-                  <a:srgbClr val="6B7280"/>
-                </a:solidFill>
-                <a:latin typeface="Calibri"/>
-              </a:rPr>
-              <a:t>L2  ·  4/14</a:t>
-            </a:r>
-          </a:p>
-        </p:txBody>
-      </p:sp>
-    </p:spTree>
-  </p:cSld>
-  <p:clrMapOvr>
-    <a:masterClrMapping/>
-  </p:clrMapOvr>
-</p:sld>
-</file>
-
-<file path=ppt/slides/slide5.xml><?xml version="1.0" encoding="utf-8"?>
-<p:sld xmlns:a="http://schemas.openxmlformats.org/drawingml/2006/main" xmlns:p="http://schemas.openxmlformats.org/presentationml/2006/main" xmlns:r="http://schemas.openxmlformats.org/officeDocument/2006/relationships">
-  <p:cSld>
-    <p:spTree>
-      <p:nvGrpSpPr>
-        <p:cNvPr id="1" name=""/>
-        <p:cNvGrpSpPr/>
-        <p:nvPr/>
-      </p:nvGrpSpPr>
-      <p:grpSpPr/>
-      <p:sp>
-        <p:nvSpPr>
-          <p:cNvPr id="2" name="Rectangle 1"/>
-          <p:cNvSpPr/>
-          <p:nvPr/>
-        </p:nvSpPr>
-        <p:spPr>
-          <a:xfrm>
-            <a:off x="0" y="0"/>
-            <a:ext cx="12191695" cy="777240"/>
-          </a:xfrm>
-          <a:prstGeom prst="rect">
-            <a:avLst/>
-          </a:prstGeom>
-          <a:solidFill>
-            <a:srgbClr val="0F2D52"/>
-          </a:solidFill>
-          <a:ln>
-            <a:noFill/>
-          </a:ln>
-        </p:spPr>
-        <p:style>
-          <a:lnRef idx="1">
-            <a:schemeClr val="accent1"/>
-          </a:lnRef>
-          <a:fillRef idx="3">
-            <a:schemeClr val="accent1"/>
-          </a:fillRef>
-          <a:effectRef idx="2">
-            <a:schemeClr val="accent1"/>
-          </a:effectRef>
-          <a:fontRef idx="minor">
-            <a:schemeClr val="lt1"/>
-          </a:fontRef>
-        </p:style>
-        <p:txBody>
-          <a:bodyPr rtlCol="0" anchor="ctr"/>
-          <a:lstStyle/>
-          <a:p>
-            <a:pPr algn="ctr"/>
-          </a:p>
-        </p:txBody>
-      </p:sp>
-      <p:sp>
-        <p:nvSpPr>
-          <p:cNvPr id="3" name="TextBox 2"/>
-          <p:cNvSpPr txBox="1"/>
-          <p:nvPr/>
-        </p:nvSpPr>
-        <p:spPr>
-          <a:xfrm>
-            <a:off x="457200" y="164592"/>
-            <a:ext cx="10972800" cy="502920"/>
-          </a:xfrm>
-          <a:prstGeom prst="rect">
-            <a:avLst/>
-          </a:prstGeom>
-          <a:noFill/>
-        </p:spPr>
-        <p:txBody>
-          <a:bodyPr wrap="square" lIns="45720" rIns="45720" tIns="18288" bIns="18288" anchor="ctr">
-            <a:spAutoFit/>
-          </a:bodyPr>
-          <a:lstStyle/>
-          <a:p>
-            <a:pPr algn="l"/>
-            <a:r>
-              <a:rPr sz="2400" b="1" i="0">
-                <a:solidFill>
-                  <a:srgbClr val="FFFFFF"/>
-                </a:solidFill>
-                <a:latin typeface="Calibri"/>
-              </a:rPr>
               <a:t>OWASP Top 10 (2021/2025)</a:t>
             </a:r>
           </a:p>
@@ -6999,7 +8116,7 @@
         </p:nvGraphicFramePr>
         <p:xfrm>
           <a:off x="457200" y="1188720"/>
-          <a:ext cx="11247120" cy="5029200"/>
+          <a:ext cx="11247120" cy="4937760"/>
         </p:xfrm>
         <a:graphic>
           <a:graphicData uri="http://schemas.openxmlformats.org/drawingml/2006/table">
@@ -7012,7 +8129,7 @@
                 <a:gridCol w="3749040"/>
                 <a:gridCol w="3749040"/>
               </a:tblGrid>
-              <a:tr h="457200">
+              <a:tr h="448887">
                 <a:tc>
                   <a:txBody>
                     <a:bodyPr/>
@@ -7020,7 +8137,7 @@
                     <a:p>
                       <a:pPr algn="ctr"/>
                       <a:r>
-                        <a:rPr sz="1400" b="1">
+                        <a:rPr sz="1300" b="1">
                           <a:solidFill>
                             <a:srgbClr val="FFFFFF"/>
                           </a:solidFill>
@@ -7043,7 +8160,7 @@
                     <a:p>
                       <a:pPr algn="ctr"/>
                       <a:r>
-                        <a:rPr sz="1400" b="1">
+                        <a:rPr sz="1300" b="1">
                           <a:solidFill>
                             <a:srgbClr val="FFFFFF"/>
                           </a:solidFill>
@@ -7066,7 +8183,7 @@
                     <a:p>
                       <a:pPr algn="ctr"/>
                       <a:r>
-                        <a:rPr sz="1400" b="1">
+                        <a:rPr sz="1300" b="1">
                           <a:solidFill>
                             <a:srgbClr val="FFFFFF"/>
                           </a:solidFill>
@@ -7083,15 +8200,14 @@
                   </a:tcPr>
                 </a:tc>
               </a:tr>
-              <a:tr h="457200">
+              <a:tr h="448887">
                 <a:tc>
                   <a:txBody>
                     <a:bodyPr/>
                     <a:lstStyle/>
                     <a:p>
-                      <a:pPr algn="l"/>
                       <a:r>
-                        <a:rPr sz="1200">
+                        <a:rPr sz="1100">
                           <a:solidFill>
                             <a:srgbClr val="1A1A2E"/>
                           </a:solidFill>
@@ -7112,9 +8228,8 @@
                     <a:bodyPr/>
                     <a:lstStyle/>
                     <a:p>
-                      <a:pPr algn="l"/>
                       <a:r>
-                        <a:rPr sz="1200">
+                        <a:rPr sz="1100">
                           <a:solidFill>
                             <a:srgbClr val="1A1A2E"/>
                           </a:solidFill>
@@ -7135,9 +8250,8 @@
                     <a:bodyPr/>
                     <a:lstStyle/>
                     <a:p>
-                      <a:pPr algn="l"/>
                       <a:r>
-                        <a:rPr sz="1200">
+                        <a:rPr sz="1100">
                           <a:solidFill>
                             <a:srgbClr val="1A1A2E"/>
                           </a:solidFill>
@@ -7154,15 +8268,14 @@
                   </a:tcPr>
                 </a:tc>
               </a:tr>
-              <a:tr h="457200">
+              <a:tr h="448887">
                 <a:tc>
                   <a:txBody>
                     <a:bodyPr/>
                     <a:lstStyle/>
                     <a:p>
-                      <a:pPr algn="l"/>
                       <a:r>
-                        <a:rPr sz="1200">
+                        <a:rPr sz="1100">
                           <a:solidFill>
                             <a:srgbClr val="1A1A2E"/>
                           </a:solidFill>
@@ -7183,9 +8296,8 @@
                     <a:bodyPr/>
                     <a:lstStyle/>
                     <a:p>
-                      <a:pPr algn="l"/>
                       <a:r>
-                        <a:rPr sz="1200">
+                        <a:rPr sz="1100">
                           <a:solidFill>
                             <a:srgbClr val="1A1A2E"/>
                           </a:solidFill>
@@ -7206,9 +8318,8 @@
                     <a:bodyPr/>
                     <a:lstStyle/>
                     <a:p>
-                      <a:pPr algn="l"/>
                       <a:r>
-                        <a:rPr sz="1200">
+                        <a:rPr sz="1100">
                           <a:solidFill>
                             <a:srgbClr val="1A1A2E"/>
                           </a:solidFill>
@@ -7225,15 +8336,14 @@
                   </a:tcPr>
                 </a:tc>
               </a:tr>
-              <a:tr h="457200">
+              <a:tr h="448887">
                 <a:tc>
                   <a:txBody>
                     <a:bodyPr/>
                     <a:lstStyle/>
                     <a:p>
-                      <a:pPr algn="l"/>
                       <a:r>
-                        <a:rPr sz="1200">
+                        <a:rPr sz="1100">
                           <a:solidFill>
                             <a:srgbClr val="1A1A2E"/>
                           </a:solidFill>
@@ -7254,9 +8364,8 @@
                     <a:bodyPr/>
                     <a:lstStyle/>
                     <a:p>
-                      <a:pPr algn="l"/>
                       <a:r>
-                        <a:rPr sz="1200">
+                        <a:rPr sz="1100">
                           <a:solidFill>
                             <a:srgbClr val="1A1A2E"/>
                           </a:solidFill>
@@ -7277,9 +8386,8 @@
                     <a:bodyPr/>
                     <a:lstStyle/>
                     <a:p>
-                      <a:pPr algn="l"/>
                       <a:r>
-                        <a:rPr sz="1200">
+                        <a:rPr sz="1100">
                           <a:solidFill>
                             <a:srgbClr val="1A1A2E"/>
                           </a:solidFill>
@@ -7296,15 +8404,14 @@
                   </a:tcPr>
                 </a:tc>
               </a:tr>
-              <a:tr h="457200">
+              <a:tr h="448887">
                 <a:tc>
                   <a:txBody>
                     <a:bodyPr/>
                     <a:lstStyle/>
                     <a:p>
-                      <a:pPr algn="l"/>
                       <a:r>
-                        <a:rPr sz="1200">
+                        <a:rPr sz="1100">
                           <a:solidFill>
                             <a:srgbClr val="1A1A2E"/>
                           </a:solidFill>
@@ -7325,9 +8432,8 @@
                     <a:bodyPr/>
                     <a:lstStyle/>
                     <a:p>
-                      <a:pPr algn="l"/>
                       <a:r>
-                        <a:rPr sz="1200">
+                        <a:rPr sz="1100">
                           <a:solidFill>
                             <a:srgbClr val="1A1A2E"/>
                           </a:solidFill>
@@ -7348,9 +8454,8 @@
                     <a:bodyPr/>
                     <a:lstStyle/>
                     <a:p>
-                      <a:pPr algn="l"/>
                       <a:r>
-                        <a:rPr sz="1200">
+                        <a:rPr sz="1100">
                           <a:solidFill>
                             <a:srgbClr val="1A1A2E"/>
                           </a:solidFill>
@@ -7367,15 +8472,14 @@
                   </a:tcPr>
                 </a:tc>
               </a:tr>
-              <a:tr h="457200">
+              <a:tr h="448887">
                 <a:tc>
                   <a:txBody>
                     <a:bodyPr/>
                     <a:lstStyle/>
                     <a:p>
-                      <a:pPr algn="l"/>
                       <a:r>
-                        <a:rPr sz="1200">
+                        <a:rPr sz="1100">
                           <a:solidFill>
                             <a:srgbClr val="1A1A2E"/>
                           </a:solidFill>
@@ -7396,9 +8500,8 @@
                     <a:bodyPr/>
                     <a:lstStyle/>
                     <a:p>
-                      <a:pPr algn="l"/>
                       <a:r>
-                        <a:rPr sz="1200">
+                        <a:rPr sz="1100">
                           <a:solidFill>
                             <a:srgbClr val="1A1A2E"/>
                           </a:solidFill>
@@ -7419,15 +8522,14 @@
                     <a:bodyPr/>
                     <a:lstStyle/>
                     <a:p>
-                      <a:pPr algn="l"/>
                       <a:r>
-                        <a:rPr sz="1200">
+                        <a:rPr sz="1100">
                           <a:solidFill>
                             <a:srgbClr val="1A1A2E"/>
                           </a:solidFill>
                           <a:latin typeface="Calibri"/>
                         </a:rPr>
-                        <a:t>Default credentials, debug=True in prod</a:t>
+                        <a:t>debug=True in prod</a:t>
                       </a:r>
                     </a:p>
                   </a:txBody>
@@ -7438,15 +8540,14 @@
                   </a:tcPr>
                 </a:tc>
               </a:tr>
-              <a:tr h="457200">
+              <a:tr h="448887">
                 <a:tc>
                   <a:txBody>
                     <a:bodyPr/>
                     <a:lstStyle/>
                     <a:p>
-                      <a:pPr algn="l"/>
                       <a:r>
-                        <a:rPr sz="1200">
+                        <a:rPr sz="1100">
                           <a:solidFill>
                             <a:srgbClr val="1A1A2E"/>
                           </a:solidFill>
@@ -7467,9 +8568,8 @@
                     <a:bodyPr/>
                     <a:lstStyle/>
                     <a:p>
-                      <a:pPr algn="l"/>
                       <a:r>
-                        <a:rPr sz="1200">
+                        <a:rPr sz="1100">
                           <a:solidFill>
                             <a:srgbClr val="1A1A2E"/>
                           </a:solidFill>
@@ -7490,15 +8590,14 @@
                     <a:bodyPr/>
                     <a:lstStyle/>
                     <a:p>
-                      <a:pPr algn="l"/>
                       <a:r>
-                        <a:rPr sz="1200">
+                        <a:rPr sz="1100">
                           <a:solidFill>
                             <a:srgbClr val="1A1A2E"/>
                           </a:solidFill>
                           <a:latin typeface="Calibri"/>
                         </a:rPr>
-                        <a:t>Libreria con CVE nota (es. Log4Shell)</a:t>
+                        <a:t>Libreria con CVE nota (Log4Shell)</a:t>
                       </a:r>
                     </a:p>
                   </a:txBody>
@@ -7509,15 +8608,14 @@
                   </a:tcPr>
                 </a:tc>
               </a:tr>
-              <a:tr h="457200">
+              <a:tr h="448887">
                 <a:tc>
                   <a:txBody>
                     <a:bodyPr/>
                     <a:lstStyle/>
                     <a:p>
-                      <a:pPr algn="l"/>
                       <a:r>
-                        <a:rPr sz="1200">
+                        <a:rPr sz="1100">
                           <a:solidFill>
                             <a:srgbClr val="1A1A2E"/>
                           </a:solidFill>
@@ -7538,9 +8636,8 @@
                     <a:bodyPr/>
                     <a:lstStyle/>
                     <a:p>
-                      <a:pPr algn="l"/>
                       <a:r>
-                        <a:rPr sz="1200">
+                        <a:rPr sz="1100">
                           <a:solidFill>
                             <a:srgbClr val="1A1A2E"/>
                           </a:solidFill>
@@ -7561,9 +8658,8 @@
                     <a:bodyPr/>
                     <a:lstStyle/>
                     <a:p>
-                      <a:pPr algn="l"/>
                       <a:r>
-                        <a:rPr sz="1200">
+                        <a:rPr sz="1100">
                           <a:solidFill>
                             <a:srgbClr val="1A1A2E"/>
                           </a:solidFill>
@@ -7580,15 +8676,14 @@
                   </a:tcPr>
                 </a:tc>
               </a:tr>
-              <a:tr h="457200">
+              <a:tr h="448887">
                 <a:tc>
                   <a:txBody>
                     <a:bodyPr/>
                     <a:lstStyle/>
                     <a:p>
-                      <a:pPr algn="l"/>
                       <a:r>
-                        <a:rPr sz="1200">
+                        <a:rPr sz="1100">
                           <a:solidFill>
                             <a:srgbClr val="1A1A2E"/>
                           </a:solidFill>
@@ -7609,9 +8704,8 @@
                     <a:bodyPr/>
                     <a:lstStyle/>
                     <a:p>
-                      <a:pPr algn="l"/>
                       <a:r>
-                        <a:rPr sz="1200">
+                        <a:rPr sz="1100">
                           <a:solidFill>
                             <a:srgbClr val="1A1A2E"/>
                           </a:solidFill>
@@ -7632,9 +8726,8 @@
                     <a:bodyPr/>
                     <a:lstStyle/>
                     <a:p>
-                      <a:pPr algn="l"/>
                       <a:r>
-                        <a:rPr sz="1200">
+                        <a:rPr sz="1100">
                           <a:solidFill>
                             <a:srgbClr val="1A1A2E"/>
                           </a:solidFill>
@@ -7651,15 +8744,14 @@
                   </a:tcPr>
                 </a:tc>
               </a:tr>
-              <a:tr h="457200">
+              <a:tr h="448887">
                 <a:tc>
                   <a:txBody>
                     <a:bodyPr/>
                     <a:lstStyle/>
                     <a:p>
-                      <a:pPr algn="l"/>
                       <a:r>
-                        <a:rPr sz="1200">
+                        <a:rPr sz="1100">
                           <a:solidFill>
                             <a:srgbClr val="1A1A2E"/>
                           </a:solidFill>
@@ -7680,9 +8772,8 @@
                     <a:bodyPr/>
                     <a:lstStyle/>
                     <a:p>
-                      <a:pPr algn="l"/>
                       <a:r>
-                        <a:rPr sz="1200">
+                        <a:rPr sz="1100">
                           <a:solidFill>
                             <a:srgbClr val="1A1A2E"/>
                           </a:solidFill>
@@ -7703,9 +8794,8 @@
                     <a:bodyPr/>
                     <a:lstStyle/>
                     <a:p>
-                      <a:pPr algn="l"/>
                       <a:r>
-                        <a:rPr sz="1200">
+                        <a:rPr sz="1100">
                           <a:solidFill>
                             <a:srgbClr val="1A1A2E"/>
                           </a:solidFill>
@@ -7722,15 +8812,14 @@
                   </a:tcPr>
                 </a:tc>
               </a:tr>
-              <a:tr h="457200">
+              <a:tr h="448890">
                 <a:tc>
                   <a:txBody>
                     <a:bodyPr/>
                     <a:lstStyle/>
                     <a:p>
-                      <a:pPr algn="l"/>
                       <a:r>
-                        <a:rPr sz="1200">
+                        <a:rPr sz="1100">
                           <a:solidFill>
                             <a:srgbClr val="1A1A2E"/>
                           </a:solidFill>
@@ -7751,9 +8840,8 @@
                     <a:bodyPr/>
                     <a:lstStyle/>
                     <a:p>
-                      <a:pPr algn="l"/>
                       <a:r>
-                        <a:rPr sz="1200">
+                        <a:rPr sz="1100">
                           <a:solidFill>
                             <a:srgbClr val="1A1A2E"/>
                           </a:solidFill>
@@ -7774,9 +8862,8 @@
                     <a:bodyPr/>
                     <a:lstStyle/>
                     <a:p>
-                      <a:pPr algn="l"/>
                       <a:r>
-                        <a:rPr sz="1200">
+                        <a:rPr sz="1100">
                           <a:solidFill>
                             <a:srgbClr val="1A1A2E"/>
                           </a:solidFill>
@@ -7841,7 +8928,7 @@
         <p:spPr>
           <a:xfrm>
             <a:off x="457200" y="6473952"/>
-            <a:ext cx="7315200" cy="320040"/>
+            <a:ext cx="7315200" cy="292608"/>
           </a:xfrm>
           <a:prstGeom prst="rect">
             <a:avLst/>
@@ -7862,7 +8949,7 @@
                 </a:solidFill>
                 <a:latin typeface="Calibri"/>
               </a:rPr>
-              <a:t>Secure Coding · Corso IFTS STEM · A. Manneschi</a:t>
+              <a:t>Secure Coding · Corso IFTS STEM · A. Manneschi · 2024/2025</a:t>
             </a:r>
           </a:p>
         </p:txBody>
@@ -7876,7 +8963,646 @@
         <p:spPr>
           <a:xfrm>
             <a:off x="10515600" y="6473952"/>
-            <a:ext cx="1188720" cy="320040"/>
+            <a:ext cx="1188720" cy="292608"/>
+          </a:xfrm>
+          <a:prstGeom prst="rect">
+            <a:avLst/>
+          </a:prstGeom>
+          <a:noFill/>
+        </p:spPr>
+        <p:txBody>
+          <a:bodyPr wrap="square" lIns="45720" rIns="45720" tIns="18288" bIns="18288" anchor="t">
+            <a:spAutoFit/>
+          </a:bodyPr>
+          <a:lstStyle/>
+          <a:p>
+            <a:pPr algn="r"/>
+            <a:r>
+              <a:rPr sz="1000" b="1" i="0">
+                <a:solidFill>
+                  <a:srgbClr val="6B7280"/>
+                </a:solidFill>
+                <a:latin typeface="Calibri"/>
+              </a:rPr>
+              <a:t>L2  ·  4/14</a:t>
+            </a:r>
+          </a:p>
+        </p:txBody>
+      </p:sp>
+    </p:spTree>
+  </p:cSld>
+  <p:clrMapOvr>
+    <a:masterClrMapping/>
+  </p:clrMapOvr>
+</p:sld>
+</file>
+
+<file path=ppt/slides/slide5.xml><?xml version="1.0" encoding="utf-8"?>
+<p:sld xmlns:a="http://schemas.openxmlformats.org/drawingml/2006/main" xmlns:p="http://schemas.openxmlformats.org/presentationml/2006/main" xmlns:r="http://schemas.openxmlformats.org/officeDocument/2006/relationships">
+  <p:cSld>
+    <p:spTree>
+      <p:nvGrpSpPr>
+        <p:cNvPr id="1" name=""/>
+        <p:cNvGrpSpPr/>
+        <p:nvPr/>
+      </p:nvGrpSpPr>
+      <p:grpSpPr/>
+      <p:sp>
+        <p:nvSpPr>
+          <p:cNvPr id="2" name="Rectangle 1"/>
+          <p:cNvSpPr/>
+          <p:nvPr/>
+        </p:nvSpPr>
+        <p:spPr>
+          <a:xfrm>
+            <a:off x="0" y="0"/>
+            <a:ext cx="12191695" cy="777240"/>
+          </a:xfrm>
+          <a:prstGeom prst="rect">
+            <a:avLst/>
+          </a:prstGeom>
+          <a:solidFill>
+            <a:srgbClr val="0F2D52"/>
+          </a:solidFill>
+          <a:ln>
+            <a:noFill/>
+          </a:ln>
+        </p:spPr>
+        <p:style>
+          <a:lnRef idx="1">
+            <a:schemeClr val="accent1"/>
+          </a:lnRef>
+          <a:fillRef idx="3">
+            <a:schemeClr val="accent1"/>
+          </a:fillRef>
+          <a:effectRef idx="2">
+            <a:schemeClr val="accent1"/>
+          </a:effectRef>
+          <a:fontRef idx="minor">
+            <a:schemeClr val="lt1"/>
+          </a:fontRef>
+        </p:style>
+        <p:txBody>
+          <a:bodyPr rtlCol="0" anchor="ctr"/>
+          <a:lstStyle/>
+          <a:p>
+            <a:pPr algn="ctr"/>
+          </a:p>
+        </p:txBody>
+      </p:sp>
+      <p:sp>
+        <p:nvSpPr>
+          <p:cNvPr id="3" name="TextBox 2"/>
+          <p:cNvSpPr txBox="1"/>
+          <p:nvPr/>
+        </p:nvSpPr>
+        <p:spPr>
+          <a:xfrm>
+            <a:off x="457200" y="164592"/>
+            <a:ext cx="10972800" cy="502920"/>
+          </a:xfrm>
+          <a:prstGeom prst="rect">
+            <a:avLst/>
+          </a:prstGeom>
+          <a:noFill/>
+        </p:spPr>
+        <p:txBody>
+          <a:bodyPr wrap="square" lIns="45720" rIns="45720" tIns="18288" bIns="18288" anchor="ctr">
+            <a:spAutoFit/>
+          </a:bodyPr>
+          <a:lstStyle/>
+          <a:p>
+            <a:pPr algn="l"/>
+            <a:r>
+              <a:rPr sz="2400" b="1" i="0">
+                <a:solidFill>
+                  <a:srgbClr val="FFFFFF"/>
+                </a:solidFill>
+                <a:latin typeface="Calibri"/>
+              </a:rPr>
+              <a:t>CVSS: bande di gravità (0-10)</a:t>
+            </a:r>
+          </a:p>
+        </p:txBody>
+      </p:sp>
+      <p:graphicFrame>
+        <p:nvGraphicFramePr>
+          <p:cNvPr id="4" name="Table 3"/>
+          <p:cNvGraphicFramePr>
+            <a:graphicFrameLocks noGrp="1"/>
+          </p:cNvGraphicFramePr>
+          <p:nvPr/>
+        </p:nvGraphicFramePr>
+        <p:xfrm>
+          <a:off x="457200" y="1188720"/>
+          <a:ext cx="11247120" cy="4937760"/>
+        </p:xfrm>
+        <a:graphic>
+          <a:graphicData uri="http://schemas.openxmlformats.org/drawingml/2006/table">
+            <a:tbl>
+              <a:tblPr firstRow="1" bandRow="1">
+                <a:tableStyleId>{5C22544A-7EE6-4342-B048-85BDC9FD1C3A}</a:tableStyleId>
+              </a:tblPr>
+              <a:tblGrid>
+                <a:gridCol w="3749040"/>
+                <a:gridCol w="3749040"/>
+                <a:gridCol w="3749040"/>
+              </a:tblGrid>
+              <a:tr h="822960">
+                <a:tc>
+                  <a:txBody>
+                    <a:bodyPr/>
+                    <a:lstStyle/>
+                    <a:p>
+                      <a:pPr algn="ctr"/>
+                      <a:r>
+                        <a:rPr sz="1300" b="1">
+                          <a:solidFill>
+                            <a:srgbClr val="FFFFFF"/>
+                          </a:solidFill>
+                          <a:latin typeface="Calibri"/>
+                        </a:rPr>
+                        <a:t>Range</a:t>
+                      </a:r>
+                    </a:p>
+                  </a:txBody>
+                  <a:tcPr>
+                    <a:solidFill>
+                      <a:srgbClr val="0F2D52"/>
+                    </a:solidFill>
+                  </a:tcPr>
+                </a:tc>
+                <a:tc>
+                  <a:txBody>
+                    <a:bodyPr/>
+                    <a:lstStyle/>
+                    <a:p>
+                      <a:pPr algn="ctr"/>
+                      <a:r>
+                        <a:rPr sz="1300" b="1">
+                          <a:solidFill>
+                            <a:srgbClr val="FFFFFF"/>
+                          </a:solidFill>
+                          <a:latin typeface="Calibri"/>
+                        </a:rPr>
+                        <a:t>Severity</a:t>
+                      </a:r>
+                    </a:p>
+                  </a:txBody>
+                  <a:tcPr>
+                    <a:solidFill>
+                      <a:srgbClr val="0F2D52"/>
+                    </a:solidFill>
+                  </a:tcPr>
+                </a:tc>
+                <a:tc>
+                  <a:txBody>
+                    <a:bodyPr/>
+                    <a:lstStyle/>
+                    <a:p>
+                      <a:pPr algn="ctr"/>
+                      <a:r>
+                        <a:rPr sz="1300" b="1">
+                          <a:solidFill>
+                            <a:srgbClr val="FFFFFF"/>
+                          </a:solidFill>
+                          <a:latin typeface="Calibri"/>
+                        </a:rPr>
+                        <a:t>Azione tipica</a:t>
+                      </a:r>
+                    </a:p>
+                  </a:txBody>
+                  <a:tcPr>
+                    <a:solidFill>
+                      <a:srgbClr val="0F2D52"/>
+                    </a:solidFill>
+                  </a:tcPr>
+                </a:tc>
+              </a:tr>
+              <a:tr h="822960">
+                <a:tc>
+                  <a:txBody>
+                    <a:bodyPr/>
+                    <a:lstStyle/>
+                    <a:p>
+                      <a:r>
+                        <a:rPr sz="1100">
+                          <a:solidFill>
+                            <a:srgbClr val="1A1A2E"/>
+                          </a:solidFill>
+                          <a:latin typeface="Calibri"/>
+                        </a:rPr>
+                        <a:t>0.0</a:t>
+                      </a:r>
+                    </a:p>
+                  </a:txBody>
+                  <a:tcPr>
+                    <a:solidFill>
+                      <a:srgbClr val="F1F4F8"/>
+                    </a:solidFill>
+                  </a:tcPr>
+                </a:tc>
+                <a:tc>
+                  <a:txBody>
+                    <a:bodyPr/>
+                    <a:lstStyle/>
+                    <a:p>
+                      <a:r>
+                        <a:rPr sz="1100">
+                          <a:solidFill>
+                            <a:srgbClr val="1A1A2E"/>
+                          </a:solidFill>
+                          <a:latin typeface="Calibri"/>
+                        </a:rPr>
+                        <a:t>None</a:t>
+                      </a:r>
+                    </a:p>
+                  </a:txBody>
+                  <a:tcPr>
+                    <a:solidFill>
+                      <a:srgbClr val="F1F4F8"/>
+                    </a:solidFill>
+                  </a:tcPr>
+                </a:tc>
+                <a:tc>
+                  <a:txBody>
+                    <a:bodyPr/>
+                    <a:lstStyle/>
+                    <a:p>
+                      <a:r>
+                        <a:rPr sz="1100">
+                          <a:solidFill>
+                            <a:srgbClr val="1A1A2E"/>
+                          </a:solidFill>
+                          <a:latin typeface="Calibri"/>
+                        </a:rPr>
+                        <a:t>—</a:t>
+                      </a:r>
+                    </a:p>
+                  </a:txBody>
+                  <a:tcPr>
+                    <a:solidFill>
+                      <a:srgbClr val="F1F4F8"/>
+                    </a:solidFill>
+                  </a:tcPr>
+                </a:tc>
+              </a:tr>
+              <a:tr h="822960">
+                <a:tc>
+                  <a:txBody>
+                    <a:bodyPr/>
+                    <a:lstStyle/>
+                    <a:p>
+                      <a:r>
+                        <a:rPr sz="1100">
+                          <a:solidFill>
+                            <a:srgbClr val="1A1A2E"/>
+                          </a:solidFill>
+                          <a:latin typeface="Calibri"/>
+                        </a:rPr>
+                        <a:t>0.1 – 3.9</a:t>
+                      </a:r>
+                    </a:p>
+                  </a:txBody>
+                  <a:tcPr>
+                    <a:solidFill>
+                      <a:srgbClr val="FFFFFF"/>
+                    </a:solidFill>
+                  </a:tcPr>
+                </a:tc>
+                <a:tc>
+                  <a:txBody>
+                    <a:bodyPr/>
+                    <a:lstStyle/>
+                    <a:p>
+                      <a:r>
+                        <a:rPr sz="1100">
+                          <a:solidFill>
+                            <a:srgbClr val="1A1A2E"/>
+                          </a:solidFill>
+                          <a:latin typeface="Calibri"/>
+                        </a:rPr>
+                        <a:t>Low</a:t>
+                      </a:r>
+                    </a:p>
+                  </a:txBody>
+                  <a:tcPr>
+                    <a:solidFill>
+                      <a:srgbClr val="FFFFFF"/>
+                    </a:solidFill>
+                  </a:tcPr>
+                </a:tc>
+                <a:tc>
+                  <a:txBody>
+                    <a:bodyPr/>
+                    <a:lstStyle/>
+                    <a:p>
+                      <a:r>
+                        <a:rPr sz="1100">
+                          <a:solidFill>
+                            <a:srgbClr val="1A1A2E"/>
+                          </a:solidFill>
+                          <a:latin typeface="Calibri"/>
+                        </a:rPr>
+                        <a:t>Programma il fix</a:t>
+                      </a:r>
+                    </a:p>
+                  </a:txBody>
+                  <a:tcPr>
+                    <a:solidFill>
+                      <a:srgbClr val="FFFFFF"/>
+                    </a:solidFill>
+                  </a:tcPr>
+                </a:tc>
+              </a:tr>
+              <a:tr h="822960">
+                <a:tc>
+                  <a:txBody>
+                    <a:bodyPr/>
+                    <a:lstStyle/>
+                    <a:p>
+                      <a:r>
+                        <a:rPr sz="1100">
+                          <a:solidFill>
+                            <a:srgbClr val="1A1A2E"/>
+                          </a:solidFill>
+                          <a:latin typeface="Calibri"/>
+                        </a:rPr>
+                        <a:t>4.0 – 6.9</a:t>
+                      </a:r>
+                    </a:p>
+                  </a:txBody>
+                  <a:tcPr>
+                    <a:solidFill>
+                      <a:srgbClr val="F1F4F8"/>
+                    </a:solidFill>
+                  </a:tcPr>
+                </a:tc>
+                <a:tc>
+                  <a:txBody>
+                    <a:bodyPr/>
+                    <a:lstStyle/>
+                    <a:p>
+                      <a:r>
+                        <a:rPr sz="1100">
+                          <a:solidFill>
+                            <a:srgbClr val="1A1A2E"/>
+                          </a:solidFill>
+                          <a:latin typeface="Calibri"/>
+                        </a:rPr>
+                        <a:t>Medium</a:t>
+                      </a:r>
+                    </a:p>
+                  </a:txBody>
+                  <a:tcPr>
+                    <a:solidFill>
+                      <a:srgbClr val="F1F4F8"/>
+                    </a:solidFill>
+                  </a:tcPr>
+                </a:tc>
+                <a:tc>
+                  <a:txBody>
+                    <a:bodyPr/>
+                    <a:lstStyle/>
+                    <a:p>
+                      <a:r>
+                        <a:rPr sz="1100">
+                          <a:solidFill>
+                            <a:srgbClr val="1A1A2E"/>
+                          </a:solidFill>
+                          <a:latin typeface="Calibri"/>
+                        </a:rPr>
+                        <a:t>Fix nel prossimo sprint</a:t>
+                      </a:r>
+                    </a:p>
+                  </a:txBody>
+                  <a:tcPr>
+                    <a:solidFill>
+                      <a:srgbClr val="F1F4F8"/>
+                    </a:solidFill>
+                  </a:tcPr>
+                </a:tc>
+              </a:tr>
+              <a:tr h="822960">
+                <a:tc>
+                  <a:txBody>
+                    <a:bodyPr/>
+                    <a:lstStyle/>
+                    <a:p>
+                      <a:r>
+                        <a:rPr sz="1100">
+                          <a:solidFill>
+                            <a:srgbClr val="1A1A2E"/>
+                          </a:solidFill>
+                          <a:latin typeface="Calibri"/>
+                        </a:rPr>
+                        <a:t>7.0 – 8.9</a:t>
+                      </a:r>
+                    </a:p>
+                  </a:txBody>
+                  <a:tcPr>
+                    <a:solidFill>
+                      <a:srgbClr val="FFFFFF"/>
+                    </a:solidFill>
+                  </a:tcPr>
+                </a:tc>
+                <a:tc>
+                  <a:txBody>
+                    <a:bodyPr/>
+                    <a:lstStyle/>
+                    <a:p>
+                      <a:r>
+                        <a:rPr sz="1100">
+                          <a:solidFill>
+                            <a:srgbClr val="1A1A2E"/>
+                          </a:solidFill>
+                          <a:latin typeface="Calibri"/>
+                        </a:rPr>
+                        <a:t>High</a:t>
+                      </a:r>
+                    </a:p>
+                  </a:txBody>
+                  <a:tcPr>
+                    <a:solidFill>
+                      <a:srgbClr val="FFFFFF"/>
+                    </a:solidFill>
+                  </a:tcPr>
+                </a:tc>
+                <a:tc>
+                  <a:txBody>
+                    <a:bodyPr/>
+                    <a:lstStyle/>
+                    <a:p>
+                      <a:r>
+                        <a:rPr sz="1100">
+                          <a:solidFill>
+                            <a:srgbClr val="1A1A2E"/>
+                          </a:solidFill>
+                          <a:latin typeface="Calibri"/>
+                        </a:rPr>
+                        <a:t>Patcha entro 30 giorni</a:t>
+                      </a:r>
+                    </a:p>
+                  </a:txBody>
+                  <a:tcPr>
+                    <a:solidFill>
+                      <a:srgbClr val="FFFFFF"/>
+                    </a:solidFill>
+                  </a:tcPr>
+                </a:tc>
+              </a:tr>
+              <a:tr h="822960">
+                <a:tc>
+                  <a:txBody>
+                    <a:bodyPr/>
+                    <a:lstStyle/>
+                    <a:p>
+                      <a:r>
+                        <a:rPr sz="1100">
+                          <a:solidFill>
+                            <a:srgbClr val="1A1A2E"/>
+                          </a:solidFill>
+                          <a:latin typeface="Calibri"/>
+                        </a:rPr>
+                        <a:t>9.0 – 10.0</a:t>
+                      </a:r>
+                    </a:p>
+                  </a:txBody>
+                  <a:tcPr>
+                    <a:solidFill>
+                      <a:srgbClr val="F1F4F8"/>
+                    </a:solidFill>
+                  </a:tcPr>
+                </a:tc>
+                <a:tc>
+                  <a:txBody>
+                    <a:bodyPr/>
+                    <a:lstStyle/>
+                    <a:p>
+                      <a:r>
+                        <a:rPr sz="1100">
+                          <a:solidFill>
+                            <a:srgbClr val="1A1A2E"/>
+                          </a:solidFill>
+                          <a:latin typeface="Calibri"/>
+                        </a:rPr>
+                        <a:t>CRITICAL</a:t>
+                      </a:r>
+                    </a:p>
+                  </a:txBody>
+                  <a:tcPr>
+                    <a:solidFill>
+                      <a:srgbClr val="F1F4F8"/>
+                    </a:solidFill>
+                  </a:tcPr>
+                </a:tc>
+                <a:tc>
+                  <a:txBody>
+                    <a:bodyPr/>
+                    <a:lstStyle/>
+                    <a:p>
+                      <a:r>
+                        <a:rPr sz="1100">
+                          <a:solidFill>
+                            <a:srgbClr val="1A1A2E"/>
+                          </a:solidFill>
+                          <a:latin typeface="Calibri"/>
+                        </a:rPr>
+                        <a:t>Patcha SUBITO (Log4Shell = 10.0)</a:t>
+                      </a:r>
+                    </a:p>
+                  </a:txBody>
+                  <a:tcPr>
+                    <a:solidFill>
+                      <a:srgbClr val="F1F4F8"/>
+                    </a:solidFill>
+                  </a:tcPr>
+                </a:tc>
+              </a:tr>
+            </a:tbl>
+          </a:graphicData>
+        </a:graphic>
+      </p:graphicFrame>
+      <p:cxnSp>
+        <p:nvCxnSpPr>
+          <p:cNvPr id="5" name="Connector 4"/>
+          <p:cNvCxnSpPr/>
+          <p:nvPr/>
+        </p:nvCxnSpPr>
+        <p:spPr>
+          <a:xfrm>
+            <a:off x="457200" y="6446520"/>
+            <a:ext cx="11274552" cy="0"/>
+          </a:xfrm>
+          <a:prstGeom prst="line">
+            <a:avLst/>
+          </a:prstGeom>
+          <a:ln w="19050">
+            <a:solidFill>
+              <a:srgbClr val="00A0B0"/>
+            </a:solidFill>
+          </a:ln>
+        </p:spPr>
+        <p:style>
+          <a:lnRef idx="2">
+            <a:schemeClr val="accent1"/>
+          </a:lnRef>
+          <a:fillRef idx="0">
+            <a:schemeClr val="accent1"/>
+          </a:fillRef>
+          <a:effectRef idx="1">
+            <a:schemeClr val="accent1"/>
+          </a:effectRef>
+          <a:fontRef idx="minor">
+            <a:schemeClr val="tx1"/>
+          </a:fontRef>
+        </p:style>
+      </p:cxnSp>
+      <p:sp>
+        <p:nvSpPr>
+          <p:cNvPr id="6" name="TextBox 5"/>
+          <p:cNvSpPr txBox="1"/>
+          <p:nvPr/>
+        </p:nvSpPr>
+        <p:spPr>
+          <a:xfrm>
+            <a:off x="457200" y="6473952"/>
+            <a:ext cx="7315200" cy="292608"/>
+          </a:xfrm>
+          <a:prstGeom prst="rect">
+            <a:avLst/>
+          </a:prstGeom>
+          <a:noFill/>
+        </p:spPr>
+        <p:txBody>
+          <a:bodyPr wrap="square" lIns="45720" rIns="45720" tIns="18288" bIns="18288" anchor="t">
+            <a:spAutoFit/>
+          </a:bodyPr>
+          <a:lstStyle/>
+          <a:p>
+            <a:pPr algn="l"/>
+            <a:r>
+              <a:rPr sz="1000" b="0" i="0">
+                <a:solidFill>
+                  <a:srgbClr val="6B7280"/>
+                </a:solidFill>
+                <a:latin typeface="Calibri"/>
+              </a:rPr>
+              <a:t>Secure Coding · Corso IFTS STEM · A. Manneschi · 2024/2025</a:t>
+            </a:r>
+          </a:p>
+        </p:txBody>
+      </p:sp>
+      <p:sp>
+        <p:nvSpPr>
+          <p:cNvPr id="7" name="TextBox 6"/>
+          <p:cNvSpPr txBox="1"/>
+          <p:nvPr/>
+        </p:nvSpPr>
+        <p:spPr>
+          <a:xfrm>
+            <a:off x="10515600" y="6473952"/>
+            <a:ext cx="1188720" cy="292608"/>
           </a:xfrm>
           <a:prstGeom prst="rect">
             <a:avLst/>
@@ -7929,13 +9655,13 @@
         <p:spPr>
           <a:xfrm>
             <a:off x="0" y="0"/>
-            <a:ext cx="12191695" cy="777240"/>
+            <a:ext cx="4114800" cy="6858000"/>
           </a:xfrm>
           <a:prstGeom prst="rect">
             <a:avLst/>
           </a:prstGeom>
           <a:solidFill>
-            <a:srgbClr val="0F2D52"/>
+            <a:srgbClr val="081B33"/>
           </a:solidFill>
           <a:ln>
             <a:noFill/>
@@ -7965,14 +9691,100 @@
       </p:sp>
       <p:sp>
         <p:nvSpPr>
-          <p:cNvPr id="3" name="TextBox 2"/>
+          <p:cNvPr id="3" name="Rectangle 2"/>
+          <p:cNvSpPr/>
+          <p:nvPr/>
+        </p:nvSpPr>
+        <p:spPr>
+          <a:xfrm>
+            <a:off x="4114800" y="0"/>
+            <a:ext cx="8046720" cy="6858000"/>
+          </a:xfrm>
+          <a:prstGeom prst="rect">
+            <a:avLst/>
+          </a:prstGeom>
+          <a:solidFill>
+            <a:srgbClr val="F1F4F8"/>
+          </a:solidFill>
+          <a:ln>
+            <a:noFill/>
+          </a:ln>
+        </p:spPr>
+        <p:style>
+          <a:lnRef idx="1">
+            <a:schemeClr val="accent1"/>
+          </a:lnRef>
+          <a:fillRef idx="3">
+            <a:schemeClr val="accent1"/>
+          </a:fillRef>
+          <a:effectRef idx="2">
+            <a:schemeClr val="accent1"/>
+          </a:effectRef>
+          <a:fontRef idx="minor">
+            <a:schemeClr val="lt1"/>
+          </a:fontRef>
+        </p:style>
+        <p:txBody>
+          <a:bodyPr rtlCol="0" anchor="ctr"/>
+          <a:lstStyle/>
+          <a:p>
+            <a:pPr algn="ctr"/>
+          </a:p>
+        </p:txBody>
+      </p:sp>
+      <p:sp>
+        <p:nvSpPr>
+          <p:cNvPr id="4" name="Rectangle 3"/>
+          <p:cNvSpPr/>
+          <p:nvPr/>
+        </p:nvSpPr>
+        <p:spPr>
+          <a:xfrm>
+            <a:off x="4114800" y="0"/>
+            <a:ext cx="137160" cy="6858000"/>
+          </a:xfrm>
+          <a:prstGeom prst="rect">
+            <a:avLst/>
+          </a:prstGeom>
+          <a:solidFill>
+            <a:srgbClr val="00A0B0"/>
+          </a:solidFill>
+          <a:ln>
+            <a:noFill/>
+          </a:ln>
+        </p:spPr>
+        <p:style>
+          <a:lnRef idx="1">
+            <a:schemeClr val="accent1"/>
+          </a:lnRef>
+          <a:fillRef idx="3">
+            <a:schemeClr val="accent1"/>
+          </a:fillRef>
+          <a:effectRef idx="2">
+            <a:schemeClr val="accent1"/>
+          </a:effectRef>
+          <a:fontRef idx="minor">
+            <a:schemeClr val="lt1"/>
+          </a:fontRef>
+        </p:style>
+        <p:txBody>
+          <a:bodyPr rtlCol="0" anchor="ctr"/>
+          <a:lstStyle/>
+          <a:p>
+            <a:pPr algn="ctr"/>
+          </a:p>
+        </p:txBody>
+      </p:sp>
+      <p:sp>
+        <p:nvSpPr>
+          <p:cNvPr id="5" name="TextBox 4"/>
           <p:cNvSpPr txBox="1"/>
           <p:nvPr/>
         </p:nvSpPr>
         <p:spPr>
           <a:xfrm>
-            <a:off x="457200" y="164592"/>
-            <a:ext cx="10972800" cy="502920"/>
+            <a:off x="274320" y="2103120"/>
+            <a:ext cx="3657600" cy="2286000"/>
           </a:xfrm>
           <a:prstGeom prst="rect">
             <a:avLst/>
@@ -7980,34 +9792,34 @@
           <a:noFill/>
         </p:spPr>
         <p:txBody>
-          <a:bodyPr wrap="square" lIns="45720" rIns="45720" tIns="18288" bIns="18288" anchor="ctr">
+          <a:bodyPr wrap="square" lIns="45720" rIns="45720" tIns="18288" bIns="18288" anchor="t">
             <a:spAutoFit/>
           </a:bodyPr>
           <a:lstStyle/>
           <a:p>
-            <a:pPr algn="l"/>
-            <a:r>
-              <a:rPr sz="2400" b="1" i="0">
-                <a:solidFill>
-                  <a:srgbClr val="FFFFFF"/>
+            <a:pPr algn="ctr"/>
+            <a:r>
+              <a:rPr sz="17000" b="1" i="0">
+                <a:solidFill>
+                  <a:srgbClr val="00A0B0"/>
                 </a:solidFill>
                 <a:latin typeface="Calibri"/>
               </a:rPr>
-              <a:t>CVE — Common Vulnerabilities and Exposures</a:t>
-            </a:r>
-          </a:p>
-        </p:txBody>
-      </p:sp>
-      <p:sp>
-        <p:nvSpPr>
-          <p:cNvPr id="4" name="TextBox 3"/>
+              <a:t>02</a:t>
+            </a:r>
+          </a:p>
+        </p:txBody>
+      </p:sp>
+      <p:sp>
+        <p:nvSpPr>
+          <p:cNvPr id="6" name="TextBox 5"/>
           <p:cNvSpPr txBox="1"/>
           <p:nvPr/>
         </p:nvSpPr>
         <p:spPr>
           <a:xfrm>
-            <a:off x="640080" y="1005840"/>
-            <a:ext cx="10972800" cy="5029200"/>
+            <a:off x="274320" y="4572000"/>
+            <a:ext cx="3657600" cy="457200"/>
           </a:xfrm>
           <a:prstGeom prst="rect">
             <a:avLst/>
@@ -8015,215 +9827,97 @@
           <a:noFill/>
         </p:spPr>
         <p:txBody>
-          <a:bodyPr wrap="square">
+          <a:bodyPr wrap="square" lIns="45720" rIns="45720" tIns="18288" bIns="18288" anchor="t">
             <a:spAutoFit/>
           </a:bodyPr>
           <a:lstStyle/>
           <a:p>
-            <a:pPr>
-              <a:lnSpc>
-                <a:spcPct val="150000"/>
-              </a:lnSpc>
-            </a:pPr>
-            <a:r>
-              <a:rPr sz="2000" b="1">
-                <a:solidFill>
-                  <a:srgbClr val="00A0B0"/>
+            <a:pPr algn="ctr"/>
+            <a:r>
+              <a:rPr sz="2000" b="1" i="0">
+                <a:solidFill>
+                  <a:srgbClr val="6FD8E0"/>
                 </a:solidFill>
                 <a:latin typeface="Calibri"/>
               </a:rPr>
-              <a:t>▸  </a:t>
-            </a:r>
-            <a:r>
-              <a:rPr sz="2000">
-                <a:solidFill>
-                  <a:srgbClr val="1A1A2E"/>
+              <a:t>PARTE</a:t>
+            </a:r>
+          </a:p>
+        </p:txBody>
+      </p:sp>
+      <p:sp>
+        <p:nvSpPr>
+          <p:cNvPr id="7" name="TextBox 6"/>
+          <p:cNvSpPr txBox="1"/>
+          <p:nvPr/>
+        </p:nvSpPr>
+        <p:spPr>
+          <a:xfrm>
+            <a:off x="4572000" y="2286000"/>
+            <a:ext cx="7315200" cy="1645920"/>
+          </a:xfrm>
+          <a:prstGeom prst="rect">
+            <a:avLst/>
+          </a:prstGeom>
+          <a:noFill/>
+        </p:spPr>
+        <p:txBody>
+          <a:bodyPr wrap="square" lIns="45720" rIns="45720" tIns="18288" bIns="18288" anchor="t">
+            <a:spAutoFit/>
+          </a:bodyPr>
+          <a:lstStyle/>
+          <a:p>
+            <a:pPr algn="l"/>
+            <a:r>
+              <a:rPr sz="4400" b="1" i="0">
+                <a:solidFill>
+                  <a:srgbClr val="0F2D52"/>
                 </a:solidFill>
                 <a:latin typeface="Calibri"/>
               </a:rPr>
-              <a:t>Identificatore univoco di una vulnerabilità nota</a:t>
-            </a:r>
-          </a:p>
-          <a:p>
-            <a:pPr>
-              <a:lnSpc>
-                <a:spcPct val="150000"/>
-              </a:lnSpc>
-            </a:pPr>
-            <a:r>
-              <a:rPr sz="2000" b="1">
-                <a:solidFill>
-                  <a:srgbClr val="00A0B0"/>
+              <a:t>Threat Modeling</a:t>
+            </a:r>
+          </a:p>
+        </p:txBody>
+      </p:sp>
+      <p:sp>
+        <p:nvSpPr>
+          <p:cNvPr id="8" name="TextBox 7"/>
+          <p:cNvSpPr txBox="1"/>
+          <p:nvPr/>
+        </p:nvSpPr>
+        <p:spPr>
+          <a:xfrm>
+            <a:off x="4572000" y="3931920"/>
+            <a:ext cx="7315200" cy="1828800"/>
+          </a:xfrm>
+          <a:prstGeom prst="rect">
+            <a:avLst/>
+          </a:prstGeom>
+          <a:noFill/>
+        </p:spPr>
+        <p:txBody>
+          <a:bodyPr wrap="square" lIns="45720" rIns="45720" tIns="18288" bIns="18288" anchor="t">
+            <a:spAutoFit/>
+          </a:bodyPr>
+          <a:lstStyle/>
+          <a:p>
+            <a:pPr algn="l"/>
+            <a:r>
+              <a:rPr sz="1800" b="0" i="1">
+                <a:solidFill>
+                  <a:srgbClr val="6B7280"/>
                 </a:solidFill>
                 <a:latin typeface="Calibri"/>
               </a:rPr>
-              <a:t>▸  </a:t>
-            </a:r>
-            <a:r>
-              <a:rPr sz="2000">
-                <a:solidFill>
-                  <a:srgbClr val="1A1A2E"/>
-                </a:solidFill>
-                <a:latin typeface="Calibri"/>
-              </a:rPr>
-              <a:t>Formato: CVE-AAAA-NNNNN (anno + progressivo)</a:t>
-            </a:r>
-          </a:p>
-          <a:p>
-            <a:pPr>
-              <a:lnSpc>
-                <a:spcPct val="150000"/>
-              </a:lnSpc>
-            </a:pPr>
-            <a:r>
-              <a:rPr sz="2000" b="1">
-                <a:solidFill>
-                  <a:srgbClr val="00A0B0"/>
-                </a:solidFill>
-                <a:latin typeface="Calibri"/>
-              </a:rPr>
-              <a:t>▸  </a:t>
-            </a:r>
-            <a:r>
-              <a:rPr sz="2000">
-                <a:solidFill>
-                  <a:srgbClr val="1A1A2E"/>
-                </a:solidFill>
-                <a:latin typeface="Calibri"/>
-              </a:rPr>
-              <a:t>Database principale: NVD — nvd.nist.gov</a:t>
-            </a:r>
-          </a:p>
-          <a:p>
-            <a:pPr>
-              <a:lnSpc>
-                <a:spcPct val="150000"/>
-              </a:lnSpc>
-            </a:pPr>
-            <a:r>
-              <a:rPr sz="2000" b="1">
-                <a:solidFill>
-                  <a:srgbClr val="00A0B0"/>
-                </a:solidFill>
-                <a:latin typeface="Calibri"/>
-              </a:rPr>
-              <a:t>▸  </a:t>
-            </a:r>
-            <a:r>
-              <a:rPr sz="2000">
-                <a:solidFill>
-                  <a:srgbClr val="1A1A2E"/>
-                </a:solidFill>
-                <a:latin typeface="Calibri"/>
-              </a:rPr>
-              <a:t/>
-            </a:r>
-          </a:p>
-          <a:p>
-            <a:pPr>
-              <a:lnSpc>
-                <a:spcPct val="150000"/>
-              </a:lnSpc>
-            </a:pPr>
-            <a:r>
-              <a:rPr sz="2000" b="1">
-                <a:solidFill>
-                  <a:srgbClr val="00A0B0"/>
-                </a:solidFill>
-                <a:latin typeface="Calibri"/>
-              </a:rPr>
-              <a:t>▸  </a:t>
-            </a:r>
-            <a:r>
-              <a:rPr sz="2000">
-                <a:solidFill>
-                  <a:srgbClr val="1A1A2E"/>
-                </a:solidFill>
-                <a:latin typeface="Calibri"/>
-              </a:rPr>
-              <a:t>Esempi famosi:</a:t>
-            </a:r>
-          </a:p>
-          <a:p>
-            <a:pPr>
-              <a:lnSpc>
-                <a:spcPct val="150000"/>
-              </a:lnSpc>
-            </a:pPr>
-            <a:r>
-              <a:rPr sz="2000" b="1">
-                <a:solidFill>
-                  <a:srgbClr val="00A0B0"/>
-                </a:solidFill>
-                <a:latin typeface="Calibri"/>
-              </a:rPr>
-              <a:t>▸  </a:t>
-            </a:r>
-            <a:r>
-              <a:rPr sz="2000">
-                <a:solidFill>
-                  <a:srgbClr val="1A1A2E"/>
-                </a:solidFill>
-                <a:latin typeface="Calibri"/>
-              </a:rPr>
-              <a:t>  CVE-2014-0160 → Heartbleed</a:t>
-            </a:r>
-          </a:p>
-          <a:p>
-            <a:pPr>
-              <a:lnSpc>
-                <a:spcPct val="150000"/>
-              </a:lnSpc>
-            </a:pPr>
-            <a:r>
-              <a:rPr sz="2000" b="1">
-                <a:solidFill>
-                  <a:srgbClr val="00A0B0"/>
-                </a:solidFill>
-                <a:latin typeface="Calibri"/>
-              </a:rPr>
-              <a:t>▸  </a:t>
-            </a:r>
-            <a:r>
-              <a:rPr sz="2000">
-                <a:solidFill>
-                  <a:srgbClr val="1A1A2E"/>
-                </a:solidFill>
-                <a:latin typeface="Calibri"/>
-              </a:rPr>
-              <a:t>  CVE-2021-44228 → Log4Shell</a:t>
-            </a:r>
-          </a:p>
-          <a:p>
-            <a:pPr>
-              <a:lnSpc>
-                <a:spcPct val="150000"/>
-              </a:lnSpc>
-            </a:pPr>
-            <a:r>
-              <a:rPr sz="2000" b="1">
-                <a:solidFill>
-                  <a:srgbClr val="00A0B0"/>
-                </a:solidFill>
-                <a:latin typeface="Calibri"/>
-              </a:rPr>
-              <a:t>▸  </a:t>
-            </a:r>
-            <a:r>
-              <a:rPr sz="2000">
-                <a:solidFill>
-                  <a:srgbClr val="1A1A2E"/>
-                </a:solidFill>
-                <a:latin typeface="Calibri"/>
-              </a:rPr>
-              <a:t>  CVE-2024-3094 → XZ Utils backdoor</a:t>
+              <a:t>30 minuti di carta + lavagna salvano ore di refactor</a:t>
             </a:r>
           </a:p>
         </p:txBody>
       </p:sp>
       <p:cxnSp>
         <p:nvCxnSpPr>
-          <p:cNvPr id="5" name="Connector 4"/>
+          <p:cNvPr id="9" name="Connector 8"/>
           <p:cNvCxnSpPr/>
           <p:nvPr/>
         </p:nvCxnSpPr>
@@ -8258,14 +9952,14 @@
       </p:cxnSp>
       <p:sp>
         <p:nvSpPr>
-          <p:cNvPr id="6" name="TextBox 5"/>
+          <p:cNvPr id="10" name="TextBox 9"/>
           <p:cNvSpPr txBox="1"/>
           <p:nvPr/>
         </p:nvSpPr>
         <p:spPr>
           <a:xfrm>
             <a:off x="457200" y="6473952"/>
-            <a:ext cx="7315200" cy="320040"/>
+            <a:ext cx="7315200" cy="292608"/>
           </a:xfrm>
           <a:prstGeom prst="rect">
             <a:avLst/>
@@ -8286,21 +9980,21 @@
                 </a:solidFill>
                 <a:latin typeface="Calibri"/>
               </a:rPr>
-              <a:t>Secure Coding · Corso IFTS STEM · A. Manneschi</a:t>
-            </a:r>
-          </a:p>
-        </p:txBody>
-      </p:sp>
-      <p:sp>
-        <p:nvSpPr>
-          <p:cNvPr id="7" name="TextBox 6"/>
+              <a:t>Secure Coding · Corso IFTS STEM · A. Manneschi · 2024/2025</a:t>
+            </a:r>
+          </a:p>
+        </p:txBody>
+      </p:sp>
+      <p:sp>
+        <p:nvSpPr>
+          <p:cNvPr id="11" name="TextBox 10"/>
           <p:cNvSpPr txBox="1"/>
           <p:nvPr/>
         </p:nvSpPr>
         <p:spPr>
           <a:xfrm>
             <a:off x="10515600" y="6473952"/>
-            <a:ext cx="1188720" cy="320040"/>
+            <a:ext cx="1188720" cy="292608"/>
           </a:xfrm>
           <a:prstGeom prst="rect">
             <a:avLst/>
@@ -8417,7 +10111,7 @@
                 </a:solidFill>
                 <a:latin typeface="Calibri"/>
               </a:rPr>
-              <a:t>CVSS — punteggio di gravità (0-10)</a:t>
+              <a:t>❓  Le 4 domande di Adam Shostack</a:t>
             </a:r>
           </a:p>
         </p:txBody>
@@ -8430,7 +10124,7 @@
         </p:nvSpPr>
         <p:spPr>
           <a:xfrm>
-            <a:off x="640080" y="1005840"/>
+            <a:off x="640080" y="1097280"/>
             <a:ext cx="10972800" cy="5029200"/>
           </a:xfrm>
           <a:prstGeom prst="rect">
@@ -8448,6 +10142,9 @@
               <a:lnSpc>
                 <a:spcPct val="150000"/>
               </a:lnSpc>
+              <a:spcAft>
+                <a:spcPts val="400"/>
+              </a:spcAft>
             </a:pPr>
             <a:r>
               <a:rPr sz="2000" b="1">
@@ -8465,7 +10162,7 @@
                 </a:solidFill>
                 <a:latin typeface="Calibri"/>
               </a:rPr>
-              <a:t>0.0 — None</a:t>
+              <a:t>1. Cosa stiamo costruendo? → disegna il sistema (DFD)</a:t>
             </a:r>
           </a:p>
           <a:p>
@@ -8473,6 +10170,9 @@
               <a:lnSpc>
                 <a:spcPct val="150000"/>
               </a:lnSpc>
+              <a:spcAft>
+                <a:spcPts val="400"/>
+              </a:spcAft>
             </a:pPr>
             <a:r>
               <a:rPr sz="2000" b="1">
@@ -8490,7 +10190,7 @@
                 </a:solidFill>
                 <a:latin typeface="Calibri"/>
               </a:rPr>
-              <a:t>0.1-3.9 — Low</a:t>
+              <a:t>2. Cosa può andare storto? → applica STRIDE</a:t>
             </a:r>
           </a:p>
           <a:p>
@@ -8498,6 +10198,9 @@
               <a:lnSpc>
                 <a:spcPct val="150000"/>
               </a:lnSpc>
+              <a:spcAft>
+                <a:spcPts val="400"/>
+              </a:spcAft>
             </a:pPr>
             <a:r>
               <a:rPr sz="2000" b="1">
@@ -8515,7 +10218,7 @@
                 </a:solidFill>
                 <a:latin typeface="Calibri"/>
               </a:rPr>
-              <a:t>4.0-6.9 — Medium</a:t>
+              <a:t>3. Cosa facciamo a riguardo? → mitiga / accetta / elimina</a:t>
             </a:r>
           </a:p>
           <a:p>
@@ -8523,6 +10226,9 @@
               <a:lnSpc>
                 <a:spcPct val="150000"/>
               </a:lnSpc>
+              <a:spcAft>
+                <a:spcPts val="400"/>
+              </a:spcAft>
             </a:pPr>
             <a:r>
               <a:rPr sz="2000" b="1">
@@ -8540,7 +10246,7 @@
                 </a:solidFill>
                 <a:latin typeface="Calibri"/>
               </a:rPr>
-              <a:t>7.0-8.9 — High → patcha entro 30 giorni</a:t>
+              <a:t>4. Abbiamo fatto un buon lavoro? → review e iterazione</a:t>
             </a:r>
           </a:p>
           <a:p>
@@ -8548,6 +10254,9 @@
               <a:lnSpc>
                 <a:spcPct val="150000"/>
               </a:lnSpc>
+              <a:spcAft>
+                <a:spcPts val="400"/>
+              </a:spcAft>
             </a:pPr>
             <a:r>
               <a:rPr sz="2000" b="1">
@@ -8565,7 +10274,7 @@
                 </a:solidFill>
                 <a:latin typeface="Calibri"/>
               </a:rPr>
-              <a:t>9.0-10.0 — CRITICAL → patcha SUBITO</a:t>
+              <a:t/>
             </a:r>
           </a:p>
           <a:p>
@@ -8573,6 +10282,9 @@
               <a:lnSpc>
                 <a:spcPct val="150000"/>
               </a:lnSpc>
+              <a:spcAft>
+                <a:spcPts val="400"/>
+              </a:spcAft>
             </a:pPr>
             <a:r>
               <a:rPr sz="2000" b="1">
@@ -8590,32 +10302,7 @@
                 </a:solidFill>
                 <a:latin typeface="Calibri"/>
               </a:rPr>
-              <a:t/>
-            </a:r>
-          </a:p>
-          <a:p>
-            <a:pPr>
-              <a:lnSpc>
-                <a:spcPct val="150000"/>
-              </a:lnSpc>
-            </a:pPr>
-            <a:r>
-              <a:rPr sz="2000" b="1">
-                <a:solidFill>
-                  <a:srgbClr val="00A0B0"/>
-                </a:solidFill>
-                <a:latin typeface="Calibri"/>
-              </a:rPr>
-              <a:t>▸  </a:t>
-            </a:r>
-            <a:r>
-              <a:rPr sz="2000">
-                <a:solidFill>
-                  <a:srgbClr val="1A1A2E"/>
-                </a:solidFill>
-                <a:latin typeface="Calibri"/>
-              </a:rPr>
-              <a:t>Log4Shell era 10.0</a:t>
+              <a:t>Si fa PRIMA di scrivere codice. Su carta, in 30-60 minuti.</a:t>
             </a:r>
           </a:p>
         </p:txBody>
@@ -8664,7 +10351,7 @@
         <p:spPr>
           <a:xfrm>
             <a:off x="457200" y="6473952"/>
-            <a:ext cx="7315200" cy="320040"/>
+            <a:ext cx="7315200" cy="292608"/>
           </a:xfrm>
           <a:prstGeom prst="rect">
             <a:avLst/>
@@ -8685,7 +10372,7 @@
                 </a:solidFill>
                 <a:latin typeface="Calibri"/>
               </a:rPr>
-              <a:t>Secure Coding · Corso IFTS STEM · A. Manneschi</a:t>
+              <a:t>Secure Coding · Corso IFTS STEM · A. Manneschi · 2024/2025</a:t>
             </a:r>
           </a:p>
         </p:txBody>
@@ -8699,7 +10386,7 @@
         <p:spPr>
           <a:xfrm>
             <a:off x="10515600" y="6473952"/>
-            <a:ext cx="1188720" cy="320040"/>
+            <a:ext cx="1188720" cy="292608"/>
           </a:xfrm>
           <a:prstGeom prst="rect">
             <a:avLst/>
@@ -8752,7 +10439,7 @@
         <p:spPr>
           <a:xfrm>
             <a:off x="0" y="0"/>
-            <a:ext cx="2286000" cy="6858000"/>
+            <a:ext cx="12191695" cy="777240"/>
           </a:xfrm>
           <a:prstGeom prst="rect">
             <a:avLst/>
@@ -8794,8 +10481,8 @@
         </p:nvSpPr>
         <p:spPr>
           <a:xfrm>
-            <a:off x="274320" y="2286000"/>
-            <a:ext cx="1828800" cy="1828800"/>
+            <a:off x="457200" y="164592"/>
+            <a:ext cx="10972800" cy="502920"/>
           </a:xfrm>
           <a:prstGeom prst="rect">
             <a:avLst/>
@@ -8803,97 +10490,533 @@
           <a:noFill/>
         </p:spPr>
         <p:txBody>
-          <a:bodyPr wrap="square" lIns="45720" rIns="45720" tIns="18288" bIns="18288" anchor="t">
+          <a:bodyPr wrap="square" lIns="45720" rIns="45720" tIns="18288" bIns="18288" anchor="ctr">
             <a:spAutoFit/>
           </a:bodyPr>
           <a:lstStyle/>
           <a:p>
-            <a:pPr algn="ctr"/>
-            <a:r>
-              <a:rPr sz="12000" b="1" i="0">
-                <a:solidFill>
-                  <a:srgbClr val="00A0B0"/>
+            <a:pPr algn="l"/>
+            <a:r>
+              <a:rPr sz="2400" b="1" i="0">
+                <a:solidFill>
+                  <a:srgbClr val="FFFFFF"/>
                 </a:solidFill>
                 <a:latin typeface="Calibri"/>
               </a:rPr>
-              <a:t>02</a:t>
-            </a:r>
-          </a:p>
-        </p:txBody>
-      </p:sp>
-      <p:sp>
-        <p:nvSpPr>
-          <p:cNvPr id="4" name="TextBox 3"/>
-          <p:cNvSpPr txBox="1"/>
-          <p:nvPr/>
-        </p:nvSpPr>
-        <p:spPr>
-          <a:xfrm>
-            <a:off x="2743200" y="2560320"/>
-            <a:ext cx="8961120" cy="1371600"/>
-          </a:xfrm>
-          <a:prstGeom prst="rect">
-            <a:avLst/>
-          </a:prstGeom>
-          <a:noFill/>
-        </p:spPr>
-        <p:txBody>
-          <a:bodyPr wrap="square" lIns="45720" rIns="45720" tIns="18288" bIns="18288" anchor="t">
-            <a:spAutoFit/>
-          </a:bodyPr>
-          <a:lstStyle/>
-          <a:p>
-            <a:pPr algn="l"/>
-            <a:r>
-              <a:rPr sz="4200" b="1" i="0">
-                <a:solidFill>
-                  <a:srgbClr val="0F2D52"/>
-                </a:solidFill>
-                <a:latin typeface="Calibri"/>
-              </a:rPr>
-              <a:t>Threat Modeling</a:t>
-            </a:r>
-          </a:p>
-        </p:txBody>
-      </p:sp>
-      <p:sp>
-        <p:nvSpPr>
-          <p:cNvPr id="5" name="TextBox 4"/>
-          <p:cNvSpPr txBox="1"/>
-          <p:nvPr/>
-        </p:nvSpPr>
-        <p:spPr>
-          <a:xfrm>
-            <a:off x="2743200" y="3931920"/>
-            <a:ext cx="8961120" cy="1828800"/>
-          </a:xfrm>
-          <a:prstGeom prst="rect">
-            <a:avLst/>
-          </a:prstGeom>
-          <a:noFill/>
-        </p:spPr>
-        <p:txBody>
-          <a:bodyPr wrap="square" lIns="45720" rIns="45720" tIns="18288" bIns="18288" anchor="t">
-            <a:spAutoFit/>
-          </a:bodyPr>
-          <a:lstStyle/>
-          <a:p>
-            <a:pPr algn="l"/>
-            <a:r>
-              <a:rPr sz="1800" b="0" i="1">
-                <a:solidFill>
-                  <a:srgbClr val="6B7280"/>
-                </a:solidFill>
-                <a:latin typeface="Calibri"/>
-              </a:rPr>
-              <a:t>30 minuti di carta + lavagna salvano ore di refactor</a:t>
-            </a:r>
-          </a:p>
-        </p:txBody>
-      </p:sp>
+              <a:t>STRIDE — sei lettere, sei categorie</a:t>
+            </a:r>
+          </a:p>
+        </p:txBody>
+      </p:sp>
+      <p:graphicFrame>
+        <p:nvGraphicFramePr>
+          <p:cNvPr id="4" name="Table 3"/>
+          <p:cNvGraphicFramePr>
+            <a:graphicFrameLocks noGrp="1"/>
+          </p:cNvGraphicFramePr>
+          <p:nvPr/>
+        </p:nvGraphicFramePr>
+        <p:xfrm>
+          <a:off x="457200" y="1188720"/>
+          <a:ext cx="11247120" cy="4937760"/>
+        </p:xfrm>
+        <a:graphic>
+          <a:graphicData uri="http://schemas.openxmlformats.org/drawingml/2006/table">
+            <a:tbl>
+              <a:tblPr firstRow="1" bandRow="1">
+                <a:tableStyleId>{5C22544A-7EE6-4342-B048-85BDC9FD1C3A}</a:tableStyleId>
+              </a:tblPr>
+              <a:tblGrid>
+                <a:gridCol w="3749040"/>
+                <a:gridCol w="3749040"/>
+                <a:gridCol w="3749040"/>
+              </a:tblGrid>
+              <a:tr h="705394">
+                <a:tc>
+                  <a:txBody>
+                    <a:bodyPr/>
+                    <a:lstStyle/>
+                    <a:p>
+                      <a:pPr algn="ctr"/>
+                      <a:r>
+                        <a:rPr sz="1300" b="1">
+                          <a:solidFill>
+                            <a:srgbClr val="FFFFFF"/>
+                          </a:solidFill>
+                          <a:latin typeface="Calibri"/>
+                        </a:rPr>
+                        <a:t>Lettera</a:t>
+                      </a:r>
+                    </a:p>
+                  </a:txBody>
+                  <a:tcPr>
+                    <a:solidFill>
+                      <a:srgbClr val="0F2D52"/>
+                    </a:solidFill>
+                  </a:tcPr>
+                </a:tc>
+                <a:tc>
+                  <a:txBody>
+                    <a:bodyPr/>
+                    <a:lstStyle/>
+                    <a:p>
+                      <a:pPr algn="ctr"/>
+                      <a:r>
+                        <a:rPr sz="1300" b="1">
+                          <a:solidFill>
+                            <a:srgbClr val="FFFFFF"/>
+                          </a:solidFill>
+                          <a:latin typeface="Calibri"/>
+                        </a:rPr>
+                        <a:t>Categoria</a:t>
+                      </a:r>
+                    </a:p>
+                  </a:txBody>
+                  <a:tcPr>
+                    <a:solidFill>
+                      <a:srgbClr val="0F2D52"/>
+                    </a:solidFill>
+                  </a:tcPr>
+                </a:tc>
+                <a:tc>
+                  <a:txBody>
+                    <a:bodyPr/>
+                    <a:lstStyle/>
+                    <a:p>
+                      <a:pPr algn="ctr"/>
+                      <a:r>
+                        <a:rPr sz="1300" b="1">
+                          <a:solidFill>
+                            <a:srgbClr val="FFFFFF"/>
+                          </a:solidFill>
+                          <a:latin typeface="Calibri"/>
+                        </a:rPr>
+                        <a:t>Esempio</a:t>
+                      </a:r>
+                    </a:p>
+                  </a:txBody>
+                  <a:tcPr>
+                    <a:solidFill>
+                      <a:srgbClr val="0F2D52"/>
+                    </a:solidFill>
+                  </a:tcPr>
+                </a:tc>
+              </a:tr>
+              <a:tr h="705394">
+                <a:tc>
+                  <a:txBody>
+                    <a:bodyPr/>
+                    <a:lstStyle/>
+                    <a:p>
+                      <a:r>
+                        <a:rPr sz="1100">
+                          <a:solidFill>
+                            <a:srgbClr val="1A1A2E"/>
+                          </a:solidFill>
+                          <a:latin typeface="Calibri"/>
+                        </a:rPr>
+                        <a:t>S</a:t>
+                      </a:r>
+                    </a:p>
+                  </a:txBody>
+                  <a:tcPr>
+                    <a:solidFill>
+                      <a:srgbClr val="F1F4F8"/>
+                    </a:solidFill>
+                  </a:tcPr>
+                </a:tc>
+                <a:tc>
+                  <a:txBody>
+                    <a:bodyPr/>
+                    <a:lstStyle/>
+                    <a:p>
+                      <a:r>
+                        <a:rPr sz="1100">
+                          <a:solidFill>
+                            <a:srgbClr val="1A1A2E"/>
+                          </a:solidFill>
+                          <a:latin typeface="Calibri"/>
+                        </a:rPr>
+                        <a:t>Spoofing</a:t>
+                      </a:r>
+                    </a:p>
+                  </a:txBody>
+                  <a:tcPr>
+                    <a:solidFill>
+                      <a:srgbClr val="F1F4F8"/>
+                    </a:solidFill>
+                  </a:tcPr>
+                </a:tc>
+                <a:tc>
+                  <a:txBody>
+                    <a:bodyPr/>
+                    <a:lstStyle/>
+                    <a:p>
+                      <a:r>
+                        <a:rPr sz="1100">
+                          <a:solidFill>
+                            <a:srgbClr val="1A1A2E"/>
+                          </a:solidFill>
+                          <a:latin typeface="Calibri"/>
+                        </a:rPr>
+                        <a:t>Fingersi qualcun altro (account takeover)</a:t>
+                      </a:r>
+                    </a:p>
+                  </a:txBody>
+                  <a:tcPr>
+                    <a:solidFill>
+                      <a:srgbClr val="F1F4F8"/>
+                    </a:solidFill>
+                  </a:tcPr>
+                </a:tc>
+              </a:tr>
+              <a:tr h="705394">
+                <a:tc>
+                  <a:txBody>
+                    <a:bodyPr/>
+                    <a:lstStyle/>
+                    <a:p>
+                      <a:r>
+                        <a:rPr sz="1100">
+                          <a:solidFill>
+                            <a:srgbClr val="1A1A2E"/>
+                          </a:solidFill>
+                          <a:latin typeface="Calibri"/>
+                        </a:rPr>
+                        <a:t>T</a:t>
+                      </a:r>
+                    </a:p>
+                  </a:txBody>
+                  <a:tcPr>
+                    <a:solidFill>
+                      <a:srgbClr val="FFFFFF"/>
+                    </a:solidFill>
+                  </a:tcPr>
+                </a:tc>
+                <a:tc>
+                  <a:txBody>
+                    <a:bodyPr/>
+                    <a:lstStyle/>
+                    <a:p>
+                      <a:r>
+                        <a:rPr sz="1100">
+                          <a:solidFill>
+                            <a:srgbClr val="1A1A2E"/>
+                          </a:solidFill>
+                          <a:latin typeface="Calibri"/>
+                        </a:rPr>
+                        <a:t>Tampering</a:t>
+                      </a:r>
+                    </a:p>
+                  </a:txBody>
+                  <a:tcPr>
+                    <a:solidFill>
+                      <a:srgbClr val="FFFFFF"/>
+                    </a:solidFill>
+                  </a:tcPr>
+                </a:tc>
+                <a:tc>
+                  <a:txBody>
+                    <a:bodyPr/>
+                    <a:lstStyle/>
+                    <a:p>
+                      <a:r>
+                        <a:rPr sz="1100">
+                          <a:solidFill>
+                            <a:srgbClr val="1A1A2E"/>
+                          </a:solidFill>
+                          <a:latin typeface="Calibri"/>
+                        </a:rPr>
+                        <a:t>Modificare dati (cookie, payload)</a:t>
+                      </a:r>
+                    </a:p>
+                  </a:txBody>
+                  <a:tcPr>
+                    <a:solidFill>
+                      <a:srgbClr val="FFFFFF"/>
+                    </a:solidFill>
+                  </a:tcPr>
+                </a:tc>
+              </a:tr>
+              <a:tr h="705394">
+                <a:tc>
+                  <a:txBody>
+                    <a:bodyPr/>
+                    <a:lstStyle/>
+                    <a:p>
+                      <a:r>
+                        <a:rPr sz="1100">
+                          <a:solidFill>
+                            <a:srgbClr val="1A1A2E"/>
+                          </a:solidFill>
+                          <a:latin typeface="Calibri"/>
+                        </a:rPr>
+                        <a:t>R</a:t>
+                      </a:r>
+                    </a:p>
+                  </a:txBody>
+                  <a:tcPr>
+                    <a:solidFill>
+                      <a:srgbClr val="F1F4F8"/>
+                    </a:solidFill>
+                  </a:tcPr>
+                </a:tc>
+                <a:tc>
+                  <a:txBody>
+                    <a:bodyPr/>
+                    <a:lstStyle/>
+                    <a:p>
+                      <a:r>
+                        <a:rPr sz="1100">
+                          <a:solidFill>
+                            <a:srgbClr val="1A1A2E"/>
+                          </a:solidFill>
+                          <a:latin typeface="Calibri"/>
+                        </a:rPr>
+                        <a:t>Repudiation</a:t>
+                      </a:r>
+                    </a:p>
+                  </a:txBody>
+                  <a:tcPr>
+                    <a:solidFill>
+                      <a:srgbClr val="F1F4F8"/>
+                    </a:solidFill>
+                  </a:tcPr>
+                </a:tc>
+                <a:tc>
+                  <a:txBody>
+                    <a:bodyPr/>
+                    <a:lstStyle/>
+                    <a:p>
+                      <a:r>
+                        <a:rPr sz="1100">
+                          <a:solidFill>
+                            <a:srgbClr val="1A1A2E"/>
+                          </a:solidFill>
+                          <a:latin typeface="Calibri"/>
+                        </a:rPr>
+                        <a:t>Negare di aver fatto un'azione</a:t>
+                      </a:r>
+                    </a:p>
+                  </a:txBody>
+                  <a:tcPr>
+                    <a:solidFill>
+                      <a:srgbClr val="F1F4F8"/>
+                    </a:solidFill>
+                  </a:tcPr>
+                </a:tc>
+              </a:tr>
+              <a:tr h="705394">
+                <a:tc>
+                  <a:txBody>
+                    <a:bodyPr/>
+                    <a:lstStyle/>
+                    <a:p>
+                      <a:r>
+                        <a:rPr sz="1100">
+                          <a:solidFill>
+                            <a:srgbClr val="1A1A2E"/>
+                          </a:solidFill>
+                          <a:latin typeface="Calibri"/>
+                        </a:rPr>
+                        <a:t>I</a:t>
+                      </a:r>
+                    </a:p>
+                  </a:txBody>
+                  <a:tcPr>
+                    <a:solidFill>
+                      <a:srgbClr val="FFFFFF"/>
+                    </a:solidFill>
+                  </a:tcPr>
+                </a:tc>
+                <a:tc>
+                  <a:txBody>
+                    <a:bodyPr/>
+                    <a:lstStyle/>
+                    <a:p>
+                      <a:r>
+                        <a:rPr sz="1100">
+                          <a:solidFill>
+                            <a:srgbClr val="1A1A2E"/>
+                          </a:solidFill>
+                          <a:latin typeface="Calibri"/>
+                        </a:rPr>
+                        <a:t>Information Disclosure</a:t>
+                      </a:r>
+                    </a:p>
+                  </a:txBody>
+                  <a:tcPr>
+                    <a:solidFill>
+                      <a:srgbClr val="FFFFFF"/>
+                    </a:solidFill>
+                  </a:tcPr>
+                </a:tc>
+                <a:tc>
+                  <a:txBody>
+                    <a:bodyPr/>
+                    <a:lstStyle/>
+                    <a:p>
+                      <a:r>
+                        <a:rPr sz="1100">
+                          <a:solidFill>
+                            <a:srgbClr val="1A1A2E"/>
+                          </a:solidFill>
+                          <a:latin typeface="Calibri"/>
+                        </a:rPr>
+                        <a:t>Esporre dati (stack trace, SQLi)</a:t>
+                      </a:r>
+                    </a:p>
+                  </a:txBody>
+                  <a:tcPr>
+                    <a:solidFill>
+                      <a:srgbClr val="FFFFFF"/>
+                    </a:solidFill>
+                  </a:tcPr>
+                </a:tc>
+              </a:tr>
+              <a:tr h="705394">
+                <a:tc>
+                  <a:txBody>
+                    <a:bodyPr/>
+                    <a:lstStyle/>
+                    <a:p>
+                      <a:r>
+                        <a:rPr sz="1100">
+                          <a:solidFill>
+                            <a:srgbClr val="1A1A2E"/>
+                          </a:solidFill>
+                          <a:latin typeface="Calibri"/>
+                        </a:rPr>
+                        <a:t>D</a:t>
+                      </a:r>
+                    </a:p>
+                  </a:txBody>
+                  <a:tcPr>
+                    <a:solidFill>
+                      <a:srgbClr val="F1F4F8"/>
+                    </a:solidFill>
+                  </a:tcPr>
+                </a:tc>
+                <a:tc>
+                  <a:txBody>
+                    <a:bodyPr/>
+                    <a:lstStyle/>
+                    <a:p>
+                      <a:r>
+                        <a:rPr sz="1100">
+                          <a:solidFill>
+                            <a:srgbClr val="1A1A2E"/>
+                          </a:solidFill>
+                          <a:latin typeface="Calibri"/>
+                        </a:rPr>
+                        <a:t>Denial of Service</a:t>
+                      </a:r>
+                    </a:p>
+                  </a:txBody>
+                  <a:tcPr>
+                    <a:solidFill>
+                      <a:srgbClr val="F1F4F8"/>
+                    </a:solidFill>
+                  </a:tcPr>
+                </a:tc>
+                <a:tc>
+                  <a:txBody>
+                    <a:bodyPr/>
+                    <a:lstStyle/>
+                    <a:p>
+                      <a:r>
+                        <a:rPr sz="1100">
+                          <a:solidFill>
+                            <a:srgbClr val="1A1A2E"/>
+                          </a:solidFill>
+                          <a:latin typeface="Calibri"/>
+                        </a:rPr>
+                        <a:t>Rendere indisponibile (DDoS)</a:t>
+                      </a:r>
+                    </a:p>
+                  </a:txBody>
+                  <a:tcPr>
+                    <a:solidFill>
+                      <a:srgbClr val="F1F4F8"/>
+                    </a:solidFill>
+                  </a:tcPr>
+                </a:tc>
+              </a:tr>
+              <a:tr h="705396">
+                <a:tc>
+                  <a:txBody>
+                    <a:bodyPr/>
+                    <a:lstStyle/>
+                    <a:p>
+                      <a:r>
+                        <a:rPr sz="1100">
+                          <a:solidFill>
+                            <a:srgbClr val="1A1A2E"/>
+                          </a:solidFill>
+                          <a:latin typeface="Calibri"/>
+                        </a:rPr>
+                        <a:t>E</a:t>
+                      </a:r>
+                    </a:p>
+                  </a:txBody>
+                  <a:tcPr>
+                    <a:solidFill>
+                      <a:srgbClr val="FFFFFF"/>
+                    </a:solidFill>
+                  </a:tcPr>
+                </a:tc>
+                <a:tc>
+                  <a:txBody>
+                    <a:bodyPr/>
+                    <a:lstStyle/>
+                    <a:p>
+                      <a:r>
+                        <a:rPr sz="1100">
+                          <a:solidFill>
+                            <a:srgbClr val="1A1A2E"/>
+                          </a:solidFill>
+                          <a:latin typeface="Calibri"/>
+                        </a:rPr>
+                        <a:t>Elevation of Privilege</a:t>
+                      </a:r>
+                    </a:p>
+                  </a:txBody>
+                  <a:tcPr>
+                    <a:solidFill>
+                      <a:srgbClr val="FFFFFF"/>
+                    </a:solidFill>
+                  </a:tcPr>
+                </a:tc>
+                <a:tc>
+                  <a:txBody>
+                    <a:bodyPr/>
+                    <a:lstStyle/>
+                    <a:p>
+                      <a:r>
+                        <a:rPr sz="1100">
+                          <a:solidFill>
+                            <a:srgbClr val="1A1A2E"/>
+                          </a:solidFill>
+                          <a:latin typeface="Calibri"/>
+                        </a:rPr>
+                        <a:t>IDOR, bypass authz</a:t>
+                      </a:r>
+                    </a:p>
+                  </a:txBody>
+                  <a:tcPr>
+                    <a:solidFill>
+                      <a:srgbClr val="FFFFFF"/>
+                    </a:solidFill>
+                  </a:tcPr>
+                </a:tc>
+              </a:tr>
+            </a:tbl>
+          </a:graphicData>
+        </a:graphic>
+      </p:graphicFrame>
       <p:cxnSp>
         <p:nvCxnSpPr>
-          <p:cNvPr id="6" name="Connector 5"/>
+          <p:cNvPr id="5" name="Connector 4"/>
           <p:cNvCxnSpPr/>
           <p:nvPr/>
         </p:nvCxnSpPr>
@@ -8928,14 +11051,14 @@
       </p:cxnSp>
       <p:sp>
         <p:nvSpPr>
-          <p:cNvPr id="7" name="TextBox 6"/>
+          <p:cNvPr id="6" name="TextBox 5"/>
           <p:cNvSpPr txBox="1"/>
           <p:nvPr/>
         </p:nvSpPr>
         <p:spPr>
           <a:xfrm>
             <a:off x="457200" y="6473952"/>
-            <a:ext cx="7315200" cy="320040"/>
+            <a:ext cx="7315200" cy="292608"/>
           </a:xfrm>
           <a:prstGeom prst="rect">
             <a:avLst/>
@@ -8956,21 +11079,21 @@
                 </a:solidFill>
                 <a:latin typeface="Calibri"/>
               </a:rPr>
-              <a:t>Secure Coding · Corso IFTS STEM · A. Manneschi</a:t>
-            </a:r>
-          </a:p>
-        </p:txBody>
-      </p:sp>
-      <p:sp>
-        <p:nvSpPr>
-          <p:cNvPr id="8" name="TextBox 7"/>
+              <a:t>Secure Coding · Corso IFTS STEM · A. Manneschi · 2024/2025</a:t>
+            </a:r>
+          </a:p>
+        </p:txBody>
+      </p:sp>
+      <p:sp>
+        <p:nvSpPr>
+          <p:cNvPr id="7" name="TextBox 6"/>
           <p:cNvSpPr txBox="1"/>
           <p:nvPr/>
         </p:nvSpPr>
         <p:spPr>
           <a:xfrm>
             <a:off x="10515600" y="6473952"/>
-            <a:ext cx="1188720" cy="320040"/>
+            <a:ext cx="1188720" cy="292608"/>
           </a:xfrm>
           <a:prstGeom prst="rect">
             <a:avLst/>
@@ -9087,21 +11210,45 @@
                 </a:solidFill>
                 <a:latin typeface="Calibri"/>
               </a:rPr>
-              <a:t>Le 4 domande di Adam Shostack</a:t>
-            </a:r>
-          </a:p>
-        </p:txBody>
-      </p:sp>
-      <p:sp>
-        <p:nvSpPr>
-          <p:cNvPr id="4" name="TextBox 3"/>
+              <a:t>DFD: esempio su mini-blog</a:t>
+            </a:r>
+          </a:p>
+        </p:txBody>
+      </p:sp>
+      <p:pic>
+        <p:nvPicPr>
+          <p:cNvPr id="4" name="Picture 3" descr="cap2_dfd_mini_blog.png"/>
+          <p:cNvPicPr>
+            <a:picLocks noChangeAspect="1"/>
+          </p:cNvPicPr>
+          <p:nvPr/>
+        </p:nvPicPr>
+        <p:blipFill>
+          <a:blip r:embed="rId2"/>
+          <a:stretch>
+            <a:fillRect/>
+          </a:stretch>
+        </p:blipFill>
+        <p:spPr>
+          <a:xfrm>
+            <a:off x="640080" y="1097280"/>
+            <a:ext cx="10881360" cy="4572000"/>
+          </a:xfrm>
+          <a:prstGeom prst="rect">
+            <a:avLst/>
+          </a:prstGeom>
+        </p:spPr>
+      </p:pic>
+      <p:sp>
+        <p:nvSpPr>
+          <p:cNvPr id="5" name="TextBox 4"/>
           <p:cNvSpPr txBox="1"/>
           <p:nvPr/>
         </p:nvSpPr>
         <p:spPr>
           <a:xfrm>
-            <a:off x="640080" y="1005840"/>
-            <a:ext cx="10972800" cy="5029200"/>
+            <a:off x="457200" y="5852160"/>
+            <a:ext cx="11247120" cy="365760"/>
           </a:xfrm>
           <a:prstGeom prst="rect">
             <a:avLst/>
@@ -9109,165 +11256,27 @@
           <a:noFill/>
         </p:spPr>
         <p:txBody>
-          <a:bodyPr wrap="square">
+          <a:bodyPr wrap="square" lIns="45720" rIns="45720" tIns="18288" bIns="18288" anchor="t">
             <a:spAutoFit/>
           </a:bodyPr>
           <a:lstStyle/>
           <a:p>
-            <a:pPr>
-              <a:lnSpc>
-                <a:spcPct val="150000"/>
-              </a:lnSpc>
-            </a:pPr>
-            <a:r>
-              <a:rPr sz="2000" b="1">
-                <a:solidFill>
-                  <a:srgbClr val="00A0B0"/>
+            <a:pPr algn="ctr"/>
+            <a:r>
+              <a:rPr sz="1300" b="0" i="1">
+                <a:solidFill>
+                  <a:srgbClr val="6B7280"/>
                 </a:solidFill>
                 <a:latin typeface="Calibri"/>
               </a:rPr>
-              <a:t>▸  </a:t>
-            </a:r>
-            <a:r>
-              <a:rPr sz="2000">
-                <a:solidFill>
-                  <a:srgbClr val="1A1A2E"/>
-                </a:solidFill>
-                <a:latin typeface="Calibri"/>
-              </a:rPr>
-              <a:t>1. Cosa stiamo costruendo? → disegna il sistema (DFD)</a:t>
-            </a:r>
-          </a:p>
-          <a:p>
-            <a:pPr>
-              <a:lnSpc>
-                <a:spcPct val="150000"/>
-              </a:lnSpc>
-            </a:pPr>
-            <a:r>
-              <a:rPr sz="2000" b="1">
-                <a:solidFill>
-                  <a:srgbClr val="00A0B0"/>
-                </a:solidFill>
-                <a:latin typeface="Calibri"/>
-              </a:rPr>
-              <a:t>▸  </a:t>
-            </a:r>
-            <a:r>
-              <a:rPr sz="2000">
-                <a:solidFill>
-                  <a:srgbClr val="1A1A2E"/>
-                </a:solidFill>
-                <a:latin typeface="Calibri"/>
-              </a:rPr>
-              <a:t>2. Cosa può andare storto? → applica STRIDE</a:t>
-            </a:r>
-          </a:p>
-          <a:p>
-            <a:pPr>
-              <a:lnSpc>
-                <a:spcPct val="150000"/>
-              </a:lnSpc>
-            </a:pPr>
-            <a:r>
-              <a:rPr sz="2000" b="1">
-                <a:solidFill>
-                  <a:srgbClr val="00A0B0"/>
-                </a:solidFill>
-                <a:latin typeface="Calibri"/>
-              </a:rPr>
-              <a:t>▸  </a:t>
-            </a:r>
-            <a:r>
-              <a:rPr sz="2000">
-                <a:solidFill>
-                  <a:srgbClr val="1A1A2E"/>
-                </a:solidFill>
-                <a:latin typeface="Calibri"/>
-              </a:rPr>
-              <a:t>3. Cosa facciamo a riguardo? → mitiga / accetta / elimina</a:t>
-            </a:r>
-          </a:p>
-          <a:p>
-            <a:pPr>
-              <a:lnSpc>
-                <a:spcPct val="150000"/>
-              </a:lnSpc>
-            </a:pPr>
-            <a:r>
-              <a:rPr sz="2000" b="1">
-                <a:solidFill>
-                  <a:srgbClr val="00A0B0"/>
-                </a:solidFill>
-                <a:latin typeface="Calibri"/>
-              </a:rPr>
-              <a:t>▸  </a:t>
-            </a:r>
-            <a:r>
-              <a:rPr sz="2000">
-                <a:solidFill>
-                  <a:srgbClr val="1A1A2E"/>
-                </a:solidFill>
-                <a:latin typeface="Calibri"/>
-              </a:rPr>
-              <a:t>4. Abbiamo fatto un buon lavoro? → review e iterazione</a:t>
-            </a:r>
-          </a:p>
-          <a:p>
-            <a:pPr>
-              <a:lnSpc>
-                <a:spcPct val="150000"/>
-              </a:lnSpc>
-            </a:pPr>
-            <a:r>
-              <a:rPr sz="2000" b="1">
-                <a:solidFill>
-                  <a:srgbClr val="00A0B0"/>
-                </a:solidFill>
-                <a:latin typeface="Calibri"/>
-              </a:rPr>
-              <a:t>▸  </a:t>
-            </a:r>
-            <a:r>
-              <a:rPr sz="2000">
-                <a:solidFill>
-                  <a:srgbClr val="1A1A2E"/>
-                </a:solidFill>
-                <a:latin typeface="Calibri"/>
-              </a:rPr>
-              <a:t/>
-            </a:r>
-          </a:p>
-          <a:p>
-            <a:pPr>
-              <a:lnSpc>
-                <a:spcPct val="150000"/>
-              </a:lnSpc>
-            </a:pPr>
-            <a:r>
-              <a:rPr sz="2000" b="1">
-                <a:solidFill>
-                  <a:srgbClr val="00A0B0"/>
-                </a:solidFill>
-                <a:latin typeface="Calibri"/>
-              </a:rPr>
-              <a:t>▸  </a:t>
-            </a:r>
-            <a:r>
-              <a:rPr sz="2000">
-                <a:solidFill>
-                  <a:srgbClr val="1A1A2E"/>
-                </a:solidFill>
-                <a:latin typeface="Calibri"/>
-              </a:rPr>
-              <a:t>Si fa PRIMA di scrivere codice. Su carta, in 30-60 minuti.</a:t>
+              <a:t>Data Flow Diagram con trust boundary tra Internet/server e server/DB</a:t>
             </a:r>
           </a:p>
         </p:txBody>
       </p:sp>
       <p:cxnSp>
         <p:nvCxnSpPr>
-          <p:cNvPr id="5" name="Connector 4"/>
+          <p:cNvPr id="6" name="Connector 5"/>
           <p:cNvCxnSpPr/>
           <p:nvPr/>
         </p:nvCxnSpPr>
@@ -9302,14 +11311,14 @@
       </p:cxnSp>
       <p:sp>
         <p:nvSpPr>
-          <p:cNvPr id="6" name="TextBox 5"/>
+          <p:cNvPr id="7" name="TextBox 6"/>
           <p:cNvSpPr txBox="1"/>
           <p:nvPr/>
         </p:nvSpPr>
         <p:spPr>
           <a:xfrm>
             <a:off x="457200" y="6473952"/>
-            <a:ext cx="7315200" cy="320040"/>
+            <a:ext cx="7315200" cy="292608"/>
           </a:xfrm>
           <a:prstGeom prst="rect">
             <a:avLst/>
@@ -9330,21 +11339,21 @@
                 </a:solidFill>
                 <a:latin typeface="Calibri"/>
               </a:rPr>
-              <a:t>Secure Coding · Corso IFTS STEM · A. Manneschi</a:t>
-            </a:r>
-          </a:p>
-        </p:txBody>
-      </p:sp>
-      <p:sp>
-        <p:nvSpPr>
-          <p:cNvPr id="7" name="TextBox 6"/>
+              <a:t>Secure Coding · Corso IFTS STEM · A. Manneschi · 2024/2025</a:t>
+            </a:r>
+          </a:p>
+        </p:txBody>
+      </p:sp>
+      <p:sp>
+        <p:nvSpPr>
+          <p:cNvPr id="8" name="TextBox 7"/>
           <p:cNvSpPr txBox="1"/>
           <p:nvPr/>
         </p:nvSpPr>
         <p:spPr>
           <a:xfrm>
             <a:off x="10515600" y="6473952"/>
-            <a:ext cx="1188720" cy="320040"/>
+            <a:ext cx="1188720" cy="292608"/>
           </a:xfrm>
           <a:prstGeom prst="rect">
             <a:avLst/>

--- a/slide/L2_owasp_stride.pptx
+++ b/slide/L2_owasp_stride.pptx
@@ -19,6 +19,7 @@
     <p:sldId id="267" r:id="rId18"/>
     <p:sldId id="268" r:id="rId19"/>
     <p:sldId id="269" r:id="rId20"/>
+    <p:sldId id="270" r:id="rId21"/>
   </p:sldIdLst>
   <p:sldSz cx="12191695" cy="6858000" type="screen4x3"/>
   <p:notesSz cx="6858000" cy="9144000"/>
@@ -3588,6 +3589,266 @@
 </file>
 
 <file path=ppt/slides/slide10.xml><?xml version="1.0" encoding="utf-8"?>
+<p:sld xmlns:a="http://schemas.openxmlformats.org/drawingml/2006/main" xmlns:p="http://schemas.openxmlformats.org/presentationml/2006/main" xmlns:r="http://schemas.openxmlformats.org/officeDocument/2006/relationships">
+  <p:cSld>
+    <p:spTree>
+      <p:nvGrpSpPr>
+        <p:cNvPr id="1" name=""/>
+        <p:cNvGrpSpPr/>
+        <p:nvPr/>
+      </p:nvGrpSpPr>
+      <p:grpSpPr/>
+      <p:sp>
+        <p:nvSpPr>
+          <p:cNvPr id="2" name="Rectangle 1"/>
+          <p:cNvSpPr/>
+          <p:nvPr/>
+        </p:nvSpPr>
+        <p:spPr>
+          <a:xfrm>
+            <a:off x="0" y="0"/>
+            <a:ext cx="12191695" cy="777240"/>
+          </a:xfrm>
+          <a:prstGeom prst="rect">
+            <a:avLst/>
+          </a:prstGeom>
+          <a:solidFill>
+            <a:srgbClr val="0F2D52"/>
+          </a:solidFill>
+          <a:ln>
+            <a:noFill/>
+          </a:ln>
+        </p:spPr>
+        <p:style>
+          <a:lnRef idx="1">
+            <a:schemeClr val="accent1"/>
+          </a:lnRef>
+          <a:fillRef idx="3">
+            <a:schemeClr val="accent1"/>
+          </a:fillRef>
+          <a:effectRef idx="2">
+            <a:schemeClr val="accent1"/>
+          </a:effectRef>
+          <a:fontRef idx="minor">
+            <a:schemeClr val="lt1"/>
+          </a:fontRef>
+        </p:style>
+        <p:txBody>
+          <a:bodyPr rtlCol="0" anchor="ctr"/>
+          <a:lstStyle/>
+          <a:p>
+            <a:pPr algn="ctr"/>
+          </a:p>
+        </p:txBody>
+      </p:sp>
+      <p:sp>
+        <p:nvSpPr>
+          <p:cNvPr id="3" name="TextBox 2"/>
+          <p:cNvSpPr txBox="1"/>
+          <p:nvPr/>
+        </p:nvSpPr>
+        <p:spPr>
+          <a:xfrm>
+            <a:off x="457200" y="164592"/>
+            <a:ext cx="10972800" cy="502920"/>
+          </a:xfrm>
+          <a:prstGeom prst="rect">
+            <a:avLst/>
+          </a:prstGeom>
+          <a:noFill/>
+        </p:spPr>
+        <p:txBody>
+          <a:bodyPr wrap="square" lIns="45720" rIns="45720" tIns="18288" bIns="18288" anchor="ctr">
+            <a:spAutoFit/>
+          </a:bodyPr>
+          <a:lstStyle/>
+          <a:p>
+            <a:pPr algn="l"/>
+            <a:r>
+              <a:rPr sz="2400" b="1" i="0">
+                <a:solidFill>
+                  <a:srgbClr val="FFFFFF"/>
+                </a:solidFill>
+                <a:latin typeface="Calibri"/>
+              </a:rPr>
+              <a:t>DFD: esempio su mini-blog</a:t>
+            </a:r>
+          </a:p>
+        </p:txBody>
+      </p:sp>
+      <p:pic>
+        <p:nvPicPr>
+          <p:cNvPr id="4" name="Picture 3" descr="cap2_dfd_mini_blog.png"/>
+          <p:cNvPicPr>
+            <a:picLocks noChangeAspect="1"/>
+          </p:cNvPicPr>
+          <p:nvPr/>
+        </p:nvPicPr>
+        <p:blipFill>
+          <a:blip r:embed="rId2"/>
+          <a:stretch>
+            <a:fillRect/>
+          </a:stretch>
+        </p:blipFill>
+        <p:spPr>
+          <a:xfrm>
+            <a:off x="640080" y="1097280"/>
+            <a:ext cx="10881360" cy="4572000"/>
+          </a:xfrm>
+          <a:prstGeom prst="rect">
+            <a:avLst/>
+          </a:prstGeom>
+        </p:spPr>
+      </p:pic>
+      <p:sp>
+        <p:nvSpPr>
+          <p:cNvPr id="5" name="TextBox 4"/>
+          <p:cNvSpPr txBox="1"/>
+          <p:nvPr/>
+        </p:nvSpPr>
+        <p:spPr>
+          <a:xfrm>
+            <a:off x="457200" y="5852160"/>
+            <a:ext cx="11247120" cy="365760"/>
+          </a:xfrm>
+          <a:prstGeom prst="rect">
+            <a:avLst/>
+          </a:prstGeom>
+          <a:noFill/>
+        </p:spPr>
+        <p:txBody>
+          <a:bodyPr wrap="square" lIns="45720" rIns="45720" tIns="18288" bIns="18288" anchor="t">
+            <a:spAutoFit/>
+          </a:bodyPr>
+          <a:lstStyle/>
+          <a:p>
+            <a:pPr algn="ctr"/>
+            <a:r>
+              <a:rPr sz="1300" b="0" i="1">
+                <a:solidFill>
+                  <a:srgbClr val="6B7280"/>
+                </a:solidFill>
+                <a:latin typeface="Calibri"/>
+              </a:rPr>
+              <a:t>Data Flow Diagram con trust boundary tra Internet/server e server/DB</a:t>
+            </a:r>
+          </a:p>
+        </p:txBody>
+      </p:sp>
+      <p:cxnSp>
+        <p:nvCxnSpPr>
+          <p:cNvPr id="6" name="Connector 5"/>
+          <p:cNvCxnSpPr/>
+          <p:nvPr/>
+        </p:nvCxnSpPr>
+        <p:spPr>
+          <a:xfrm>
+            <a:off x="457200" y="6446520"/>
+            <a:ext cx="11274552" cy="0"/>
+          </a:xfrm>
+          <a:prstGeom prst="line">
+            <a:avLst/>
+          </a:prstGeom>
+          <a:ln w="19050">
+            <a:solidFill>
+              <a:srgbClr val="00A0B0"/>
+            </a:solidFill>
+          </a:ln>
+        </p:spPr>
+        <p:style>
+          <a:lnRef idx="2">
+            <a:schemeClr val="accent1"/>
+          </a:lnRef>
+          <a:fillRef idx="0">
+            <a:schemeClr val="accent1"/>
+          </a:fillRef>
+          <a:effectRef idx="1">
+            <a:schemeClr val="accent1"/>
+          </a:effectRef>
+          <a:fontRef idx="minor">
+            <a:schemeClr val="tx1"/>
+          </a:fontRef>
+        </p:style>
+      </p:cxnSp>
+      <p:sp>
+        <p:nvSpPr>
+          <p:cNvPr id="7" name="TextBox 6"/>
+          <p:cNvSpPr txBox="1"/>
+          <p:nvPr/>
+        </p:nvSpPr>
+        <p:spPr>
+          <a:xfrm>
+            <a:off x="457200" y="6473952"/>
+            <a:ext cx="7315200" cy="292608"/>
+          </a:xfrm>
+          <a:prstGeom prst="rect">
+            <a:avLst/>
+          </a:prstGeom>
+          <a:noFill/>
+        </p:spPr>
+        <p:txBody>
+          <a:bodyPr wrap="square" lIns="45720" rIns="45720" tIns="18288" bIns="18288" anchor="t">
+            <a:spAutoFit/>
+          </a:bodyPr>
+          <a:lstStyle/>
+          <a:p>
+            <a:pPr algn="l"/>
+            <a:r>
+              <a:rPr sz="1000" b="0" i="0">
+                <a:solidFill>
+                  <a:srgbClr val="6B7280"/>
+                </a:solidFill>
+                <a:latin typeface="Calibri"/>
+              </a:rPr>
+              <a:t>Secure Coding · Corso IFTS STEM · A. Manneschi · 2024/2025</a:t>
+            </a:r>
+          </a:p>
+        </p:txBody>
+      </p:sp>
+      <p:sp>
+        <p:nvSpPr>
+          <p:cNvPr id="8" name="TextBox 7"/>
+          <p:cNvSpPr txBox="1"/>
+          <p:nvPr/>
+        </p:nvSpPr>
+        <p:spPr>
+          <a:xfrm>
+            <a:off x="10515600" y="6473952"/>
+            <a:ext cx="1188720" cy="292608"/>
+          </a:xfrm>
+          <a:prstGeom prst="rect">
+            <a:avLst/>
+          </a:prstGeom>
+          <a:noFill/>
+        </p:spPr>
+        <p:txBody>
+          <a:bodyPr wrap="square" lIns="45720" rIns="45720" tIns="18288" bIns="18288" anchor="t">
+            <a:spAutoFit/>
+          </a:bodyPr>
+          <a:lstStyle/>
+          <a:p>
+            <a:pPr algn="r"/>
+            <a:r>
+              <a:rPr sz="1000" b="1" i="0">
+                <a:solidFill>
+                  <a:srgbClr val="6B7280"/>
+                </a:solidFill>
+                <a:latin typeface="Calibri"/>
+              </a:rPr>
+              <a:t>L2  ·  10/15</a:t>
+            </a:r>
+          </a:p>
+        </p:txBody>
+      </p:sp>
+    </p:spTree>
+  </p:cSld>
+  <p:clrMapOvr>
+    <a:masterClrMapping/>
+  </p:clrMapOvr>
+</p:sld>
+</file>
+
+<file path=ppt/slides/slide11.xml><?xml version="1.0" encoding="utf-8"?>
 <p:sld xmlns:a="http://schemas.openxmlformats.org/drawingml/2006/main" xmlns:p="http://schemas.openxmlformats.org/presentationml/2006/main" xmlns:r="http://schemas.openxmlformats.org/officeDocument/2006/relationships">
   <p:cSld>
     <p:spTree>
@@ -4527,427 +4788,7 @@
                 </a:solidFill>
                 <a:latin typeface="Calibri"/>
               </a:rPr>
-              <a:t>L2  ·  10/14</a:t>
-            </a:r>
-          </a:p>
-        </p:txBody>
-      </p:sp>
-    </p:spTree>
-  </p:cSld>
-  <p:clrMapOvr>
-    <a:masterClrMapping/>
-  </p:clrMapOvr>
-</p:sld>
-</file>
-
-<file path=ppt/slides/slide11.xml><?xml version="1.0" encoding="utf-8"?>
-<p:sld xmlns:a="http://schemas.openxmlformats.org/drawingml/2006/main" xmlns:p="http://schemas.openxmlformats.org/presentationml/2006/main" xmlns:r="http://schemas.openxmlformats.org/officeDocument/2006/relationships">
-  <p:cSld>
-    <p:spTree>
-      <p:nvGrpSpPr>
-        <p:cNvPr id="1" name=""/>
-        <p:cNvGrpSpPr/>
-        <p:nvPr/>
-      </p:nvGrpSpPr>
-      <p:grpSpPr/>
-      <p:sp>
-        <p:nvSpPr>
-          <p:cNvPr id="2" name="Rectangle 1"/>
-          <p:cNvSpPr/>
-          <p:nvPr/>
-        </p:nvSpPr>
-        <p:spPr>
-          <a:xfrm>
-            <a:off x="0" y="0"/>
-            <a:ext cx="12191695" cy="777240"/>
-          </a:xfrm>
-          <a:prstGeom prst="rect">
-            <a:avLst/>
-          </a:prstGeom>
-          <a:solidFill>
-            <a:srgbClr val="0F2D52"/>
-          </a:solidFill>
-          <a:ln>
-            <a:noFill/>
-          </a:ln>
-        </p:spPr>
-        <p:style>
-          <a:lnRef idx="1">
-            <a:schemeClr val="accent1"/>
-          </a:lnRef>
-          <a:fillRef idx="3">
-            <a:schemeClr val="accent1"/>
-          </a:fillRef>
-          <a:effectRef idx="2">
-            <a:schemeClr val="accent1"/>
-          </a:effectRef>
-          <a:fontRef idx="minor">
-            <a:schemeClr val="lt1"/>
-          </a:fontRef>
-        </p:style>
-        <p:txBody>
-          <a:bodyPr rtlCol="0" anchor="ctr"/>
-          <a:lstStyle/>
-          <a:p>
-            <a:pPr algn="ctr"/>
-          </a:p>
-        </p:txBody>
-      </p:sp>
-      <p:sp>
-        <p:nvSpPr>
-          <p:cNvPr id="3" name="TextBox 2"/>
-          <p:cNvSpPr txBox="1"/>
-          <p:nvPr/>
-        </p:nvSpPr>
-        <p:spPr>
-          <a:xfrm>
-            <a:off x="457200" y="164592"/>
-            <a:ext cx="10972800" cy="502920"/>
-          </a:xfrm>
-          <a:prstGeom prst="rect">
-            <a:avLst/>
-          </a:prstGeom>
-          <a:noFill/>
-        </p:spPr>
-        <p:txBody>
-          <a:bodyPr wrap="square" lIns="45720" rIns="45720" tIns="18288" bIns="18288" anchor="ctr">
-            <a:spAutoFit/>
-          </a:bodyPr>
-          <a:lstStyle/>
-          <a:p>
-            <a:pPr algn="l"/>
-            <a:r>
-              <a:rPr sz="2400" b="1" i="0">
-                <a:solidFill>
-                  <a:srgbClr val="FFFFFF"/>
-                </a:solidFill>
-                <a:latin typeface="Calibri"/>
-              </a:rPr>
-              <a:t>✏  Workshop in aula (30 min)</a:t>
-            </a:r>
-          </a:p>
-        </p:txBody>
-      </p:sp>
-      <p:sp>
-        <p:nvSpPr>
-          <p:cNvPr id="4" name="TextBox 3"/>
-          <p:cNvSpPr txBox="1"/>
-          <p:nvPr/>
-        </p:nvSpPr>
-        <p:spPr>
-          <a:xfrm>
-            <a:off x="640080" y="1097280"/>
-            <a:ext cx="10972800" cy="5029200"/>
-          </a:xfrm>
-          <a:prstGeom prst="rect">
-            <a:avLst/>
-          </a:prstGeom>
-          <a:noFill/>
-        </p:spPr>
-        <p:txBody>
-          <a:bodyPr wrap="square">
-            <a:spAutoFit/>
-          </a:bodyPr>
-          <a:lstStyle/>
-          <a:p>
-            <a:pPr>
-              <a:lnSpc>
-                <a:spcPct val="150000"/>
-              </a:lnSpc>
-              <a:spcAft>
-                <a:spcPts val="400"/>
-              </a:spcAft>
-            </a:pPr>
-            <a:r>
-              <a:rPr sz="2000" b="1">
-                <a:solidFill>
-                  <a:srgbClr val="00A0B0"/>
-                </a:solidFill>
-                <a:latin typeface="Calibri"/>
-              </a:rPr>
-              <a:t>▸  </a:t>
-            </a:r>
-            <a:r>
-              <a:rPr sz="2000">
-                <a:solidFill>
-                  <a:srgbClr val="1A1A2E"/>
-                </a:solidFill>
-                <a:latin typeface="Calibri"/>
-              </a:rPr>
-              <a:t>A coppie: applica STRIDE a un e-commerce piccolo</a:t>
-            </a:r>
-          </a:p>
-          <a:p>
-            <a:pPr>
-              <a:lnSpc>
-                <a:spcPct val="150000"/>
-              </a:lnSpc>
-              <a:spcAft>
-                <a:spcPts val="400"/>
-              </a:spcAft>
-            </a:pPr>
-            <a:r>
-              <a:rPr sz="2000" b="1">
-                <a:solidFill>
-                  <a:srgbClr val="00A0B0"/>
-                </a:solidFill>
-                <a:latin typeface="Calibri"/>
-              </a:rPr>
-              <a:t>▸  </a:t>
-            </a:r>
-            <a:r>
-              <a:rPr sz="2000">
-                <a:solidFill>
-                  <a:srgbClr val="1A1A2E"/>
-                </a:solidFill>
-                <a:latin typeface="Calibri"/>
-              </a:rPr>
-              <a:t>registrazione · login · ricerca · ordine · pagamento Stripe · email</a:t>
-            </a:r>
-          </a:p>
-          <a:p>
-            <a:pPr>
-              <a:lnSpc>
-                <a:spcPct val="150000"/>
-              </a:lnSpc>
-              <a:spcAft>
-                <a:spcPts val="400"/>
-              </a:spcAft>
-            </a:pPr>
-            <a:r>
-              <a:rPr sz="2000" b="1">
-                <a:solidFill>
-                  <a:srgbClr val="00A0B0"/>
-                </a:solidFill>
-                <a:latin typeface="Calibri"/>
-              </a:rPr>
-              <a:t>▸  </a:t>
-            </a:r>
-            <a:r>
-              <a:rPr sz="2000">
-                <a:solidFill>
-                  <a:srgbClr val="1A1A2E"/>
-                </a:solidFill>
-                <a:latin typeface="Calibri"/>
-              </a:rPr>
-              <a:t/>
-            </a:r>
-          </a:p>
-          <a:p>
-            <a:pPr>
-              <a:lnSpc>
-                <a:spcPct val="150000"/>
-              </a:lnSpc>
-              <a:spcAft>
-                <a:spcPts val="400"/>
-              </a:spcAft>
-            </a:pPr>
-            <a:r>
-              <a:rPr sz="2000" b="1">
-                <a:solidFill>
-                  <a:srgbClr val="00A0B0"/>
-                </a:solidFill>
-                <a:latin typeface="Calibri"/>
-              </a:rPr>
-              <a:t>▸  </a:t>
-            </a:r>
-            <a:r>
-              <a:rPr sz="2000">
-                <a:solidFill>
-                  <a:srgbClr val="1A1A2E"/>
-                </a:solidFill>
-                <a:latin typeface="Calibri"/>
-              </a:rPr>
-              <a:t>Output richiesto:</a:t>
-            </a:r>
-          </a:p>
-          <a:p>
-            <a:pPr>
-              <a:lnSpc>
-                <a:spcPct val="150000"/>
-              </a:lnSpc>
-              <a:spcAft>
-                <a:spcPts val="400"/>
-              </a:spcAft>
-            </a:pPr>
-            <a:r>
-              <a:rPr sz="2000" b="1">
-                <a:solidFill>
-                  <a:srgbClr val="00A0B0"/>
-                </a:solidFill>
-                <a:latin typeface="Calibri"/>
-              </a:rPr>
-              <a:t>▸  </a:t>
-            </a:r>
-            <a:r>
-              <a:rPr sz="2000">
-                <a:solidFill>
-                  <a:srgbClr val="1A1A2E"/>
-                </a:solidFill>
-                <a:latin typeface="Calibri"/>
-              </a:rPr>
-              <a:t>Disegno DFD (≥4 processi, 2 datastore, 2 trust boundary)</a:t>
-            </a:r>
-          </a:p>
-          <a:p>
-            <a:pPr>
-              <a:lnSpc>
-                <a:spcPct val="150000"/>
-              </a:lnSpc>
-              <a:spcAft>
-                <a:spcPts val="400"/>
-              </a:spcAft>
-            </a:pPr>
-            <a:r>
-              <a:rPr sz="2000" b="1">
-                <a:solidFill>
-                  <a:srgbClr val="00A0B0"/>
-                </a:solidFill>
-                <a:latin typeface="Calibri"/>
-              </a:rPr>
-              <a:t>▸  </a:t>
-            </a:r>
-            <a:r>
-              <a:rPr sz="2000">
-                <a:solidFill>
-                  <a:srgbClr val="1A1A2E"/>
-                </a:solidFill>
-                <a:latin typeface="Calibri"/>
-              </a:rPr>
-              <a:t>Tabella STRIDE con ≥8 minacce sparse tra le 6 categorie</a:t>
-            </a:r>
-          </a:p>
-          <a:p>
-            <a:pPr>
-              <a:lnSpc>
-                <a:spcPct val="150000"/>
-              </a:lnSpc>
-              <a:spcAft>
-                <a:spcPts val="400"/>
-              </a:spcAft>
-            </a:pPr>
-            <a:r>
-              <a:rPr sz="2000" b="1">
-                <a:solidFill>
-                  <a:srgbClr val="00A0B0"/>
-                </a:solidFill>
-                <a:latin typeface="Calibri"/>
-              </a:rPr>
-              <a:t>▸  </a:t>
-            </a:r>
-            <a:r>
-              <a:rPr sz="2000">
-                <a:solidFill>
-                  <a:srgbClr val="1A1A2E"/>
-                </a:solidFill>
-                <a:latin typeface="Calibri"/>
-              </a:rPr>
-              <a:t>Una mitigazione per ogni minaccia</a:t>
-            </a:r>
-          </a:p>
-        </p:txBody>
-      </p:sp>
-      <p:cxnSp>
-        <p:nvCxnSpPr>
-          <p:cNvPr id="5" name="Connector 4"/>
-          <p:cNvCxnSpPr/>
-          <p:nvPr/>
-        </p:nvCxnSpPr>
-        <p:spPr>
-          <a:xfrm>
-            <a:off x="457200" y="6446520"/>
-            <a:ext cx="11274552" cy="0"/>
-          </a:xfrm>
-          <a:prstGeom prst="line">
-            <a:avLst/>
-          </a:prstGeom>
-          <a:ln w="19050">
-            <a:solidFill>
-              <a:srgbClr val="00A0B0"/>
-            </a:solidFill>
-          </a:ln>
-        </p:spPr>
-        <p:style>
-          <a:lnRef idx="2">
-            <a:schemeClr val="accent1"/>
-          </a:lnRef>
-          <a:fillRef idx="0">
-            <a:schemeClr val="accent1"/>
-          </a:fillRef>
-          <a:effectRef idx="1">
-            <a:schemeClr val="accent1"/>
-          </a:effectRef>
-          <a:fontRef idx="minor">
-            <a:schemeClr val="tx1"/>
-          </a:fontRef>
-        </p:style>
-      </p:cxnSp>
-      <p:sp>
-        <p:nvSpPr>
-          <p:cNvPr id="6" name="TextBox 5"/>
-          <p:cNvSpPr txBox="1"/>
-          <p:nvPr/>
-        </p:nvSpPr>
-        <p:spPr>
-          <a:xfrm>
-            <a:off x="457200" y="6473952"/>
-            <a:ext cx="7315200" cy="292608"/>
-          </a:xfrm>
-          <a:prstGeom prst="rect">
-            <a:avLst/>
-          </a:prstGeom>
-          <a:noFill/>
-        </p:spPr>
-        <p:txBody>
-          <a:bodyPr wrap="square" lIns="45720" rIns="45720" tIns="18288" bIns="18288" anchor="t">
-            <a:spAutoFit/>
-          </a:bodyPr>
-          <a:lstStyle/>
-          <a:p>
-            <a:pPr algn="l"/>
-            <a:r>
-              <a:rPr sz="1000" b="0" i="0">
-                <a:solidFill>
-                  <a:srgbClr val="6B7280"/>
-                </a:solidFill>
-                <a:latin typeface="Calibri"/>
-              </a:rPr>
-              <a:t>Secure Coding · Corso IFTS STEM · A. Manneschi · 2024/2025</a:t>
-            </a:r>
-          </a:p>
-        </p:txBody>
-      </p:sp>
-      <p:sp>
-        <p:nvSpPr>
-          <p:cNvPr id="7" name="TextBox 6"/>
-          <p:cNvSpPr txBox="1"/>
-          <p:nvPr/>
-        </p:nvSpPr>
-        <p:spPr>
-          <a:xfrm>
-            <a:off x="10515600" y="6473952"/>
-            <a:ext cx="1188720" cy="292608"/>
-          </a:xfrm>
-          <a:prstGeom prst="rect">
-            <a:avLst/>
-          </a:prstGeom>
-          <a:noFill/>
-        </p:spPr>
-        <p:txBody>
-          <a:bodyPr wrap="square" lIns="45720" rIns="45720" tIns="18288" bIns="18288" anchor="t">
-            <a:spAutoFit/>
-          </a:bodyPr>
-          <a:lstStyle/>
-          <a:p>
-            <a:pPr algn="r"/>
-            <a:r>
-              <a:rPr sz="1000" b="1" i="0">
-                <a:solidFill>
-                  <a:srgbClr val="6B7280"/>
-                </a:solidFill>
-                <a:latin typeface="Calibri"/>
-              </a:rPr>
-              <a:t>L2  ·  11/14</a:t>
+              <a:t>L2  ·  11/15</a:t>
             </a:r>
           </a:p>
         </p:txBody>
@@ -5043,64 +4884,21 @@
                 </a:solidFill>
                 <a:latin typeface="Calibri"/>
               </a:rPr>
-              <a:t>📌  Cosa portare a casa</a:t>
-            </a:r>
-          </a:p>
-        </p:txBody>
-      </p:sp>
-      <p:sp>
-        <p:nvSpPr>
-          <p:cNvPr id="4" name="Oval 3"/>
-          <p:cNvSpPr/>
-          <p:nvPr/>
-        </p:nvSpPr>
-        <p:spPr>
-          <a:xfrm>
-            <a:off x="914400" y="1440180"/>
-            <a:ext cx="777240" cy="777240"/>
-          </a:xfrm>
-          <a:prstGeom prst="ellipse">
-            <a:avLst/>
-          </a:prstGeom>
-          <a:solidFill>
-            <a:srgbClr val="00A0B0"/>
-          </a:solidFill>
-          <a:ln>
-            <a:noFill/>
-          </a:ln>
-        </p:spPr>
-        <p:style>
-          <a:lnRef idx="1">
-            <a:schemeClr val="accent1"/>
-          </a:lnRef>
-          <a:fillRef idx="3">
-            <a:schemeClr val="accent1"/>
-          </a:fillRef>
-          <a:effectRef idx="2">
-            <a:schemeClr val="accent1"/>
-          </a:effectRef>
-          <a:fontRef idx="minor">
-            <a:schemeClr val="lt1"/>
-          </a:fontRef>
-        </p:style>
-        <p:txBody>
-          <a:bodyPr rtlCol="0" anchor="ctr"/>
-          <a:lstStyle/>
-          <a:p>
-            <a:pPr algn="ctr"/>
-          </a:p>
-        </p:txBody>
-      </p:sp>
-      <p:sp>
-        <p:nvSpPr>
-          <p:cNvPr id="5" name="TextBox 4"/>
+              <a:t>✏  Workshop in aula (30 min)</a:t>
+            </a:r>
+          </a:p>
+        </p:txBody>
+      </p:sp>
+      <p:sp>
+        <p:nvSpPr>
+          <p:cNvPr id="4" name="TextBox 3"/>
           <p:cNvSpPr txBox="1"/>
           <p:nvPr/>
         </p:nvSpPr>
         <p:spPr>
           <a:xfrm>
-            <a:off x="914400" y="1440180"/>
-            <a:ext cx="777240" cy="777240"/>
+            <a:off x="640080" y="1097280"/>
+            <a:ext cx="10972800" cy="5029200"/>
           </a:xfrm>
           <a:prstGeom prst="rect">
             <a:avLst/>
@@ -5108,749 +4906,211 @@
           <a:noFill/>
         </p:spPr>
         <p:txBody>
-          <a:bodyPr wrap="square" lIns="45720" rIns="45720" tIns="18288" bIns="18288" anchor="ctr">
+          <a:bodyPr wrap="square">
             <a:spAutoFit/>
           </a:bodyPr>
           <a:lstStyle/>
           <a:p>
-            <a:pPr algn="ctr"/>
-            <a:r>
-              <a:rPr sz="2800" b="1" i="0">
-                <a:solidFill>
-                  <a:srgbClr val="FFFFFF"/>
+            <a:pPr>
+              <a:lnSpc>
+                <a:spcPct val="150000"/>
+              </a:lnSpc>
+              <a:spcAft>
+                <a:spcPts val="400"/>
+              </a:spcAft>
+            </a:pPr>
+            <a:r>
+              <a:rPr sz="2000" b="1">
+                <a:solidFill>
+                  <a:srgbClr val="00A0B0"/>
                 </a:solidFill>
                 <a:latin typeface="Calibri"/>
               </a:rPr>
-              <a:t>1</a:t>
-            </a:r>
-          </a:p>
-        </p:txBody>
-      </p:sp>
-      <p:sp>
-        <p:nvSpPr>
-          <p:cNvPr id="6" name="Rounded Rectangle 5"/>
-          <p:cNvSpPr/>
-          <p:nvPr/>
-        </p:nvSpPr>
-        <p:spPr>
-          <a:xfrm>
-            <a:off x="2011680" y="1440180"/>
-            <a:ext cx="9144000" cy="777240"/>
-          </a:xfrm>
-          <a:prstGeom prst="roundRect">
-            <a:avLst>
-              <a:gd name="adj" fmla="val 8000"/>
-            </a:avLst>
-          </a:prstGeom>
-          <a:solidFill>
-            <a:srgbClr val="FBFBFD"/>
-          </a:solidFill>
-          <a:ln w="19050">
-            <a:solidFill>
-              <a:srgbClr val="00A0B0"/>
-            </a:solidFill>
-          </a:ln>
-        </p:spPr>
-        <p:style>
-          <a:lnRef idx="1">
-            <a:schemeClr val="accent1"/>
-          </a:lnRef>
-          <a:fillRef idx="3">
-            <a:schemeClr val="accent1"/>
-          </a:fillRef>
-          <a:effectRef idx="2">
-            <a:schemeClr val="accent1"/>
-          </a:effectRef>
-          <a:fontRef idx="minor">
-            <a:schemeClr val="lt1"/>
-          </a:fontRef>
-        </p:style>
-        <p:txBody>
-          <a:bodyPr rtlCol="0" anchor="ctr"/>
-          <a:lstStyle/>
-          <a:p>
-            <a:pPr algn="ctr"/>
-          </a:p>
-        </p:txBody>
-      </p:sp>
-      <p:sp>
-        <p:nvSpPr>
-          <p:cNvPr id="7" name="TextBox 6"/>
-          <p:cNvSpPr txBox="1"/>
-          <p:nvPr/>
-        </p:nvSpPr>
-        <p:spPr>
-          <a:xfrm>
-            <a:off x="2286000" y="1440180"/>
-            <a:ext cx="8686800" cy="777240"/>
-          </a:xfrm>
-          <a:prstGeom prst="rect">
-            <a:avLst/>
-          </a:prstGeom>
-          <a:noFill/>
-        </p:spPr>
-        <p:txBody>
-          <a:bodyPr wrap="square" lIns="45720" rIns="45720" tIns="18288" bIns="18288" anchor="ctr">
-            <a:spAutoFit/>
-          </a:bodyPr>
-          <a:lstStyle/>
-          <a:p>
-            <a:pPr algn="l"/>
-            <a:r>
-              <a:rPr sz="1800" b="0" i="0">
+              <a:t>▸  </a:t>
+            </a:r>
+            <a:r>
+              <a:rPr sz="2000">
                 <a:solidFill>
                   <a:srgbClr val="1A1A2E"/>
                 </a:solidFill>
                 <a:latin typeface="Calibri"/>
               </a:rPr>
-              <a:t>OWASP Top 10: impara almeno i primi 5 a memoria</a:t>
-            </a:r>
-          </a:p>
-        </p:txBody>
-      </p:sp>
-      <p:sp>
-        <p:nvSpPr>
-          <p:cNvPr id="8" name="Oval 7"/>
-          <p:cNvSpPr/>
-          <p:nvPr/>
-        </p:nvSpPr>
-        <p:spPr>
-          <a:xfrm>
-            <a:off x="914400" y="2354580"/>
-            <a:ext cx="777240" cy="777240"/>
-          </a:xfrm>
-          <a:prstGeom prst="ellipse">
-            <a:avLst/>
-          </a:prstGeom>
-          <a:solidFill>
-            <a:srgbClr val="00A0B0"/>
-          </a:solidFill>
-          <a:ln>
-            <a:noFill/>
-          </a:ln>
-        </p:spPr>
-        <p:style>
-          <a:lnRef idx="1">
-            <a:schemeClr val="accent1"/>
-          </a:lnRef>
-          <a:fillRef idx="3">
-            <a:schemeClr val="accent1"/>
-          </a:fillRef>
-          <a:effectRef idx="2">
-            <a:schemeClr val="accent1"/>
-          </a:effectRef>
-          <a:fontRef idx="minor">
-            <a:schemeClr val="lt1"/>
-          </a:fontRef>
-        </p:style>
-        <p:txBody>
-          <a:bodyPr rtlCol="0" anchor="ctr"/>
-          <a:lstStyle/>
-          <a:p>
-            <a:pPr algn="ctr"/>
-          </a:p>
-        </p:txBody>
-      </p:sp>
-      <p:sp>
-        <p:nvSpPr>
-          <p:cNvPr id="9" name="TextBox 8"/>
-          <p:cNvSpPr txBox="1"/>
-          <p:nvPr/>
-        </p:nvSpPr>
-        <p:spPr>
-          <a:xfrm>
-            <a:off x="914400" y="2354580"/>
-            <a:ext cx="777240" cy="777240"/>
-          </a:xfrm>
-          <a:prstGeom prst="rect">
-            <a:avLst/>
-          </a:prstGeom>
-          <a:noFill/>
-        </p:spPr>
-        <p:txBody>
-          <a:bodyPr wrap="square" lIns="45720" rIns="45720" tIns="18288" bIns="18288" anchor="ctr">
-            <a:spAutoFit/>
-          </a:bodyPr>
-          <a:lstStyle/>
-          <a:p>
-            <a:pPr algn="ctr"/>
-            <a:r>
-              <a:rPr sz="2800" b="1" i="0">
-                <a:solidFill>
-                  <a:srgbClr val="FFFFFF"/>
+              <a:t>A coppie: applica STRIDE a un e-commerce piccolo</a:t>
+            </a:r>
+          </a:p>
+          <a:p>
+            <a:pPr>
+              <a:lnSpc>
+                <a:spcPct val="150000"/>
+              </a:lnSpc>
+              <a:spcAft>
+                <a:spcPts val="400"/>
+              </a:spcAft>
+            </a:pPr>
+            <a:r>
+              <a:rPr sz="2000" b="1">
+                <a:solidFill>
+                  <a:srgbClr val="00A0B0"/>
                 </a:solidFill>
                 <a:latin typeface="Calibri"/>
               </a:rPr>
-              <a:t>2</a:t>
-            </a:r>
-          </a:p>
-        </p:txBody>
-      </p:sp>
-      <p:sp>
-        <p:nvSpPr>
-          <p:cNvPr id="10" name="Rounded Rectangle 9"/>
-          <p:cNvSpPr/>
-          <p:nvPr/>
-        </p:nvSpPr>
-        <p:spPr>
-          <a:xfrm>
-            <a:off x="2011680" y="2354580"/>
-            <a:ext cx="9144000" cy="777240"/>
-          </a:xfrm>
-          <a:prstGeom prst="roundRect">
-            <a:avLst>
-              <a:gd name="adj" fmla="val 8000"/>
-            </a:avLst>
-          </a:prstGeom>
-          <a:solidFill>
-            <a:srgbClr val="FBFBFD"/>
-          </a:solidFill>
-          <a:ln w="19050">
-            <a:solidFill>
-              <a:srgbClr val="00A0B0"/>
-            </a:solidFill>
-          </a:ln>
-        </p:spPr>
-        <p:style>
-          <a:lnRef idx="1">
-            <a:schemeClr val="accent1"/>
-          </a:lnRef>
-          <a:fillRef idx="3">
-            <a:schemeClr val="accent1"/>
-          </a:fillRef>
-          <a:effectRef idx="2">
-            <a:schemeClr val="accent1"/>
-          </a:effectRef>
-          <a:fontRef idx="minor">
-            <a:schemeClr val="lt1"/>
-          </a:fontRef>
-        </p:style>
-        <p:txBody>
-          <a:bodyPr rtlCol="0" anchor="ctr"/>
-          <a:lstStyle/>
-          <a:p>
-            <a:pPr algn="ctr"/>
-          </a:p>
-        </p:txBody>
-      </p:sp>
-      <p:sp>
-        <p:nvSpPr>
-          <p:cNvPr id="11" name="TextBox 10"/>
-          <p:cNvSpPr txBox="1"/>
-          <p:nvPr/>
-        </p:nvSpPr>
-        <p:spPr>
-          <a:xfrm>
-            <a:off x="2286000" y="2354580"/>
-            <a:ext cx="8686800" cy="777240"/>
-          </a:xfrm>
-          <a:prstGeom prst="rect">
-            <a:avLst/>
-          </a:prstGeom>
-          <a:noFill/>
-        </p:spPr>
-        <p:txBody>
-          <a:bodyPr wrap="square" lIns="45720" rIns="45720" tIns="18288" bIns="18288" anchor="ctr">
-            <a:spAutoFit/>
-          </a:bodyPr>
-          <a:lstStyle/>
-          <a:p>
-            <a:pPr algn="l"/>
-            <a:r>
-              <a:rPr sz="1800" b="0" i="0">
+              <a:t>▸  </a:t>
+            </a:r>
+            <a:r>
+              <a:rPr sz="2000">
                 <a:solidFill>
                   <a:srgbClr val="1A1A2E"/>
                 </a:solidFill>
                 <a:latin typeface="Calibri"/>
               </a:rPr>
-              <a:t>CVE = identificatore, CVSS = punteggio 0-10</a:t>
-            </a:r>
-          </a:p>
-        </p:txBody>
-      </p:sp>
-      <p:sp>
-        <p:nvSpPr>
-          <p:cNvPr id="12" name="Oval 11"/>
-          <p:cNvSpPr/>
-          <p:nvPr/>
-        </p:nvSpPr>
-        <p:spPr>
-          <a:xfrm>
-            <a:off x="914400" y="3268980"/>
-            <a:ext cx="777240" cy="777240"/>
-          </a:xfrm>
-          <a:prstGeom prst="ellipse">
-            <a:avLst/>
-          </a:prstGeom>
-          <a:solidFill>
-            <a:srgbClr val="00A0B0"/>
-          </a:solidFill>
-          <a:ln>
-            <a:noFill/>
-          </a:ln>
-        </p:spPr>
-        <p:style>
-          <a:lnRef idx="1">
-            <a:schemeClr val="accent1"/>
-          </a:lnRef>
-          <a:fillRef idx="3">
-            <a:schemeClr val="accent1"/>
-          </a:fillRef>
-          <a:effectRef idx="2">
-            <a:schemeClr val="accent1"/>
-          </a:effectRef>
-          <a:fontRef idx="minor">
-            <a:schemeClr val="lt1"/>
-          </a:fontRef>
-        </p:style>
-        <p:txBody>
-          <a:bodyPr rtlCol="0" anchor="ctr"/>
-          <a:lstStyle/>
-          <a:p>
-            <a:pPr algn="ctr"/>
-          </a:p>
-        </p:txBody>
-      </p:sp>
-      <p:sp>
-        <p:nvSpPr>
-          <p:cNvPr id="13" name="TextBox 12"/>
-          <p:cNvSpPr txBox="1"/>
-          <p:nvPr/>
-        </p:nvSpPr>
-        <p:spPr>
-          <a:xfrm>
-            <a:off x="914400" y="3268980"/>
-            <a:ext cx="777240" cy="777240"/>
-          </a:xfrm>
-          <a:prstGeom prst="rect">
-            <a:avLst/>
-          </a:prstGeom>
-          <a:noFill/>
-        </p:spPr>
-        <p:txBody>
-          <a:bodyPr wrap="square" lIns="45720" rIns="45720" tIns="18288" bIns="18288" anchor="ctr">
-            <a:spAutoFit/>
-          </a:bodyPr>
-          <a:lstStyle/>
-          <a:p>
-            <a:pPr algn="ctr"/>
-            <a:r>
-              <a:rPr sz="2800" b="1" i="0">
-                <a:solidFill>
-                  <a:srgbClr val="FFFFFF"/>
+              <a:t>registrazione · login · ricerca · ordine · pagamento Stripe · email</a:t>
+            </a:r>
+          </a:p>
+          <a:p>
+            <a:pPr>
+              <a:lnSpc>
+                <a:spcPct val="150000"/>
+              </a:lnSpc>
+              <a:spcAft>
+                <a:spcPts val="400"/>
+              </a:spcAft>
+            </a:pPr>
+            <a:r>
+              <a:rPr sz="2000" b="1">
+                <a:solidFill>
+                  <a:srgbClr val="00A0B0"/>
                 </a:solidFill>
                 <a:latin typeface="Calibri"/>
               </a:rPr>
-              <a:t>3</a:t>
-            </a:r>
-          </a:p>
-        </p:txBody>
-      </p:sp>
-      <p:sp>
-        <p:nvSpPr>
-          <p:cNvPr id="14" name="Rounded Rectangle 13"/>
-          <p:cNvSpPr/>
-          <p:nvPr/>
-        </p:nvSpPr>
-        <p:spPr>
-          <a:xfrm>
-            <a:off x="2011680" y="3268980"/>
-            <a:ext cx="9144000" cy="777240"/>
-          </a:xfrm>
-          <a:prstGeom prst="roundRect">
-            <a:avLst>
-              <a:gd name="adj" fmla="val 8000"/>
-            </a:avLst>
-          </a:prstGeom>
-          <a:solidFill>
-            <a:srgbClr val="FBFBFD"/>
-          </a:solidFill>
-          <a:ln w="19050">
-            <a:solidFill>
-              <a:srgbClr val="00A0B0"/>
-            </a:solidFill>
-          </a:ln>
-        </p:spPr>
-        <p:style>
-          <a:lnRef idx="1">
-            <a:schemeClr val="accent1"/>
-          </a:lnRef>
-          <a:fillRef idx="3">
-            <a:schemeClr val="accent1"/>
-          </a:fillRef>
-          <a:effectRef idx="2">
-            <a:schemeClr val="accent1"/>
-          </a:effectRef>
-          <a:fontRef idx="minor">
-            <a:schemeClr val="lt1"/>
-          </a:fontRef>
-        </p:style>
-        <p:txBody>
-          <a:bodyPr rtlCol="0" anchor="ctr"/>
-          <a:lstStyle/>
-          <a:p>
-            <a:pPr algn="ctr"/>
-          </a:p>
-        </p:txBody>
-      </p:sp>
-      <p:sp>
-        <p:nvSpPr>
-          <p:cNvPr id="15" name="TextBox 14"/>
-          <p:cNvSpPr txBox="1"/>
-          <p:nvPr/>
-        </p:nvSpPr>
-        <p:spPr>
-          <a:xfrm>
-            <a:off x="2286000" y="3268980"/>
-            <a:ext cx="8686800" cy="777240"/>
-          </a:xfrm>
-          <a:prstGeom prst="rect">
-            <a:avLst/>
-          </a:prstGeom>
-          <a:noFill/>
-        </p:spPr>
-        <p:txBody>
-          <a:bodyPr wrap="square" lIns="45720" rIns="45720" tIns="18288" bIns="18288" anchor="ctr">
-            <a:spAutoFit/>
-          </a:bodyPr>
-          <a:lstStyle/>
-          <a:p>
-            <a:pPr algn="l"/>
-            <a:r>
-              <a:rPr sz="1800" b="0" i="0">
+              <a:t>▸  </a:t>
+            </a:r>
+            <a:r>
+              <a:rPr sz="2000">
                 <a:solidFill>
                   <a:srgbClr val="1A1A2E"/>
                 </a:solidFill>
                 <a:latin typeface="Calibri"/>
               </a:rPr>
-              <a:t>Threat modeling = 4 domande di Shostack</a:t>
-            </a:r>
-          </a:p>
-        </p:txBody>
-      </p:sp>
-      <p:sp>
-        <p:nvSpPr>
-          <p:cNvPr id="16" name="Oval 15"/>
-          <p:cNvSpPr/>
-          <p:nvPr/>
-        </p:nvSpPr>
-        <p:spPr>
-          <a:xfrm>
-            <a:off x="914400" y="4183380"/>
-            <a:ext cx="777240" cy="777240"/>
-          </a:xfrm>
-          <a:prstGeom prst="ellipse">
-            <a:avLst/>
-          </a:prstGeom>
-          <a:solidFill>
-            <a:srgbClr val="00A0B0"/>
-          </a:solidFill>
-          <a:ln>
-            <a:noFill/>
-          </a:ln>
-        </p:spPr>
-        <p:style>
-          <a:lnRef idx="1">
-            <a:schemeClr val="accent1"/>
-          </a:lnRef>
-          <a:fillRef idx="3">
-            <a:schemeClr val="accent1"/>
-          </a:fillRef>
-          <a:effectRef idx="2">
-            <a:schemeClr val="accent1"/>
-          </a:effectRef>
-          <a:fontRef idx="minor">
-            <a:schemeClr val="lt1"/>
-          </a:fontRef>
-        </p:style>
-        <p:txBody>
-          <a:bodyPr rtlCol="0" anchor="ctr"/>
-          <a:lstStyle/>
-          <a:p>
-            <a:pPr algn="ctr"/>
-          </a:p>
-        </p:txBody>
-      </p:sp>
-      <p:sp>
-        <p:nvSpPr>
-          <p:cNvPr id="17" name="TextBox 16"/>
-          <p:cNvSpPr txBox="1"/>
-          <p:nvPr/>
-        </p:nvSpPr>
-        <p:spPr>
-          <a:xfrm>
-            <a:off x="914400" y="4183380"/>
-            <a:ext cx="777240" cy="777240"/>
-          </a:xfrm>
-          <a:prstGeom prst="rect">
-            <a:avLst/>
-          </a:prstGeom>
-          <a:noFill/>
-        </p:spPr>
-        <p:txBody>
-          <a:bodyPr wrap="square" lIns="45720" rIns="45720" tIns="18288" bIns="18288" anchor="ctr">
-            <a:spAutoFit/>
-          </a:bodyPr>
-          <a:lstStyle/>
-          <a:p>
-            <a:pPr algn="ctr"/>
-            <a:r>
-              <a:rPr sz="2800" b="1" i="0">
-                <a:solidFill>
-                  <a:srgbClr val="FFFFFF"/>
+              <a:t/>
+            </a:r>
+          </a:p>
+          <a:p>
+            <a:pPr>
+              <a:lnSpc>
+                <a:spcPct val="150000"/>
+              </a:lnSpc>
+              <a:spcAft>
+                <a:spcPts val="400"/>
+              </a:spcAft>
+            </a:pPr>
+            <a:r>
+              <a:rPr sz="2000" b="1">
+                <a:solidFill>
+                  <a:srgbClr val="00A0B0"/>
                 </a:solidFill>
                 <a:latin typeface="Calibri"/>
               </a:rPr>
-              <a:t>4</a:t>
-            </a:r>
-          </a:p>
-        </p:txBody>
-      </p:sp>
-      <p:sp>
-        <p:nvSpPr>
-          <p:cNvPr id="18" name="Rounded Rectangle 17"/>
-          <p:cNvSpPr/>
-          <p:nvPr/>
-        </p:nvSpPr>
-        <p:spPr>
-          <a:xfrm>
-            <a:off x="2011680" y="4183380"/>
-            <a:ext cx="9144000" cy="777240"/>
-          </a:xfrm>
-          <a:prstGeom prst="roundRect">
-            <a:avLst>
-              <a:gd name="adj" fmla="val 8000"/>
-            </a:avLst>
-          </a:prstGeom>
-          <a:solidFill>
-            <a:srgbClr val="FBFBFD"/>
-          </a:solidFill>
-          <a:ln w="19050">
-            <a:solidFill>
-              <a:srgbClr val="00A0B0"/>
-            </a:solidFill>
-          </a:ln>
-        </p:spPr>
-        <p:style>
-          <a:lnRef idx="1">
-            <a:schemeClr val="accent1"/>
-          </a:lnRef>
-          <a:fillRef idx="3">
-            <a:schemeClr val="accent1"/>
-          </a:fillRef>
-          <a:effectRef idx="2">
-            <a:schemeClr val="accent1"/>
-          </a:effectRef>
-          <a:fontRef idx="minor">
-            <a:schemeClr val="lt1"/>
-          </a:fontRef>
-        </p:style>
-        <p:txBody>
-          <a:bodyPr rtlCol="0" anchor="ctr"/>
-          <a:lstStyle/>
-          <a:p>
-            <a:pPr algn="ctr"/>
-          </a:p>
-        </p:txBody>
-      </p:sp>
-      <p:sp>
-        <p:nvSpPr>
-          <p:cNvPr id="19" name="TextBox 18"/>
-          <p:cNvSpPr txBox="1"/>
-          <p:nvPr/>
-        </p:nvSpPr>
-        <p:spPr>
-          <a:xfrm>
-            <a:off x="2286000" y="4183380"/>
-            <a:ext cx="8686800" cy="777240"/>
-          </a:xfrm>
-          <a:prstGeom prst="rect">
-            <a:avLst/>
-          </a:prstGeom>
-          <a:noFill/>
-        </p:spPr>
-        <p:txBody>
-          <a:bodyPr wrap="square" lIns="45720" rIns="45720" tIns="18288" bIns="18288" anchor="ctr">
-            <a:spAutoFit/>
-          </a:bodyPr>
-          <a:lstStyle/>
-          <a:p>
-            <a:pPr algn="l"/>
-            <a:r>
-              <a:rPr sz="1800" b="0" i="0">
+              <a:t>▸  </a:t>
+            </a:r>
+            <a:r>
+              <a:rPr sz="2000">
                 <a:solidFill>
                   <a:srgbClr val="1A1A2E"/>
                 </a:solidFill>
                 <a:latin typeface="Calibri"/>
               </a:rPr>
-              <a:t>STRIDE = checklist sistematica, 6 categorie</a:t>
-            </a:r>
-          </a:p>
-        </p:txBody>
-      </p:sp>
-      <p:sp>
-        <p:nvSpPr>
-          <p:cNvPr id="20" name="Oval 19"/>
-          <p:cNvSpPr/>
-          <p:nvPr/>
-        </p:nvSpPr>
-        <p:spPr>
-          <a:xfrm>
-            <a:off x="914400" y="5097780"/>
-            <a:ext cx="777240" cy="777240"/>
-          </a:xfrm>
-          <a:prstGeom prst="ellipse">
-            <a:avLst/>
-          </a:prstGeom>
-          <a:solidFill>
-            <a:srgbClr val="00A0B0"/>
-          </a:solidFill>
-          <a:ln>
-            <a:noFill/>
-          </a:ln>
-        </p:spPr>
-        <p:style>
-          <a:lnRef idx="1">
-            <a:schemeClr val="accent1"/>
-          </a:lnRef>
-          <a:fillRef idx="3">
-            <a:schemeClr val="accent1"/>
-          </a:fillRef>
-          <a:effectRef idx="2">
-            <a:schemeClr val="accent1"/>
-          </a:effectRef>
-          <a:fontRef idx="minor">
-            <a:schemeClr val="lt1"/>
-          </a:fontRef>
-        </p:style>
-        <p:txBody>
-          <a:bodyPr rtlCol="0" anchor="ctr"/>
-          <a:lstStyle/>
-          <a:p>
-            <a:pPr algn="ctr"/>
-          </a:p>
-        </p:txBody>
-      </p:sp>
-      <p:sp>
-        <p:nvSpPr>
-          <p:cNvPr id="21" name="TextBox 20"/>
-          <p:cNvSpPr txBox="1"/>
-          <p:nvPr/>
-        </p:nvSpPr>
-        <p:spPr>
-          <a:xfrm>
-            <a:off x="914400" y="5097780"/>
-            <a:ext cx="777240" cy="777240"/>
-          </a:xfrm>
-          <a:prstGeom prst="rect">
-            <a:avLst/>
-          </a:prstGeom>
-          <a:noFill/>
-        </p:spPr>
-        <p:txBody>
-          <a:bodyPr wrap="square" lIns="45720" rIns="45720" tIns="18288" bIns="18288" anchor="ctr">
-            <a:spAutoFit/>
-          </a:bodyPr>
-          <a:lstStyle/>
-          <a:p>
-            <a:pPr algn="ctr"/>
-            <a:r>
-              <a:rPr sz="2800" b="1" i="0">
-                <a:solidFill>
-                  <a:srgbClr val="FFFFFF"/>
+              <a:t>Output richiesto:</a:t>
+            </a:r>
+          </a:p>
+          <a:p>
+            <a:pPr>
+              <a:lnSpc>
+                <a:spcPct val="150000"/>
+              </a:lnSpc>
+              <a:spcAft>
+                <a:spcPts val="400"/>
+              </a:spcAft>
+            </a:pPr>
+            <a:r>
+              <a:rPr sz="2000" b="1">
+                <a:solidFill>
+                  <a:srgbClr val="00A0B0"/>
                 </a:solidFill>
                 <a:latin typeface="Calibri"/>
               </a:rPr>
-              <a:t>5</a:t>
-            </a:r>
-          </a:p>
-        </p:txBody>
-      </p:sp>
-      <p:sp>
-        <p:nvSpPr>
-          <p:cNvPr id="22" name="Rounded Rectangle 21"/>
-          <p:cNvSpPr/>
-          <p:nvPr/>
-        </p:nvSpPr>
-        <p:spPr>
-          <a:xfrm>
-            <a:off x="2011680" y="5097780"/>
-            <a:ext cx="9144000" cy="777240"/>
-          </a:xfrm>
-          <a:prstGeom prst="roundRect">
-            <a:avLst>
-              <a:gd name="adj" fmla="val 8000"/>
-            </a:avLst>
-          </a:prstGeom>
-          <a:solidFill>
-            <a:srgbClr val="FBFBFD"/>
-          </a:solidFill>
-          <a:ln w="19050">
-            <a:solidFill>
-              <a:srgbClr val="00A0B0"/>
-            </a:solidFill>
-          </a:ln>
-        </p:spPr>
-        <p:style>
-          <a:lnRef idx="1">
-            <a:schemeClr val="accent1"/>
-          </a:lnRef>
-          <a:fillRef idx="3">
-            <a:schemeClr val="accent1"/>
-          </a:fillRef>
-          <a:effectRef idx="2">
-            <a:schemeClr val="accent1"/>
-          </a:effectRef>
-          <a:fontRef idx="minor">
-            <a:schemeClr val="lt1"/>
-          </a:fontRef>
-        </p:style>
-        <p:txBody>
-          <a:bodyPr rtlCol="0" anchor="ctr"/>
-          <a:lstStyle/>
-          <a:p>
-            <a:pPr algn="ctr"/>
-          </a:p>
-        </p:txBody>
-      </p:sp>
-      <p:sp>
-        <p:nvSpPr>
-          <p:cNvPr id="23" name="TextBox 22"/>
-          <p:cNvSpPr txBox="1"/>
-          <p:nvPr/>
-        </p:nvSpPr>
-        <p:spPr>
-          <a:xfrm>
-            <a:off x="2286000" y="5097780"/>
-            <a:ext cx="8686800" cy="777240"/>
-          </a:xfrm>
-          <a:prstGeom prst="rect">
-            <a:avLst/>
-          </a:prstGeom>
-          <a:noFill/>
-        </p:spPr>
-        <p:txBody>
-          <a:bodyPr wrap="square" lIns="45720" rIns="45720" tIns="18288" bIns="18288" anchor="ctr">
-            <a:spAutoFit/>
-          </a:bodyPr>
-          <a:lstStyle/>
-          <a:p>
-            <a:pPr algn="l"/>
-            <a:r>
-              <a:rPr sz="1800" b="0" i="0">
+              <a:t>▸  </a:t>
+            </a:r>
+            <a:r>
+              <a:rPr sz="2000">
                 <a:solidFill>
                   <a:srgbClr val="1A1A2E"/>
                 </a:solidFill>
                 <a:latin typeface="Calibri"/>
               </a:rPr>
-              <a:t>Trust boundary = ogni attraversamento è opportunità d'attacco</a:t>
+              <a:t>Disegno DFD (≥4 processi, 2 datastore, 2 trust boundary)</a:t>
+            </a:r>
+          </a:p>
+          <a:p>
+            <a:pPr>
+              <a:lnSpc>
+                <a:spcPct val="150000"/>
+              </a:lnSpc>
+              <a:spcAft>
+                <a:spcPts val="400"/>
+              </a:spcAft>
+            </a:pPr>
+            <a:r>
+              <a:rPr sz="2000" b="1">
+                <a:solidFill>
+                  <a:srgbClr val="00A0B0"/>
+                </a:solidFill>
+                <a:latin typeface="Calibri"/>
+              </a:rPr>
+              <a:t>▸  </a:t>
+            </a:r>
+            <a:r>
+              <a:rPr sz="2000">
+                <a:solidFill>
+                  <a:srgbClr val="1A1A2E"/>
+                </a:solidFill>
+                <a:latin typeface="Calibri"/>
+              </a:rPr>
+              <a:t>Tabella STRIDE con ≥8 minacce sparse tra le 6 categorie</a:t>
+            </a:r>
+          </a:p>
+          <a:p>
+            <a:pPr>
+              <a:lnSpc>
+                <a:spcPct val="150000"/>
+              </a:lnSpc>
+              <a:spcAft>
+                <a:spcPts val="400"/>
+              </a:spcAft>
+            </a:pPr>
+            <a:r>
+              <a:rPr sz="2000" b="1">
+                <a:solidFill>
+                  <a:srgbClr val="00A0B0"/>
+                </a:solidFill>
+                <a:latin typeface="Calibri"/>
+              </a:rPr>
+              <a:t>▸  </a:t>
+            </a:r>
+            <a:r>
+              <a:rPr sz="2000">
+                <a:solidFill>
+                  <a:srgbClr val="1A1A2E"/>
+                </a:solidFill>
+                <a:latin typeface="Calibri"/>
+              </a:rPr>
+              <a:t>Una mitigazione per ogni minaccia</a:t>
             </a:r>
           </a:p>
         </p:txBody>
       </p:sp>
       <p:cxnSp>
         <p:nvCxnSpPr>
-          <p:cNvPr id="24" name="Connector 23"/>
+          <p:cNvPr id="5" name="Connector 4"/>
           <p:cNvCxnSpPr/>
           <p:nvPr/>
         </p:nvCxnSpPr>
@@ -5885,7 +5145,7 @@
       </p:cxnSp>
       <p:sp>
         <p:nvSpPr>
-          <p:cNvPr id="25" name="TextBox 24"/>
+          <p:cNvPr id="6" name="TextBox 5"/>
           <p:cNvSpPr txBox="1"/>
           <p:nvPr/>
         </p:nvSpPr>
@@ -5920,7 +5180,7 @@
       </p:sp>
       <p:sp>
         <p:nvSpPr>
-          <p:cNvPr id="26" name="TextBox 25"/>
+          <p:cNvPr id="7" name="TextBox 6"/>
           <p:cNvSpPr txBox="1"/>
           <p:nvPr/>
         </p:nvSpPr>
@@ -5948,7 +5208,7 @@
                 </a:solidFill>
                 <a:latin typeface="Calibri"/>
               </a:rPr>
-              <a:t>L2  ·  12/14</a:t>
+              <a:t>L2  ·  12/15</a:t>
             </a:r>
           </a:p>
         </p:txBody>
@@ -5980,13 +5240,13 @@
         <p:spPr>
           <a:xfrm>
             <a:off x="0" y="0"/>
-            <a:ext cx="4114800" cy="6858000"/>
+            <a:ext cx="12191695" cy="777240"/>
           </a:xfrm>
           <a:prstGeom prst="rect">
             <a:avLst/>
           </a:prstGeom>
           <a:solidFill>
-            <a:srgbClr val="081B33"/>
+            <a:srgbClr val="0F2D52"/>
           </a:solidFill>
           <a:ln>
             <a:noFill/>
@@ -6016,59 +5276,51 @@
       </p:sp>
       <p:sp>
         <p:nvSpPr>
-          <p:cNvPr id="3" name="Rectangle 2"/>
+          <p:cNvPr id="3" name="TextBox 2"/>
+          <p:cNvSpPr txBox="1"/>
+          <p:nvPr/>
+        </p:nvSpPr>
+        <p:spPr>
+          <a:xfrm>
+            <a:off x="457200" y="164592"/>
+            <a:ext cx="10972800" cy="502920"/>
+          </a:xfrm>
+          <a:prstGeom prst="rect">
+            <a:avLst/>
+          </a:prstGeom>
+          <a:noFill/>
+        </p:spPr>
+        <p:txBody>
+          <a:bodyPr wrap="square" lIns="45720" rIns="45720" tIns="18288" bIns="18288" anchor="ctr">
+            <a:spAutoFit/>
+          </a:bodyPr>
+          <a:lstStyle/>
+          <a:p>
+            <a:pPr algn="l"/>
+            <a:r>
+              <a:rPr sz="2400" b="1" i="0">
+                <a:solidFill>
+                  <a:srgbClr val="FFFFFF"/>
+                </a:solidFill>
+                <a:latin typeface="Calibri"/>
+              </a:rPr>
+              <a:t>📌  Cosa portare a casa</a:t>
+            </a:r>
+          </a:p>
+        </p:txBody>
+      </p:sp>
+      <p:sp>
+        <p:nvSpPr>
+          <p:cNvPr id="4" name="Oval 3"/>
           <p:cNvSpPr/>
           <p:nvPr/>
         </p:nvSpPr>
         <p:spPr>
           <a:xfrm>
-            <a:off x="4114800" y="0"/>
-            <a:ext cx="8046720" cy="6858000"/>
-          </a:xfrm>
-          <a:prstGeom prst="rect">
-            <a:avLst/>
-          </a:prstGeom>
-          <a:solidFill>
-            <a:srgbClr val="F1F4F8"/>
-          </a:solidFill>
-          <a:ln>
-            <a:noFill/>
-          </a:ln>
-        </p:spPr>
-        <p:style>
-          <a:lnRef idx="1">
-            <a:schemeClr val="accent1"/>
-          </a:lnRef>
-          <a:fillRef idx="3">
-            <a:schemeClr val="accent1"/>
-          </a:fillRef>
-          <a:effectRef idx="2">
-            <a:schemeClr val="accent1"/>
-          </a:effectRef>
-          <a:fontRef idx="minor">
-            <a:schemeClr val="lt1"/>
-          </a:fontRef>
-        </p:style>
-        <p:txBody>
-          <a:bodyPr rtlCol="0" anchor="ctr"/>
-          <a:lstStyle/>
-          <a:p>
-            <a:pPr algn="ctr"/>
-          </a:p>
-        </p:txBody>
-      </p:sp>
-      <p:sp>
-        <p:nvSpPr>
-          <p:cNvPr id="4" name="Rectangle 3"/>
-          <p:cNvSpPr/>
-          <p:nvPr/>
-        </p:nvSpPr>
-        <p:spPr>
-          <a:xfrm>
-            <a:off x="4114800" y="0"/>
-            <a:ext cx="137160" cy="6858000"/>
-          </a:xfrm>
-          <a:prstGeom prst="rect">
+            <a:off x="914400" y="1440180"/>
+            <a:ext cx="777240" cy="777240"/>
+          </a:xfrm>
+          <a:prstGeom prst="ellipse">
             <a:avLst/>
           </a:prstGeom>
           <a:solidFill>
@@ -6108,8 +5360,8 @@
         </p:nvSpPr>
         <p:spPr>
           <a:xfrm>
-            <a:off x="274320" y="2103120"/>
-            <a:ext cx="3657600" cy="2286000"/>
+            <a:off x="914400" y="1440180"/>
+            <a:ext cx="777240" cy="777240"/>
           </a:xfrm>
           <a:prstGeom prst="rect">
             <a:avLst/>
@@ -6117,34 +5369,81 @@
           <a:noFill/>
         </p:spPr>
         <p:txBody>
-          <a:bodyPr wrap="square" lIns="45720" rIns="45720" tIns="18288" bIns="18288" anchor="t">
+          <a:bodyPr wrap="square" lIns="45720" rIns="45720" tIns="18288" bIns="18288" anchor="ctr">
             <a:spAutoFit/>
           </a:bodyPr>
           <a:lstStyle/>
           <a:p>
             <a:pPr algn="ctr"/>
             <a:r>
-              <a:rPr sz="17000" b="1" i="0">
-                <a:solidFill>
-                  <a:srgbClr val="00A0B0"/>
+              <a:rPr sz="2800" b="1" i="0">
+                <a:solidFill>
+                  <a:srgbClr val="FFFFFF"/>
                 </a:solidFill>
                 <a:latin typeface="Calibri"/>
               </a:rPr>
-              <a:t>03</a:t>
-            </a:r>
-          </a:p>
-        </p:txBody>
-      </p:sp>
-      <p:sp>
-        <p:nvSpPr>
-          <p:cNvPr id="6" name="TextBox 5"/>
+              <a:t>1</a:t>
+            </a:r>
+          </a:p>
+        </p:txBody>
+      </p:sp>
+      <p:sp>
+        <p:nvSpPr>
+          <p:cNvPr id="6" name="Rounded Rectangle 5"/>
+          <p:cNvSpPr/>
+          <p:nvPr/>
+        </p:nvSpPr>
+        <p:spPr>
+          <a:xfrm>
+            <a:off x="2011680" y="1440180"/>
+            <a:ext cx="9144000" cy="777240"/>
+          </a:xfrm>
+          <a:prstGeom prst="roundRect">
+            <a:avLst>
+              <a:gd name="adj" fmla="val 8000"/>
+            </a:avLst>
+          </a:prstGeom>
+          <a:solidFill>
+            <a:srgbClr val="FBFBFD"/>
+          </a:solidFill>
+          <a:ln w="19050">
+            <a:solidFill>
+              <a:srgbClr val="00A0B0"/>
+            </a:solidFill>
+          </a:ln>
+        </p:spPr>
+        <p:style>
+          <a:lnRef idx="1">
+            <a:schemeClr val="accent1"/>
+          </a:lnRef>
+          <a:fillRef idx="3">
+            <a:schemeClr val="accent1"/>
+          </a:fillRef>
+          <a:effectRef idx="2">
+            <a:schemeClr val="accent1"/>
+          </a:effectRef>
+          <a:fontRef idx="minor">
+            <a:schemeClr val="lt1"/>
+          </a:fontRef>
+        </p:style>
+        <p:txBody>
+          <a:bodyPr rtlCol="0" anchor="ctr"/>
+          <a:lstStyle/>
+          <a:p>
+            <a:pPr algn="ctr"/>
+          </a:p>
+        </p:txBody>
+      </p:sp>
+      <p:sp>
+        <p:nvSpPr>
+          <p:cNvPr id="7" name="TextBox 6"/>
           <p:cNvSpPr txBox="1"/>
           <p:nvPr/>
         </p:nvSpPr>
         <p:spPr>
           <a:xfrm>
-            <a:off x="274320" y="4572000"/>
-            <a:ext cx="3657600" cy="457200"/>
+            <a:off x="2286000" y="1440180"/>
+            <a:ext cx="8686800" cy="777240"/>
           </a:xfrm>
           <a:prstGeom prst="rect">
             <a:avLst/>
@@ -6152,34 +5451,77 @@
           <a:noFill/>
         </p:spPr>
         <p:txBody>
-          <a:bodyPr wrap="square" lIns="45720" rIns="45720" tIns="18288" bIns="18288" anchor="t">
+          <a:bodyPr wrap="square" lIns="45720" rIns="45720" tIns="18288" bIns="18288" anchor="ctr">
             <a:spAutoFit/>
           </a:bodyPr>
           <a:lstStyle/>
           <a:p>
+            <a:pPr algn="l"/>
+            <a:r>
+              <a:rPr sz="1800" b="0" i="0">
+                <a:solidFill>
+                  <a:srgbClr val="1A1A2E"/>
+                </a:solidFill>
+                <a:latin typeface="Calibri"/>
+              </a:rPr>
+              <a:t>OWASP Top 10: impara almeno i primi 5 a memoria</a:t>
+            </a:r>
+          </a:p>
+        </p:txBody>
+      </p:sp>
+      <p:sp>
+        <p:nvSpPr>
+          <p:cNvPr id="8" name="Oval 7"/>
+          <p:cNvSpPr/>
+          <p:nvPr/>
+        </p:nvSpPr>
+        <p:spPr>
+          <a:xfrm>
+            <a:off x="914400" y="2354580"/>
+            <a:ext cx="777240" cy="777240"/>
+          </a:xfrm>
+          <a:prstGeom prst="ellipse">
+            <a:avLst/>
+          </a:prstGeom>
+          <a:solidFill>
+            <a:srgbClr val="00A0B0"/>
+          </a:solidFill>
+          <a:ln>
+            <a:noFill/>
+          </a:ln>
+        </p:spPr>
+        <p:style>
+          <a:lnRef idx="1">
+            <a:schemeClr val="accent1"/>
+          </a:lnRef>
+          <a:fillRef idx="3">
+            <a:schemeClr val="accent1"/>
+          </a:fillRef>
+          <a:effectRef idx="2">
+            <a:schemeClr val="accent1"/>
+          </a:effectRef>
+          <a:fontRef idx="minor">
+            <a:schemeClr val="lt1"/>
+          </a:fontRef>
+        </p:style>
+        <p:txBody>
+          <a:bodyPr rtlCol="0" anchor="ctr"/>
+          <a:lstStyle/>
+          <a:p>
             <a:pPr algn="ctr"/>
-            <a:r>
-              <a:rPr sz="2000" b="1" i="0">
-                <a:solidFill>
-                  <a:srgbClr val="6FD8E0"/>
-                </a:solidFill>
-                <a:latin typeface="Calibri"/>
-              </a:rPr>
-              <a:t>PARTE</a:t>
-            </a:r>
-          </a:p>
-        </p:txBody>
-      </p:sp>
-      <p:sp>
-        <p:nvSpPr>
-          <p:cNvPr id="7" name="TextBox 6"/>
+          </a:p>
+        </p:txBody>
+      </p:sp>
+      <p:sp>
+        <p:nvSpPr>
+          <p:cNvPr id="9" name="TextBox 8"/>
           <p:cNvSpPr txBox="1"/>
           <p:nvPr/>
         </p:nvSpPr>
         <p:spPr>
           <a:xfrm>
-            <a:off x="4572000" y="2286000"/>
-            <a:ext cx="7315200" cy="1645920"/>
+            <a:off x="914400" y="2354580"/>
+            <a:ext cx="777240" cy="777240"/>
           </a:xfrm>
           <a:prstGeom prst="rect">
             <a:avLst/>
@@ -6187,34 +5529,81 @@
           <a:noFill/>
         </p:spPr>
         <p:txBody>
-          <a:bodyPr wrap="square" lIns="45720" rIns="45720" tIns="18288" bIns="18288" anchor="t">
+          <a:bodyPr wrap="square" lIns="45720" rIns="45720" tIns="18288" bIns="18288" anchor="ctr">
             <a:spAutoFit/>
           </a:bodyPr>
           <a:lstStyle/>
           <a:p>
-            <a:pPr algn="l"/>
-            <a:r>
-              <a:rPr sz="4400" b="1" i="0">
-                <a:solidFill>
-                  <a:srgbClr val="0F2D52"/>
+            <a:pPr algn="ctr"/>
+            <a:r>
+              <a:rPr sz="2800" b="1" i="0">
+                <a:solidFill>
+                  <a:srgbClr val="FFFFFF"/>
                 </a:solidFill>
                 <a:latin typeface="Calibri"/>
               </a:rPr>
-              <a:t>Per approfondire</a:t>
-            </a:r>
-          </a:p>
-        </p:txBody>
-      </p:sp>
-      <p:sp>
-        <p:nvSpPr>
-          <p:cNvPr id="8" name="TextBox 7"/>
+              <a:t>2</a:t>
+            </a:r>
+          </a:p>
+        </p:txBody>
+      </p:sp>
+      <p:sp>
+        <p:nvSpPr>
+          <p:cNvPr id="10" name="Rounded Rectangle 9"/>
+          <p:cNvSpPr/>
+          <p:nvPr/>
+        </p:nvSpPr>
+        <p:spPr>
+          <a:xfrm>
+            <a:off x="2011680" y="2354580"/>
+            <a:ext cx="9144000" cy="777240"/>
+          </a:xfrm>
+          <a:prstGeom prst="roundRect">
+            <a:avLst>
+              <a:gd name="adj" fmla="val 8000"/>
+            </a:avLst>
+          </a:prstGeom>
+          <a:solidFill>
+            <a:srgbClr val="FBFBFD"/>
+          </a:solidFill>
+          <a:ln w="19050">
+            <a:solidFill>
+              <a:srgbClr val="00A0B0"/>
+            </a:solidFill>
+          </a:ln>
+        </p:spPr>
+        <p:style>
+          <a:lnRef idx="1">
+            <a:schemeClr val="accent1"/>
+          </a:lnRef>
+          <a:fillRef idx="3">
+            <a:schemeClr val="accent1"/>
+          </a:fillRef>
+          <a:effectRef idx="2">
+            <a:schemeClr val="accent1"/>
+          </a:effectRef>
+          <a:fontRef idx="minor">
+            <a:schemeClr val="lt1"/>
+          </a:fontRef>
+        </p:style>
+        <p:txBody>
+          <a:bodyPr rtlCol="0" anchor="ctr"/>
+          <a:lstStyle/>
+          <a:p>
+            <a:pPr algn="ctr"/>
+          </a:p>
+        </p:txBody>
+      </p:sp>
+      <p:sp>
+        <p:nvSpPr>
+          <p:cNvPr id="11" name="TextBox 10"/>
           <p:cNvSpPr txBox="1"/>
           <p:nvPr/>
         </p:nvSpPr>
         <p:spPr>
           <a:xfrm>
-            <a:off x="4572000" y="3931920"/>
-            <a:ext cx="7315200" cy="1828800"/>
+            <a:off x="2286000" y="2354580"/>
+            <a:ext cx="8686800" cy="777240"/>
           </a:xfrm>
           <a:prstGeom prst="rect">
             <a:avLst/>
@@ -6222,27 +5611,507 @@
           <a:noFill/>
         </p:spPr>
         <p:txBody>
-          <a:bodyPr wrap="square" lIns="45720" rIns="45720" tIns="18288" bIns="18288" anchor="t">
+          <a:bodyPr wrap="square" lIns="45720" rIns="45720" tIns="18288" bIns="18288" anchor="ctr">
             <a:spAutoFit/>
           </a:bodyPr>
           <a:lstStyle/>
           <a:p>
             <a:pPr algn="l"/>
             <a:r>
-              <a:rPr sz="1800" b="0" i="1">
-                <a:solidFill>
-                  <a:srgbClr val="6B7280"/>
+              <a:rPr sz="1800" b="0" i="0">
+                <a:solidFill>
+                  <a:srgbClr val="1A1A2E"/>
                 </a:solidFill>
                 <a:latin typeface="Calibri"/>
               </a:rPr>
-              <a:t>Cosa leggere prima della prossima lezione</a:t>
+              <a:t>CVE = identificatore, CVSS = punteggio 0-10</a:t>
+            </a:r>
+          </a:p>
+        </p:txBody>
+      </p:sp>
+      <p:sp>
+        <p:nvSpPr>
+          <p:cNvPr id="12" name="Oval 11"/>
+          <p:cNvSpPr/>
+          <p:nvPr/>
+        </p:nvSpPr>
+        <p:spPr>
+          <a:xfrm>
+            <a:off x="914400" y="3268980"/>
+            <a:ext cx="777240" cy="777240"/>
+          </a:xfrm>
+          <a:prstGeom prst="ellipse">
+            <a:avLst/>
+          </a:prstGeom>
+          <a:solidFill>
+            <a:srgbClr val="00A0B0"/>
+          </a:solidFill>
+          <a:ln>
+            <a:noFill/>
+          </a:ln>
+        </p:spPr>
+        <p:style>
+          <a:lnRef idx="1">
+            <a:schemeClr val="accent1"/>
+          </a:lnRef>
+          <a:fillRef idx="3">
+            <a:schemeClr val="accent1"/>
+          </a:fillRef>
+          <a:effectRef idx="2">
+            <a:schemeClr val="accent1"/>
+          </a:effectRef>
+          <a:fontRef idx="minor">
+            <a:schemeClr val="lt1"/>
+          </a:fontRef>
+        </p:style>
+        <p:txBody>
+          <a:bodyPr rtlCol="0" anchor="ctr"/>
+          <a:lstStyle/>
+          <a:p>
+            <a:pPr algn="ctr"/>
+          </a:p>
+        </p:txBody>
+      </p:sp>
+      <p:sp>
+        <p:nvSpPr>
+          <p:cNvPr id="13" name="TextBox 12"/>
+          <p:cNvSpPr txBox="1"/>
+          <p:nvPr/>
+        </p:nvSpPr>
+        <p:spPr>
+          <a:xfrm>
+            <a:off x="914400" y="3268980"/>
+            <a:ext cx="777240" cy="777240"/>
+          </a:xfrm>
+          <a:prstGeom prst="rect">
+            <a:avLst/>
+          </a:prstGeom>
+          <a:noFill/>
+        </p:spPr>
+        <p:txBody>
+          <a:bodyPr wrap="square" lIns="45720" rIns="45720" tIns="18288" bIns="18288" anchor="ctr">
+            <a:spAutoFit/>
+          </a:bodyPr>
+          <a:lstStyle/>
+          <a:p>
+            <a:pPr algn="ctr"/>
+            <a:r>
+              <a:rPr sz="2800" b="1" i="0">
+                <a:solidFill>
+                  <a:srgbClr val="FFFFFF"/>
+                </a:solidFill>
+                <a:latin typeface="Calibri"/>
+              </a:rPr>
+              <a:t>3</a:t>
+            </a:r>
+          </a:p>
+        </p:txBody>
+      </p:sp>
+      <p:sp>
+        <p:nvSpPr>
+          <p:cNvPr id="14" name="Rounded Rectangle 13"/>
+          <p:cNvSpPr/>
+          <p:nvPr/>
+        </p:nvSpPr>
+        <p:spPr>
+          <a:xfrm>
+            <a:off x="2011680" y="3268980"/>
+            <a:ext cx="9144000" cy="777240"/>
+          </a:xfrm>
+          <a:prstGeom prst="roundRect">
+            <a:avLst>
+              <a:gd name="adj" fmla="val 8000"/>
+            </a:avLst>
+          </a:prstGeom>
+          <a:solidFill>
+            <a:srgbClr val="FBFBFD"/>
+          </a:solidFill>
+          <a:ln w="19050">
+            <a:solidFill>
+              <a:srgbClr val="00A0B0"/>
+            </a:solidFill>
+          </a:ln>
+        </p:spPr>
+        <p:style>
+          <a:lnRef idx="1">
+            <a:schemeClr val="accent1"/>
+          </a:lnRef>
+          <a:fillRef idx="3">
+            <a:schemeClr val="accent1"/>
+          </a:fillRef>
+          <a:effectRef idx="2">
+            <a:schemeClr val="accent1"/>
+          </a:effectRef>
+          <a:fontRef idx="minor">
+            <a:schemeClr val="lt1"/>
+          </a:fontRef>
+        </p:style>
+        <p:txBody>
+          <a:bodyPr rtlCol="0" anchor="ctr"/>
+          <a:lstStyle/>
+          <a:p>
+            <a:pPr algn="ctr"/>
+          </a:p>
+        </p:txBody>
+      </p:sp>
+      <p:sp>
+        <p:nvSpPr>
+          <p:cNvPr id="15" name="TextBox 14"/>
+          <p:cNvSpPr txBox="1"/>
+          <p:nvPr/>
+        </p:nvSpPr>
+        <p:spPr>
+          <a:xfrm>
+            <a:off x="2286000" y="3268980"/>
+            <a:ext cx="8686800" cy="777240"/>
+          </a:xfrm>
+          <a:prstGeom prst="rect">
+            <a:avLst/>
+          </a:prstGeom>
+          <a:noFill/>
+        </p:spPr>
+        <p:txBody>
+          <a:bodyPr wrap="square" lIns="45720" rIns="45720" tIns="18288" bIns="18288" anchor="ctr">
+            <a:spAutoFit/>
+          </a:bodyPr>
+          <a:lstStyle/>
+          <a:p>
+            <a:pPr algn="l"/>
+            <a:r>
+              <a:rPr sz="1800" b="0" i="0">
+                <a:solidFill>
+                  <a:srgbClr val="1A1A2E"/>
+                </a:solidFill>
+                <a:latin typeface="Calibri"/>
+              </a:rPr>
+              <a:t>Threat modeling = 4 domande di Shostack</a:t>
+            </a:r>
+          </a:p>
+        </p:txBody>
+      </p:sp>
+      <p:sp>
+        <p:nvSpPr>
+          <p:cNvPr id="16" name="Oval 15"/>
+          <p:cNvSpPr/>
+          <p:nvPr/>
+        </p:nvSpPr>
+        <p:spPr>
+          <a:xfrm>
+            <a:off x="914400" y="4183380"/>
+            <a:ext cx="777240" cy="777240"/>
+          </a:xfrm>
+          <a:prstGeom prst="ellipse">
+            <a:avLst/>
+          </a:prstGeom>
+          <a:solidFill>
+            <a:srgbClr val="00A0B0"/>
+          </a:solidFill>
+          <a:ln>
+            <a:noFill/>
+          </a:ln>
+        </p:spPr>
+        <p:style>
+          <a:lnRef idx="1">
+            <a:schemeClr val="accent1"/>
+          </a:lnRef>
+          <a:fillRef idx="3">
+            <a:schemeClr val="accent1"/>
+          </a:fillRef>
+          <a:effectRef idx="2">
+            <a:schemeClr val="accent1"/>
+          </a:effectRef>
+          <a:fontRef idx="minor">
+            <a:schemeClr val="lt1"/>
+          </a:fontRef>
+        </p:style>
+        <p:txBody>
+          <a:bodyPr rtlCol="0" anchor="ctr"/>
+          <a:lstStyle/>
+          <a:p>
+            <a:pPr algn="ctr"/>
+          </a:p>
+        </p:txBody>
+      </p:sp>
+      <p:sp>
+        <p:nvSpPr>
+          <p:cNvPr id="17" name="TextBox 16"/>
+          <p:cNvSpPr txBox="1"/>
+          <p:nvPr/>
+        </p:nvSpPr>
+        <p:spPr>
+          <a:xfrm>
+            <a:off x="914400" y="4183380"/>
+            <a:ext cx="777240" cy="777240"/>
+          </a:xfrm>
+          <a:prstGeom prst="rect">
+            <a:avLst/>
+          </a:prstGeom>
+          <a:noFill/>
+        </p:spPr>
+        <p:txBody>
+          <a:bodyPr wrap="square" lIns="45720" rIns="45720" tIns="18288" bIns="18288" anchor="ctr">
+            <a:spAutoFit/>
+          </a:bodyPr>
+          <a:lstStyle/>
+          <a:p>
+            <a:pPr algn="ctr"/>
+            <a:r>
+              <a:rPr sz="2800" b="1" i="0">
+                <a:solidFill>
+                  <a:srgbClr val="FFFFFF"/>
+                </a:solidFill>
+                <a:latin typeface="Calibri"/>
+              </a:rPr>
+              <a:t>4</a:t>
+            </a:r>
+          </a:p>
+        </p:txBody>
+      </p:sp>
+      <p:sp>
+        <p:nvSpPr>
+          <p:cNvPr id="18" name="Rounded Rectangle 17"/>
+          <p:cNvSpPr/>
+          <p:nvPr/>
+        </p:nvSpPr>
+        <p:spPr>
+          <a:xfrm>
+            <a:off x="2011680" y="4183380"/>
+            <a:ext cx="9144000" cy="777240"/>
+          </a:xfrm>
+          <a:prstGeom prst="roundRect">
+            <a:avLst>
+              <a:gd name="adj" fmla="val 8000"/>
+            </a:avLst>
+          </a:prstGeom>
+          <a:solidFill>
+            <a:srgbClr val="FBFBFD"/>
+          </a:solidFill>
+          <a:ln w="19050">
+            <a:solidFill>
+              <a:srgbClr val="00A0B0"/>
+            </a:solidFill>
+          </a:ln>
+        </p:spPr>
+        <p:style>
+          <a:lnRef idx="1">
+            <a:schemeClr val="accent1"/>
+          </a:lnRef>
+          <a:fillRef idx="3">
+            <a:schemeClr val="accent1"/>
+          </a:fillRef>
+          <a:effectRef idx="2">
+            <a:schemeClr val="accent1"/>
+          </a:effectRef>
+          <a:fontRef idx="minor">
+            <a:schemeClr val="lt1"/>
+          </a:fontRef>
+        </p:style>
+        <p:txBody>
+          <a:bodyPr rtlCol="0" anchor="ctr"/>
+          <a:lstStyle/>
+          <a:p>
+            <a:pPr algn="ctr"/>
+          </a:p>
+        </p:txBody>
+      </p:sp>
+      <p:sp>
+        <p:nvSpPr>
+          <p:cNvPr id="19" name="TextBox 18"/>
+          <p:cNvSpPr txBox="1"/>
+          <p:nvPr/>
+        </p:nvSpPr>
+        <p:spPr>
+          <a:xfrm>
+            <a:off x="2286000" y="4183380"/>
+            <a:ext cx="8686800" cy="777240"/>
+          </a:xfrm>
+          <a:prstGeom prst="rect">
+            <a:avLst/>
+          </a:prstGeom>
+          <a:noFill/>
+        </p:spPr>
+        <p:txBody>
+          <a:bodyPr wrap="square" lIns="45720" rIns="45720" tIns="18288" bIns="18288" anchor="ctr">
+            <a:spAutoFit/>
+          </a:bodyPr>
+          <a:lstStyle/>
+          <a:p>
+            <a:pPr algn="l"/>
+            <a:r>
+              <a:rPr sz="1800" b="0" i="0">
+                <a:solidFill>
+                  <a:srgbClr val="1A1A2E"/>
+                </a:solidFill>
+                <a:latin typeface="Calibri"/>
+              </a:rPr>
+              <a:t>STRIDE = checklist sistematica, 6 categorie</a:t>
+            </a:r>
+          </a:p>
+        </p:txBody>
+      </p:sp>
+      <p:sp>
+        <p:nvSpPr>
+          <p:cNvPr id="20" name="Oval 19"/>
+          <p:cNvSpPr/>
+          <p:nvPr/>
+        </p:nvSpPr>
+        <p:spPr>
+          <a:xfrm>
+            <a:off x="914400" y="5097780"/>
+            <a:ext cx="777240" cy="777240"/>
+          </a:xfrm>
+          <a:prstGeom prst="ellipse">
+            <a:avLst/>
+          </a:prstGeom>
+          <a:solidFill>
+            <a:srgbClr val="00A0B0"/>
+          </a:solidFill>
+          <a:ln>
+            <a:noFill/>
+          </a:ln>
+        </p:spPr>
+        <p:style>
+          <a:lnRef idx="1">
+            <a:schemeClr val="accent1"/>
+          </a:lnRef>
+          <a:fillRef idx="3">
+            <a:schemeClr val="accent1"/>
+          </a:fillRef>
+          <a:effectRef idx="2">
+            <a:schemeClr val="accent1"/>
+          </a:effectRef>
+          <a:fontRef idx="minor">
+            <a:schemeClr val="lt1"/>
+          </a:fontRef>
+        </p:style>
+        <p:txBody>
+          <a:bodyPr rtlCol="0" anchor="ctr"/>
+          <a:lstStyle/>
+          <a:p>
+            <a:pPr algn="ctr"/>
+          </a:p>
+        </p:txBody>
+      </p:sp>
+      <p:sp>
+        <p:nvSpPr>
+          <p:cNvPr id="21" name="TextBox 20"/>
+          <p:cNvSpPr txBox="1"/>
+          <p:nvPr/>
+        </p:nvSpPr>
+        <p:spPr>
+          <a:xfrm>
+            <a:off x="914400" y="5097780"/>
+            <a:ext cx="777240" cy="777240"/>
+          </a:xfrm>
+          <a:prstGeom prst="rect">
+            <a:avLst/>
+          </a:prstGeom>
+          <a:noFill/>
+        </p:spPr>
+        <p:txBody>
+          <a:bodyPr wrap="square" lIns="45720" rIns="45720" tIns="18288" bIns="18288" anchor="ctr">
+            <a:spAutoFit/>
+          </a:bodyPr>
+          <a:lstStyle/>
+          <a:p>
+            <a:pPr algn="ctr"/>
+            <a:r>
+              <a:rPr sz="2800" b="1" i="0">
+                <a:solidFill>
+                  <a:srgbClr val="FFFFFF"/>
+                </a:solidFill>
+                <a:latin typeface="Calibri"/>
+              </a:rPr>
+              <a:t>5</a:t>
+            </a:r>
+          </a:p>
+        </p:txBody>
+      </p:sp>
+      <p:sp>
+        <p:nvSpPr>
+          <p:cNvPr id="22" name="Rounded Rectangle 21"/>
+          <p:cNvSpPr/>
+          <p:nvPr/>
+        </p:nvSpPr>
+        <p:spPr>
+          <a:xfrm>
+            <a:off x="2011680" y="5097780"/>
+            <a:ext cx="9144000" cy="777240"/>
+          </a:xfrm>
+          <a:prstGeom prst="roundRect">
+            <a:avLst>
+              <a:gd name="adj" fmla="val 8000"/>
+            </a:avLst>
+          </a:prstGeom>
+          <a:solidFill>
+            <a:srgbClr val="FBFBFD"/>
+          </a:solidFill>
+          <a:ln w="19050">
+            <a:solidFill>
+              <a:srgbClr val="00A0B0"/>
+            </a:solidFill>
+          </a:ln>
+        </p:spPr>
+        <p:style>
+          <a:lnRef idx="1">
+            <a:schemeClr val="accent1"/>
+          </a:lnRef>
+          <a:fillRef idx="3">
+            <a:schemeClr val="accent1"/>
+          </a:fillRef>
+          <a:effectRef idx="2">
+            <a:schemeClr val="accent1"/>
+          </a:effectRef>
+          <a:fontRef idx="minor">
+            <a:schemeClr val="lt1"/>
+          </a:fontRef>
+        </p:style>
+        <p:txBody>
+          <a:bodyPr rtlCol="0" anchor="ctr"/>
+          <a:lstStyle/>
+          <a:p>
+            <a:pPr algn="ctr"/>
+          </a:p>
+        </p:txBody>
+      </p:sp>
+      <p:sp>
+        <p:nvSpPr>
+          <p:cNvPr id="23" name="TextBox 22"/>
+          <p:cNvSpPr txBox="1"/>
+          <p:nvPr/>
+        </p:nvSpPr>
+        <p:spPr>
+          <a:xfrm>
+            <a:off x="2286000" y="5097780"/>
+            <a:ext cx="8686800" cy="777240"/>
+          </a:xfrm>
+          <a:prstGeom prst="rect">
+            <a:avLst/>
+          </a:prstGeom>
+          <a:noFill/>
+        </p:spPr>
+        <p:txBody>
+          <a:bodyPr wrap="square" lIns="45720" rIns="45720" tIns="18288" bIns="18288" anchor="ctr">
+            <a:spAutoFit/>
+          </a:bodyPr>
+          <a:lstStyle/>
+          <a:p>
+            <a:pPr algn="l"/>
+            <a:r>
+              <a:rPr sz="1800" b="0" i="0">
+                <a:solidFill>
+                  <a:srgbClr val="1A1A2E"/>
+                </a:solidFill>
+                <a:latin typeface="Calibri"/>
+              </a:rPr>
+              <a:t>Trust boundary = ogni attraversamento è opportunità d'attacco</a:t>
             </a:r>
           </a:p>
         </p:txBody>
       </p:sp>
       <p:cxnSp>
         <p:nvCxnSpPr>
-          <p:cNvPr id="9" name="Connector 8"/>
+          <p:cNvPr id="24" name="Connector 23"/>
           <p:cNvCxnSpPr/>
           <p:nvPr/>
         </p:nvCxnSpPr>
@@ -6277,7 +6146,7 @@
       </p:cxnSp>
       <p:sp>
         <p:nvSpPr>
-          <p:cNvPr id="10" name="TextBox 9"/>
+          <p:cNvPr id="25" name="TextBox 24"/>
           <p:cNvSpPr txBox="1"/>
           <p:nvPr/>
         </p:nvSpPr>
@@ -6312,7 +6181,7 @@
       </p:sp>
       <p:sp>
         <p:nvSpPr>
-          <p:cNvPr id="11" name="TextBox 10"/>
+          <p:cNvPr id="26" name="TextBox 25"/>
           <p:cNvSpPr txBox="1"/>
           <p:nvPr/>
         </p:nvSpPr>
@@ -6340,7 +6209,7 @@
                 </a:solidFill>
                 <a:latin typeface="Calibri"/>
               </a:rPr>
-              <a:t>L2  ·  13/14</a:t>
+              <a:t>L2  ·  13/15</a:t>
             </a:r>
           </a:p>
         </p:txBody>
@@ -6372,7 +6241,7 @@
         <p:spPr>
           <a:xfrm>
             <a:off x="0" y="0"/>
-            <a:ext cx="12191695" cy="6858000"/>
+            <a:ext cx="4114800" cy="6858000"/>
           </a:xfrm>
           <a:prstGeom prst="rect">
             <a:avLst/>
@@ -6408,6 +6277,398 @@
       </p:sp>
       <p:sp>
         <p:nvSpPr>
+          <p:cNvPr id="3" name="Rectangle 2"/>
+          <p:cNvSpPr/>
+          <p:nvPr/>
+        </p:nvSpPr>
+        <p:spPr>
+          <a:xfrm>
+            <a:off x="4114800" y="0"/>
+            <a:ext cx="8046720" cy="6858000"/>
+          </a:xfrm>
+          <a:prstGeom prst="rect">
+            <a:avLst/>
+          </a:prstGeom>
+          <a:solidFill>
+            <a:srgbClr val="F1F4F8"/>
+          </a:solidFill>
+          <a:ln>
+            <a:noFill/>
+          </a:ln>
+        </p:spPr>
+        <p:style>
+          <a:lnRef idx="1">
+            <a:schemeClr val="accent1"/>
+          </a:lnRef>
+          <a:fillRef idx="3">
+            <a:schemeClr val="accent1"/>
+          </a:fillRef>
+          <a:effectRef idx="2">
+            <a:schemeClr val="accent1"/>
+          </a:effectRef>
+          <a:fontRef idx="minor">
+            <a:schemeClr val="lt1"/>
+          </a:fontRef>
+        </p:style>
+        <p:txBody>
+          <a:bodyPr rtlCol="0" anchor="ctr"/>
+          <a:lstStyle/>
+          <a:p>
+            <a:pPr algn="ctr"/>
+          </a:p>
+        </p:txBody>
+      </p:sp>
+      <p:sp>
+        <p:nvSpPr>
+          <p:cNvPr id="4" name="Rectangle 3"/>
+          <p:cNvSpPr/>
+          <p:nvPr/>
+        </p:nvSpPr>
+        <p:spPr>
+          <a:xfrm>
+            <a:off x="4114800" y="0"/>
+            <a:ext cx="137160" cy="6858000"/>
+          </a:xfrm>
+          <a:prstGeom prst="rect">
+            <a:avLst/>
+          </a:prstGeom>
+          <a:solidFill>
+            <a:srgbClr val="00A0B0"/>
+          </a:solidFill>
+          <a:ln>
+            <a:noFill/>
+          </a:ln>
+        </p:spPr>
+        <p:style>
+          <a:lnRef idx="1">
+            <a:schemeClr val="accent1"/>
+          </a:lnRef>
+          <a:fillRef idx="3">
+            <a:schemeClr val="accent1"/>
+          </a:fillRef>
+          <a:effectRef idx="2">
+            <a:schemeClr val="accent1"/>
+          </a:effectRef>
+          <a:fontRef idx="minor">
+            <a:schemeClr val="lt1"/>
+          </a:fontRef>
+        </p:style>
+        <p:txBody>
+          <a:bodyPr rtlCol="0" anchor="ctr"/>
+          <a:lstStyle/>
+          <a:p>
+            <a:pPr algn="ctr"/>
+          </a:p>
+        </p:txBody>
+      </p:sp>
+      <p:sp>
+        <p:nvSpPr>
+          <p:cNvPr id="5" name="TextBox 4"/>
+          <p:cNvSpPr txBox="1"/>
+          <p:nvPr/>
+        </p:nvSpPr>
+        <p:spPr>
+          <a:xfrm>
+            <a:off x="274320" y="2103120"/>
+            <a:ext cx="3657600" cy="2286000"/>
+          </a:xfrm>
+          <a:prstGeom prst="rect">
+            <a:avLst/>
+          </a:prstGeom>
+          <a:noFill/>
+        </p:spPr>
+        <p:txBody>
+          <a:bodyPr wrap="square" lIns="45720" rIns="45720" tIns="18288" bIns="18288" anchor="t">
+            <a:spAutoFit/>
+          </a:bodyPr>
+          <a:lstStyle/>
+          <a:p>
+            <a:pPr algn="ctr"/>
+            <a:r>
+              <a:rPr sz="17000" b="1" i="0">
+                <a:solidFill>
+                  <a:srgbClr val="00A0B0"/>
+                </a:solidFill>
+                <a:latin typeface="Calibri"/>
+              </a:rPr>
+              <a:t>03</a:t>
+            </a:r>
+          </a:p>
+        </p:txBody>
+      </p:sp>
+      <p:sp>
+        <p:nvSpPr>
+          <p:cNvPr id="6" name="TextBox 5"/>
+          <p:cNvSpPr txBox="1"/>
+          <p:nvPr/>
+        </p:nvSpPr>
+        <p:spPr>
+          <a:xfrm>
+            <a:off x="274320" y="4572000"/>
+            <a:ext cx="3657600" cy="457200"/>
+          </a:xfrm>
+          <a:prstGeom prst="rect">
+            <a:avLst/>
+          </a:prstGeom>
+          <a:noFill/>
+        </p:spPr>
+        <p:txBody>
+          <a:bodyPr wrap="square" lIns="45720" rIns="45720" tIns="18288" bIns="18288" anchor="t">
+            <a:spAutoFit/>
+          </a:bodyPr>
+          <a:lstStyle/>
+          <a:p>
+            <a:pPr algn="ctr"/>
+            <a:r>
+              <a:rPr sz="2000" b="1" i="0">
+                <a:solidFill>
+                  <a:srgbClr val="6FD8E0"/>
+                </a:solidFill>
+                <a:latin typeface="Calibri"/>
+              </a:rPr>
+              <a:t>PARTE</a:t>
+            </a:r>
+          </a:p>
+        </p:txBody>
+      </p:sp>
+      <p:sp>
+        <p:nvSpPr>
+          <p:cNvPr id="7" name="TextBox 6"/>
+          <p:cNvSpPr txBox="1"/>
+          <p:nvPr/>
+        </p:nvSpPr>
+        <p:spPr>
+          <a:xfrm>
+            <a:off x="4572000" y="2286000"/>
+            <a:ext cx="7315200" cy="1645920"/>
+          </a:xfrm>
+          <a:prstGeom prst="rect">
+            <a:avLst/>
+          </a:prstGeom>
+          <a:noFill/>
+        </p:spPr>
+        <p:txBody>
+          <a:bodyPr wrap="square" lIns="45720" rIns="45720" tIns="18288" bIns="18288" anchor="t">
+            <a:spAutoFit/>
+          </a:bodyPr>
+          <a:lstStyle/>
+          <a:p>
+            <a:pPr algn="l"/>
+            <a:r>
+              <a:rPr sz="4400" b="1" i="0">
+                <a:solidFill>
+                  <a:srgbClr val="0F2D52"/>
+                </a:solidFill>
+                <a:latin typeface="Calibri"/>
+              </a:rPr>
+              <a:t>Per approfondire</a:t>
+            </a:r>
+          </a:p>
+        </p:txBody>
+      </p:sp>
+      <p:sp>
+        <p:nvSpPr>
+          <p:cNvPr id="8" name="TextBox 7"/>
+          <p:cNvSpPr txBox="1"/>
+          <p:nvPr/>
+        </p:nvSpPr>
+        <p:spPr>
+          <a:xfrm>
+            <a:off x="4572000" y="3931920"/>
+            <a:ext cx="7315200" cy="1828800"/>
+          </a:xfrm>
+          <a:prstGeom prst="rect">
+            <a:avLst/>
+          </a:prstGeom>
+          <a:noFill/>
+        </p:spPr>
+        <p:txBody>
+          <a:bodyPr wrap="square" lIns="45720" rIns="45720" tIns="18288" bIns="18288" anchor="t">
+            <a:spAutoFit/>
+          </a:bodyPr>
+          <a:lstStyle/>
+          <a:p>
+            <a:pPr algn="l"/>
+            <a:r>
+              <a:rPr sz="1800" b="0" i="1">
+                <a:solidFill>
+                  <a:srgbClr val="6B7280"/>
+                </a:solidFill>
+                <a:latin typeface="Calibri"/>
+              </a:rPr>
+              <a:t>Cosa leggere prima della prossima lezione</a:t>
+            </a:r>
+          </a:p>
+        </p:txBody>
+      </p:sp>
+      <p:cxnSp>
+        <p:nvCxnSpPr>
+          <p:cNvPr id="9" name="Connector 8"/>
+          <p:cNvCxnSpPr/>
+          <p:nvPr/>
+        </p:nvCxnSpPr>
+        <p:spPr>
+          <a:xfrm>
+            <a:off x="457200" y="6446520"/>
+            <a:ext cx="11274552" cy="0"/>
+          </a:xfrm>
+          <a:prstGeom prst="line">
+            <a:avLst/>
+          </a:prstGeom>
+          <a:ln w="19050">
+            <a:solidFill>
+              <a:srgbClr val="00A0B0"/>
+            </a:solidFill>
+          </a:ln>
+        </p:spPr>
+        <p:style>
+          <a:lnRef idx="2">
+            <a:schemeClr val="accent1"/>
+          </a:lnRef>
+          <a:fillRef idx="0">
+            <a:schemeClr val="accent1"/>
+          </a:fillRef>
+          <a:effectRef idx="1">
+            <a:schemeClr val="accent1"/>
+          </a:effectRef>
+          <a:fontRef idx="minor">
+            <a:schemeClr val="tx1"/>
+          </a:fontRef>
+        </p:style>
+      </p:cxnSp>
+      <p:sp>
+        <p:nvSpPr>
+          <p:cNvPr id="10" name="TextBox 9"/>
+          <p:cNvSpPr txBox="1"/>
+          <p:nvPr/>
+        </p:nvSpPr>
+        <p:spPr>
+          <a:xfrm>
+            <a:off x="457200" y="6473952"/>
+            <a:ext cx="7315200" cy="292608"/>
+          </a:xfrm>
+          <a:prstGeom prst="rect">
+            <a:avLst/>
+          </a:prstGeom>
+          <a:noFill/>
+        </p:spPr>
+        <p:txBody>
+          <a:bodyPr wrap="square" lIns="45720" rIns="45720" tIns="18288" bIns="18288" anchor="t">
+            <a:spAutoFit/>
+          </a:bodyPr>
+          <a:lstStyle/>
+          <a:p>
+            <a:pPr algn="l"/>
+            <a:r>
+              <a:rPr sz="1000" b="0" i="0">
+                <a:solidFill>
+                  <a:srgbClr val="6B7280"/>
+                </a:solidFill>
+                <a:latin typeface="Calibri"/>
+              </a:rPr>
+              <a:t>Secure Coding · Corso IFTS STEM · A. Manneschi · 2024/2025</a:t>
+            </a:r>
+          </a:p>
+        </p:txBody>
+      </p:sp>
+      <p:sp>
+        <p:nvSpPr>
+          <p:cNvPr id="11" name="TextBox 10"/>
+          <p:cNvSpPr txBox="1"/>
+          <p:nvPr/>
+        </p:nvSpPr>
+        <p:spPr>
+          <a:xfrm>
+            <a:off x="10515600" y="6473952"/>
+            <a:ext cx="1188720" cy="292608"/>
+          </a:xfrm>
+          <a:prstGeom prst="rect">
+            <a:avLst/>
+          </a:prstGeom>
+          <a:noFill/>
+        </p:spPr>
+        <p:txBody>
+          <a:bodyPr wrap="square" lIns="45720" rIns="45720" tIns="18288" bIns="18288" anchor="t">
+            <a:spAutoFit/>
+          </a:bodyPr>
+          <a:lstStyle/>
+          <a:p>
+            <a:pPr algn="r"/>
+            <a:r>
+              <a:rPr sz="1000" b="1" i="0">
+                <a:solidFill>
+                  <a:srgbClr val="6B7280"/>
+                </a:solidFill>
+                <a:latin typeface="Calibri"/>
+              </a:rPr>
+              <a:t>L2  ·  14/15</a:t>
+            </a:r>
+          </a:p>
+        </p:txBody>
+      </p:sp>
+    </p:spTree>
+  </p:cSld>
+  <p:clrMapOvr>
+    <a:masterClrMapping/>
+  </p:clrMapOvr>
+</p:sld>
+</file>
+
+<file path=ppt/slides/slide15.xml><?xml version="1.0" encoding="utf-8"?>
+<p:sld xmlns:a="http://schemas.openxmlformats.org/drawingml/2006/main" xmlns:p="http://schemas.openxmlformats.org/presentationml/2006/main" xmlns:r="http://schemas.openxmlformats.org/officeDocument/2006/relationships">
+  <p:cSld>
+    <p:spTree>
+      <p:nvGrpSpPr>
+        <p:cNvPr id="1" name=""/>
+        <p:cNvGrpSpPr/>
+        <p:nvPr/>
+      </p:nvGrpSpPr>
+      <p:grpSpPr/>
+      <p:sp>
+        <p:nvSpPr>
+          <p:cNvPr id="2" name="Rectangle 1"/>
+          <p:cNvSpPr/>
+          <p:nvPr/>
+        </p:nvSpPr>
+        <p:spPr>
+          <a:xfrm>
+            <a:off x="0" y="0"/>
+            <a:ext cx="12191695" cy="6858000"/>
+          </a:xfrm>
+          <a:prstGeom prst="rect">
+            <a:avLst/>
+          </a:prstGeom>
+          <a:solidFill>
+            <a:srgbClr val="081B33"/>
+          </a:solidFill>
+          <a:ln>
+            <a:noFill/>
+          </a:ln>
+        </p:spPr>
+        <p:style>
+          <a:lnRef idx="1">
+            <a:schemeClr val="accent1"/>
+          </a:lnRef>
+          <a:fillRef idx="3">
+            <a:schemeClr val="accent1"/>
+          </a:fillRef>
+          <a:effectRef idx="2">
+            <a:schemeClr val="accent1"/>
+          </a:effectRef>
+          <a:fontRef idx="minor">
+            <a:schemeClr val="lt1"/>
+          </a:fontRef>
+        </p:style>
+        <p:txBody>
+          <a:bodyPr rtlCol="0" anchor="ctr"/>
+          <a:lstStyle/>
+          <a:p>
+            <a:pPr algn="ctr"/>
+          </a:p>
+        </p:txBody>
+      </p:sp>
+      <p:sp>
+        <p:nvSpPr>
           <p:cNvPr id="3" name="Oval 2"/>
           <p:cNvSpPr/>
           <p:nvPr/>
@@ -6820,7 +7081,7 @@
                 </a:solidFill>
                 <a:latin typeface="Calibri"/>
               </a:rPr>
-              <a:t>L2  ·  14/14</a:t>
+              <a:t>L2  ·  15/15</a:t>
             </a:r>
           </a:p>
         </p:txBody>
@@ -7656,7 +7917,7 @@
                 </a:solidFill>
                 <a:latin typeface="Calibri"/>
               </a:rPr>
-              <a:t>L2  ·  2/14</a:t>
+              <a:t>L2  ·  2/15</a:t>
             </a:r>
           </a:p>
         </p:txBody>
@@ -8005,7 +8266,7 @@
                 </a:solidFill>
                 <a:latin typeface="Calibri"/>
               </a:rPr>
-              <a:t>L2  ·  3/14</a:t>
+              <a:t>L2  ·  3/15</a:t>
             </a:r>
           </a:p>
         </p:txBody>
@@ -8019,6 +8280,517 @@
 </file>
 
 <file path=ppt/slides/slide4.xml><?xml version="1.0" encoding="utf-8"?>
+<p:sld xmlns:a="http://schemas.openxmlformats.org/drawingml/2006/main" xmlns:p="http://schemas.openxmlformats.org/presentationml/2006/main" xmlns:r="http://schemas.openxmlformats.org/officeDocument/2006/relationships">
+  <p:cSld>
+    <p:spTree>
+      <p:nvGrpSpPr>
+        <p:cNvPr id="1" name=""/>
+        <p:cNvGrpSpPr/>
+        <p:nvPr/>
+      </p:nvGrpSpPr>
+      <p:grpSpPr/>
+      <p:sp>
+        <p:nvSpPr>
+          <p:cNvPr id="2" name="Rectangle 1"/>
+          <p:cNvSpPr/>
+          <p:nvPr/>
+        </p:nvSpPr>
+        <p:spPr>
+          <a:xfrm>
+            <a:off x="0" y="0"/>
+            <a:ext cx="12191695" cy="777240"/>
+          </a:xfrm>
+          <a:prstGeom prst="rect">
+            <a:avLst/>
+          </a:prstGeom>
+          <a:solidFill>
+            <a:srgbClr val="0F2D52"/>
+          </a:solidFill>
+          <a:ln>
+            <a:noFill/>
+          </a:ln>
+        </p:spPr>
+        <p:style>
+          <a:lnRef idx="1">
+            <a:schemeClr val="accent1"/>
+          </a:lnRef>
+          <a:fillRef idx="3">
+            <a:schemeClr val="accent1"/>
+          </a:fillRef>
+          <a:effectRef idx="2">
+            <a:schemeClr val="accent1"/>
+          </a:effectRef>
+          <a:fontRef idx="minor">
+            <a:schemeClr val="lt1"/>
+          </a:fontRef>
+        </p:style>
+        <p:txBody>
+          <a:bodyPr rtlCol="0" anchor="ctr"/>
+          <a:lstStyle/>
+          <a:p>
+            <a:pPr algn="ctr"/>
+          </a:p>
+        </p:txBody>
+      </p:sp>
+      <p:sp>
+        <p:nvSpPr>
+          <p:cNvPr id="3" name="TextBox 2"/>
+          <p:cNvSpPr txBox="1"/>
+          <p:nvPr/>
+        </p:nvSpPr>
+        <p:spPr>
+          <a:xfrm>
+            <a:off x="457200" y="164592"/>
+            <a:ext cx="10972800" cy="502920"/>
+          </a:xfrm>
+          <a:prstGeom prst="rect">
+            <a:avLst/>
+          </a:prstGeom>
+          <a:noFill/>
+        </p:spPr>
+        <p:txBody>
+          <a:bodyPr wrap="square" lIns="45720" rIns="45720" tIns="18288" bIns="18288" anchor="ctr">
+            <a:spAutoFit/>
+          </a:bodyPr>
+          <a:lstStyle/>
+          <a:p>
+            <a:pPr algn="l"/>
+            <a:r>
+              <a:rPr sz="2400" b="1" i="0">
+                <a:solidFill>
+                  <a:srgbClr val="FFFFFF"/>
+                </a:solidFill>
+                <a:latin typeface="Calibri"/>
+              </a:rPr>
+              <a:t>🌐  OWASP — chi sono e cosa producono</a:t>
+            </a:r>
+          </a:p>
+        </p:txBody>
+      </p:sp>
+      <p:sp>
+        <p:nvSpPr>
+          <p:cNvPr id="4" name="TextBox 3"/>
+          <p:cNvSpPr txBox="1"/>
+          <p:nvPr/>
+        </p:nvSpPr>
+        <p:spPr>
+          <a:xfrm>
+            <a:off x="457200" y="914400"/>
+            <a:ext cx="11247120" cy="457200"/>
+          </a:xfrm>
+          <a:prstGeom prst="rect">
+            <a:avLst/>
+          </a:prstGeom>
+          <a:noFill/>
+        </p:spPr>
+        <p:txBody>
+          <a:bodyPr wrap="square" lIns="45720" rIns="45720" tIns="18288" bIns="18288" anchor="t">
+            <a:spAutoFit/>
+          </a:bodyPr>
+          <a:lstStyle/>
+          <a:p>
+            <a:pPr algn="l"/>
+            <a:r>
+              <a:rPr sz="1500" b="0" i="1">
+                <a:solidFill>
+                  <a:srgbClr val="00A0B0"/>
+                </a:solidFill>
+                <a:latin typeface="Calibri"/>
+              </a:rPr>
+              <a:t>Quando un collega dice 'A03', sta citando OWASP Top 10</a:t>
+            </a:r>
+          </a:p>
+        </p:txBody>
+      </p:sp>
+      <p:sp>
+        <p:nvSpPr>
+          <p:cNvPr id="5" name="TextBox 4"/>
+          <p:cNvSpPr txBox="1"/>
+          <p:nvPr/>
+        </p:nvSpPr>
+        <p:spPr>
+          <a:xfrm>
+            <a:off x="640080" y="1554480"/>
+            <a:ext cx="10972800" cy="5029200"/>
+          </a:xfrm>
+          <a:prstGeom prst="rect">
+            <a:avLst/>
+          </a:prstGeom>
+          <a:noFill/>
+        </p:spPr>
+        <p:txBody>
+          <a:bodyPr wrap="square">
+            <a:spAutoFit/>
+          </a:bodyPr>
+          <a:lstStyle/>
+          <a:p>
+            <a:pPr>
+              <a:lnSpc>
+                <a:spcPct val="150000"/>
+              </a:lnSpc>
+              <a:spcAft>
+                <a:spcPts val="400"/>
+              </a:spcAft>
+            </a:pPr>
+            <a:r>
+              <a:rPr sz="2000" b="1">
+                <a:solidFill>
+                  <a:srgbClr val="00A0B0"/>
+                </a:solidFill>
+                <a:latin typeface="Calibri"/>
+              </a:rPr>
+              <a:t>▸  </a:t>
+            </a:r>
+            <a:r>
+              <a:rPr sz="2000">
+                <a:solidFill>
+                  <a:srgbClr val="1A1A2E"/>
+                </a:solidFill>
+                <a:latin typeface="Calibri"/>
+              </a:rPr>
+              <a:t>Open Web Application Security Project</a:t>
+            </a:r>
+          </a:p>
+          <a:p>
+            <a:pPr>
+              <a:lnSpc>
+                <a:spcPct val="150000"/>
+              </a:lnSpc>
+              <a:spcAft>
+                <a:spcPts val="400"/>
+              </a:spcAft>
+            </a:pPr>
+            <a:r>
+              <a:rPr sz="2000" b="1">
+                <a:solidFill>
+                  <a:srgbClr val="00A0B0"/>
+                </a:solidFill>
+                <a:latin typeface="Calibri"/>
+              </a:rPr>
+              <a:t>▸  </a:t>
+            </a:r>
+            <a:r>
+              <a:rPr sz="2000">
+                <a:solidFill>
+                  <a:srgbClr val="1A1A2E"/>
+                </a:solidFill>
+                <a:latin typeface="Calibri"/>
+              </a:rPr>
+              <a:t>Fondazione no-profit, internazionale, dal 2001</a:t>
+            </a:r>
+          </a:p>
+          <a:p>
+            <a:pPr>
+              <a:lnSpc>
+                <a:spcPct val="150000"/>
+              </a:lnSpc>
+              <a:spcAft>
+                <a:spcPts val="400"/>
+              </a:spcAft>
+            </a:pPr>
+            <a:r>
+              <a:rPr sz="2000" b="1">
+                <a:solidFill>
+                  <a:srgbClr val="00A0B0"/>
+                </a:solidFill>
+                <a:latin typeface="Calibri"/>
+              </a:rPr>
+              <a:t>▸  </a:t>
+            </a:r>
+            <a:r>
+              <a:rPr sz="2000">
+                <a:solidFill>
+                  <a:srgbClr val="1A1A2E"/>
+                </a:solidFill>
+                <a:latin typeface="Calibri"/>
+              </a:rPr>
+              <a:t>Tutto gratuito · niente vendita di prodotti</a:t>
+            </a:r>
+          </a:p>
+          <a:p>
+            <a:pPr>
+              <a:lnSpc>
+                <a:spcPct val="150000"/>
+              </a:lnSpc>
+              <a:spcAft>
+                <a:spcPts val="400"/>
+              </a:spcAft>
+            </a:pPr>
+            <a:r>
+              <a:rPr sz="2000" b="1">
+                <a:solidFill>
+                  <a:srgbClr val="00A0B0"/>
+                </a:solidFill>
+                <a:latin typeface="Calibri"/>
+              </a:rPr>
+              <a:t>▸  </a:t>
+            </a:r>
+            <a:r>
+              <a:rPr sz="2000">
+                <a:solidFill>
+                  <a:srgbClr val="1A1A2E"/>
+                </a:solidFill>
+                <a:latin typeface="Calibri"/>
+              </a:rPr>
+              <a:t>Standard de facto della sicurezza applicativa nel mondo</a:t>
+            </a:r>
+          </a:p>
+          <a:p>
+            <a:pPr>
+              <a:lnSpc>
+                <a:spcPct val="150000"/>
+              </a:lnSpc>
+              <a:spcAft>
+                <a:spcPts val="400"/>
+              </a:spcAft>
+            </a:pPr>
+            <a:r>
+              <a:rPr sz="2000" b="1">
+                <a:solidFill>
+                  <a:srgbClr val="00A0B0"/>
+                </a:solidFill>
+                <a:latin typeface="Calibri"/>
+              </a:rPr>
+              <a:t>▸  </a:t>
+            </a:r>
+            <a:r>
+              <a:rPr sz="2000">
+                <a:solidFill>
+                  <a:srgbClr val="1A1A2E"/>
+                </a:solidFill>
+                <a:latin typeface="Calibri"/>
+              </a:rPr>
+              <a:t/>
+            </a:r>
+          </a:p>
+          <a:p>
+            <a:pPr>
+              <a:lnSpc>
+                <a:spcPct val="150000"/>
+              </a:lnSpc>
+              <a:spcAft>
+                <a:spcPts val="400"/>
+              </a:spcAft>
+            </a:pPr>
+            <a:r>
+              <a:rPr sz="2000" b="1">
+                <a:solidFill>
+                  <a:srgbClr val="00A0B0"/>
+                </a:solidFill>
+                <a:latin typeface="Calibri"/>
+              </a:rPr>
+              <a:t>▸  </a:t>
+            </a:r>
+            <a:r>
+              <a:rPr sz="2000">
+                <a:solidFill>
+                  <a:srgbClr val="1A1A2E"/>
+                </a:solidFill>
+                <a:latin typeface="Calibri"/>
+              </a:rPr>
+              <a:t>Cosa pubblica (tutto open):</a:t>
+            </a:r>
+          </a:p>
+          <a:p>
+            <a:pPr>
+              <a:lnSpc>
+                <a:spcPct val="150000"/>
+              </a:lnSpc>
+              <a:spcAft>
+                <a:spcPts val="400"/>
+              </a:spcAft>
+            </a:pPr>
+            <a:r>
+              <a:rPr sz="2000" b="1">
+                <a:solidFill>
+                  <a:srgbClr val="00A0B0"/>
+                </a:solidFill>
+                <a:latin typeface="Calibri"/>
+              </a:rPr>
+              <a:t>▸  </a:t>
+            </a:r>
+            <a:r>
+              <a:rPr sz="2000">
+                <a:solidFill>
+                  <a:srgbClr val="1A1A2E"/>
+                </a:solidFill>
+                <a:latin typeface="Calibri"/>
+              </a:rPr>
+              <a:t>  OWASP Top 10  ·  API Security Top 10  ·  LLM Top 10</a:t>
+            </a:r>
+          </a:p>
+          <a:p>
+            <a:pPr>
+              <a:lnSpc>
+                <a:spcPct val="150000"/>
+              </a:lnSpc>
+              <a:spcAft>
+                <a:spcPts val="400"/>
+              </a:spcAft>
+            </a:pPr>
+            <a:r>
+              <a:rPr sz="2000" b="1">
+                <a:solidFill>
+                  <a:srgbClr val="00A0B0"/>
+                </a:solidFill>
+                <a:latin typeface="Calibri"/>
+              </a:rPr>
+              <a:t>▸  </a:t>
+            </a:r>
+            <a:r>
+              <a:rPr sz="2000">
+                <a:solidFill>
+                  <a:srgbClr val="1A1A2E"/>
+                </a:solidFill>
+                <a:latin typeface="Calibri"/>
+              </a:rPr>
+              <a:t>  Cheat Sheet Series  ·  ASVS  ·  SAMM</a:t>
+            </a:r>
+          </a:p>
+          <a:p>
+            <a:pPr>
+              <a:lnSpc>
+                <a:spcPct val="150000"/>
+              </a:lnSpc>
+              <a:spcAft>
+                <a:spcPts val="400"/>
+              </a:spcAft>
+            </a:pPr>
+            <a:r>
+              <a:rPr sz="2000" b="1">
+                <a:solidFill>
+                  <a:srgbClr val="00A0B0"/>
+                </a:solidFill>
+                <a:latin typeface="Calibri"/>
+              </a:rPr>
+              <a:t>▸  </a:t>
+            </a:r>
+            <a:r>
+              <a:rPr sz="2000">
+                <a:solidFill>
+                  <a:srgbClr val="1A1A2E"/>
+                </a:solidFill>
+                <a:latin typeface="Calibri"/>
+              </a:rPr>
+              <a:t>  Tool: ZAP, Dependency-Check, Threat Dragon</a:t>
+            </a:r>
+          </a:p>
+        </p:txBody>
+      </p:sp>
+      <p:cxnSp>
+        <p:nvCxnSpPr>
+          <p:cNvPr id="6" name="Connector 5"/>
+          <p:cNvCxnSpPr/>
+          <p:nvPr/>
+        </p:nvCxnSpPr>
+        <p:spPr>
+          <a:xfrm>
+            <a:off x="457200" y="6446520"/>
+            <a:ext cx="11274552" cy="0"/>
+          </a:xfrm>
+          <a:prstGeom prst="line">
+            <a:avLst/>
+          </a:prstGeom>
+          <a:ln w="19050">
+            <a:solidFill>
+              <a:srgbClr val="00A0B0"/>
+            </a:solidFill>
+          </a:ln>
+        </p:spPr>
+        <p:style>
+          <a:lnRef idx="2">
+            <a:schemeClr val="accent1"/>
+          </a:lnRef>
+          <a:fillRef idx="0">
+            <a:schemeClr val="accent1"/>
+          </a:fillRef>
+          <a:effectRef idx="1">
+            <a:schemeClr val="accent1"/>
+          </a:effectRef>
+          <a:fontRef idx="minor">
+            <a:schemeClr val="tx1"/>
+          </a:fontRef>
+        </p:style>
+      </p:cxnSp>
+      <p:sp>
+        <p:nvSpPr>
+          <p:cNvPr id="7" name="TextBox 6"/>
+          <p:cNvSpPr txBox="1"/>
+          <p:nvPr/>
+        </p:nvSpPr>
+        <p:spPr>
+          <a:xfrm>
+            <a:off x="457200" y="6473952"/>
+            <a:ext cx="7315200" cy="292608"/>
+          </a:xfrm>
+          <a:prstGeom prst="rect">
+            <a:avLst/>
+          </a:prstGeom>
+          <a:noFill/>
+        </p:spPr>
+        <p:txBody>
+          <a:bodyPr wrap="square" lIns="45720" rIns="45720" tIns="18288" bIns="18288" anchor="t">
+            <a:spAutoFit/>
+          </a:bodyPr>
+          <a:lstStyle/>
+          <a:p>
+            <a:pPr algn="l"/>
+            <a:r>
+              <a:rPr sz="1000" b="0" i="0">
+                <a:solidFill>
+                  <a:srgbClr val="6B7280"/>
+                </a:solidFill>
+                <a:latin typeface="Calibri"/>
+              </a:rPr>
+              <a:t>Secure Coding · Corso IFTS STEM · A. Manneschi · 2024/2025</a:t>
+            </a:r>
+          </a:p>
+        </p:txBody>
+      </p:sp>
+      <p:sp>
+        <p:nvSpPr>
+          <p:cNvPr id="8" name="TextBox 7"/>
+          <p:cNvSpPr txBox="1"/>
+          <p:nvPr/>
+        </p:nvSpPr>
+        <p:spPr>
+          <a:xfrm>
+            <a:off x="10515600" y="6473952"/>
+            <a:ext cx="1188720" cy="292608"/>
+          </a:xfrm>
+          <a:prstGeom prst="rect">
+            <a:avLst/>
+          </a:prstGeom>
+          <a:noFill/>
+        </p:spPr>
+        <p:txBody>
+          <a:bodyPr wrap="square" lIns="45720" rIns="45720" tIns="18288" bIns="18288" anchor="t">
+            <a:spAutoFit/>
+          </a:bodyPr>
+          <a:lstStyle/>
+          <a:p>
+            <a:pPr algn="r"/>
+            <a:r>
+              <a:rPr sz="1000" b="1" i="0">
+                <a:solidFill>
+                  <a:srgbClr val="6B7280"/>
+                </a:solidFill>
+                <a:latin typeface="Calibri"/>
+              </a:rPr>
+              <a:t>L2  ·  4/15</a:t>
+            </a:r>
+          </a:p>
+        </p:txBody>
+      </p:sp>
+    </p:spTree>
+  </p:cSld>
+  <p:clrMapOvr>
+    <a:masterClrMapping/>
+  </p:clrMapOvr>
+</p:sld>
+</file>
+
+<file path=ppt/slides/slide5.xml><?xml version="1.0" encoding="utf-8"?>
 <p:sld xmlns:a="http://schemas.openxmlformats.org/drawingml/2006/main" xmlns:p="http://schemas.openxmlformats.org/presentationml/2006/main" xmlns:r="http://schemas.openxmlformats.org/officeDocument/2006/relationships">
   <p:cSld>
     <p:spTree>
@@ -8984,7 +9756,7 @@
                 </a:solidFill>
                 <a:latin typeface="Calibri"/>
               </a:rPr>
-              <a:t>L2  ·  4/14</a:t>
+              <a:t>L2  ·  5/15</a:t>
             </a:r>
           </a:p>
         </p:txBody>
@@ -8997,7 +9769,7 @@
 </p:sld>
 </file>
 
-<file path=ppt/slides/slide5.xml><?xml version="1.0" encoding="utf-8"?>
+<file path=ppt/slides/slide6.xml><?xml version="1.0" encoding="utf-8"?>
 <p:sld xmlns:a="http://schemas.openxmlformats.org/drawingml/2006/main" xmlns:p="http://schemas.openxmlformats.org/presentationml/2006/main" xmlns:r="http://schemas.openxmlformats.org/officeDocument/2006/relationships">
   <p:cSld>
     <p:spTree>
@@ -9623,399 +10395,7 @@
                 </a:solidFill>
                 <a:latin typeface="Calibri"/>
               </a:rPr>
-              <a:t>L2  ·  5/14</a:t>
-            </a:r>
-          </a:p>
-        </p:txBody>
-      </p:sp>
-    </p:spTree>
-  </p:cSld>
-  <p:clrMapOvr>
-    <a:masterClrMapping/>
-  </p:clrMapOvr>
-</p:sld>
-</file>
-
-<file path=ppt/slides/slide6.xml><?xml version="1.0" encoding="utf-8"?>
-<p:sld xmlns:a="http://schemas.openxmlformats.org/drawingml/2006/main" xmlns:p="http://schemas.openxmlformats.org/presentationml/2006/main" xmlns:r="http://schemas.openxmlformats.org/officeDocument/2006/relationships">
-  <p:cSld>
-    <p:spTree>
-      <p:nvGrpSpPr>
-        <p:cNvPr id="1" name=""/>
-        <p:cNvGrpSpPr/>
-        <p:nvPr/>
-      </p:nvGrpSpPr>
-      <p:grpSpPr/>
-      <p:sp>
-        <p:nvSpPr>
-          <p:cNvPr id="2" name="Rectangle 1"/>
-          <p:cNvSpPr/>
-          <p:nvPr/>
-        </p:nvSpPr>
-        <p:spPr>
-          <a:xfrm>
-            <a:off x="0" y="0"/>
-            <a:ext cx="4114800" cy="6858000"/>
-          </a:xfrm>
-          <a:prstGeom prst="rect">
-            <a:avLst/>
-          </a:prstGeom>
-          <a:solidFill>
-            <a:srgbClr val="081B33"/>
-          </a:solidFill>
-          <a:ln>
-            <a:noFill/>
-          </a:ln>
-        </p:spPr>
-        <p:style>
-          <a:lnRef idx="1">
-            <a:schemeClr val="accent1"/>
-          </a:lnRef>
-          <a:fillRef idx="3">
-            <a:schemeClr val="accent1"/>
-          </a:fillRef>
-          <a:effectRef idx="2">
-            <a:schemeClr val="accent1"/>
-          </a:effectRef>
-          <a:fontRef idx="minor">
-            <a:schemeClr val="lt1"/>
-          </a:fontRef>
-        </p:style>
-        <p:txBody>
-          <a:bodyPr rtlCol="0" anchor="ctr"/>
-          <a:lstStyle/>
-          <a:p>
-            <a:pPr algn="ctr"/>
-          </a:p>
-        </p:txBody>
-      </p:sp>
-      <p:sp>
-        <p:nvSpPr>
-          <p:cNvPr id="3" name="Rectangle 2"/>
-          <p:cNvSpPr/>
-          <p:nvPr/>
-        </p:nvSpPr>
-        <p:spPr>
-          <a:xfrm>
-            <a:off x="4114800" y="0"/>
-            <a:ext cx="8046720" cy="6858000"/>
-          </a:xfrm>
-          <a:prstGeom prst="rect">
-            <a:avLst/>
-          </a:prstGeom>
-          <a:solidFill>
-            <a:srgbClr val="F1F4F8"/>
-          </a:solidFill>
-          <a:ln>
-            <a:noFill/>
-          </a:ln>
-        </p:spPr>
-        <p:style>
-          <a:lnRef idx="1">
-            <a:schemeClr val="accent1"/>
-          </a:lnRef>
-          <a:fillRef idx="3">
-            <a:schemeClr val="accent1"/>
-          </a:fillRef>
-          <a:effectRef idx="2">
-            <a:schemeClr val="accent1"/>
-          </a:effectRef>
-          <a:fontRef idx="minor">
-            <a:schemeClr val="lt1"/>
-          </a:fontRef>
-        </p:style>
-        <p:txBody>
-          <a:bodyPr rtlCol="0" anchor="ctr"/>
-          <a:lstStyle/>
-          <a:p>
-            <a:pPr algn="ctr"/>
-          </a:p>
-        </p:txBody>
-      </p:sp>
-      <p:sp>
-        <p:nvSpPr>
-          <p:cNvPr id="4" name="Rectangle 3"/>
-          <p:cNvSpPr/>
-          <p:nvPr/>
-        </p:nvSpPr>
-        <p:spPr>
-          <a:xfrm>
-            <a:off x="4114800" y="0"/>
-            <a:ext cx="137160" cy="6858000"/>
-          </a:xfrm>
-          <a:prstGeom prst="rect">
-            <a:avLst/>
-          </a:prstGeom>
-          <a:solidFill>
-            <a:srgbClr val="00A0B0"/>
-          </a:solidFill>
-          <a:ln>
-            <a:noFill/>
-          </a:ln>
-        </p:spPr>
-        <p:style>
-          <a:lnRef idx="1">
-            <a:schemeClr val="accent1"/>
-          </a:lnRef>
-          <a:fillRef idx="3">
-            <a:schemeClr val="accent1"/>
-          </a:fillRef>
-          <a:effectRef idx="2">
-            <a:schemeClr val="accent1"/>
-          </a:effectRef>
-          <a:fontRef idx="minor">
-            <a:schemeClr val="lt1"/>
-          </a:fontRef>
-        </p:style>
-        <p:txBody>
-          <a:bodyPr rtlCol="0" anchor="ctr"/>
-          <a:lstStyle/>
-          <a:p>
-            <a:pPr algn="ctr"/>
-          </a:p>
-        </p:txBody>
-      </p:sp>
-      <p:sp>
-        <p:nvSpPr>
-          <p:cNvPr id="5" name="TextBox 4"/>
-          <p:cNvSpPr txBox="1"/>
-          <p:nvPr/>
-        </p:nvSpPr>
-        <p:spPr>
-          <a:xfrm>
-            <a:off x="274320" y="2103120"/>
-            <a:ext cx="3657600" cy="2286000"/>
-          </a:xfrm>
-          <a:prstGeom prst="rect">
-            <a:avLst/>
-          </a:prstGeom>
-          <a:noFill/>
-        </p:spPr>
-        <p:txBody>
-          <a:bodyPr wrap="square" lIns="45720" rIns="45720" tIns="18288" bIns="18288" anchor="t">
-            <a:spAutoFit/>
-          </a:bodyPr>
-          <a:lstStyle/>
-          <a:p>
-            <a:pPr algn="ctr"/>
-            <a:r>
-              <a:rPr sz="17000" b="1" i="0">
-                <a:solidFill>
-                  <a:srgbClr val="00A0B0"/>
-                </a:solidFill>
-                <a:latin typeface="Calibri"/>
-              </a:rPr>
-              <a:t>02</a:t>
-            </a:r>
-          </a:p>
-        </p:txBody>
-      </p:sp>
-      <p:sp>
-        <p:nvSpPr>
-          <p:cNvPr id="6" name="TextBox 5"/>
-          <p:cNvSpPr txBox="1"/>
-          <p:nvPr/>
-        </p:nvSpPr>
-        <p:spPr>
-          <a:xfrm>
-            <a:off x="274320" y="4572000"/>
-            <a:ext cx="3657600" cy="457200"/>
-          </a:xfrm>
-          <a:prstGeom prst="rect">
-            <a:avLst/>
-          </a:prstGeom>
-          <a:noFill/>
-        </p:spPr>
-        <p:txBody>
-          <a:bodyPr wrap="square" lIns="45720" rIns="45720" tIns="18288" bIns="18288" anchor="t">
-            <a:spAutoFit/>
-          </a:bodyPr>
-          <a:lstStyle/>
-          <a:p>
-            <a:pPr algn="ctr"/>
-            <a:r>
-              <a:rPr sz="2000" b="1" i="0">
-                <a:solidFill>
-                  <a:srgbClr val="6FD8E0"/>
-                </a:solidFill>
-                <a:latin typeface="Calibri"/>
-              </a:rPr>
-              <a:t>PARTE</a:t>
-            </a:r>
-          </a:p>
-        </p:txBody>
-      </p:sp>
-      <p:sp>
-        <p:nvSpPr>
-          <p:cNvPr id="7" name="TextBox 6"/>
-          <p:cNvSpPr txBox="1"/>
-          <p:nvPr/>
-        </p:nvSpPr>
-        <p:spPr>
-          <a:xfrm>
-            <a:off x="4572000" y="2286000"/>
-            <a:ext cx="7315200" cy="1645920"/>
-          </a:xfrm>
-          <a:prstGeom prst="rect">
-            <a:avLst/>
-          </a:prstGeom>
-          <a:noFill/>
-        </p:spPr>
-        <p:txBody>
-          <a:bodyPr wrap="square" lIns="45720" rIns="45720" tIns="18288" bIns="18288" anchor="t">
-            <a:spAutoFit/>
-          </a:bodyPr>
-          <a:lstStyle/>
-          <a:p>
-            <a:pPr algn="l"/>
-            <a:r>
-              <a:rPr sz="4400" b="1" i="0">
-                <a:solidFill>
-                  <a:srgbClr val="0F2D52"/>
-                </a:solidFill>
-                <a:latin typeface="Calibri"/>
-              </a:rPr>
-              <a:t>Threat Modeling</a:t>
-            </a:r>
-          </a:p>
-        </p:txBody>
-      </p:sp>
-      <p:sp>
-        <p:nvSpPr>
-          <p:cNvPr id="8" name="TextBox 7"/>
-          <p:cNvSpPr txBox="1"/>
-          <p:nvPr/>
-        </p:nvSpPr>
-        <p:spPr>
-          <a:xfrm>
-            <a:off x="4572000" y="3931920"/>
-            <a:ext cx="7315200" cy="1828800"/>
-          </a:xfrm>
-          <a:prstGeom prst="rect">
-            <a:avLst/>
-          </a:prstGeom>
-          <a:noFill/>
-        </p:spPr>
-        <p:txBody>
-          <a:bodyPr wrap="square" lIns="45720" rIns="45720" tIns="18288" bIns="18288" anchor="t">
-            <a:spAutoFit/>
-          </a:bodyPr>
-          <a:lstStyle/>
-          <a:p>
-            <a:pPr algn="l"/>
-            <a:r>
-              <a:rPr sz="1800" b="0" i="1">
-                <a:solidFill>
-                  <a:srgbClr val="6B7280"/>
-                </a:solidFill>
-                <a:latin typeface="Calibri"/>
-              </a:rPr>
-              <a:t>30 minuti di carta + lavagna salvano ore di refactor</a:t>
-            </a:r>
-          </a:p>
-        </p:txBody>
-      </p:sp>
-      <p:cxnSp>
-        <p:nvCxnSpPr>
-          <p:cNvPr id="9" name="Connector 8"/>
-          <p:cNvCxnSpPr/>
-          <p:nvPr/>
-        </p:nvCxnSpPr>
-        <p:spPr>
-          <a:xfrm>
-            <a:off x="457200" y="6446520"/>
-            <a:ext cx="11274552" cy="0"/>
-          </a:xfrm>
-          <a:prstGeom prst="line">
-            <a:avLst/>
-          </a:prstGeom>
-          <a:ln w="19050">
-            <a:solidFill>
-              <a:srgbClr val="00A0B0"/>
-            </a:solidFill>
-          </a:ln>
-        </p:spPr>
-        <p:style>
-          <a:lnRef idx="2">
-            <a:schemeClr val="accent1"/>
-          </a:lnRef>
-          <a:fillRef idx="0">
-            <a:schemeClr val="accent1"/>
-          </a:fillRef>
-          <a:effectRef idx="1">
-            <a:schemeClr val="accent1"/>
-          </a:effectRef>
-          <a:fontRef idx="minor">
-            <a:schemeClr val="tx1"/>
-          </a:fontRef>
-        </p:style>
-      </p:cxnSp>
-      <p:sp>
-        <p:nvSpPr>
-          <p:cNvPr id="10" name="TextBox 9"/>
-          <p:cNvSpPr txBox="1"/>
-          <p:nvPr/>
-        </p:nvSpPr>
-        <p:spPr>
-          <a:xfrm>
-            <a:off x="457200" y="6473952"/>
-            <a:ext cx="7315200" cy="292608"/>
-          </a:xfrm>
-          <a:prstGeom prst="rect">
-            <a:avLst/>
-          </a:prstGeom>
-          <a:noFill/>
-        </p:spPr>
-        <p:txBody>
-          <a:bodyPr wrap="square" lIns="45720" rIns="45720" tIns="18288" bIns="18288" anchor="t">
-            <a:spAutoFit/>
-          </a:bodyPr>
-          <a:lstStyle/>
-          <a:p>
-            <a:pPr algn="l"/>
-            <a:r>
-              <a:rPr sz="1000" b="0" i="0">
-                <a:solidFill>
-                  <a:srgbClr val="6B7280"/>
-                </a:solidFill>
-                <a:latin typeface="Calibri"/>
-              </a:rPr>
-              <a:t>Secure Coding · Corso IFTS STEM · A. Manneschi · 2024/2025</a:t>
-            </a:r>
-          </a:p>
-        </p:txBody>
-      </p:sp>
-      <p:sp>
-        <p:nvSpPr>
-          <p:cNvPr id="11" name="TextBox 10"/>
-          <p:cNvSpPr txBox="1"/>
-          <p:nvPr/>
-        </p:nvSpPr>
-        <p:spPr>
-          <a:xfrm>
-            <a:off x="10515600" y="6473952"/>
-            <a:ext cx="1188720" cy="292608"/>
-          </a:xfrm>
-          <a:prstGeom prst="rect">
-            <a:avLst/>
-          </a:prstGeom>
-          <a:noFill/>
-        </p:spPr>
-        <p:txBody>
-          <a:bodyPr wrap="square" lIns="45720" rIns="45720" tIns="18288" bIns="18288" anchor="t">
-            <a:spAutoFit/>
-          </a:bodyPr>
-          <a:lstStyle/>
-          <a:p>
-            <a:pPr algn="r"/>
-            <a:r>
-              <a:rPr sz="1000" b="1" i="0">
-                <a:solidFill>
-                  <a:srgbClr val="6B7280"/>
-                </a:solidFill>
-                <a:latin typeface="Calibri"/>
-              </a:rPr>
-              <a:t>L2  ·  6/14</a:t>
+              <a:t>L2  ·  6/15</a:t>
             </a:r>
           </a:p>
         </p:txBody>
@@ -10047,13 +10427,13 @@
         <p:spPr>
           <a:xfrm>
             <a:off x="0" y="0"/>
-            <a:ext cx="12191695" cy="777240"/>
+            <a:ext cx="4114800" cy="6858000"/>
           </a:xfrm>
           <a:prstGeom prst="rect">
             <a:avLst/>
           </a:prstGeom>
           <a:solidFill>
-            <a:srgbClr val="0F2D52"/>
+            <a:srgbClr val="081B33"/>
           </a:solidFill>
           <a:ln>
             <a:noFill/>
@@ -10083,14 +10463,100 @@
       </p:sp>
       <p:sp>
         <p:nvSpPr>
-          <p:cNvPr id="3" name="TextBox 2"/>
+          <p:cNvPr id="3" name="Rectangle 2"/>
+          <p:cNvSpPr/>
+          <p:nvPr/>
+        </p:nvSpPr>
+        <p:spPr>
+          <a:xfrm>
+            <a:off x="4114800" y="0"/>
+            <a:ext cx="8046720" cy="6858000"/>
+          </a:xfrm>
+          <a:prstGeom prst="rect">
+            <a:avLst/>
+          </a:prstGeom>
+          <a:solidFill>
+            <a:srgbClr val="F1F4F8"/>
+          </a:solidFill>
+          <a:ln>
+            <a:noFill/>
+          </a:ln>
+        </p:spPr>
+        <p:style>
+          <a:lnRef idx="1">
+            <a:schemeClr val="accent1"/>
+          </a:lnRef>
+          <a:fillRef idx="3">
+            <a:schemeClr val="accent1"/>
+          </a:fillRef>
+          <a:effectRef idx="2">
+            <a:schemeClr val="accent1"/>
+          </a:effectRef>
+          <a:fontRef idx="minor">
+            <a:schemeClr val="lt1"/>
+          </a:fontRef>
+        </p:style>
+        <p:txBody>
+          <a:bodyPr rtlCol="0" anchor="ctr"/>
+          <a:lstStyle/>
+          <a:p>
+            <a:pPr algn="ctr"/>
+          </a:p>
+        </p:txBody>
+      </p:sp>
+      <p:sp>
+        <p:nvSpPr>
+          <p:cNvPr id="4" name="Rectangle 3"/>
+          <p:cNvSpPr/>
+          <p:nvPr/>
+        </p:nvSpPr>
+        <p:spPr>
+          <a:xfrm>
+            <a:off x="4114800" y="0"/>
+            <a:ext cx="137160" cy="6858000"/>
+          </a:xfrm>
+          <a:prstGeom prst="rect">
+            <a:avLst/>
+          </a:prstGeom>
+          <a:solidFill>
+            <a:srgbClr val="00A0B0"/>
+          </a:solidFill>
+          <a:ln>
+            <a:noFill/>
+          </a:ln>
+        </p:spPr>
+        <p:style>
+          <a:lnRef idx="1">
+            <a:schemeClr val="accent1"/>
+          </a:lnRef>
+          <a:fillRef idx="3">
+            <a:schemeClr val="accent1"/>
+          </a:fillRef>
+          <a:effectRef idx="2">
+            <a:schemeClr val="accent1"/>
+          </a:effectRef>
+          <a:fontRef idx="minor">
+            <a:schemeClr val="lt1"/>
+          </a:fontRef>
+        </p:style>
+        <p:txBody>
+          <a:bodyPr rtlCol="0" anchor="ctr"/>
+          <a:lstStyle/>
+          <a:p>
+            <a:pPr algn="ctr"/>
+          </a:p>
+        </p:txBody>
+      </p:sp>
+      <p:sp>
+        <p:nvSpPr>
+          <p:cNvPr id="5" name="TextBox 4"/>
           <p:cNvSpPr txBox="1"/>
           <p:nvPr/>
         </p:nvSpPr>
         <p:spPr>
           <a:xfrm>
-            <a:off x="457200" y="164592"/>
-            <a:ext cx="10972800" cy="502920"/>
+            <a:off x="274320" y="2103120"/>
+            <a:ext cx="3657600" cy="2286000"/>
           </a:xfrm>
           <a:prstGeom prst="rect">
             <a:avLst/>
@@ -10098,34 +10564,34 @@
           <a:noFill/>
         </p:spPr>
         <p:txBody>
-          <a:bodyPr wrap="square" lIns="45720" rIns="45720" tIns="18288" bIns="18288" anchor="ctr">
+          <a:bodyPr wrap="square" lIns="45720" rIns="45720" tIns="18288" bIns="18288" anchor="t">
             <a:spAutoFit/>
           </a:bodyPr>
           <a:lstStyle/>
           <a:p>
-            <a:pPr algn="l"/>
-            <a:r>
-              <a:rPr sz="2400" b="1" i="0">
-                <a:solidFill>
-                  <a:srgbClr val="FFFFFF"/>
+            <a:pPr algn="ctr"/>
+            <a:r>
+              <a:rPr sz="17000" b="1" i="0">
+                <a:solidFill>
+                  <a:srgbClr val="00A0B0"/>
                 </a:solidFill>
                 <a:latin typeface="Calibri"/>
               </a:rPr>
-              <a:t>❓  Le 4 domande di Adam Shostack</a:t>
-            </a:r>
-          </a:p>
-        </p:txBody>
-      </p:sp>
-      <p:sp>
-        <p:nvSpPr>
-          <p:cNvPr id="4" name="TextBox 3"/>
+              <a:t>02</a:t>
+            </a:r>
+          </a:p>
+        </p:txBody>
+      </p:sp>
+      <p:sp>
+        <p:nvSpPr>
+          <p:cNvPr id="6" name="TextBox 5"/>
           <p:cNvSpPr txBox="1"/>
           <p:nvPr/>
         </p:nvSpPr>
         <p:spPr>
           <a:xfrm>
-            <a:off x="640080" y="1097280"/>
-            <a:ext cx="10972800" cy="5029200"/>
+            <a:off x="274320" y="4572000"/>
+            <a:ext cx="3657600" cy="457200"/>
           </a:xfrm>
           <a:prstGeom prst="rect">
             <a:avLst/>
@@ -10133,183 +10599,97 @@
           <a:noFill/>
         </p:spPr>
         <p:txBody>
-          <a:bodyPr wrap="square">
+          <a:bodyPr wrap="square" lIns="45720" rIns="45720" tIns="18288" bIns="18288" anchor="t">
             <a:spAutoFit/>
           </a:bodyPr>
           <a:lstStyle/>
           <a:p>
-            <a:pPr>
-              <a:lnSpc>
-                <a:spcPct val="150000"/>
-              </a:lnSpc>
-              <a:spcAft>
-                <a:spcPts val="400"/>
-              </a:spcAft>
-            </a:pPr>
-            <a:r>
-              <a:rPr sz="2000" b="1">
-                <a:solidFill>
-                  <a:srgbClr val="00A0B0"/>
+            <a:pPr algn="ctr"/>
+            <a:r>
+              <a:rPr sz="2000" b="1" i="0">
+                <a:solidFill>
+                  <a:srgbClr val="6FD8E0"/>
                 </a:solidFill>
                 <a:latin typeface="Calibri"/>
               </a:rPr>
-              <a:t>▸  </a:t>
-            </a:r>
-            <a:r>
-              <a:rPr sz="2000">
-                <a:solidFill>
-                  <a:srgbClr val="1A1A2E"/>
+              <a:t>PARTE</a:t>
+            </a:r>
+          </a:p>
+        </p:txBody>
+      </p:sp>
+      <p:sp>
+        <p:nvSpPr>
+          <p:cNvPr id="7" name="TextBox 6"/>
+          <p:cNvSpPr txBox="1"/>
+          <p:nvPr/>
+        </p:nvSpPr>
+        <p:spPr>
+          <a:xfrm>
+            <a:off x="4572000" y="2286000"/>
+            <a:ext cx="7315200" cy="1645920"/>
+          </a:xfrm>
+          <a:prstGeom prst="rect">
+            <a:avLst/>
+          </a:prstGeom>
+          <a:noFill/>
+        </p:spPr>
+        <p:txBody>
+          <a:bodyPr wrap="square" lIns="45720" rIns="45720" tIns="18288" bIns="18288" anchor="t">
+            <a:spAutoFit/>
+          </a:bodyPr>
+          <a:lstStyle/>
+          <a:p>
+            <a:pPr algn="l"/>
+            <a:r>
+              <a:rPr sz="4400" b="1" i="0">
+                <a:solidFill>
+                  <a:srgbClr val="0F2D52"/>
                 </a:solidFill>
                 <a:latin typeface="Calibri"/>
               </a:rPr>
-              <a:t>1. Cosa stiamo costruendo? → disegna il sistema (DFD)</a:t>
-            </a:r>
-          </a:p>
-          <a:p>
-            <a:pPr>
-              <a:lnSpc>
-                <a:spcPct val="150000"/>
-              </a:lnSpc>
-              <a:spcAft>
-                <a:spcPts val="400"/>
-              </a:spcAft>
-            </a:pPr>
-            <a:r>
-              <a:rPr sz="2000" b="1">
-                <a:solidFill>
-                  <a:srgbClr val="00A0B0"/>
+              <a:t>Threat Modeling</a:t>
+            </a:r>
+          </a:p>
+        </p:txBody>
+      </p:sp>
+      <p:sp>
+        <p:nvSpPr>
+          <p:cNvPr id="8" name="TextBox 7"/>
+          <p:cNvSpPr txBox="1"/>
+          <p:nvPr/>
+        </p:nvSpPr>
+        <p:spPr>
+          <a:xfrm>
+            <a:off x="4572000" y="3931920"/>
+            <a:ext cx="7315200" cy="1828800"/>
+          </a:xfrm>
+          <a:prstGeom prst="rect">
+            <a:avLst/>
+          </a:prstGeom>
+          <a:noFill/>
+        </p:spPr>
+        <p:txBody>
+          <a:bodyPr wrap="square" lIns="45720" rIns="45720" tIns="18288" bIns="18288" anchor="t">
+            <a:spAutoFit/>
+          </a:bodyPr>
+          <a:lstStyle/>
+          <a:p>
+            <a:pPr algn="l"/>
+            <a:r>
+              <a:rPr sz="1800" b="0" i="1">
+                <a:solidFill>
+                  <a:srgbClr val="6B7280"/>
                 </a:solidFill>
                 <a:latin typeface="Calibri"/>
               </a:rPr>
-              <a:t>▸  </a:t>
-            </a:r>
-            <a:r>
-              <a:rPr sz="2000">
-                <a:solidFill>
-                  <a:srgbClr val="1A1A2E"/>
-                </a:solidFill>
-                <a:latin typeface="Calibri"/>
-              </a:rPr>
-              <a:t>2. Cosa può andare storto? → applica STRIDE</a:t>
-            </a:r>
-          </a:p>
-          <a:p>
-            <a:pPr>
-              <a:lnSpc>
-                <a:spcPct val="150000"/>
-              </a:lnSpc>
-              <a:spcAft>
-                <a:spcPts val="400"/>
-              </a:spcAft>
-            </a:pPr>
-            <a:r>
-              <a:rPr sz="2000" b="1">
-                <a:solidFill>
-                  <a:srgbClr val="00A0B0"/>
-                </a:solidFill>
-                <a:latin typeface="Calibri"/>
-              </a:rPr>
-              <a:t>▸  </a:t>
-            </a:r>
-            <a:r>
-              <a:rPr sz="2000">
-                <a:solidFill>
-                  <a:srgbClr val="1A1A2E"/>
-                </a:solidFill>
-                <a:latin typeface="Calibri"/>
-              </a:rPr>
-              <a:t>3. Cosa facciamo a riguardo? → mitiga / accetta / elimina</a:t>
-            </a:r>
-          </a:p>
-          <a:p>
-            <a:pPr>
-              <a:lnSpc>
-                <a:spcPct val="150000"/>
-              </a:lnSpc>
-              <a:spcAft>
-                <a:spcPts val="400"/>
-              </a:spcAft>
-            </a:pPr>
-            <a:r>
-              <a:rPr sz="2000" b="1">
-                <a:solidFill>
-                  <a:srgbClr val="00A0B0"/>
-                </a:solidFill>
-                <a:latin typeface="Calibri"/>
-              </a:rPr>
-              <a:t>▸  </a:t>
-            </a:r>
-            <a:r>
-              <a:rPr sz="2000">
-                <a:solidFill>
-                  <a:srgbClr val="1A1A2E"/>
-                </a:solidFill>
-                <a:latin typeface="Calibri"/>
-              </a:rPr>
-              <a:t>4. Abbiamo fatto un buon lavoro? → review e iterazione</a:t>
-            </a:r>
-          </a:p>
-          <a:p>
-            <a:pPr>
-              <a:lnSpc>
-                <a:spcPct val="150000"/>
-              </a:lnSpc>
-              <a:spcAft>
-                <a:spcPts val="400"/>
-              </a:spcAft>
-            </a:pPr>
-            <a:r>
-              <a:rPr sz="2000" b="1">
-                <a:solidFill>
-                  <a:srgbClr val="00A0B0"/>
-                </a:solidFill>
-                <a:latin typeface="Calibri"/>
-              </a:rPr>
-              <a:t>▸  </a:t>
-            </a:r>
-            <a:r>
-              <a:rPr sz="2000">
-                <a:solidFill>
-                  <a:srgbClr val="1A1A2E"/>
-                </a:solidFill>
-                <a:latin typeface="Calibri"/>
-              </a:rPr>
-              <a:t/>
-            </a:r>
-          </a:p>
-          <a:p>
-            <a:pPr>
-              <a:lnSpc>
-                <a:spcPct val="150000"/>
-              </a:lnSpc>
-              <a:spcAft>
-                <a:spcPts val="400"/>
-              </a:spcAft>
-            </a:pPr>
-            <a:r>
-              <a:rPr sz="2000" b="1">
-                <a:solidFill>
-                  <a:srgbClr val="00A0B0"/>
-                </a:solidFill>
-                <a:latin typeface="Calibri"/>
-              </a:rPr>
-              <a:t>▸  </a:t>
-            </a:r>
-            <a:r>
-              <a:rPr sz="2000">
-                <a:solidFill>
-                  <a:srgbClr val="1A1A2E"/>
-                </a:solidFill>
-                <a:latin typeface="Calibri"/>
-              </a:rPr>
-              <a:t>Si fa PRIMA di scrivere codice. Su carta, in 30-60 minuti.</a:t>
+              <a:t>30 minuti di carta + lavagna salvano ore di refactor</a:t>
             </a:r>
           </a:p>
         </p:txBody>
       </p:sp>
       <p:cxnSp>
         <p:nvCxnSpPr>
-          <p:cNvPr id="5" name="Connector 4"/>
+          <p:cNvPr id="9" name="Connector 8"/>
           <p:cNvCxnSpPr/>
           <p:nvPr/>
         </p:nvCxnSpPr>
@@ -10344,7 +10724,7 @@
       </p:cxnSp>
       <p:sp>
         <p:nvSpPr>
-          <p:cNvPr id="6" name="TextBox 5"/>
+          <p:cNvPr id="10" name="TextBox 9"/>
           <p:cNvSpPr txBox="1"/>
           <p:nvPr/>
         </p:nvSpPr>
@@ -10379,7 +10759,7 @@
       </p:sp>
       <p:sp>
         <p:nvSpPr>
-          <p:cNvPr id="7" name="TextBox 6"/>
+          <p:cNvPr id="11" name="TextBox 10"/>
           <p:cNvSpPr txBox="1"/>
           <p:nvPr/>
         </p:nvSpPr>
@@ -10407,7 +10787,7 @@
                 </a:solidFill>
                 <a:latin typeface="Calibri"/>
               </a:rPr>
-              <a:t>L2  ·  7/14</a:t>
+              <a:t>L2  ·  7/15</a:t>
             </a:r>
           </a:p>
         </p:txBody>
@@ -10421,6 +10801,398 @@
 </file>
 
 <file path=ppt/slides/slide8.xml><?xml version="1.0" encoding="utf-8"?>
+<p:sld xmlns:a="http://schemas.openxmlformats.org/drawingml/2006/main" xmlns:p="http://schemas.openxmlformats.org/presentationml/2006/main" xmlns:r="http://schemas.openxmlformats.org/officeDocument/2006/relationships">
+  <p:cSld>
+    <p:spTree>
+      <p:nvGrpSpPr>
+        <p:cNvPr id="1" name=""/>
+        <p:cNvGrpSpPr/>
+        <p:nvPr/>
+      </p:nvGrpSpPr>
+      <p:grpSpPr/>
+      <p:sp>
+        <p:nvSpPr>
+          <p:cNvPr id="2" name="Rectangle 1"/>
+          <p:cNvSpPr/>
+          <p:nvPr/>
+        </p:nvSpPr>
+        <p:spPr>
+          <a:xfrm>
+            <a:off x="0" y="0"/>
+            <a:ext cx="12191695" cy="777240"/>
+          </a:xfrm>
+          <a:prstGeom prst="rect">
+            <a:avLst/>
+          </a:prstGeom>
+          <a:solidFill>
+            <a:srgbClr val="0F2D52"/>
+          </a:solidFill>
+          <a:ln>
+            <a:noFill/>
+          </a:ln>
+        </p:spPr>
+        <p:style>
+          <a:lnRef idx="1">
+            <a:schemeClr val="accent1"/>
+          </a:lnRef>
+          <a:fillRef idx="3">
+            <a:schemeClr val="accent1"/>
+          </a:fillRef>
+          <a:effectRef idx="2">
+            <a:schemeClr val="accent1"/>
+          </a:effectRef>
+          <a:fontRef idx="minor">
+            <a:schemeClr val="lt1"/>
+          </a:fontRef>
+        </p:style>
+        <p:txBody>
+          <a:bodyPr rtlCol="0" anchor="ctr"/>
+          <a:lstStyle/>
+          <a:p>
+            <a:pPr algn="ctr"/>
+          </a:p>
+        </p:txBody>
+      </p:sp>
+      <p:sp>
+        <p:nvSpPr>
+          <p:cNvPr id="3" name="TextBox 2"/>
+          <p:cNvSpPr txBox="1"/>
+          <p:nvPr/>
+        </p:nvSpPr>
+        <p:spPr>
+          <a:xfrm>
+            <a:off x="457200" y="164592"/>
+            <a:ext cx="10972800" cy="502920"/>
+          </a:xfrm>
+          <a:prstGeom prst="rect">
+            <a:avLst/>
+          </a:prstGeom>
+          <a:noFill/>
+        </p:spPr>
+        <p:txBody>
+          <a:bodyPr wrap="square" lIns="45720" rIns="45720" tIns="18288" bIns="18288" anchor="ctr">
+            <a:spAutoFit/>
+          </a:bodyPr>
+          <a:lstStyle/>
+          <a:p>
+            <a:pPr algn="l"/>
+            <a:r>
+              <a:rPr sz="2400" b="1" i="0">
+                <a:solidFill>
+                  <a:srgbClr val="FFFFFF"/>
+                </a:solidFill>
+                <a:latin typeface="Calibri"/>
+              </a:rPr>
+              <a:t>❓  Le 4 domande di Adam Shostack</a:t>
+            </a:r>
+          </a:p>
+        </p:txBody>
+      </p:sp>
+      <p:sp>
+        <p:nvSpPr>
+          <p:cNvPr id="4" name="TextBox 3"/>
+          <p:cNvSpPr txBox="1"/>
+          <p:nvPr/>
+        </p:nvSpPr>
+        <p:spPr>
+          <a:xfrm>
+            <a:off x="640080" y="1097280"/>
+            <a:ext cx="10972800" cy="5029200"/>
+          </a:xfrm>
+          <a:prstGeom prst="rect">
+            <a:avLst/>
+          </a:prstGeom>
+          <a:noFill/>
+        </p:spPr>
+        <p:txBody>
+          <a:bodyPr wrap="square">
+            <a:spAutoFit/>
+          </a:bodyPr>
+          <a:lstStyle/>
+          <a:p>
+            <a:pPr>
+              <a:lnSpc>
+                <a:spcPct val="150000"/>
+              </a:lnSpc>
+              <a:spcAft>
+                <a:spcPts val="400"/>
+              </a:spcAft>
+            </a:pPr>
+            <a:r>
+              <a:rPr sz="2000" b="1">
+                <a:solidFill>
+                  <a:srgbClr val="00A0B0"/>
+                </a:solidFill>
+                <a:latin typeface="Calibri"/>
+              </a:rPr>
+              <a:t>▸  </a:t>
+            </a:r>
+            <a:r>
+              <a:rPr sz="2000">
+                <a:solidFill>
+                  <a:srgbClr val="1A1A2E"/>
+                </a:solidFill>
+                <a:latin typeface="Calibri"/>
+              </a:rPr>
+              <a:t>1. Cosa stiamo costruendo? → disegna il sistema (DFD)</a:t>
+            </a:r>
+          </a:p>
+          <a:p>
+            <a:pPr>
+              <a:lnSpc>
+                <a:spcPct val="150000"/>
+              </a:lnSpc>
+              <a:spcAft>
+                <a:spcPts val="400"/>
+              </a:spcAft>
+            </a:pPr>
+            <a:r>
+              <a:rPr sz="2000" b="1">
+                <a:solidFill>
+                  <a:srgbClr val="00A0B0"/>
+                </a:solidFill>
+                <a:latin typeface="Calibri"/>
+              </a:rPr>
+              <a:t>▸  </a:t>
+            </a:r>
+            <a:r>
+              <a:rPr sz="2000">
+                <a:solidFill>
+                  <a:srgbClr val="1A1A2E"/>
+                </a:solidFill>
+                <a:latin typeface="Calibri"/>
+              </a:rPr>
+              <a:t>2. Cosa può andare storto? → applica STRIDE</a:t>
+            </a:r>
+          </a:p>
+          <a:p>
+            <a:pPr>
+              <a:lnSpc>
+                <a:spcPct val="150000"/>
+              </a:lnSpc>
+              <a:spcAft>
+                <a:spcPts val="400"/>
+              </a:spcAft>
+            </a:pPr>
+            <a:r>
+              <a:rPr sz="2000" b="1">
+                <a:solidFill>
+                  <a:srgbClr val="00A0B0"/>
+                </a:solidFill>
+                <a:latin typeface="Calibri"/>
+              </a:rPr>
+              <a:t>▸  </a:t>
+            </a:r>
+            <a:r>
+              <a:rPr sz="2000">
+                <a:solidFill>
+                  <a:srgbClr val="1A1A2E"/>
+                </a:solidFill>
+                <a:latin typeface="Calibri"/>
+              </a:rPr>
+              <a:t>3. Cosa facciamo a riguardo? → mitiga / accetta / elimina</a:t>
+            </a:r>
+          </a:p>
+          <a:p>
+            <a:pPr>
+              <a:lnSpc>
+                <a:spcPct val="150000"/>
+              </a:lnSpc>
+              <a:spcAft>
+                <a:spcPts val="400"/>
+              </a:spcAft>
+            </a:pPr>
+            <a:r>
+              <a:rPr sz="2000" b="1">
+                <a:solidFill>
+                  <a:srgbClr val="00A0B0"/>
+                </a:solidFill>
+                <a:latin typeface="Calibri"/>
+              </a:rPr>
+              <a:t>▸  </a:t>
+            </a:r>
+            <a:r>
+              <a:rPr sz="2000">
+                <a:solidFill>
+                  <a:srgbClr val="1A1A2E"/>
+                </a:solidFill>
+                <a:latin typeface="Calibri"/>
+              </a:rPr>
+              <a:t>4. Abbiamo fatto un buon lavoro? → review e iterazione</a:t>
+            </a:r>
+          </a:p>
+          <a:p>
+            <a:pPr>
+              <a:lnSpc>
+                <a:spcPct val="150000"/>
+              </a:lnSpc>
+              <a:spcAft>
+                <a:spcPts val="400"/>
+              </a:spcAft>
+            </a:pPr>
+            <a:r>
+              <a:rPr sz="2000" b="1">
+                <a:solidFill>
+                  <a:srgbClr val="00A0B0"/>
+                </a:solidFill>
+                <a:latin typeface="Calibri"/>
+              </a:rPr>
+              <a:t>▸  </a:t>
+            </a:r>
+            <a:r>
+              <a:rPr sz="2000">
+                <a:solidFill>
+                  <a:srgbClr val="1A1A2E"/>
+                </a:solidFill>
+                <a:latin typeface="Calibri"/>
+              </a:rPr>
+              <a:t/>
+            </a:r>
+          </a:p>
+          <a:p>
+            <a:pPr>
+              <a:lnSpc>
+                <a:spcPct val="150000"/>
+              </a:lnSpc>
+              <a:spcAft>
+                <a:spcPts val="400"/>
+              </a:spcAft>
+            </a:pPr>
+            <a:r>
+              <a:rPr sz="2000" b="1">
+                <a:solidFill>
+                  <a:srgbClr val="00A0B0"/>
+                </a:solidFill>
+                <a:latin typeface="Calibri"/>
+              </a:rPr>
+              <a:t>▸  </a:t>
+            </a:r>
+            <a:r>
+              <a:rPr sz="2000">
+                <a:solidFill>
+                  <a:srgbClr val="1A1A2E"/>
+                </a:solidFill>
+                <a:latin typeface="Calibri"/>
+              </a:rPr>
+              <a:t>Si fa PRIMA di scrivere codice. Su carta, in 30-60 minuti.</a:t>
+            </a:r>
+          </a:p>
+        </p:txBody>
+      </p:sp>
+      <p:cxnSp>
+        <p:nvCxnSpPr>
+          <p:cNvPr id="5" name="Connector 4"/>
+          <p:cNvCxnSpPr/>
+          <p:nvPr/>
+        </p:nvCxnSpPr>
+        <p:spPr>
+          <a:xfrm>
+            <a:off x="457200" y="6446520"/>
+            <a:ext cx="11274552" cy="0"/>
+          </a:xfrm>
+          <a:prstGeom prst="line">
+            <a:avLst/>
+          </a:prstGeom>
+          <a:ln w="19050">
+            <a:solidFill>
+              <a:srgbClr val="00A0B0"/>
+            </a:solidFill>
+          </a:ln>
+        </p:spPr>
+        <p:style>
+          <a:lnRef idx="2">
+            <a:schemeClr val="accent1"/>
+          </a:lnRef>
+          <a:fillRef idx="0">
+            <a:schemeClr val="accent1"/>
+          </a:fillRef>
+          <a:effectRef idx="1">
+            <a:schemeClr val="accent1"/>
+          </a:effectRef>
+          <a:fontRef idx="minor">
+            <a:schemeClr val="tx1"/>
+          </a:fontRef>
+        </p:style>
+      </p:cxnSp>
+      <p:sp>
+        <p:nvSpPr>
+          <p:cNvPr id="6" name="TextBox 5"/>
+          <p:cNvSpPr txBox="1"/>
+          <p:nvPr/>
+        </p:nvSpPr>
+        <p:spPr>
+          <a:xfrm>
+            <a:off x="457200" y="6473952"/>
+            <a:ext cx="7315200" cy="292608"/>
+          </a:xfrm>
+          <a:prstGeom prst="rect">
+            <a:avLst/>
+          </a:prstGeom>
+          <a:noFill/>
+        </p:spPr>
+        <p:txBody>
+          <a:bodyPr wrap="square" lIns="45720" rIns="45720" tIns="18288" bIns="18288" anchor="t">
+            <a:spAutoFit/>
+          </a:bodyPr>
+          <a:lstStyle/>
+          <a:p>
+            <a:pPr algn="l"/>
+            <a:r>
+              <a:rPr sz="1000" b="0" i="0">
+                <a:solidFill>
+                  <a:srgbClr val="6B7280"/>
+                </a:solidFill>
+                <a:latin typeface="Calibri"/>
+              </a:rPr>
+              <a:t>Secure Coding · Corso IFTS STEM · A. Manneschi · 2024/2025</a:t>
+            </a:r>
+          </a:p>
+        </p:txBody>
+      </p:sp>
+      <p:sp>
+        <p:nvSpPr>
+          <p:cNvPr id="7" name="TextBox 6"/>
+          <p:cNvSpPr txBox="1"/>
+          <p:nvPr/>
+        </p:nvSpPr>
+        <p:spPr>
+          <a:xfrm>
+            <a:off x="10515600" y="6473952"/>
+            <a:ext cx="1188720" cy="292608"/>
+          </a:xfrm>
+          <a:prstGeom prst="rect">
+            <a:avLst/>
+          </a:prstGeom>
+          <a:noFill/>
+        </p:spPr>
+        <p:txBody>
+          <a:bodyPr wrap="square" lIns="45720" rIns="45720" tIns="18288" bIns="18288" anchor="t">
+            <a:spAutoFit/>
+          </a:bodyPr>
+          <a:lstStyle/>
+          <a:p>
+            <a:pPr algn="r"/>
+            <a:r>
+              <a:rPr sz="1000" b="1" i="0">
+                <a:solidFill>
+                  <a:srgbClr val="6B7280"/>
+                </a:solidFill>
+                <a:latin typeface="Calibri"/>
+              </a:rPr>
+              <a:t>L2  ·  8/15</a:t>
+            </a:r>
+          </a:p>
+        </p:txBody>
+      </p:sp>
+    </p:spTree>
+  </p:cSld>
+  <p:clrMapOvr>
+    <a:masterClrMapping/>
+  </p:clrMapOvr>
+</p:sld>
+</file>
+
+<file path=ppt/slides/slide9.xml><?xml version="1.0" encoding="utf-8"?>
 <p:sld xmlns:a="http://schemas.openxmlformats.org/drawingml/2006/main" xmlns:p="http://schemas.openxmlformats.org/presentationml/2006/main" xmlns:r="http://schemas.openxmlformats.org/officeDocument/2006/relationships">
   <p:cSld>
     <p:spTree>
@@ -11114,267 +11886,7 @@
                 </a:solidFill>
                 <a:latin typeface="Calibri"/>
               </a:rPr>
-              <a:t>L2  ·  8/14</a:t>
-            </a:r>
-          </a:p>
-        </p:txBody>
-      </p:sp>
-    </p:spTree>
-  </p:cSld>
-  <p:clrMapOvr>
-    <a:masterClrMapping/>
-  </p:clrMapOvr>
-</p:sld>
-</file>
-
-<file path=ppt/slides/slide9.xml><?xml version="1.0" encoding="utf-8"?>
-<p:sld xmlns:a="http://schemas.openxmlformats.org/drawingml/2006/main" xmlns:p="http://schemas.openxmlformats.org/presentationml/2006/main" xmlns:r="http://schemas.openxmlformats.org/officeDocument/2006/relationships">
-  <p:cSld>
-    <p:spTree>
-      <p:nvGrpSpPr>
-        <p:cNvPr id="1" name=""/>
-        <p:cNvGrpSpPr/>
-        <p:nvPr/>
-      </p:nvGrpSpPr>
-      <p:grpSpPr/>
-      <p:sp>
-        <p:nvSpPr>
-          <p:cNvPr id="2" name="Rectangle 1"/>
-          <p:cNvSpPr/>
-          <p:nvPr/>
-        </p:nvSpPr>
-        <p:spPr>
-          <a:xfrm>
-            <a:off x="0" y="0"/>
-            <a:ext cx="12191695" cy="777240"/>
-          </a:xfrm>
-          <a:prstGeom prst="rect">
-            <a:avLst/>
-          </a:prstGeom>
-          <a:solidFill>
-            <a:srgbClr val="0F2D52"/>
-          </a:solidFill>
-          <a:ln>
-            <a:noFill/>
-          </a:ln>
-        </p:spPr>
-        <p:style>
-          <a:lnRef idx="1">
-            <a:schemeClr val="accent1"/>
-          </a:lnRef>
-          <a:fillRef idx="3">
-            <a:schemeClr val="accent1"/>
-          </a:fillRef>
-          <a:effectRef idx="2">
-            <a:schemeClr val="accent1"/>
-          </a:effectRef>
-          <a:fontRef idx="minor">
-            <a:schemeClr val="lt1"/>
-          </a:fontRef>
-        </p:style>
-        <p:txBody>
-          <a:bodyPr rtlCol="0" anchor="ctr"/>
-          <a:lstStyle/>
-          <a:p>
-            <a:pPr algn="ctr"/>
-          </a:p>
-        </p:txBody>
-      </p:sp>
-      <p:sp>
-        <p:nvSpPr>
-          <p:cNvPr id="3" name="TextBox 2"/>
-          <p:cNvSpPr txBox="1"/>
-          <p:nvPr/>
-        </p:nvSpPr>
-        <p:spPr>
-          <a:xfrm>
-            <a:off x="457200" y="164592"/>
-            <a:ext cx="10972800" cy="502920"/>
-          </a:xfrm>
-          <a:prstGeom prst="rect">
-            <a:avLst/>
-          </a:prstGeom>
-          <a:noFill/>
-        </p:spPr>
-        <p:txBody>
-          <a:bodyPr wrap="square" lIns="45720" rIns="45720" tIns="18288" bIns="18288" anchor="ctr">
-            <a:spAutoFit/>
-          </a:bodyPr>
-          <a:lstStyle/>
-          <a:p>
-            <a:pPr algn="l"/>
-            <a:r>
-              <a:rPr sz="2400" b="1" i="0">
-                <a:solidFill>
-                  <a:srgbClr val="FFFFFF"/>
-                </a:solidFill>
-                <a:latin typeface="Calibri"/>
-              </a:rPr>
-              <a:t>DFD: esempio su mini-blog</a:t>
-            </a:r>
-          </a:p>
-        </p:txBody>
-      </p:sp>
-      <p:pic>
-        <p:nvPicPr>
-          <p:cNvPr id="4" name="Picture 3" descr="cap2_dfd_mini_blog.png"/>
-          <p:cNvPicPr>
-            <a:picLocks noChangeAspect="1"/>
-          </p:cNvPicPr>
-          <p:nvPr/>
-        </p:nvPicPr>
-        <p:blipFill>
-          <a:blip r:embed="rId2"/>
-          <a:stretch>
-            <a:fillRect/>
-          </a:stretch>
-        </p:blipFill>
-        <p:spPr>
-          <a:xfrm>
-            <a:off x="640080" y="1097280"/>
-            <a:ext cx="10881360" cy="4572000"/>
-          </a:xfrm>
-          <a:prstGeom prst="rect">
-            <a:avLst/>
-          </a:prstGeom>
-        </p:spPr>
-      </p:pic>
-      <p:sp>
-        <p:nvSpPr>
-          <p:cNvPr id="5" name="TextBox 4"/>
-          <p:cNvSpPr txBox="1"/>
-          <p:nvPr/>
-        </p:nvSpPr>
-        <p:spPr>
-          <a:xfrm>
-            <a:off x="457200" y="5852160"/>
-            <a:ext cx="11247120" cy="365760"/>
-          </a:xfrm>
-          <a:prstGeom prst="rect">
-            <a:avLst/>
-          </a:prstGeom>
-          <a:noFill/>
-        </p:spPr>
-        <p:txBody>
-          <a:bodyPr wrap="square" lIns="45720" rIns="45720" tIns="18288" bIns="18288" anchor="t">
-            <a:spAutoFit/>
-          </a:bodyPr>
-          <a:lstStyle/>
-          <a:p>
-            <a:pPr algn="ctr"/>
-            <a:r>
-              <a:rPr sz="1300" b="0" i="1">
-                <a:solidFill>
-                  <a:srgbClr val="6B7280"/>
-                </a:solidFill>
-                <a:latin typeface="Calibri"/>
-              </a:rPr>
-              <a:t>Data Flow Diagram con trust boundary tra Internet/server e server/DB</a:t>
-            </a:r>
-          </a:p>
-        </p:txBody>
-      </p:sp>
-      <p:cxnSp>
-        <p:nvCxnSpPr>
-          <p:cNvPr id="6" name="Connector 5"/>
-          <p:cNvCxnSpPr/>
-          <p:nvPr/>
-        </p:nvCxnSpPr>
-        <p:spPr>
-          <a:xfrm>
-            <a:off x="457200" y="6446520"/>
-            <a:ext cx="11274552" cy="0"/>
-          </a:xfrm>
-          <a:prstGeom prst="line">
-            <a:avLst/>
-          </a:prstGeom>
-          <a:ln w="19050">
-            <a:solidFill>
-              <a:srgbClr val="00A0B0"/>
-            </a:solidFill>
-          </a:ln>
-        </p:spPr>
-        <p:style>
-          <a:lnRef idx="2">
-            <a:schemeClr val="accent1"/>
-          </a:lnRef>
-          <a:fillRef idx="0">
-            <a:schemeClr val="accent1"/>
-          </a:fillRef>
-          <a:effectRef idx="1">
-            <a:schemeClr val="accent1"/>
-          </a:effectRef>
-          <a:fontRef idx="minor">
-            <a:schemeClr val="tx1"/>
-          </a:fontRef>
-        </p:style>
-      </p:cxnSp>
-      <p:sp>
-        <p:nvSpPr>
-          <p:cNvPr id="7" name="TextBox 6"/>
-          <p:cNvSpPr txBox="1"/>
-          <p:nvPr/>
-        </p:nvSpPr>
-        <p:spPr>
-          <a:xfrm>
-            <a:off x="457200" y="6473952"/>
-            <a:ext cx="7315200" cy="292608"/>
-          </a:xfrm>
-          <a:prstGeom prst="rect">
-            <a:avLst/>
-          </a:prstGeom>
-          <a:noFill/>
-        </p:spPr>
-        <p:txBody>
-          <a:bodyPr wrap="square" lIns="45720" rIns="45720" tIns="18288" bIns="18288" anchor="t">
-            <a:spAutoFit/>
-          </a:bodyPr>
-          <a:lstStyle/>
-          <a:p>
-            <a:pPr algn="l"/>
-            <a:r>
-              <a:rPr sz="1000" b="0" i="0">
-                <a:solidFill>
-                  <a:srgbClr val="6B7280"/>
-                </a:solidFill>
-                <a:latin typeface="Calibri"/>
-              </a:rPr>
-              <a:t>Secure Coding · Corso IFTS STEM · A. Manneschi · 2024/2025</a:t>
-            </a:r>
-          </a:p>
-        </p:txBody>
-      </p:sp>
-      <p:sp>
-        <p:nvSpPr>
-          <p:cNvPr id="8" name="TextBox 7"/>
-          <p:cNvSpPr txBox="1"/>
-          <p:nvPr/>
-        </p:nvSpPr>
-        <p:spPr>
-          <a:xfrm>
-            <a:off x="10515600" y="6473952"/>
-            <a:ext cx="1188720" cy="292608"/>
-          </a:xfrm>
-          <a:prstGeom prst="rect">
-            <a:avLst/>
-          </a:prstGeom>
-          <a:noFill/>
-        </p:spPr>
-        <p:txBody>
-          <a:bodyPr wrap="square" lIns="45720" rIns="45720" tIns="18288" bIns="18288" anchor="t">
-            <a:spAutoFit/>
-          </a:bodyPr>
-          <a:lstStyle/>
-          <a:p>
-            <a:pPr algn="r"/>
-            <a:r>
-              <a:rPr sz="1000" b="1" i="0">
-                <a:solidFill>
-                  <a:srgbClr val="6B7280"/>
-                </a:solidFill>
-                <a:latin typeface="Calibri"/>
-              </a:rPr>
-              <a:t>L2  ·  9/14</a:t>
+              <a:t>L2  ·  9/15</a:t>
             </a:r>
           </a:p>
         </p:txBody>
